--- a/slides/6_discrete_controllers.pptx
+++ b/slides/6_discrete_controllers.pptx
@@ -5,7 +5,7 @@
     <p:sldMasterId id="2147483648" r:id="rId1"/>
   </p:sldMasterIdLst>
   <p:notesMasterIdLst>
-    <p:notesMasterId r:id="rId28"/>
+    <p:notesMasterId r:id="rId46"/>
   </p:notesMasterIdLst>
   <p:sldIdLst>
     <p:sldId id="256" r:id="rId2"/>
@@ -29,11 +29,29 @@
     <p:sldId id="384" r:id="rId20"/>
     <p:sldId id="271" r:id="rId21"/>
     <p:sldId id="385" r:id="rId22"/>
-    <p:sldId id="374" r:id="rId23"/>
-    <p:sldId id="375" r:id="rId24"/>
-    <p:sldId id="272" r:id="rId25"/>
-    <p:sldId id="273" r:id="rId26"/>
-    <p:sldId id="274" r:id="rId27"/>
+    <p:sldId id="388" r:id="rId23"/>
+    <p:sldId id="389" r:id="rId24"/>
+    <p:sldId id="374" r:id="rId25"/>
+    <p:sldId id="375" r:id="rId26"/>
+    <p:sldId id="387" r:id="rId27"/>
+    <p:sldId id="390" r:id="rId28"/>
+    <p:sldId id="272" r:id="rId29"/>
+    <p:sldId id="391" r:id="rId30"/>
+    <p:sldId id="392" r:id="rId31"/>
+    <p:sldId id="393" r:id="rId32"/>
+    <p:sldId id="394" r:id="rId33"/>
+    <p:sldId id="273" r:id="rId34"/>
+    <p:sldId id="395" r:id="rId35"/>
+    <p:sldId id="396" r:id="rId36"/>
+    <p:sldId id="397" r:id="rId37"/>
+    <p:sldId id="398" r:id="rId38"/>
+    <p:sldId id="274" r:id="rId39"/>
+    <p:sldId id="400" r:id="rId40"/>
+    <p:sldId id="401" r:id="rId41"/>
+    <p:sldId id="402" r:id="rId42"/>
+    <p:sldId id="403" r:id="rId43"/>
+    <p:sldId id="404" r:id="rId44"/>
+    <p:sldId id="399" r:id="rId45"/>
   </p:sldIdLst>
   <p:sldSz cx="12192000" cy="6858000"/>
   <p:notesSz cx="6858000" cy="9144000"/>
@@ -504,7 +522,7 @@
           <a:p>
             <a:fld id="{506E0FD1-891F-4B1E-916D-E9B585160BB8}" type="datetimeFigureOut">
               <a:rPr lang="en-GB" smtClean="0"/>
-              <a:t>28/03/2026</a:t>
+              <a:t>30/03/2026</a:t>
             </a:fld>
             <a:endParaRPr lang="en-GB"/>
           </a:p>
@@ -921,7 +939,7 @@
           <a:p>
             <a:fld id="{D68C3F22-27B2-44E3-9C5F-D08126455F6F}" type="datetime1">
               <a:rPr lang="en-GB" smtClean="0"/>
-              <a:t>28/03/2026</a:t>
+              <a:t>30/03/2026</a:t>
             </a:fld>
             <a:endParaRPr lang="en-GB"/>
           </a:p>
@@ -1121,7 +1139,7 @@
           <a:p>
             <a:fld id="{1CD03846-7BF6-4FB6-A921-FF3379ADBD4C}" type="datetime1">
               <a:rPr lang="en-GB" smtClean="0"/>
-              <a:t>28/03/2026</a:t>
+              <a:t>30/03/2026</a:t>
             </a:fld>
             <a:endParaRPr lang="en-GB"/>
           </a:p>
@@ -1331,7 +1349,7 @@
           <a:p>
             <a:fld id="{99E1B91A-3FD0-4144-9C84-63E9688ED2FE}" type="datetime1">
               <a:rPr lang="en-GB" smtClean="0"/>
-              <a:t>28/03/2026</a:t>
+              <a:t>30/03/2026</a:t>
             </a:fld>
             <a:endParaRPr lang="en-GB"/>
           </a:p>
@@ -1531,7 +1549,7 @@
           <a:p>
             <a:fld id="{5295ED7B-FEAD-4734-819F-93EF4B0EA908}" type="datetime1">
               <a:rPr lang="en-GB" smtClean="0"/>
-              <a:t>28/03/2026</a:t>
+              <a:t>30/03/2026</a:t>
             </a:fld>
             <a:endParaRPr lang="en-GB"/>
           </a:p>
@@ -1807,7 +1825,7 @@
           <a:p>
             <a:fld id="{D2D5D4B4-C926-4B45-8815-1ED8911179A2}" type="datetime1">
               <a:rPr lang="en-GB" smtClean="0"/>
-              <a:t>28/03/2026</a:t>
+              <a:t>30/03/2026</a:t>
             </a:fld>
             <a:endParaRPr lang="en-GB"/>
           </a:p>
@@ -2075,7 +2093,7 @@
           <a:p>
             <a:fld id="{B4C5210A-0E37-4935-93AF-69F21A5F712F}" type="datetime1">
               <a:rPr lang="en-GB" smtClean="0"/>
-              <a:t>28/03/2026</a:t>
+              <a:t>30/03/2026</a:t>
             </a:fld>
             <a:endParaRPr lang="en-GB"/>
           </a:p>
@@ -2490,7 +2508,7 @@
           <a:p>
             <a:fld id="{3D3A6B2F-436C-4691-80E8-9C890E000E9D}" type="datetime1">
               <a:rPr lang="en-GB" smtClean="0"/>
-              <a:t>28/03/2026</a:t>
+              <a:t>30/03/2026</a:t>
             </a:fld>
             <a:endParaRPr lang="en-GB"/>
           </a:p>
@@ -2632,7 +2650,7 @@
           <a:p>
             <a:fld id="{84385F4C-D74B-496F-8D21-97E3549C783B}" type="datetime1">
               <a:rPr lang="en-GB" smtClean="0"/>
-              <a:t>28/03/2026</a:t>
+              <a:t>30/03/2026</a:t>
             </a:fld>
             <a:endParaRPr lang="en-GB"/>
           </a:p>
@@ -2745,7 +2763,7 @@
           <a:p>
             <a:fld id="{0CBDCB32-C241-4703-A832-4EB47BD54E83}" type="datetime1">
               <a:rPr lang="en-GB" smtClean="0"/>
-              <a:t>28/03/2026</a:t>
+              <a:t>30/03/2026</a:t>
             </a:fld>
             <a:endParaRPr lang="en-GB"/>
           </a:p>
@@ -3058,7 +3076,7 @@
           <a:p>
             <a:fld id="{85C150FF-BE95-4D25-A16A-E368A81CBF24}" type="datetime1">
               <a:rPr lang="en-GB" smtClean="0"/>
-              <a:t>28/03/2026</a:t>
+              <a:t>30/03/2026</a:t>
             </a:fld>
             <a:endParaRPr lang="en-GB"/>
           </a:p>
@@ -3347,7 +3365,7 @@
           <a:p>
             <a:fld id="{F3C5DB4B-B349-43C9-A424-BADA723AD9F1}" type="datetime1">
               <a:rPr lang="en-GB" smtClean="0"/>
-              <a:t>28/03/2026</a:t>
+              <a:t>30/03/2026</a:t>
             </a:fld>
             <a:endParaRPr lang="en-GB"/>
           </a:p>
@@ -3590,7 +3608,7 @@
           <a:p>
             <a:fld id="{12632426-0A0C-405F-A3D0-2D11AA44702A}" type="datetime1">
               <a:rPr lang="en-GB" smtClean="0"/>
-              <a:t>28/03/2026</a:t>
+              <a:t>30/03/2026</a:t>
             </a:fld>
             <a:endParaRPr lang="en-GB"/>
           </a:p>
@@ -4133,8 +4151,8 @@
           </a:p>
         </p:txBody>
       </p:sp>
-      <mc:AlternateContent xmlns:mc="http://schemas.openxmlformats.org/markup-compatibility/2006">
-        <mc:Choice xmlns:a14="http://schemas.microsoft.com/office/drawing/2010/main" Requires="a14">
+      <mc:AlternateContent xmlns:mc="http://schemas.openxmlformats.org/markup-compatibility/2006" xmlns:a14="http://schemas.microsoft.com/office/drawing/2010/main">
+        <mc:Choice Requires="a14">
           <p:sp>
             <p:nvSpPr>
               <p:cNvPr id="3" name="Content Placeholder 2">
@@ -4411,7 +4429,7 @@
             </p:txBody>
           </p:sp>
         </mc:Choice>
-        <mc:Fallback>
+        <mc:Fallback xmlns="">
           <p:sp>
             <p:nvSpPr>
               <p:cNvPr id="3" name="Content Placeholder 2">
@@ -4484,8 +4502,8 @@
           </a:p>
         </p:txBody>
       </p:sp>
-      <mc:AlternateContent xmlns:mc="http://schemas.openxmlformats.org/markup-compatibility/2006">
-        <mc:Choice xmlns:a14="http://schemas.microsoft.com/office/drawing/2010/main" Requires="a14">
+      <mc:AlternateContent xmlns:mc="http://schemas.openxmlformats.org/markup-compatibility/2006" xmlns:a14="http://schemas.microsoft.com/office/drawing/2010/main">
+        <mc:Choice Requires="a14">
           <p:sp>
             <p:nvSpPr>
               <p:cNvPr id="9" name="TextBox 8">
@@ -4582,7 +4600,7 @@
             </p:txBody>
           </p:sp>
         </mc:Choice>
-        <mc:Fallback>
+        <mc:Fallback xmlns="">
           <p:sp>
             <p:nvSpPr>
               <p:cNvPr id="9" name="TextBox 8">
@@ -4627,8 +4645,8 @@
           </p:sp>
         </mc:Fallback>
       </mc:AlternateContent>
-      <mc:AlternateContent xmlns:mc="http://schemas.openxmlformats.org/markup-compatibility/2006">
-        <mc:Choice xmlns:a14="http://schemas.microsoft.com/office/drawing/2010/main" Requires="a14">
+      <mc:AlternateContent xmlns:mc="http://schemas.openxmlformats.org/markup-compatibility/2006" xmlns:a14="http://schemas.microsoft.com/office/drawing/2010/main">
+        <mc:Choice Requires="a14">
           <p:sp>
             <p:nvSpPr>
               <p:cNvPr id="14" name="TextBox 13">
@@ -4763,7 +4781,7 @@
             </p:txBody>
           </p:sp>
         </mc:Choice>
-        <mc:Fallback>
+        <mc:Fallback xmlns="">
           <p:sp>
             <p:nvSpPr>
               <p:cNvPr id="14" name="TextBox 13">
@@ -4813,8 +4831,8 @@
           </p:sp>
         </mc:Fallback>
       </mc:AlternateContent>
-      <mc:AlternateContent xmlns:mc="http://schemas.openxmlformats.org/markup-compatibility/2006">
-        <mc:Choice xmlns:a14="http://schemas.microsoft.com/office/drawing/2010/main" Requires="a14">
+      <mc:AlternateContent xmlns:mc="http://schemas.openxmlformats.org/markup-compatibility/2006" xmlns:a14="http://schemas.microsoft.com/office/drawing/2010/main">
+        <mc:Choice Requires="a14">
           <p:sp>
             <p:nvSpPr>
               <p:cNvPr id="5" name="Textfeld 4">
@@ -4980,7 +4998,7 @@
             </p:txBody>
           </p:sp>
         </mc:Choice>
-        <mc:Fallback>
+        <mc:Fallback xmlns="">
           <p:sp>
             <p:nvSpPr>
               <p:cNvPr id="5" name="Textfeld 4">
@@ -5235,8 +5253,8 @@
           </a:p>
         </p:txBody>
       </p:sp>
-      <mc:AlternateContent xmlns:mc="http://schemas.openxmlformats.org/markup-compatibility/2006">
-        <mc:Choice xmlns:a14="http://schemas.microsoft.com/office/drawing/2010/main" Requires="a14">
+      <mc:AlternateContent xmlns:mc="http://schemas.openxmlformats.org/markup-compatibility/2006" xmlns:a14="http://schemas.microsoft.com/office/drawing/2010/main">
+        <mc:Choice Requires="a14">
           <p:sp>
             <p:nvSpPr>
               <p:cNvPr id="21" name="TextBox 8">
@@ -5327,7 +5345,7 @@
             </p:txBody>
           </p:sp>
         </mc:Choice>
-        <mc:Fallback>
+        <mc:Fallback xmlns="">
           <p:sp>
             <p:nvSpPr>
               <p:cNvPr id="21" name="TextBox 8">
@@ -5837,8 +5855,8 @@
           </a:p>
         </p:txBody>
       </p:sp>
-      <mc:AlternateContent xmlns:mc="http://schemas.openxmlformats.org/markup-compatibility/2006">
-        <mc:Choice xmlns:a14="http://schemas.microsoft.com/office/drawing/2010/main" Requires="a14">
+      <mc:AlternateContent xmlns:mc="http://schemas.openxmlformats.org/markup-compatibility/2006" xmlns:a14="http://schemas.microsoft.com/office/drawing/2010/main">
+        <mc:Choice Requires="a14">
           <p:sp>
             <p:nvSpPr>
               <p:cNvPr id="3" name="Inhaltsplatzhalter 2">
@@ -6207,7 +6225,7 @@
             </p:txBody>
           </p:sp>
         </mc:Choice>
-        <mc:Fallback>
+        <mc:Fallback xmlns="">
           <p:sp>
             <p:nvSpPr>
               <p:cNvPr id="3" name="Inhaltsplatzhalter 2">
@@ -6466,8 +6484,8 @@
           </a:p>
         </p:txBody>
       </p:sp>
-      <mc:AlternateContent xmlns:mc="http://schemas.openxmlformats.org/markup-compatibility/2006">
-        <mc:Choice xmlns:a14="http://schemas.microsoft.com/office/drawing/2010/main" Requires="a14">
+      <mc:AlternateContent xmlns:mc="http://schemas.openxmlformats.org/markup-compatibility/2006" xmlns:a14="http://schemas.microsoft.com/office/drawing/2010/main">
+        <mc:Choice Requires="a14">
           <p:sp>
             <p:nvSpPr>
               <p:cNvPr id="3" name="Inhaltsplatzhalter 2">
@@ -6545,17 +6563,21 @@
                 <a14:m>
                   <m:oMath xmlns:m="http://schemas.openxmlformats.org/officeDocument/2006/math">
                     <m:r>
-                      <a:rPr lang="de-DE" i="1"/>
+                      <a:rPr lang="de-DE" i="1">
+                        <a:latin typeface="Cambria Math" panose="02040503050406030204" pitchFamily="18" charset="0"/>
+                      </a:rPr>
                       <m:t>𝑡</m:t>
                     </m:r>
                     <m:r>
                       <a:rPr lang="de-DE" i="1">
+                        <a:latin typeface="Cambria Math" panose="02040503050406030204" pitchFamily="18" charset="0"/>
                         <a:ea typeface="Cambria Math" panose="02040503050406030204" pitchFamily="18" charset="0"/>
                       </a:rPr>
                       <m:t>→</m:t>
                     </m:r>
                     <m:r>
                       <a:rPr lang="de-DE" i="1">
+                        <a:latin typeface="Cambria Math" panose="02040503050406030204" pitchFamily="18" charset="0"/>
                         <a:ea typeface="Cambria Math" panose="02040503050406030204" pitchFamily="18" charset="0"/>
                       </a:rPr>
                       <m:t>𝑘𝑇</m:t>
@@ -6721,15 +6743,21 @@
                 <a14:m>
                   <m:oMath xmlns:m="http://schemas.openxmlformats.org/officeDocument/2006/math">
                     <m:r>
-                      <a:rPr lang="de-DE" b="0" i="1" smtClean="0"/>
+                      <a:rPr lang="de-DE" b="0" i="1" smtClean="0">
+                        <a:latin typeface="Cambria Math" panose="02040503050406030204" pitchFamily="18" charset="0"/>
+                      </a:rPr>
                       <m:t>𝑡</m:t>
                     </m:r>
                     <m:r>
-                      <a:rPr lang="de-DE" b="0" i="1" smtClean="0"/>
+                      <a:rPr lang="de-DE" b="0" i="1" smtClean="0">
+                        <a:latin typeface="Cambria Math" panose="02040503050406030204" pitchFamily="18" charset="0"/>
+                      </a:rPr>
                       <m:t>=</m:t>
                     </m:r>
                     <m:r>
-                      <a:rPr lang="de-DE" b="0" i="1" smtClean="0"/>
+                      <a:rPr lang="de-DE" b="0" i="1" smtClean="0">
+                        <a:latin typeface="Cambria Math" panose="02040503050406030204" pitchFamily="18" charset="0"/>
+                      </a:rPr>
                       <m:t>𝑇</m:t>
                     </m:r>
                   </m:oMath>
@@ -6742,7 +6770,7 @@
             </p:txBody>
           </p:sp>
         </mc:Choice>
-        <mc:Fallback>
+        <mc:Fallback xmlns="">
           <p:sp>
             <p:nvSpPr>
               <p:cNvPr id="3" name="Inhaltsplatzhalter 2">
@@ -6873,8 +6901,8 @@
           </a:p>
         </p:txBody>
       </p:sp>
-      <mc:AlternateContent xmlns:mc="http://schemas.openxmlformats.org/markup-compatibility/2006">
-        <mc:Choice xmlns:a14="http://schemas.microsoft.com/office/drawing/2010/main" Requires="a14">
+      <mc:AlternateContent xmlns:mc="http://schemas.openxmlformats.org/markup-compatibility/2006" xmlns:a14="http://schemas.microsoft.com/office/drawing/2010/main">
+        <mc:Choice Requires="a14">
           <p:sp>
             <p:nvSpPr>
               <p:cNvPr id="3" name="Inhaltsplatzhalter 2">
@@ -7877,7 +7905,7 @@
             </p:txBody>
           </p:sp>
         </mc:Choice>
-        <mc:Fallback>
+        <mc:Fallback xmlns="">
           <p:sp>
             <p:nvSpPr>
               <p:cNvPr id="3" name="Inhaltsplatzhalter 2">
@@ -7976,8 +8004,8 @@
           <a:chExt cx="0" cy="0"/>
         </a:xfrm>
       </p:grpSpPr>
-      <mc:AlternateContent xmlns:mc="http://schemas.openxmlformats.org/markup-compatibility/2006">
-        <mc:Choice xmlns:a14="http://schemas.microsoft.com/office/drawing/2010/main" Requires="a14">
+      <mc:AlternateContent xmlns:mc="http://schemas.openxmlformats.org/markup-compatibility/2006" xmlns:a14="http://schemas.microsoft.com/office/drawing/2010/main">
+        <mc:Choice Requires="a14">
           <p:sp>
             <p:nvSpPr>
               <p:cNvPr id="3" name="Inhaltsplatzhalter 2">
@@ -8996,7 +9024,7 @@
             </p:txBody>
           </p:sp>
         </mc:Choice>
-        <mc:Fallback>
+        <mc:Fallback xmlns="">
           <p:sp>
             <p:nvSpPr>
               <p:cNvPr id="3" name="Inhaltsplatzhalter 2">
@@ -9237,8 +9265,8 @@
           </a:p>
         </p:txBody>
       </p:sp>
-      <mc:AlternateContent xmlns:mc="http://schemas.openxmlformats.org/markup-compatibility/2006">
-        <mc:Choice xmlns:a14="http://schemas.microsoft.com/office/drawing/2010/main" Requires="a14">
+      <mc:AlternateContent xmlns:mc="http://schemas.openxmlformats.org/markup-compatibility/2006" xmlns:a14="http://schemas.microsoft.com/office/drawing/2010/main">
+        <mc:Choice Requires="a14">
           <p:sp>
             <p:nvSpPr>
               <p:cNvPr id="11" name="Textfeld 10">
@@ -9375,7 +9403,7 @@
             </p:txBody>
           </p:sp>
         </mc:Choice>
-        <mc:Fallback>
+        <mc:Fallback xmlns="">
           <p:sp>
             <p:nvSpPr>
               <p:cNvPr id="11" name="Textfeld 10">
@@ -9487,8 +9515,8 @@
           </a:p>
         </p:txBody>
       </p:sp>
-      <mc:AlternateContent xmlns:mc="http://schemas.openxmlformats.org/markup-compatibility/2006">
-        <mc:Choice xmlns:a14="http://schemas.microsoft.com/office/drawing/2010/main" Requires="a14">
+      <mc:AlternateContent xmlns:mc="http://schemas.openxmlformats.org/markup-compatibility/2006" xmlns:a14="http://schemas.microsoft.com/office/drawing/2010/main">
+        <mc:Choice Requires="a14">
           <p:sp>
             <p:nvSpPr>
               <p:cNvPr id="3" name="Inhaltsplatzhalter 2">
@@ -10457,7 +10485,7 @@
             </p:txBody>
           </p:sp>
         </mc:Choice>
-        <mc:Fallback>
+        <mc:Fallback xmlns="">
           <p:sp>
             <p:nvSpPr>
               <p:cNvPr id="3" name="Inhaltsplatzhalter 2">
@@ -10694,8 +10722,8 @@
           </a:p>
         </p:txBody>
       </p:sp>
-      <mc:AlternateContent xmlns:mc="http://schemas.openxmlformats.org/markup-compatibility/2006">
-        <mc:Choice xmlns:a14="http://schemas.microsoft.com/office/drawing/2010/main" Requires="a14">
+      <mc:AlternateContent xmlns:mc="http://schemas.openxmlformats.org/markup-compatibility/2006" xmlns:a14="http://schemas.microsoft.com/office/drawing/2010/main">
+        <mc:Choice Requires="a14">
           <p:sp>
             <p:nvSpPr>
               <p:cNvPr id="11" name="Textfeld 10">
@@ -10815,7 +10843,7 @@
             </p:txBody>
           </p:sp>
         </mc:Choice>
-        <mc:Fallback>
+        <mc:Fallback xmlns="">
           <p:sp>
             <p:nvSpPr>
               <p:cNvPr id="11" name="Textfeld 10">
@@ -11323,8 +11351,8 @@
           </a:p>
         </p:txBody>
       </p:sp>
-      <mc:AlternateContent xmlns:mc="http://schemas.openxmlformats.org/markup-compatibility/2006">
-        <mc:Choice xmlns:a14="http://schemas.microsoft.com/office/drawing/2010/main" Requires="a14">
+      <mc:AlternateContent xmlns:mc="http://schemas.openxmlformats.org/markup-compatibility/2006" xmlns:a14="http://schemas.microsoft.com/office/drawing/2010/main">
+        <mc:Choice Requires="a14">
           <p:sp>
             <p:nvSpPr>
               <p:cNvPr id="3" name="Inhaltsplatzhalter 2">
@@ -11676,7 +11704,7 @@
             </p:txBody>
           </p:sp>
         </mc:Choice>
-        <mc:Fallback>
+        <mc:Fallback xmlns="">
           <p:sp>
             <p:nvSpPr>
               <p:cNvPr id="3" name="Inhaltsplatzhalter 2">
@@ -11745,8 +11773,8 @@
           </a:p>
         </p:txBody>
       </p:sp>
-      <mc:AlternateContent xmlns:mc="http://schemas.openxmlformats.org/markup-compatibility/2006">
-        <mc:Choice xmlns:a14="http://schemas.microsoft.com/office/drawing/2010/main" Requires="a14">
+      <mc:AlternateContent xmlns:mc="http://schemas.openxmlformats.org/markup-compatibility/2006" xmlns:a14="http://schemas.microsoft.com/office/drawing/2010/main">
+        <mc:Choice Requires="a14">
           <p:sp>
             <p:nvSpPr>
               <p:cNvPr id="6" name="Textfeld 5">
@@ -11775,7 +11803,6 @@
               </a:bodyPr>
               <a:lstStyle/>
               <a:p>
-                <a:pPr/>
                 <a:r>
                   <a:rPr lang="de-DE" b="0" dirty="0">
                     <a:ea typeface="Cambria Math" panose="02040503050406030204" pitchFamily="18" charset="0"/>
@@ -11953,7 +11980,7 @@
             </p:txBody>
           </p:sp>
         </mc:Choice>
-        <mc:Fallback>
+        <mc:Fallback xmlns="">
           <p:sp>
             <p:nvSpPr>
               <p:cNvPr id="6" name="Textfeld 5">
@@ -12056,8 +12083,8 @@
           </a:p>
         </p:txBody>
       </p:sp>
-      <mc:AlternateContent xmlns:mc="http://schemas.openxmlformats.org/markup-compatibility/2006">
-        <mc:Choice xmlns:a14="http://schemas.microsoft.com/office/drawing/2010/main" Requires="a14">
+      <mc:AlternateContent xmlns:mc="http://schemas.openxmlformats.org/markup-compatibility/2006" xmlns:a14="http://schemas.microsoft.com/office/drawing/2010/main">
+        <mc:Choice Requires="a14">
           <p:sp>
             <p:nvSpPr>
               <p:cNvPr id="3" name="Inhaltsplatzhalter 2">
@@ -12665,7 +12692,7 @@
             </p:txBody>
           </p:sp>
         </mc:Choice>
-        <mc:Fallback>
+        <mc:Fallback xmlns="">
           <p:sp>
             <p:nvSpPr>
               <p:cNvPr id="3" name="Inhaltsplatzhalter 2">
@@ -13101,9 +13128,22 @@
             <p:spPr/>
             <p:txBody>
               <a:bodyPr>
-                <a:normAutofit fontScale="92500" lnSpcReduction="10000"/>
+                <a:normAutofit fontScale="92500" lnSpcReduction="20000"/>
               </a:bodyPr>
               <a:lstStyle/>
+              <a:p>
+                <a:pPr marL="0" indent="0">
+                  <a:buNone/>
+                </a:pPr>
+                <a:r>
+                  <a:rPr lang="de-DE" dirty="0" err="1"/>
+                  <a:t>Example</a:t>
+                </a:r>
+                <a:r>
+                  <a:rPr lang="de-DE" dirty="0"/>
+                  <a:t>:</a:t>
+                </a:r>
+              </a:p>
               <a:p>
                 <a:pPr marL="0" indent="0">
                   <a:buNone/>
@@ -13635,7 +13675,7 @@
               <a:blipFill>
                 <a:blip r:embed="rId2"/>
                 <a:stretch>
-                  <a:fillRect l="-1086" t="-1163"/>
+                  <a:fillRect l="-1086" t="-3488"/>
                 </a:stretch>
               </a:blipFill>
             </p:spPr>
@@ -13738,7 +13778,18 @@
               <a:rPr lang="de-DE" dirty="0" err="1"/>
               <a:t>Stability</a:t>
             </a:r>
-            <a:endParaRPr lang="de-DE" dirty="0"/>
+            <a:r>
+              <a:rPr lang="de-DE" dirty="0"/>
+              <a:t> in </a:t>
+            </a:r>
+            <a:r>
+              <a:rPr lang="de-DE" dirty="0" err="1"/>
+              <a:t>Discrete</a:t>
+            </a:r>
+            <a:r>
+              <a:rPr lang="de-DE" dirty="0"/>
+              <a:t>-Time</a:t>
+            </a:r>
           </a:p>
         </p:txBody>
       </p:sp>
@@ -13763,9 +13814,44 @@
           <a:bodyPr/>
           <a:lstStyle/>
           <a:p>
-            <a:r>
-              <a:rPr lang="de-DE" dirty="0"/>
-              <a:t>Poles </a:t>
+            <a:pPr marL="0" indent="0">
+              <a:buNone/>
+            </a:pPr>
+            <a:r>
+              <a:rPr lang="de-DE" dirty="0"/>
+              <a:t>System </a:t>
+            </a:r>
+            <a:r>
+              <a:rPr lang="de-DE" dirty="0" err="1"/>
+              <a:t>stable</a:t>
+            </a:r>
+            <a:r>
+              <a:rPr lang="de-DE" dirty="0"/>
+              <a:t> </a:t>
+            </a:r>
+            <a:r>
+              <a:rPr lang="de-DE" dirty="0" err="1"/>
+              <a:t>if</a:t>
+            </a:r>
+            <a:r>
+              <a:rPr lang="de-DE" dirty="0"/>
+              <a:t> </a:t>
+            </a:r>
+            <a:r>
+              <a:rPr lang="de-DE" dirty="0" err="1"/>
+              <a:t>poles</a:t>
+            </a:r>
+            <a:r>
+              <a:rPr lang="de-DE" dirty="0"/>
+              <a:t> </a:t>
+            </a:r>
+            <a:r>
+              <a:rPr lang="de-DE" dirty="0" err="1"/>
+              <a:t>lie</a:t>
+            </a:r>
+            <a:r>
+              <a:rPr lang="de-DE" dirty="0"/>
+              <a:t> </a:t>
             </a:r>
             <a:r>
               <a:rPr lang="de-DE" dirty="0" err="1"/>
@@ -13787,13 +13873,62 @@
               <a:rPr lang="de-DE" dirty="0" err="1"/>
               <a:t>circle</a:t>
             </a:r>
-            <a:r>
-              <a:rPr lang="de-DE" dirty="0"/>
-              <a:t> → </a:t>
-            </a:r>
-            <a:r>
-              <a:rPr lang="de-DE" dirty="0" err="1"/>
-              <a:t>stability</a:t>
+            <a:endParaRPr lang="de-DE" dirty="0"/>
+          </a:p>
+          <a:p>
+            <a:pPr marL="0" indent="0">
+              <a:buNone/>
+            </a:pPr>
+            <a:endParaRPr lang="de-DE" dirty="0"/>
+          </a:p>
+          <a:p>
+            <a:pPr marL="0" indent="0">
+              <a:buNone/>
+            </a:pPr>
+            <a:r>
+              <a:rPr lang="de-DE" dirty="0"/>
+              <a:t>Plot:</a:t>
+            </a:r>
+          </a:p>
+          <a:p>
+            <a:r>
+              <a:rPr lang="de-DE" dirty="0"/>
+              <a:t>Unit </a:t>
+            </a:r>
+            <a:r>
+              <a:rPr lang="de-DE" dirty="0" err="1"/>
+              <a:t>circle</a:t>
+            </a:r>
+            <a:endParaRPr lang="de-DE" dirty="0"/>
+          </a:p>
+          <a:p>
+            <a:r>
+              <a:rPr lang="de-DE" dirty="0" err="1"/>
+              <a:t>Stable</a:t>
+            </a:r>
+            <a:r>
+              <a:rPr lang="de-DE" dirty="0"/>
+              <a:t> </a:t>
+            </a:r>
+            <a:r>
+              <a:rPr lang="de-DE" dirty="0" err="1"/>
+              <a:t>vs</a:t>
+            </a:r>
+            <a:r>
+              <a:rPr lang="de-DE" dirty="0"/>
+              <a:t> </a:t>
+            </a:r>
+            <a:r>
+              <a:rPr lang="de-DE" dirty="0" err="1"/>
+              <a:t>unstable</a:t>
+            </a:r>
+            <a:r>
+              <a:rPr lang="de-DE" dirty="0"/>
+              <a:t> </a:t>
+            </a:r>
+            <a:r>
+              <a:rPr lang="de-DE" dirty="0" err="1"/>
+              <a:t>poles</a:t>
             </a:r>
             <a:endParaRPr lang="de-DE" dirty="0"/>
           </a:p>
@@ -13863,6 +13998,352 @@
           <p:cNvPr id="2" name="Titel 1">
             <a:extLst>
               <a:ext uri="{FF2B5EF4-FFF2-40B4-BE49-F238E27FC236}">
+                <a16:creationId xmlns:a16="http://schemas.microsoft.com/office/drawing/2014/main" id="{04A34126-E1FD-D3FD-250E-BE1DBC207194}"/>
+              </a:ext>
+            </a:extLst>
+          </p:cNvPr>
+          <p:cNvSpPr>
+            <a:spLocks noGrp="1"/>
+          </p:cNvSpPr>
+          <p:nvPr>
+            <p:ph type="title"/>
+          </p:nvPr>
+        </p:nvSpPr>
+        <p:spPr/>
+        <p:txBody>
+          <a:bodyPr/>
+          <a:lstStyle/>
+          <a:p>
+            <a:r>
+              <a:rPr lang="de-DE" dirty="0"/>
+              <a:t>s-plane </a:t>
+            </a:r>
+            <a:r>
+              <a:rPr lang="de-DE" dirty="0" err="1"/>
+              <a:t>vs</a:t>
+            </a:r>
+            <a:r>
+              <a:rPr lang="de-DE" dirty="0"/>
+              <a:t> </a:t>
+            </a:r>
+            <a:r>
+              <a:rPr lang="de-DE" dirty="0" err="1"/>
+              <a:t>z</a:t>
+            </a:r>
+            <a:r>
+              <a:rPr lang="de-DE" dirty="0"/>
+              <a:t>-plane Mapping</a:t>
+            </a:r>
+          </a:p>
+        </p:txBody>
+      </p:sp>
+      <p:sp>
+        <p:nvSpPr>
+          <p:cNvPr id="3" name="Inhaltsplatzhalter 2">
+            <a:extLst>
+              <a:ext uri="{FF2B5EF4-FFF2-40B4-BE49-F238E27FC236}">
+                <a16:creationId xmlns:a16="http://schemas.microsoft.com/office/drawing/2014/main" id="{8A098AEA-3D94-690F-6D1B-9AC99359E4F3}"/>
+              </a:ext>
+            </a:extLst>
+          </p:cNvPr>
+          <p:cNvSpPr>
+            <a:spLocks noGrp="1"/>
+          </p:cNvSpPr>
+          <p:nvPr>
+            <p:ph idx="1"/>
+          </p:nvPr>
+        </p:nvSpPr>
+        <p:spPr/>
+        <p:txBody>
+          <a:bodyPr/>
+          <a:lstStyle/>
+          <a:p>
+            <a:r>
+              <a:rPr lang="de-DE" dirty="0"/>
+              <a:t>Relation:</a:t>
+            </a:r>
+          </a:p>
+          <a:p>
+            <a:r>
+              <a:rPr lang="de-DE" dirty="0" err="1"/>
+              <a:t>z</a:t>
+            </a:r>
+            <a:r>
+              <a:rPr lang="de-DE" dirty="0"/>
+              <a:t> = </a:t>
+            </a:r>
+            <a:r>
+              <a:rPr lang="de-DE" dirty="0" err="1"/>
+              <a:t>e</a:t>
+            </a:r>
+            <a:r>
+              <a:rPr lang="de-DE" dirty="0"/>
+              <a:t>^{</a:t>
+            </a:r>
+            <a:r>
+              <a:rPr lang="de-DE" dirty="0" err="1"/>
+              <a:t>sT</a:t>
+            </a:r>
+            <a:r>
+              <a:rPr lang="de-DE" dirty="0"/>
+              <a:t>}</a:t>
+            </a:r>
+          </a:p>
+        </p:txBody>
+      </p:sp>
+      <p:sp>
+        <p:nvSpPr>
+          <p:cNvPr id="4" name="Foliennummernplatzhalter 3">
+            <a:extLst>
+              <a:ext uri="{FF2B5EF4-FFF2-40B4-BE49-F238E27FC236}">
+                <a16:creationId xmlns:a16="http://schemas.microsoft.com/office/drawing/2014/main" id="{10C51841-FA88-91D5-145B-3D0BDA9FB7F6}"/>
+              </a:ext>
+            </a:extLst>
+          </p:cNvPr>
+          <p:cNvSpPr>
+            <a:spLocks noGrp="1"/>
+          </p:cNvSpPr>
+          <p:nvPr>
+            <p:ph type="sldNum" sz="quarter" idx="12"/>
+          </p:nvPr>
+        </p:nvSpPr>
+        <p:spPr/>
+        <p:txBody>
+          <a:bodyPr/>
+          <a:lstStyle/>
+          <a:p>
+            <a:fld id="{08C366F5-AFAD-49CB-854A-9D9E238FCA13}" type="slidenum">
+              <a:rPr lang="en-GB" smtClean="0"/>
+              <a:t>22</a:t>
+            </a:fld>
+            <a:endParaRPr lang="en-GB"/>
+          </a:p>
+        </p:txBody>
+      </p:sp>
+    </p:spTree>
+    <p:extLst>
+      <p:ext uri="{BB962C8B-B14F-4D97-AF65-F5344CB8AC3E}">
+        <p14:creationId xmlns:p14="http://schemas.microsoft.com/office/powerpoint/2010/main" val="4063553706"/>
+      </p:ext>
+    </p:extLst>
+  </p:cSld>
+  <p:clrMapOvr>
+    <a:masterClrMapping/>
+  </p:clrMapOvr>
+</p:sld>
+</file>
+
+<file path=ppt/slides/slide23.xml><?xml version="1.0" encoding="utf-8"?>
+<p:sld xmlns:a="http://schemas.openxmlformats.org/drawingml/2006/main" xmlns:r="http://schemas.openxmlformats.org/officeDocument/2006/relationships" xmlns:p="http://schemas.openxmlformats.org/presentationml/2006/main">
+  <p:cSld>
+    <p:spTree>
+      <p:nvGrpSpPr>
+        <p:cNvPr id="1" name=""/>
+        <p:cNvGrpSpPr/>
+        <p:nvPr/>
+      </p:nvGrpSpPr>
+      <p:grpSpPr>
+        <a:xfrm>
+          <a:off x="0" y="0"/>
+          <a:ext cx="0" cy="0"/>
+          <a:chOff x="0" y="0"/>
+          <a:chExt cx="0" cy="0"/>
+        </a:xfrm>
+      </p:grpSpPr>
+      <p:sp>
+        <p:nvSpPr>
+          <p:cNvPr id="2" name="Titel 1">
+            <a:extLst>
+              <a:ext uri="{FF2B5EF4-FFF2-40B4-BE49-F238E27FC236}">
+                <a16:creationId xmlns:a16="http://schemas.microsoft.com/office/drawing/2014/main" id="{30ADDD21-7738-55E6-EA8C-D8F54A42799D}"/>
+              </a:ext>
+            </a:extLst>
+          </p:cNvPr>
+          <p:cNvSpPr>
+            <a:spLocks noGrp="1"/>
+          </p:cNvSpPr>
+          <p:nvPr>
+            <p:ph type="title"/>
+          </p:nvPr>
+        </p:nvSpPr>
+        <p:spPr/>
+        <p:txBody>
+          <a:bodyPr/>
+          <a:lstStyle/>
+          <a:p>
+            <a:r>
+              <a:rPr lang="de-DE" dirty="0"/>
+              <a:t>Mapping Insight</a:t>
+            </a:r>
+          </a:p>
+        </p:txBody>
+      </p:sp>
+      <p:sp>
+        <p:nvSpPr>
+          <p:cNvPr id="3" name="Inhaltsplatzhalter 2">
+            <a:extLst>
+              <a:ext uri="{FF2B5EF4-FFF2-40B4-BE49-F238E27FC236}">
+                <a16:creationId xmlns:a16="http://schemas.microsoft.com/office/drawing/2014/main" id="{6A3740CA-DD6C-7618-E642-D223D34007A0}"/>
+              </a:ext>
+            </a:extLst>
+          </p:cNvPr>
+          <p:cNvSpPr>
+            <a:spLocks noGrp="1"/>
+          </p:cNvSpPr>
+          <p:nvPr>
+            <p:ph idx="1"/>
+          </p:nvPr>
+        </p:nvSpPr>
+        <p:spPr/>
+        <p:txBody>
+          <a:bodyPr/>
+          <a:lstStyle/>
+          <a:p>
+            <a:r>
+              <a:rPr lang="de-DE" dirty="0" err="1"/>
+              <a:t>Left</a:t>
+            </a:r>
+            <a:r>
+              <a:rPr lang="de-DE" dirty="0"/>
+              <a:t> half-plane → </a:t>
+            </a:r>
+            <a:r>
+              <a:rPr lang="de-DE" dirty="0" err="1"/>
+              <a:t>inside</a:t>
+            </a:r>
+            <a:r>
+              <a:rPr lang="de-DE" dirty="0"/>
+              <a:t> </a:t>
+            </a:r>
+            <a:r>
+              <a:rPr lang="de-DE" dirty="0" err="1"/>
+              <a:t>unit</a:t>
+            </a:r>
+            <a:r>
+              <a:rPr lang="de-DE" dirty="0"/>
+              <a:t> </a:t>
+            </a:r>
+            <a:r>
+              <a:rPr lang="de-DE" dirty="0" err="1"/>
+              <a:t>circle</a:t>
+            </a:r>
+            <a:endParaRPr lang="de-DE" dirty="0"/>
+          </a:p>
+          <a:p>
+            <a:r>
+              <a:rPr lang="de-DE" dirty="0"/>
+              <a:t>Right half-plane → outside</a:t>
+            </a:r>
+            <a:br>
+              <a:rPr lang="de-DE" dirty="0"/>
+            </a:br>
+            <a:endParaRPr lang="de-DE" dirty="0"/>
+          </a:p>
+          <a:p>
+            <a:pPr marL="0" indent="0">
+              <a:buNone/>
+            </a:pPr>
+            <a:r>
+              <a:rPr lang="de-DE" dirty="0"/>
+              <a:t>Plot:</a:t>
+            </a:r>
+          </a:p>
+          <a:p>
+            <a:r>
+              <a:rPr lang="de-DE" dirty="0"/>
+              <a:t>s-plane </a:t>
+            </a:r>
+            <a:r>
+              <a:rPr lang="de-DE" dirty="0" err="1"/>
+              <a:t>mapped</a:t>
+            </a:r>
+            <a:r>
+              <a:rPr lang="de-DE" dirty="0"/>
+              <a:t> </a:t>
+            </a:r>
+            <a:r>
+              <a:rPr lang="de-DE" dirty="0" err="1"/>
+              <a:t>to</a:t>
+            </a:r>
+            <a:r>
+              <a:rPr lang="de-DE" dirty="0"/>
+              <a:t> </a:t>
+            </a:r>
+            <a:r>
+              <a:rPr lang="de-DE" dirty="0" err="1"/>
+              <a:t>z</a:t>
+            </a:r>
+            <a:r>
+              <a:rPr lang="de-DE" dirty="0"/>
+              <a:t>-plane</a:t>
+            </a:r>
+          </a:p>
+        </p:txBody>
+      </p:sp>
+      <p:sp>
+        <p:nvSpPr>
+          <p:cNvPr id="4" name="Foliennummernplatzhalter 3">
+            <a:extLst>
+              <a:ext uri="{FF2B5EF4-FFF2-40B4-BE49-F238E27FC236}">
+                <a16:creationId xmlns:a16="http://schemas.microsoft.com/office/drawing/2014/main" id="{B25C9A42-B536-1345-92B5-F23E8A0F728B}"/>
+              </a:ext>
+            </a:extLst>
+          </p:cNvPr>
+          <p:cNvSpPr>
+            <a:spLocks noGrp="1"/>
+          </p:cNvSpPr>
+          <p:nvPr>
+            <p:ph type="sldNum" sz="quarter" idx="12"/>
+          </p:nvPr>
+        </p:nvSpPr>
+        <p:spPr/>
+        <p:txBody>
+          <a:bodyPr/>
+          <a:lstStyle/>
+          <a:p>
+            <a:fld id="{08C366F5-AFAD-49CB-854A-9D9E238FCA13}" type="slidenum">
+              <a:rPr lang="en-GB" smtClean="0"/>
+              <a:t>23</a:t>
+            </a:fld>
+            <a:endParaRPr lang="en-GB"/>
+          </a:p>
+        </p:txBody>
+      </p:sp>
+    </p:spTree>
+    <p:extLst>
+      <p:ext uri="{BB962C8B-B14F-4D97-AF65-F5344CB8AC3E}">
+        <p14:creationId xmlns:p14="http://schemas.microsoft.com/office/powerpoint/2010/main" val="550617143"/>
+      </p:ext>
+    </p:extLst>
+  </p:cSld>
+  <p:clrMapOvr>
+    <a:masterClrMapping/>
+  </p:clrMapOvr>
+</p:sld>
+</file>
+
+<file path=ppt/slides/slide24.xml><?xml version="1.0" encoding="utf-8"?>
+<p:sld xmlns:a="http://schemas.openxmlformats.org/drawingml/2006/main" xmlns:r="http://schemas.openxmlformats.org/officeDocument/2006/relationships" xmlns:p="http://schemas.openxmlformats.org/presentationml/2006/main">
+  <p:cSld>
+    <p:spTree>
+      <p:nvGrpSpPr>
+        <p:cNvPr id="1" name=""/>
+        <p:cNvGrpSpPr/>
+        <p:nvPr/>
+      </p:nvGrpSpPr>
+      <p:grpSpPr>
+        <a:xfrm>
+          <a:off x="0" y="0"/>
+          <a:ext cx="0" cy="0"/>
+          <a:chOff x="0" y="0"/>
+          <a:chExt cx="0" cy="0"/>
+        </a:xfrm>
+      </p:grpSpPr>
+      <p:sp>
+        <p:nvSpPr>
+          <p:cNvPr id="2" name="Titel 1">
+            <a:extLst>
+              <a:ext uri="{FF2B5EF4-FFF2-40B4-BE49-F238E27FC236}">
                 <a16:creationId xmlns:a16="http://schemas.microsoft.com/office/drawing/2014/main" id="{4929D9B5-4388-01F5-3D30-72141D49664B}"/>
               </a:ext>
             </a:extLst>
@@ -13899,8 +14380,8 @@
           </a:p>
         </p:txBody>
       </p:sp>
-      <mc:AlternateContent xmlns:mc="http://schemas.openxmlformats.org/markup-compatibility/2006">
-        <mc:Choice xmlns:a14="http://schemas.microsoft.com/office/drawing/2010/main" Requires="a14">
+      <mc:AlternateContent xmlns:mc="http://schemas.openxmlformats.org/markup-compatibility/2006" xmlns:a14="http://schemas.microsoft.com/office/drawing/2010/main">
+        <mc:Choice Requires="a14">
           <p:sp>
             <p:nvSpPr>
               <p:cNvPr id="3" name="Inhaltsplatzhalter 2">
@@ -14096,7 +14577,7 @@
             </p:txBody>
           </p:sp>
         </mc:Choice>
-        <mc:Fallback>
+        <mc:Fallback xmlns="">
           <p:sp>
             <p:nvSpPr>
               <p:cNvPr id="3" name="Inhaltsplatzhalter 2">
@@ -14159,7 +14640,7 @@
           <a:p>
             <a:fld id="{08C366F5-AFAD-49CB-854A-9D9E238FCA13}" type="slidenum">
               <a:rPr lang="en-GB" smtClean="0"/>
-              <a:t>22</a:t>
+              <a:t>24</a:t>
             </a:fld>
             <a:endParaRPr lang="en-GB"/>
           </a:p>
@@ -14178,7 +14659,7 @@
 </p:sld>
 </file>
 
-<file path=ppt/slides/slide23.xml><?xml version="1.0" encoding="utf-8"?>
+<file path=ppt/slides/slide25.xml><?xml version="1.0" encoding="utf-8"?>
 <p:sld xmlns:a="http://schemas.openxmlformats.org/drawingml/2006/main" xmlns:r="http://schemas.openxmlformats.org/officeDocument/2006/relationships" xmlns:p="http://schemas.openxmlformats.org/presentationml/2006/main">
   <p:cSld>
     <p:spTree>
@@ -14236,8 +14717,8 @@
           </a:p>
         </p:txBody>
       </p:sp>
-      <mc:AlternateContent xmlns:mc="http://schemas.openxmlformats.org/markup-compatibility/2006">
-        <mc:Choice xmlns:a14="http://schemas.microsoft.com/office/drawing/2010/main" Requires="a14">
+      <mc:AlternateContent xmlns:mc="http://schemas.openxmlformats.org/markup-compatibility/2006" xmlns:a14="http://schemas.microsoft.com/office/drawing/2010/main">
+        <mc:Choice Requires="a14">
           <p:sp>
             <p:nvSpPr>
               <p:cNvPr id="3" name="Inhaltsplatzhalter 2">
@@ -14480,7 +14961,7 @@
             </p:txBody>
           </p:sp>
         </mc:Choice>
-        <mc:Fallback>
+        <mc:Fallback xmlns="">
           <p:sp>
             <p:nvSpPr>
               <p:cNvPr id="3" name="Inhaltsplatzhalter 2">
@@ -14543,7 +15024,7 @@
           <a:p>
             <a:fld id="{08C366F5-AFAD-49CB-854A-9D9E238FCA13}" type="slidenum">
               <a:rPr lang="en-GB" smtClean="0"/>
-              <a:t>23</a:t>
+              <a:t>25</a:t>
             </a:fld>
             <a:endParaRPr lang="en-GB"/>
           </a:p>
@@ -14562,7 +15043,379 @@
 </p:sld>
 </file>
 
-<file path=ppt/slides/slide24.xml><?xml version="1.0" encoding="utf-8"?>
+<file path=ppt/slides/slide26.xml><?xml version="1.0" encoding="utf-8"?>
+<p:sld xmlns:a="http://schemas.openxmlformats.org/drawingml/2006/main" xmlns:r="http://schemas.openxmlformats.org/officeDocument/2006/relationships" xmlns:p="http://schemas.openxmlformats.org/presentationml/2006/main">
+  <p:cSld>
+    <p:spTree>
+      <p:nvGrpSpPr>
+        <p:cNvPr id="1" name=""/>
+        <p:cNvGrpSpPr/>
+        <p:nvPr/>
+      </p:nvGrpSpPr>
+      <p:grpSpPr>
+        <a:xfrm>
+          <a:off x="0" y="0"/>
+          <a:ext cx="0" cy="0"/>
+          <a:chOff x="0" y="0"/>
+          <a:chExt cx="0" cy="0"/>
+        </a:xfrm>
+      </p:grpSpPr>
+      <p:sp>
+        <p:nvSpPr>
+          <p:cNvPr id="2" name="Titel 1">
+            <a:extLst>
+              <a:ext uri="{FF2B5EF4-FFF2-40B4-BE49-F238E27FC236}">
+                <a16:creationId xmlns:a16="http://schemas.microsoft.com/office/drawing/2014/main" id="{EFDBE573-CFF3-8D22-749D-89F4FDAAAA53}"/>
+              </a:ext>
+            </a:extLst>
+          </p:cNvPr>
+          <p:cNvSpPr>
+            <a:spLocks noGrp="1"/>
+          </p:cNvSpPr>
+          <p:nvPr>
+            <p:ph type="title"/>
+          </p:nvPr>
+        </p:nvSpPr>
+        <p:spPr/>
+        <p:txBody>
+          <a:bodyPr/>
+          <a:lstStyle/>
+          <a:p>
+            <a:r>
+              <a:rPr lang="de-DE" dirty="0" err="1"/>
+              <a:t>Step</a:t>
+            </a:r>
+            <a:r>
+              <a:rPr lang="de-DE" dirty="0"/>
+              <a:t> Response </a:t>
+            </a:r>
+            <a:r>
+              <a:rPr lang="de-DE" dirty="0" err="1"/>
+              <a:t>Comparison</a:t>
+            </a:r>
+            <a:endParaRPr lang="de-DE" dirty="0"/>
+          </a:p>
+        </p:txBody>
+      </p:sp>
+      <p:sp>
+        <p:nvSpPr>
+          <p:cNvPr id="3" name="Inhaltsplatzhalter 2">
+            <a:extLst>
+              <a:ext uri="{FF2B5EF4-FFF2-40B4-BE49-F238E27FC236}">
+                <a16:creationId xmlns:a16="http://schemas.microsoft.com/office/drawing/2014/main" id="{871BA06C-6235-55DD-183D-969F2FB06439}"/>
+              </a:ext>
+            </a:extLst>
+          </p:cNvPr>
+          <p:cNvSpPr>
+            <a:spLocks noGrp="1"/>
+          </p:cNvSpPr>
+          <p:nvPr>
+            <p:ph idx="1"/>
+          </p:nvPr>
+        </p:nvSpPr>
+        <p:spPr/>
+        <p:txBody>
+          <a:bodyPr/>
+          <a:lstStyle/>
+          <a:p>
+            <a:pPr marL="0" indent="0">
+              <a:buNone/>
+            </a:pPr>
+            <a:r>
+              <a:rPr lang="de-DE" dirty="0"/>
+              <a:t>👉 Plot:</a:t>
+            </a:r>
+          </a:p>
+          <a:p>
+            <a:r>
+              <a:rPr lang="de-DE" dirty="0" err="1"/>
+              <a:t>Continuous</a:t>
+            </a:r>
+            <a:r>
+              <a:rPr lang="de-DE" dirty="0"/>
+              <a:t> </a:t>
+            </a:r>
+            <a:r>
+              <a:rPr lang="de-DE" dirty="0" err="1"/>
+              <a:t>system</a:t>
+            </a:r>
+            <a:r>
+              <a:rPr lang="de-DE" dirty="0"/>
+              <a:t> </a:t>
+            </a:r>
+            <a:r>
+              <a:rPr lang="de-DE" dirty="0" err="1"/>
+              <a:t>response</a:t>
+            </a:r>
+            <a:endParaRPr lang="de-DE" dirty="0"/>
+          </a:p>
+          <a:p>
+            <a:r>
+              <a:rPr lang="de-DE" dirty="0" err="1"/>
+              <a:t>Discrete</a:t>
+            </a:r>
+            <a:r>
+              <a:rPr lang="de-DE" dirty="0"/>
+              <a:t> ZOH </a:t>
+            </a:r>
+            <a:r>
+              <a:rPr lang="de-DE" dirty="0" err="1"/>
+              <a:t>response</a:t>
+            </a:r>
+            <a:endParaRPr lang="de-DE" dirty="0"/>
+          </a:p>
+        </p:txBody>
+      </p:sp>
+      <p:sp>
+        <p:nvSpPr>
+          <p:cNvPr id="4" name="Foliennummernplatzhalter 3">
+            <a:extLst>
+              <a:ext uri="{FF2B5EF4-FFF2-40B4-BE49-F238E27FC236}">
+                <a16:creationId xmlns:a16="http://schemas.microsoft.com/office/drawing/2014/main" id="{D85D0C5C-A5B6-3AF4-23BC-09898A65F62F}"/>
+              </a:ext>
+            </a:extLst>
+          </p:cNvPr>
+          <p:cNvSpPr>
+            <a:spLocks noGrp="1"/>
+          </p:cNvSpPr>
+          <p:nvPr>
+            <p:ph type="sldNum" sz="quarter" idx="12"/>
+          </p:nvPr>
+        </p:nvSpPr>
+        <p:spPr/>
+        <p:txBody>
+          <a:bodyPr/>
+          <a:lstStyle/>
+          <a:p>
+            <a:fld id="{08C366F5-AFAD-49CB-854A-9D9E238FCA13}" type="slidenum">
+              <a:rPr lang="en-GB" smtClean="0"/>
+              <a:t>26</a:t>
+            </a:fld>
+            <a:endParaRPr lang="en-GB"/>
+          </a:p>
+        </p:txBody>
+      </p:sp>
+    </p:spTree>
+    <p:extLst>
+      <p:ext uri="{BB962C8B-B14F-4D97-AF65-F5344CB8AC3E}">
+        <p14:creationId xmlns:p14="http://schemas.microsoft.com/office/powerpoint/2010/main" val="2876703489"/>
+      </p:ext>
+    </p:extLst>
+  </p:cSld>
+  <p:clrMapOvr>
+    <a:masterClrMapping/>
+  </p:clrMapOvr>
+</p:sld>
+</file>
+
+<file path=ppt/slides/slide27.xml><?xml version="1.0" encoding="utf-8"?>
+<p:sld xmlns:a="http://schemas.openxmlformats.org/drawingml/2006/main" xmlns:r="http://schemas.openxmlformats.org/officeDocument/2006/relationships" xmlns:p="http://schemas.openxmlformats.org/presentationml/2006/main">
+  <p:cSld>
+    <p:spTree>
+      <p:nvGrpSpPr>
+        <p:cNvPr id="1" name=""/>
+        <p:cNvGrpSpPr/>
+        <p:nvPr/>
+      </p:nvGrpSpPr>
+      <p:grpSpPr>
+        <a:xfrm>
+          <a:off x="0" y="0"/>
+          <a:ext cx="0" cy="0"/>
+          <a:chOff x="0" y="0"/>
+          <a:chExt cx="0" cy="0"/>
+        </a:xfrm>
+      </p:grpSpPr>
+      <p:sp>
+        <p:nvSpPr>
+          <p:cNvPr id="2" name="Titel 1">
+            <a:extLst>
+              <a:ext uri="{FF2B5EF4-FFF2-40B4-BE49-F238E27FC236}">
+                <a16:creationId xmlns:a16="http://schemas.microsoft.com/office/drawing/2014/main" id="{B98C735A-B755-C027-C92C-3C3466B426F5}"/>
+              </a:ext>
+            </a:extLst>
+          </p:cNvPr>
+          <p:cNvSpPr>
+            <a:spLocks noGrp="1"/>
+          </p:cNvSpPr>
+          <p:nvPr>
+            <p:ph type="title"/>
+          </p:nvPr>
+        </p:nvSpPr>
+        <p:spPr/>
+        <p:txBody>
+          <a:bodyPr/>
+          <a:lstStyle/>
+          <a:p>
+            <a:r>
+              <a:rPr lang="de-DE" dirty="0" err="1"/>
+              <a:t>Discretization</a:t>
+            </a:r>
+            <a:r>
+              <a:rPr lang="de-DE" dirty="0"/>
+              <a:t> Methods</a:t>
+            </a:r>
+          </a:p>
+        </p:txBody>
+      </p:sp>
+      <p:sp>
+        <p:nvSpPr>
+          <p:cNvPr id="3" name="Inhaltsplatzhalter 2">
+            <a:extLst>
+              <a:ext uri="{FF2B5EF4-FFF2-40B4-BE49-F238E27FC236}">
+                <a16:creationId xmlns:a16="http://schemas.microsoft.com/office/drawing/2014/main" id="{12F07B9D-09CF-1A1F-5CD8-5F69FA091070}"/>
+              </a:ext>
+            </a:extLst>
+          </p:cNvPr>
+          <p:cNvSpPr>
+            <a:spLocks noGrp="1"/>
+          </p:cNvSpPr>
+          <p:nvPr>
+            <p:ph idx="1"/>
+          </p:nvPr>
+        </p:nvSpPr>
+        <p:spPr/>
+        <p:txBody>
+          <a:bodyPr/>
+          <a:lstStyle/>
+          <a:p>
+            <a:r>
+              <a:rPr lang="de-DE" dirty="0" err="1"/>
+              <a:t>We</a:t>
+            </a:r>
+            <a:r>
+              <a:rPr lang="de-DE" dirty="0"/>
+              <a:t> </a:t>
+            </a:r>
+            <a:r>
+              <a:rPr lang="de-DE" dirty="0" err="1"/>
+              <a:t>need</a:t>
+            </a:r>
+            <a:r>
+              <a:rPr lang="de-DE" dirty="0"/>
+              <a:t> </a:t>
+            </a:r>
+            <a:r>
+              <a:rPr lang="de-DE" dirty="0" err="1"/>
+              <a:t>to</a:t>
+            </a:r>
+            <a:r>
+              <a:rPr lang="de-DE" dirty="0"/>
+              <a:t> </a:t>
+            </a:r>
+            <a:r>
+              <a:rPr lang="de-DE" dirty="0" err="1"/>
+              <a:t>convert</a:t>
+            </a:r>
+            <a:r>
+              <a:rPr lang="de-DE" dirty="0"/>
+              <a:t>:</a:t>
+            </a:r>
+          </a:p>
+          <a:p>
+            <a:r>
+              <a:rPr lang="de-DE" dirty="0"/>
+              <a:t>G(s) \</a:t>
+            </a:r>
+            <a:r>
+              <a:rPr lang="de-DE" dirty="0" err="1"/>
+              <a:t>rightarrow</a:t>
+            </a:r>
+            <a:r>
+              <a:rPr lang="de-DE" dirty="0"/>
+              <a:t> G(</a:t>
+            </a:r>
+            <a:r>
+              <a:rPr lang="de-DE" dirty="0" err="1"/>
+              <a:t>z</a:t>
+            </a:r>
+            <a:r>
+              <a:rPr lang="de-DE" dirty="0"/>
+              <a:t>)</a:t>
+            </a:r>
+          </a:p>
+          <a:p>
+            <a:br>
+              <a:rPr lang="de-DE" dirty="0"/>
+            </a:br>
+            <a:endParaRPr lang="de-DE" dirty="0"/>
+          </a:p>
+          <a:p>
+            <a:r>
+              <a:rPr lang="de-DE" dirty="0"/>
+              <a:t>Methods:</a:t>
+            </a:r>
+          </a:p>
+          <a:p>
+            <a:r>
+              <a:rPr lang="de-DE" dirty="0"/>
+              <a:t>Forward Euler</a:t>
+            </a:r>
+          </a:p>
+          <a:p>
+            <a:r>
+              <a:rPr lang="de-DE" dirty="0" err="1"/>
+              <a:t>Backward</a:t>
+            </a:r>
+            <a:r>
+              <a:rPr lang="de-DE" dirty="0"/>
+              <a:t> Euler</a:t>
+            </a:r>
+          </a:p>
+          <a:p>
+            <a:r>
+              <a:rPr lang="de-DE" dirty="0" err="1"/>
+              <a:t>Tustin</a:t>
+            </a:r>
+            <a:r>
+              <a:rPr lang="de-DE" dirty="0"/>
+              <a:t> (bilinear)</a:t>
+            </a:r>
+          </a:p>
+        </p:txBody>
+      </p:sp>
+      <p:sp>
+        <p:nvSpPr>
+          <p:cNvPr id="4" name="Foliennummernplatzhalter 3">
+            <a:extLst>
+              <a:ext uri="{FF2B5EF4-FFF2-40B4-BE49-F238E27FC236}">
+                <a16:creationId xmlns:a16="http://schemas.microsoft.com/office/drawing/2014/main" id="{9445104E-DB0C-27FD-F25D-8F0C66906DE2}"/>
+              </a:ext>
+            </a:extLst>
+          </p:cNvPr>
+          <p:cNvSpPr>
+            <a:spLocks noGrp="1"/>
+          </p:cNvSpPr>
+          <p:nvPr>
+            <p:ph type="sldNum" sz="quarter" idx="12"/>
+          </p:nvPr>
+        </p:nvSpPr>
+        <p:spPr/>
+        <p:txBody>
+          <a:bodyPr/>
+          <a:lstStyle/>
+          <a:p>
+            <a:fld id="{08C366F5-AFAD-49CB-854A-9D9E238FCA13}" type="slidenum">
+              <a:rPr lang="en-GB" smtClean="0"/>
+              <a:t>27</a:t>
+            </a:fld>
+            <a:endParaRPr lang="en-GB"/>
+          </a:p>
+        </p:txBody>
+      </p:sp>
+    </p:spTree>
+    <p:extLst>
+      <p:ext uri="{BB962C8B-B14F-4D97-AF65-F5344CB8AC3E}">
+        <p14:creationId xmlns:p14="http://schemas.microsoft.com/office/powerpoint/2010/main" val="864644853"/>
+      </p:ext>
+    </p:extLst>
+  </p:cSld>
+  <p:clrMapOvr>
+    <a:masterClrMapping/>
+  </p:clrMapOvr>
+</p:sld>
+</file>
+
+<file path=ppt/slides/slide28.xml><?xml version="1.0" encoding="utf-8"?>
 <p:sld xmlns:a="http://schemas.openxmlformats.org/drawingml/2006/main" xmlns:r="http://schemas.openxmlformats.org/officeDocument/2006/relationships" xmlns:p="http://schemas.openxmlformats.org/presentationml/2006/main">
   <p:cSld>
     <p:spTree>
@@ -14602,13 +15455,8 @@
           <a:p>
             <a:r>
               <a:rPr lang="de-DE" dirty="0"/>
-              <a:t>Euler </a:t>
-            </a:r>
-            <a:r>
-              <a:rPr lang="de-DE" dirty="0" err="1"/>
-              <a:t>Discretization</a:t>
-            </a:r>
-            <a:endParaRPr lang="de-DE" dirty="0"/>
+              <a:t>Forward Euler Method</a:t>
+            </a:r>
           </a:p>
         </p:txBody>
       </p:sp>
@@ -14670,6 +15518,48 @@
             </a:r>
             <a:endParaRPr lang="de-DE" dirty="0"/>
           </a:p>
+          <a:p>
+            <a:pPr marL="0" indent="0">
+              <a:buNone/>
+            </a:pPr>
+            <a:endParaRPr lang="de-DE" dirty="0"/>
+          </a:p>
+          <a:p>
+            <a:r>
+              <a:rPr lang="de-DE" dirty="0"/>
+              <a:t>Approximation:</a:t>
+            </a:r>
+          </a:p>
+          <a:p>
+            <a:r>
+              <a:rPr lang="de-DE" dirty="0"/>
+              <a:t>s \</a:t>
+            </a:r>
+            <a:r>
+              <a:rPr lang="de-DE" dirty="0" err="1"/>
+              <a:t>approx</a:t>
+            </a:r>
+            <a:r>
+              <a:rPr lang="de-DE" dirty="0"/>
+              <a:t> \</a:t>
+            </a:r>
+            <a:r>
+              <a:rPr lang="de-DE" dirty="0" err="1"/>
+              <a:t>frac</a:t>
+            </a:r>
+            <a:r>
+              <a:rPr lang="de-DE" dirty="0"/>
+              <a:t>{</a:t>
+            </a:r>
+            <a:r>
+              <a:rPr lang="de-DE" dirty="0" err="1"/>
+              <a:t>z</a:t>
+            </a:r>
+            <a:r>
+              <a:rPr lang="de-DE" dirty="0"/>
+              <a:t> - 1}{T}</a:t>
+            </a:r>
+          </a:p>
         </p:txBody>
       </p:sp>
       <p:sp>
@@ -14695,7 +15585,7 @@
           <a:p>
             <a:fld id="{08C366F5-AFAD-49CB-854A-9D9E238FCA13}" type="slidenum">
               <a:rPr lang="en-GB" smtClean="0"/>
-              <a:t>24</a:t>
+              <a:t>28</a:t>
             </a:fld>
             <a:endParaRPr lang="en-GB"/>
           </a:p>
@@ -14714,7 +15604,7 @@
 </p:sld>
 </file>
 
-<file path=ppt/slides/slide25.xml><?xml version="1.0" encoding="utf-8"?>
+<file path=ppt/slides/slide29.xml><?xml version="1.0" encoding="utf-8"?>
 <p:sld xmlns:a="http://schemas.openxmlformats.org/drawingml/2006/main" xmlns:r="http://schemas.openxmlformats.org/officeDocument/2006/relationships" xmlns:p="http://schemas.openxmlformats.org/presentationml/2006/main">
   <p:cSld>
     <p:spTree>
@@ -14736,7 +15626,7 @@
           <p:cNvPr id="2" name="Titel 1">
             <a:extLst>
               <a:ext uri="{FF2B5EF4-FFF2-40B4-BE49-F238E27FC236}">
-                <a16:creationId xmlns:a16="http://schemas.microsoft.com/office/drawing/2014/main" id="{89FFFBB7-5493-01B1-DF7E-930B30993FE5}"/>
+                <a16:creationId xmlns:a16="http://schemas.microsoft.com/office/drawing/2014/main" id="{BE80C0C3-96DF-5883-A7D5-BA4130F5C96A}"/>
               </a:ext>
             </a:extLst>
           </p:cNvPr>
@@ -14754,17 +15644,12 @@
           <a:p>
             <a:r>
               <a:rPr lang="de-DE" dirty="0" err="1"/>
-              <a:t>Tustin</a:t>
-            </a:r>
-            <a:r>
-              <a:rPr lang="de-DE" dirty="0"/>
-              <a:t> </a:t>
-            </a:r>
-            <a:r>
-              <a:rPr lang="de-DE" dirty="0" err="1"/>
-              <a:t>Discretization</a:t>
-            </a:r>
-            <a:endParaRPr lang="de-DE" dirty="0"/>
+              <a:t>Example</a:t>
+            </a:r>
+            <a:r>
+              <a:rPr lang="de-DE" dirty="0"/>
+              <a:t> (Forward Euler)</a:t>
+            </a:r>
           </a:p>
         </p:txBody>
       </p:sp>
@@ -14773,7 +15658,7 @@
           <p:cNvPr id="3" name="Inhaltsplatzhalter 2">
             <a:extLst>
               <a:ext uri="{FF2B5EF4-FFF2-40B4-BE49-F238E27FC236}">
-                <a16:creationId xmlns:a16="http://schemas.microsoft.com/office/drawing/2014/main" id="{0BDC2B80-65D3-5892-4CF0-DAC832DAC831}"/>
+                <a16:creationId xmlns:a16="http://schemas.microsoft.com/office/drawing/2014/main" id="{92E87A64-688D-3211-F2E5-F5ECC345E670}"/>
               </a:ext>
             </a:extLst>
           </p:cNvPr>
@@ -14791,18 +15676,71 @@
           <a:p>
             <a:r>
               <a:rPr lang="de-DE" dirty="0"/>
-              <a:t>Bilinear </a:t>
-            </a:r>
-            <a:r>
-              <a:rPr lang="de-DE" dirty="0" err="1"/>
-              <a:t>transformation</a:t>
-            </a:r>
+              <a:t>Given:</a:t>
+            </a:r>
+          </a:p>
+          <a:p>
+            <a:r>
+              <a:rPr lang="de-DE" dirty="0"/>
+              <a:t>G(s) = \</a:t>
+            </a:r>
+            <a:r>
+              <a:rPr lang="de-DE" dirty="0" err="1"/>
+              <a:t>frac</a:t>
+            </a:r>
+            <a:r>
+              <a:rPr lang="de-DE" dirty="0"/>
+              <a:t>{1}{s+1}</a:t>
+            </a:r>
+          </a:p>
+          <a:p>
+            <a:br>
+              <a:rPr lang="de-DE" dirty="0"/>
+            </a:br>
             <a:endParaRPr lang="de-DE" dirty="0"/>
           </a:p>
           <a:p>
             <a:r>
-              <a:rPr lang="de-DE" dirty="0" err="1"/>
-              <a:t>Preserves</a:t>
+              <a:rPr lang="de-DE" dirty="0"/>
+              <a:t>Substitute:</a:t>
+            </a:r>
+          </a:p>
+          <a:p>
+            <a:r>
+              <a:rPr lang="de-DE" dirty="0"/>
+              <a:t>s = \</a:t>
+            </a:r>
+            <a:r>
+              <a:rPr lang="de-DE" dirty="0" err="1"/>
+              <a:t>frac</a:t>
+            </a:r>
+            <a:r>
+              <a:rPr lang="de-DE" dirty="0"/>
+              <a:t>{</a:t>
+            </a:r>
+            <a:r>
+              <a:rPr lang="de-DE" dirty="0" err="1"/>
+              <a:t>z</a:t>
+            </a:r>
+            <a:r>
+              <a:rPr lang="de-DE" dirty="0"/>
+              <a:t> - 1}{T}</a:t>
+            </a:r>
+          </a:p>
+          <a:p>
+            <a:br>
+              <a:rPr lang="de-DE" dirty="0"/>
+            </a:br>
+            <a:endParaRPr lang="de-DE" dirty="0"/>
+          </a:p>
+          <a:p>
+            <a:r>
+              <a:rPr lang="de-DE" dirty="0"/>
+              <a:t>👉 Show </a:t>
+            </a:r>
+            <a:r>
+              <a:rPr lang="de-DE" dirty="0" err="1"/>
+              <a:t>step-by-step</a:t>
             </a:r>
             <a:r>
               <a:rPr lang="de-DE" dirty="0"/>
@@ -14810,23 +15748,7 @@
             </a:r>
             <a:r>
               <a:rPr lang="de-DE" dirty="0" err="1"/>
-              <a:t>frequency</a:t>
-            </a:r>
-            <a:r>
-              <a:rPr lang="de-DE" dirty="0"/>
-              <a:t> </a:t>
-            </a:r>
-            <a:r>
-              <a:rPr lang="de-DE" dirty="0" err="1"/>
-              <a:t>characteristics</a:t>
-            </a:r>
-            <a:r>
-              <a:rPr lang="de-DE" dirty="0"/>
-              <a:t> </a:t>
-            </a:r>
-            <a:r>
-              <a:rPr lang="de-DE" dirty="0" err="1"/>
-              <a:t>better</a:t>
+              <a:t>derivation</a:t>
             </a:r>
             <a:endParaRPr lang="de-DE" dirty="0"/>
           </a:p>
@@ -14837,7 +15759,7 @@
           <p:cNvPr id="4" name="Foliennummernplatzhalter 3">
             <a:extLst>
               <a:ext uri="{FF2B5EF4-FFF2-40B4-BE49-F238E27FC236}">
-                <a16:creationId xmlns:a16="http://schemas.microsoft.com/office/drawing/2014/main" id="{26D5E52C-843C-475B-4446-7DFD4F8F786C}"/>
+                <a16:creationId xmlns:a16="http://schemas.microsoft.com/office/drawing/2014/main" id="{D5F038A0-EFFA-1D57-0B6D-267F3C722588}"/>
               </a:ext>
             </a:extLst>
           </p:cNvPr>
@@ -14855,7 +15777,7 @@
           <a:p>
             <a:fld id="{08C366F5-AFAD-49CB-854A-9D9E238FCA13}" type="slidenum">
               <a:rPr lang="en-GB" smtClean="0"/>
-              <a:t>25</a:t>
+              <a:t>29</a:t>
             </a:fld>
             <a:endParaRPr lang="en-GB"/>
           </a:p>
@@ -14864,158 +15786,7 @@
     </p:spTree>
     <p:extLst>
       <p:ext uri="{BB962C8B-B14F-4D97-AF65-F5344CB8AC3E}">
-        <p14:creationId xmlns:p14="http://schemas.microsoft.com/office/powerpoint/2010/main" val="999781829"/>
-      </p:ext>
-    </p:extLst>
-  </p:cSld>
-  <p:clrMapOvr>
-    <a:masterClrMapping/>
-  </p:clrMapOvr>
-</p:sld>
-</file>
-
-<file path=ppt/slides/slide26.xml><?xml version="1.0" encoding="utf-8"?>
-<p:sld xmlns:a="http://schemas.openxmlformats.org/drawingml/2006/main" xmlns:r="http://schemas.openxmlformats.org/officeDocument/2006/relationships" xmlns:p="http://schemas.openxmlformats.org/presentationml/2006/main">
-  <p:cSld>
-    <p:spTree>
-      <p:nvGrpSpPr>
-        <p:cNvPr id="1" name=""/>
-        <p:cNvGrpSpPr/>
-        <p:nvPr/>
-      </p:nvGrpSpPr>
-      <p:grpSpPr>
-        <a:xfrm>
-          <a:off x="0" y="0"/>
-          <a:ext cx="0" cy="0"/>
-          <a:chOff x="0" y="0"/>
-          <a:chExt cx="0" cy="0"/>
-        </a:xfrm>
-      </p:grpSpPr>
-      <p:sp>
-        <p:nvSpPr>
-          <p:cNvPr id="2" name="Titel 1">
-            <a:extLst>
-              <a:ext uri="{FF2B5EF4-FFF2-40B4-BE49-F238E27FC236}">
-                <a16:creationId xmlns:a16="http://schemas.microsoft.com/office/drawing/2014/main" id="{127BFA6C-0A38-374F-945C-AC62249259F5}"/>
-              </a:ext>
-            </a:extLst>
-          </p:cNvPr>
-          <p:cNvSpPr>
-            <a:spLocks noGrp="1"/>
-          </p:cNvSpPr>
-          <p:nvPr>
-            <p:ph type="title"/>
-          </p:nvPr>
-        </p:nvSpPr>
-        <p:spPr/>
-        <p:txBody>
-          <a:bodyPr/>
-          <a:lstStyle/>
-          <a:p>
-            <a:r>
-              <a:rPr lang="de-DE" dirty="0"/>
-              <a:t>Implementation </a:t>
-            </a:r>
-            <a:r>
-              <a:rPr lang="de-DE" dirty="0" err="1"/>
-              <a:t>Issues</a:t>
-            </a:r>
-            <a:endParaRPr lang="de-DE" dirty="0"/>
-          </a:p>
-        </p:txBody>
-      </p:sp>
-      <p:sp>
-        <p:nvSpPr>
-          <p:cNvPr id="3" name="Inhaltsplatzhalter 2">
-            <a:extLst>
-              <a:ext uri="{FF2B5EF4-FFF2-40B4-BE49-F238E27FC236}">
-                <a16:creationId xmlns:a16="http://schemas.microsoft.com/office/drawing/2014/main" id="{A528764C-E616-37B1-6C5F-EC8409FD4500}"/>
-              </a:ext>
-            </a:extLst>
-          </p:cNvPr>
-          <p:cNvSpPr>
-            <a:spLocks noGrp="1"/>
-          </p:cNvSpPr>
-          <p:nvPr>
-            <p:ph idx="1"/>
-          </p:nvPr>
-        </p:nvSpPr>
-        <p:spPr/>
-        <p:txBody>
-          <a:bodyPr/>
-          <a:lstStyle/>
-          <a:p>
-            <a:r>
-              <a:rPr lang="de-DE" dirty="0" err="1"/>
-              <a:t>Quantization</a:t>
-            </a:r>
-            <a:endParaRPr lang="de-DE" dirty="0"/>
-          </a:p>
-          <a:p>
-            <a:r>
-              <a:rPr lang="de-DE" dirty="0" err="1"/>
-              <a:t>Computation</a:t>
-            </a:r>
-            <a:r>
-              <a:rPr lang="de-DE" dirty="0"/>
-              <a:t> </a:t>
-            </a:r>
-            <a:r>
-              <a:rPr lang="de-DE" dirty="0" err="1"/>
-              <a:t>delay</a:t>
-            </a:r>
-            <a:endParaRPr lang="de-DE" dirty="0"/>
-          </a:p>
-          <a:p>
-            <a:r>
-              <a:rPr lang="de-DE" dirty="0" err="1"/>
-              <a:t>Numerical</a:t>
-            </a:r>
-            <a:r>
-              <a:rPr lang="de-DE" dirty="0"/>
-              <a:t> </a:t>
-            </a:r>
-            <a:r>
-              <a:rPr lang="de-DE" dirty="0" err="1"/>
-              <a:t>precision</a:t>
-            </a:r>
-            <a:endParaRPr lang="de-DE" dirty="0"/>
-          </a:p>
-        </p:txBody>
-      </p:sp>
-      <p:sp>
-        <p:nvSpPr>
-          <p:cNvPr id="4" name="Foliennummernplatzhalter 3">
-            <a:extLst>
-              <a:ext uri="{FF2B5EF4-FFF2-40B4-BE49-F238E27FC236}">
-                <a16:creationId xmlns:a16="http://schemas.microsoft.com/office/drawing/2014/main" id="{EF66F0F8-6AC5-36AB-811E-3A7AD0150C3A}"/>
-              </a:ext>
-            </a:extLst>
-          </p:cNvPr>
-          <p:cNvSpPr>
-            <a:spLocks noGrp="1"/>
-          </p:cNvSpPr>
-          <p:nvPr>
-            <p:ph type="sldNum" sz="quarter" idx="12"/>
-          </p:nvPr>
-        </p:nvSpPr>
-        <p:spPr/>
-        <p:txBody>
-          <a:bodyPr/>
-          <a:lstStyle/>
-          <a:p>
-            <a:fld id="{08C366F5-AFAD-49CB-854A-9D9E238FCA13}" type="slidenum">
-              <a:rPr lang="en-GB" smtClean="0"/>
-              <a:t>26</a:t>
-            </a:fld>
-            <a:endParaRPr lang="en-GB"/>
-          </a:p>
-        </p:txBody>
-      </p:sp>
-    </p:spTree>
-    <p:extLst>
-      <p:ext uri="{BB962C8B-B14F-4D97-AF65-F5344CB8AC3E}">
-        <p14:creationId xmlns:p14="http://schemas.microsoft.com/office/powerpoint/2010/main" val="1177416121"/>
+        <p14:creationId xmlns:p14="http://schemas.microsoft.com/office/powerpoint/2010/main" val="155132541"/>
       </p:ext>
     </p:extLst>
   </p:cSld>
@@ -15200,6 +15971,2055 @@
 </p:sld>
 </file>
 
+<file path=ppt/slides/slide30.xml><?xml version="1.0" encoding="utf-8"?>
+<p:sld xmlns:a="http://schemas.openxmlformats.org/drawingml/2006/main" xmlns:r="http://schemas.openxmlformats.org/officeDocument/2006/relationships" xmlns:p="http://schemas.openxmlformats.org/presentationml/2006/main">
+  <p:cSld>
+    <p:spTree>
+      <p:nvGrpSpPr>
+        <p:cNvPr id="1" name=""/>
+        <p:cNvGrpSpPr/>
+        <p:nvPr/>
+      </p:nvGrpSpPr>
+      <p:grpSpPr>
+        <a:xfrm>
+          <a:off x="0" y="0"/>
+          <a:ext cx="0" cy="0"/>
+          <a:chOff x="0" y="0"/>
+          <a:chExt cx="0" cy="0"/>
+        </a:xfrm>
+      </p:grpSpPr>
+      <p:sp>
+        <p:nvSpPr>
+          <p:cNvPr id="2" name="Titel 1">
+            <a:extLst>
+              <a:ext uri="{FF2B5EF4-FFF2-40B4-BE49-F238E27FC236}">
+                <a16:creationId xmlns:a16="http://schemas.microsoft.com/office/drawing/2014/main" id="{BD5ADC0D-2A4E-F24E-B3E7-A1EEC8833ABF}"/>
+              </a:ext>
+            </a:extLst>
+          </p:cNvPr>
+          <p:cNvSpPr>
+            <a:spLocks noGrp="1"/>
+          </p:cNvSpPr>
+          <p:nvPr>
+            <p:ph type="title"/>
+          </p:nvPr>
+        </p:nvSpPr>
+        <p:spPr/>
+        <p:txBody>
+          <a:bodyPr/>
+          <a:lstStyle/>
+          <a:p>
+            <a:r>
+              <a:rPr lang="de-DE" dirty="0"/>
+              <a:t>Properties </a:t>
+            </a:r>
+            <a:r>
+              <a:rPr lang="de-DE" dirty="0" err="1"/>
+              <a:t>of</a:t>
+            </a:r>
+            <a:r>
+              <a:rPr lang="de-DE" dirty="0"/>
+              <a:t> Forward Euler</a:t>
+            </a:r>
+          </a:p>
+        </p:txBody>
+      </p:sp>
+      <p:sp>
+        <p:nvSpPr>
+          <p:cNvPr id="3" name="Inhaltsplatzhalter 2">
+            <a:extLst>
+              <a:ext uri="{FF2B5EF4-FFF2-40B4-BE49-F238E27FC236}">
+                <a16:creationId xmlns:a16="http://schemas.microsoft.com/office/drawing/2014/main" id="{DC576364-121C-D5BD-B5C0-4BE68BECD63A}"/>
+              </a:ext>
+            </a:extLst>
+          </p:cNvPr>
+          <p:cNvSpPr>
+            <a:spLocks noGrp="1"/>
+          </p:cNvSpPr>
+          <p:nvPr>
+            <p:ph idx="1"/>
+          </p:nvPr>
+        </p:nvSpPr>
+        <p:spPr/>
+        <p:txBody>
+          <a:bodyPr/>
+          <a:lstStyle/>
+          <a:p>
+            <a:r>
+              <a:rPr lang="de-DE" dirty="0"/>
+              <a:t>Simple</a:t>
+            </a:r>
+          </a:p>
+          <a:p>
+            <a:r>
+              <a:rPr lang="de-DE" dirty="0"/>
+              <a:t>Poor </a:t>
+            </a:r>
+            <a:r>
+              <a:rPr lang="de-DE" dirty="0" err="1"/>
+              <a:t>stability</a:t>
+            </a:r>
+            <a:r>
+              <a:rPr lang="de-DE" dirty="0"/>
+              <a:t> </a:t>
+            </a:r>
+            <a:r>
+              <a:rPr lang="de-DE" dirty="0" err="1"/>
+              <a:t>properties</a:t>
+            </a:r>
+            <a:endParaRPr lang="de-DE" dirty="0"/>
+          </a:p>
+          <a:p>
+            <a:r>
+              <a:rPr lang="de-DE" dirty="0"/>
+              <a:t>Can </a:t>
+            </a:r>
+            <a:r>
+              <a:rPr lang="de-DE" dirty="0" err="1"/>
+              <a:t>destabilize</a:t>
+            </a:r>
+            <a:r>
+              <a:rPr lang="de-DE" dirty="0"/>
+              <a:t> </a:t>
+            </a:r>
+            <a:r>
+              <a:rPr lang="de-DE" dirty="0" err="1"/>
+              <a:t>system</a:t>
+            </a:r>
+            <a:endParaRPr lang="de-DE" dirty="0"/>
+          </a:p>
+        </p:txBody>
+      </p:sp>
+      <p:sp>
+        <p:nvSpPr>
+          <p:cNvPr id="4" name="Foliennummernplatzhalter 3">
+            <a:extLst>
+              <a:ext uri="{FF2B5EF4-FFF2-40B4-BE49-F238E27FC236}">
+                <a16:creationId xmlns:a16="http://schemas.microsoft.com/office/drawing/2014/main" id="{76E71E65-645B-BC88-8217-F3C2FBD6F446}"/>
+              </a:ext>
+            </a:extLst>
+          </p:cNvPr>
+          <p:cNvSpPr>
+            <a:spLocks noGrp="1"/>
+          </p:cNvSpPr>
+          <p:nvPr>
+            <p:ph type="sldNum" sz="quarter" idx="12"/>
+          </p:nvPr>
+        </p:nvSpPr>
+        <p:spPr/>
+        <p:txBody>
+          <a:bodyPr/>
+          <a:lstStyle/>
+          <a:p>
+            <a:fld id="{08C366F5-AFAD-49CB-854A-9D9E238FCA13}" type="slidenum">
+              <a:rPr lang="en-GB" smtClean="0"/>
+              <a:t>30</a:t>
+            </a:fld>
+            <a:endParaRPr lang="en-GB"/>
+          </a:p>
+        </p:txBody>
+      </p:sp>
+    </p:spTree>
+    <p:extLst>
+      <p:ext uri="{BB962C8B-B14F-4D97-AF65-F5344CB8AC3E}">
+        <p14:creationId xmlns:p14="http://schemas.microsoft.com/office/powerpoint/2010/main" val="1960818045"/>
+      </p:ext>
+    </p:extLst>
+  </p:cSld>
+  <p:clrMapOvr>
+    <a:masterClrMapping/>
+  </p:clrMapOvr>
+</p:sld>
+</file>
+
+<file path=ppt/slides/slide31.xml><?xml version="1.0" encoding="utf-8"?>
+<p:sld xmlns:a="http://schemas.openxmlformats.org/drawingml/2006/main" xmlns:r="http://schemas.openxmlformats.org/officeDocument/2006/relationships" xmlns:p="http://schemas.openxmlformats.org/presentationml/2006/main">
+  <p:cSld>
+    <p:spTree>
+      <p:nvGrpSpPr>
+        <p:cNvPr id="1" name=""/>
+        <p:cNvGrpSpPr/>
+        <p:nvPr/>
+      </p:nvGrpSpPr>
+      <p:grpSpPr>
+        <a:xfrm>
+          <a:off x="0" y="0"/>
+          <a:ext cx="0" cy="0"/>
+          <a:chOff x="0" y="0"/>
+          <a:chExt cx="0" cy="0"/>
+        </a:xfrm>
+      </p:grpSpPr>
+      <p:sp>
+        <p:nvSpPr>
+          <p:cNvPr id="2" name="Titel 1">
+            <a:extLst>
+              <a:ext uri="{FF2B5EF4-FFF2-40B4-BE49-F238E27FC236}">
+                <a16:creationId xmlns:a16="http://schemas.microsoft.com/office/drawing/2014/main" id="{40AC9EB8-E9B3-251E-BE78-E4D38AB67EAF}"/>
+              </a:ext>
+            </a:extLst>
+          </p:cNvPr>
+          <p:cNvSpPr>
+            <a:spLocks noGrp="1"/>
+          </p:cNvSpPr>
+          <p:nvPr>
+            <p:ph type="title"/>
+          </p:nvPr>
+        </p:nvSpPr>
+        <p:spPr/>
+        <p:txBody>
+          <a:bodyPr/>
+          <a:lstStyle/>
+          <a:p>
+            <a:r>
+              <a:rPr lang="de-DE" dirty="0" err="1"/>
+              <a:t>Backward</a:t>
+            </a:r>
+            <a:r>
+              <a:rPr lang="de-DE" dirty="0"/>
+              <a:t> Euler</a:t>
+            </a:r>
+          </a:p>
+        </p:txBody>
+      </p:sp>
+      <p:sp>
+        <p:nvSpPr>
+          <p:cNvPr id="3" name="Inhaltsplatzhalter 2">
+            <a:extLst>
+              <a:ext uri="{FF2B5EF4-FFF2-40B4-BE49-F238E27FC236}">
+                <a16:creationId xmlns:a16="http://schemas.microsoft.com/office/drawing/2014/main" id="{C1FDD0BB-F10B-A81F-CD00-93CAFD540859}"/>
+              </a:ext>
+            </a:extLst>
+          </p:cNvPr>
+          <p:cNvSpPr>
+            <a:spLocks noGrp="1"/>
+          </p:cNvSpPr>
+          <p:nvPr>
+            <p:ph idx="1"/>
+          </p:nvPr>
+        </p:nvSpPr>
+        <p:spPr/>
+        <p:txBody>
+          <a:bodyPr/>
+          <a:lstStyle/>
+          <a:p>
+            <a:r>
+              <a:rPr lang="de-DE" dirty="0"/>
+              <a:t>Approximation:</a:t>
+            </a:r>
+          </a:p>
+          <a:p>
+            <a:r>
+              <a:rPr lang="de-DE" dirty="0"/>
+              <a:t>s \</a:t>
+            </a:r>
+            <a:r>
+              <a:rPr lang="de-DE" dirty="0" err="1"/>
+              <a:t>approx</a:t>
+            </a:r>
+            <a:r>
+              <a:rPr lang="de-DE" dirty="0"/>
+              <a:t> \</a:t>
+            </a:r>
+            <a:r>
+              <a:rPr lang="de-DE" dirty="0" err="1"/>
+              <a:t>frac</a:t>
+            </a:r>
+            <a:r>
+              <a:rPr lang="de-DE" dirty="0"/>
+              <a:t>{</a:t>
+            </a:r>
+            <a:r>
+              <a:rPr lang="de-DE" dirty="0" err="1"/>
+              <a:t>z</a:t>
+            </a:r>
+            <a:r>
+              <a:rPr lang="de-DE" dirty="0"/>
+              <a:t> - 1}{Tz}</a:t>
+            </a:r>
+          </a:p>
+        </p:txBody>
+      </p:sp>
+      <p:sp>
+        <p:nvSpPr>
+          <p:cNvPr id="4" name="Foliennummernplatzhalter 3">
+            <a:extLst>
+              <a:ext uri="{FF2B5EF4-FFF2-40B4-BE49-F238E27FC236}">
+                <a16:creationId xmlns:a16="http://schemas.microsoft.com/office/drawing/2014/main" id="{98A9B552-86AD-FEB2-1A5D-4C25CA76D02C}"/>
+              </a:ext>
+            </a:extLst>
+          </p:cNvPr>
+          <p:cNvSpPr>
+            <a:spLocks noGrp="1"/>
+          </p:cNvSpPr>
+          <p:nvPr>
+            <p:ph type="sldNum" sz="quarter" idx="12"/>
+          </p:nvPr>
+        </p:nvSpPr>
+        <p:spPr/>
+        <p:txBody>
+          <a:bodyPr/>
+          <a:lstStyle/>
+          <a:p>
+            <a:fld id="{08C366F5-AFAD-49CB-854A-9D9E238FCA13}" type="slidenum">
+              <a:rPr lang="en-GB" smtClean="0"/>
+              <a:t>31</a:t>
+            </a:fld>
+            <a:endParaRPr lang="en-GB"/>
+          </a:p>
+        </p:txBody>
+      </p:sp>
+    </p:spTree>
+    <p:extLst>
+      <p:ext uri="{BB962C8B-B14F-4D97-AF65-F5344CB8AC3E}">
+        <p14:creationId xmlns:p14="http://schemas.microsoft.com/office/powerpoint/2010/main" val="1835092149"/>
+      </p:ext>
+    </p:extLst>
+  </p:cSld>
+  <p:clrMapOvr>
+    <a:masterClrMapping/>
+  </p:clrMapOvr>
+</p:sld>
+</file>
+
+<file path=ppt/slides/slide32.xml><?xml version="1.0" encoding="utf-8"?>
+<p:sld xmlns:a="http://schemas.openxmlformats.org/drawingml/2006/main" xmlns:r="http://schemas.openxmlformats.org/officeDocument/2006/relationships" xmlns:p="http://schemas.openxmlformats.org/presentationml/2006/main">
+  <p:cSld>
+    <p:spTree>
+      <p:nvGrpSpPr>
+        <p:cNvPr id="1" name=""/>
+        <p:cNvGrpSpPr/>
+        <p:nvPr/>
+      </p:nvGrpSpPr>
+      <p:grpSpPr>
+        <a:xfrm>
+          <a:off x="0" y="0"/>
+          <a:ext cx="0" cy="0"/>
+          <a:chOff x="0" y="0"/>
+          <a:chExt cx="0" cy="0"/>
+        </a:xfrm>
+      </p:grpSpPr>
+      <p:sp>
+        <p:nvSpPr>
+          <p:cNvPr id="2" name="Titel 1">
+            <a:extLst>
+              <a:ext uri="{FF2B5EF4-FFF2-40B4-BE49-F238E27FC236}">
+                <a16:creationId xmlns:a16="http://schemas.microsoft.com/office/drawing/2014/main" id="{9C0C49BC-D4E1-7D90-DC06-56A9F176D193}"/>
+              </a:ext>
+            </a:extLst>
+          </p:cNvPr>
+          <p:cNvSpPr>
+            <a:spLocks noGrp="1"/>
+          </p:cNvSpPr>
+          <p:nvPr>
+            <p:ph type="title"/>
+          </p:nvPr>
+        </p:nvSpPr>
+        <p:spPr/>
+        <p:txBody>
+          <a:bodyPr/>
+          <a:lstStyle/>
+          <a:p>
+            <a:r>
+              <a:rPr lang="de-DE" dirty="0"/>
+              <a:t>Properties </a:t>
+            </a:r>
+            <a:r>
+              <a:rPr lang="de-DE" dirty="0" err="1"/>
+              <a:t>of</a:t>
+            </a:r>
+            <a:r>
+              <a:rPr lang="de-DE" dirty="0"/>
+              <a:t> </a:t>
+            </a:r>
+            <a:r>
+              <a:rPr lang="de-DE" dirty="0" err="1"/>
+              <a:t>Backward</a:t>
+            </a:r>
+            <a:r>
+              <a:rPr lang="de-DE" dirty="0"/>
+              <a:t> Euler</a:t>
+            </a:r>
+          </a:p>
+        </p:txBody>
+      </p:sp>
+      <p:sp>
+        <p:nvSpPr>
+          <p:cNvPr id="3" name="Inhaltsplatzhalter 2">
+            <a:extLst>
+              <a:ext uri="{FF2B5EF4-FFF2-40B4-BE49-F238E27FC236}">
+                <a16:creationId xmlns:a16="http://schemas.microsoft.com/office/drawing/2014/main" id="{A1C7007C-D7B2-171C-E80E-4C82D2D0EABC}"/>
+              </a:ext>
+            </a:extLst>
+          </p:cNvPr>
+          <p:cNvSpPr>
+            <a:spLocks noGrp="1"/>
+          </p:cNvSpPr>
+          <p:nvPr>
+            <p:ph idx="1"/>
+          </p:nvPr>
+        </p:nvSpPr>
+        <p:spPr/>
+        <p:txBody>
+          <a:bodyPr/>
+          <a:lstStyle/>
+          <a:p>
+            <a:r>
+              <a:rPr lang="de-DE" dirty="0"/>
+              <a:t>More </a:t>
+            </a:r>
+            <a:r>
+              <a:rPr lang="de-DE" dirty="0" err="1"/>
+              <a:t>stable</a:t>
+            </a:r>
+            <a:r>
+              <a:rPr lang="de-DE" dirty="0"/>
+              <a:t> </a:t>
+            </a:r>
+            <a:r>
+              <a:rPr lang="de-DE" dirty="0" err="1"/>
+              <a:t>than</a:t>
+            </a:r>
+            <a:r>
+              <a:rPr lang="de-DE" dirty="0"/>
+              <a:t> </a:t>
+            </a:r>
+            <a:r>
+              <a:rPr lang="de-DE" dirty="0" err="1"/>
+              <a:t>forward</a:t>
+            </a:r>
+            <a:r>
+              <a:rPr lang="de-DE" dirty="0"/>
+              <a:t> Euler</a:t>
+            </a:r>
+          </a:p>
+          <a:p>
+            <a:r>
+              <a:rPr lang="de-DE" dirty="0" err="1"/>
+              <a:t>Introduces</a:t>
+            </a:r>
+            <a:r>
+              <a:rPr lang="de-DE" dirty="0"/>
+              <a:t> </a:t>
+            </a:r>
+            <a:r>
+              <a:rPr lang="de-DE" dirty="0" err="1"/>
+              <a:t>damping</a:t>
+            </a:r>
+            <a:endParaRPr lang="de-DE" dirty="0"/>
+          </a:p>
+        </p:txBody>
+      </p:sp>
+      <p:sp>
+        <p:nvSpPr>
+          <p:cNvPr id="4" name="Foliennummernplatzhalter 3">
+            <a:extLst>
+              <a:ext uri="{FF2B5EF4-FFF2-40B4-BE49-F238E27FC236}">
+                <a16:creationId xmlns:a16="http://schemas.microsoft.com/office/drawing/2014/main" id="{298F5794-2A54-31B0-269B-DFB2D3DFB20B}"/>
+              </a:ext>
+            </a:extLst>
+          </p:cNvPr>
+          <p:cNvSpPr>
+            <a:spLocks noGrp="1"/>
+          </p:cNvSpPr>
+          <p:nvPr>
+            <p:ph type="sldNum" sz="quarter" idx="12"/>
+          </p:nvPr>
+        </p:nvSpPr>
+        <p:spPr/>
+        <p:txBody>
+          <a:bodyPr/>
+          <a:lstStyle/>
+          <a:p>
+            <a:fld id="{08C366F5-AFAD-49CB-854A-9D9E238FCA13}" type="slidenum">
+              <a:rPr lang="en-GB" smtClean="0"/>
+              <a:t>32</a:t>
+            </a:fld>
+            <a:endParaRPr lang="en-GB"/>
+          </a:p>
+        </p:txBody>
+      </p:sp>
+    </p:spTree>
+    <p:extLst>
+      <p:ext uri="{BB962C8B-B14F-4D97-AF65-F5344CB8AC3E}">
+        <p14:creationId xmlns:p14="http://schemas.microsoft.com/office/powerpoint/2010/main" val="2798254879"/>
+      </p:ext>
+    </p:extLst>
+  </p:cSld>
+  <p:clrMapOvr>
+    <a:masterClrMapping/>
+  </p:clrMapOvr>
+</p:sld>
+</file>
+
+<file path=ppt/slides/slide33.xml><?xml version="1.0" encoding="utf-8"?>
+<p:sld xmlns:a="http://schemas.openxmlformats.org/drawingml/2006/main" xmlns:r="http://schemas.openxmlformats.org/officeDocument/2006/relationships" xmlns:p="http://schemas.openxmlformats.org/presentationml/2006/main">
+  <p:cSld>
+    <p:spTree>
+      <p:nvGrpSpPr>
+        <p:cNvPr id="1" name=""/>
+        <p:cNvGrpSpPr/>
+        <p:nvPr/>
+      </p:nvGrpSpPr>
+      <p:grpSpPr>
+        <a:xfrm>
+          <a:off x="0" y="0"/>
+          <a:ext cx="0" cy="0"/>
+          <a:chOff x="0" y="0"/>
+          <a:chExt cx="0" cy="0"/>
+        </a:xfrm>
+      </p:grpSpPr>
+      <p:sp>
+        <p:nvSpPr>
+          <p:cNvPr id="2" name="Titel 1">
+            <a:extLst>
+              <a:ext uri="{FF2B5EF4-FFF2-40B4-BE49-F238E27FC236}">
+                <a16:creationId xmlns:a16="http://schemas.microsoft.com/office/drawing/2014/main" id="{89FFFBB7-5493-01B1-DF7E-930B30993FE5}"/>
+              </a:ext>
+            </a:extLst>
+          </p:cNvPr>
+          <p:cNvSpPr>
+            <a:spLocks noGrp="1"/>
+          </p:cNvSpPr>
+          <p:nvPr>
+            <p:ph type="title"/>
+          </p:nvPr>
+        </p:nvSpPr>
+        <p:spPr/>
+        <p:txBody>
+          <a:bodyPr/>
+          <a:lstStyle/>
+          <a:p>
+            <a:r>
+              <a:rPr lang="de-DE" dirty="0" err="1"/>
+              <a:t>Tustin</a:t>
+            </a:r>
+            <a:r>
+              <a:rPr lang="de-DE" dirty="0"/>
+              <a:t> (Bilinear) Method</a:t>
+            </a:r>
+          </a:p>
+        </p:txBody>
+      </p:sp>
+      <p:sp>
+        <p:nvSpPr>
+          <p:cNvPr id="3" name="Inhaltsplatzhalter 2">
+            <a:extLst>
+              <a:ext uri="{FF2B5EF4-FFF2-40B4-BE49-F238E27FC236}">
+                <a16:creationId xmlns:a16="http://schemas.microsoft.com/office/drawing/2014/main" id="{0BDC2B80-65D3-5892-4CF0-DAC832DAC831}"/>
+              </a:ext>
+            </a:extLst>
+          </p:cNvPr>
+          <p:cNvSpPr>
+            <a:spLocks noGrp="1"/>
+          </p:cNvSpPr>
+          <p:nvPr>
+            <p:ph idx="1"/>
+          </p:nvPr>
+        </p:nvSpPr>
+        <p:spPr/>
+        <p:txBody>
+          <a:bodyPr/>
+          <a:lstStyle/>
+          <a:p>
+            <a:r>
+              <a:rPr lang="de-DE" dirty="0"/>
+              <a:t>Bilinear </a:t>
+            </a:r>
+            <a:r>
+              <a:rPr lang="de-DE" dirty="0" err="1"/>
+              <a:t>transformation</a:t>
+            </a:r>
+            <a:endParaRPr lang="de-DE" dirty="0"/>
+          </a:p>
+          <a:p>
+            <a:r>
+              <a:rPr lang="de-DE" dirty="0" err="1"/>
+              <a:t>Preserves</a:t>
+            </a:r>
+            <a:r>
+              <a:rPr lang="de-DE" dirty="0"/>
+              <a:t> </a:t>
+            </a:r>
+            <a:r>
+              <a:rPr lang="de-DE" dirty="0" err="1"/>
+              <a:t>frequency</a:t>
+            </a:r>
+            <a:r>
+              <a:rPr lang="de-DE" dirty="0"/>
+              <a:t> </a:t>
+            </a:r>
+            <a:r>
+              <a:rPr lang="de-DE" dirty="0" err="1"/>
+              <a:t>characteristics</a:t>
+            </a:r>
+            <a:r>
+              <a:rPr lang="de-DE" dirty="0"/>
+              <a:t> </a:t>
+            </a:r>
+            <a:r>
+              <a:rPr lang="de-DE" dirty="0" err="1"/>
+              <a:t>better</a:t>
+            </a:r>
+            <a:endParaRPr lang="de-DE" dirty="0"/>
+          </a:p>
+          <a:p>
+            <a:pPr marL="0" indent="0">
+              <a:buNone/>
+            </a:pPr>
+            <a:endParaRPr lang="de-DE" dirty="0"/>
+          </a:p>
+          <a:p>
+            <a:r>
+              <a:rPr lang="de-DE" dirty="0"/>
+              <a:t>Approximation:</a:t>
+            </a:r>
+          </a:p>
+          <a:p>
+            <a:r>
+              <a:rPr lang="de-DE" dirty="0"/>
+              <a:t>s \</a:t>
+            </a:r>
+            <a:r>
+              <a:rPr lang="de-DE" dirty="0" err="1"/>
+              <a:t>approx</a:t>
+            </a:r>
+            <a:r>
+              <a:rPr lang="de-DE" dirty="0"/>
+              <a:t> \</a:t>
+            </a:r>
+            <a:r>
+              <a:rPr lang="de-DE" dirty="0" err="1"/>
+              <a:t>frac</a:t>
+            </a:r>
+            <a:r>
+              <a:rPr lang="de-DE" dirty="0"/>
+              <a:t>{2}{T} \</a:t>
+            </a:r>
+            <a:r>
+              <a:rPr lang="de-DE" dirty="0" err="1"/>
+              <a:t>frac</a:t>
+            </a:r>
+            <a:r>
+              <a:rPr lang="de-DE" dirty="0"/>
+              <a:t>{</a:t>
+            </a:r>
+            <a:r>
+              <a:rPr lang="de-DE" dirty="0" err="1"/>
+              <a:t>z</a:t>
+            </a:r>
+            <a:r>
+              <a:rPr lang="de-DE" dirty="0"/>
+              <a:t> - 1}{</a:t>
+            </a:r>
+            <a:r>
+              <a:rPr lang="de-DE" dirty="0" err="1"/>
+              <a:t>z</a:t>
+            </a:r>
+            <a:r>
+              <a:rPr lang="de-DE" dirty="0"/>
+              <a:t> + 1}</a:t>
+            </a:r>
+          </a:p>
+        </p:txBody>
+      </p:sp>
+      <p:sp>
+        <p:nvSpPr>
+          <p:cNvPr id="4" name="Foliennummernplatzhalter 3">
+            <a:extLst>
+              <a:ext uri="{FF2B5EF4-FFF2-40B4-BE49-F238E27FC236}">
+                <a16:creationId xmlns:a16="http://schemas.microsoft.com/office/drawing/2014/main" id="{26D5E52C-843C-475B-4446-7DFD4F8F786C}"/>
+              </a:ext>
+            </a:extLst>
+          </p:cNvPr>
+          <p:cNvSpPr>
+            <a:spLocks noGrp="1"/>
+          </p:cNvSpPr>
+          <p:nvPr>
+            <p:ph type="sldNum" sz="quarter" idx="12"/>
+          </p:nvPr>
+        </p:nvSpPr>
+        <p:spPr/>
+        <p:txBody>
+          <a:bodyPr/>
+          <a:lstStyle/>
+          <a:p>
+            <a:fld id="{08C366F5-AFAD-49CB-854A-9D9E238FCA13}" type="slidenum">
+              <a:rPr lang="en-GB" smtClean="0"/>
+              <a:t>33</a:t>
+            </a:fld>
+            <a:endParaRPr lang="en-GB"/>
+          </a:p>
+        </p:txBody>
+      </p:sp>
+    </p:spTree>
+    <p:extLst>
+      <p:ext uri="{BB962C8B-B14F-4D97-AF65-F5344CB8AC3E}">
+        <p14:creationId xmlns:p14="http://schemas.microsoft.com/office/powerpoint/2010/main" val="999781829"/>
+      </p:ext>
+    </p:extLst>
+  </p:cSld>
+  <p:clrMapOvr>
+    <a:masterClrMapping/>
+  </p:clrMapOvr>
+</p:sld>
+</file>
+
+<file path=ppt/slides/slide34.xml><?xml version="1.0" encoding="utf-8"?>
+<p:sld xmlns:a="http://schemas.openxmlformats.org/drawingml/2006/main" xmlns:r="http://schemas.openxmlformats.org/officeDocument/2006/relationships" xmlns:p="http://schemas.openxmlformats.org/presentationml/2006/main">
+  <p:cSld>
+    <p:spTree>
+      <p:nvGrpSpPr>
+        <p:cNvPr id="1" name=""/>
+        <p:cNvGrpSpPr/>
+        <p:nvPr/>
+      </p:nvGrpSpPr>
+      <p:grpSpPr>
+        <a:xfrm>
+          <a:off x="0" y="0"/>
+          <a:ext cx="0" cy="0"/>
+          <a:chOff x="0" y="0"/>
+          <a:chExt cx="0" cy="0"/>
+        </a:xfrm>
+      </p:grpSpPr>
+      <p:sp>
+        <p:nvSpPr>
+          <p:cNvPr id="2" name="Titel 1">
+            <a:extLst>
+              <a:ext uri="{FF2B5EF4-FFF2-40B4-BE49-F238E27FC236}">
+                <a16:creationId xmlns:a16="http://schemas.microsoft.com/office/drawing/2014/main" id="{D8743D22-DD11-C9A9-BADF-57420F9D8FBD}"/>
+              </a:ext>
+            </a:extLst>
+          </p:cNvPr>
+          <p:cNvSpPr>
+            <a:spLocks noGrp="1"/>
+          </p:cNvSpPr>
+          <p:nvPr>
+            <p:ph type="title"/>
+          </p:nvPr>
+        </p:nvSpPr>
+        <p:spPr/>
+        <p:txBody>
+          <a:bodyPr/>
+          <a:lstStyle/>
+          <a:p>
+            <a:r>
+              <a:rPr lang="de-DE" dirty="0" err="1"/>
+              <a:t>Example</a:t>
+            </a:r>
+            <a:r>
+              <a:rPr lang="de-DE" dirty="0"/>
+              <a:t> (</a:t>
+            </a:r>
+            <a:r>
+              <a:rPr lang="de-DE" dirty="0" err="1"/>
+              <a:t>Tustin</a:t>
+            </a:r>
+            <a:r>
+              <a:rPr lang="de-DE" dirty="0"/>
+              <a:t>)</a:t>
+            </a:r>
+          </a:p>
+        </p:txBody>
+      </p:sp>
+      <p:sp>
+        <p:nvSpPr>
+          <p:cNvPr id="3" name="Inhaltsplatzhalter 2">
+            <a:extLst>
+              <a:ext uri="{FF2B5EF4-FFF2-40B4-BE49-F238E27FC236}">
+                <a16:creationId xmlns:a16="http://schemas.microsoft.com/office/drawing/2014/main" id="{689A3911-D8C7-1DE3-FBD4-A2A8BF7F6F3E}"/>
+              </a:ext>
+            </a:extLst>
+          </p:cNvPr>
+          <p:cNvSpPr>
+            <a:spLocks noGrp="1"/>
+          </p:cNvSpPr>
+          <p:nvPr>
+            <p:ph idx="1"/>
+          </p:nvPr>
+        </p:nvSpPr>
+        <p:spPr/>
+        <p:txBody>
+          <a:bodyPr/>
+          <a:lstStyle/>
+          <a:p>
+            <a:r>
+              <a:rPr lang="de-DE" dirty="0"/>
+              <a:t>Given:</a:t>
+            </a:r>
+          </a:p>
+          <a:p>
+            <a:r>
+              <a:rPr lang="de-DE" dirty="0"/>
+              <a:t>G(s) = \</a:t>
+            </a:r>
+            <a:r>
+              <a:rPr lang="de-DE" dirty="0" err="1"/>
+              <a:t>frac</a:t>
+            </a:r>
+            <a:r>
+              <a:rPr lang="de-DE" dirty="0"/>
+              <a:t>{1}{s+1}</a:t>
+            </a:r>
+            <a:br>
+              <a:rPr lang="de-DE" dirty="0"/>
+            </a:br>
+            <a:endParaRPr lang="de-DE" dirty="0"/>
+          </a:p>
+          <a:p>
+            <a:r>
+              <a:rPr lang="de-DE" dirty="0"/>
+              <a:t>Substitute </a:t>
+            </a:r>
+            <a:r>
+              <a:rPr lang="de-DE" dirty="0" err="1"/>
+              <a:t>Tustin</a:t>
+            </a:r>
+            <a:r>
+              <a:rPr lang="de-DE" dirty="0"/>
+              <a:t> </a:t>
+            </a:r>
+            <a:r>
+              <a:rPr lang="de-DE" dirty="0" err="1"/>
+              <a:t>approximation</a:t>
+            </a:r>
+            <a:br>
+              <a:rPr lang="de-DE" dirty="0"/>
+            </a:br>
+            <a:endParaRPr lang="de-DE" dirty="0"/>
+          </a:p>
+          <a:p>
+            <a:pPr marL="0" indent="0">
+              <a:buNone/>
+            </a:pPr>
+            <a:r>
+              <a:rPr lang="de-DE" dirty="0"/>
+              <a:t>Show </a:t>
+            </a:r>
+            <a:r>
+              <a:rPr lang="de-DE" dirty="0" err="1"/>
+              <a:t>full</a:t>
+            </a:r>
+            <a:r>
+              <a:rPr lang="de-DE" dirty="0"/>
+              <a:t> </a:t>
+            </a:r>
+            <a:r>
+              <a:rPr lang="de-DE" dirty="0" err="1"/>
+              <a:t>derivation</a:t>
+            </a:r>
+            <a:endParaRPr lang="de-DE" dirty="0"/>
+          </a:p>
+        </p:txBody>
+      </p:sp>
+      <p:sp>
+        <p:nvSpPr>
+          <p:cNvPr id="4" name="Foliennummernplatzhalter 3">
+            <a:extLst>
+              <a:ext uri="{FF2B5EF4-FFF2-40B4-BE49-F238E27FC236}">
+                <a16:creationId xmlns:a16="http://schemas.microsoft.com/office/drawing/2014/main" id="{D12B3716-CB48-FEDE-2AA3-2A665E976F47}"/>
+              </a:ext>
+            </a:extLst>
+          </p:cNvPr>
+          <p:cNvSpPr>
+            <a:spLocks noGrp="1"/>
+          </p:cNvSpPr>
+          <p:nvPr>
+            <p:ph type="sldNum" sz="quarter" idx="12"/>
+          </p:nvPr>
+        </p:nvSpPr>
+        <p:spPr/>
+        <p:txBody>
+          <a:bodyPr/>
+          <a:lstStyle/>
+          <a:p>
+            <a:fld id="{08C366F5-AFAD-49CB-854A-9D9E238FCA13}" type="slidenum">
+              <a:rPr lang="en-GB" smtClean="0"/>
+              <a:t>34</a:t>
+            </a:fld>
+            <a:endParaRPr lang="en-GB"/>
+          </a:p>
+        </p:txBody>
+      </p:sp>
+    </p:spTree>
+    <p:extLst>
+      <p:ext uri="{BB962C8B-B14F-4D97-AF65-F5344CB8AC3E}">
+        <p14:creationId xmlns:p14="http://schemas.microsoft.com/office/powerpoint/2010/main" val="2297320984"/>
+      </p:ext>
+    </p:extLst>
+  </p:cSld>
+  <p:clrMapOvr>
+    <a:masterClrMapping/>
+  </p:clrMapOvr>
+</p:sld>
+</file>
+
+<file path=ppt/slides/slide35.xml><?xml version="1.0" encoding="utf-8"?>
+<p:sld xmlns:a="http://schemas.openxmlformats.org/drawingml/2006/main" xmlns:r="http://schemas.openxmlformats.org/officeDocument/2006/relationships" xmlns:p="http://schemas.openxmlformats.org/presentationml/2006/main">
+  <p:cSld>
+    <p:spTree>
+      <p:nvGrpSpPr>
+        <p:cNvPr id="1" name=""/>
+        <p:cNvGrpSpPr/>
+        <p:nvPr/>
+      </p:nvGrpSpPr>
+      <p:grpSpPr>
+        <a:xfrm>
+          <a:off x="0" y="0"/>
+          <a:ext cx="0" cy="0"/>
+          <a:chOff x="0" y="0"/>
+          <a:chExt cx="0" cy="0"/>
+        </a:xfrm>
+      </p:grpSpPr>
+      <p:sp>
+        <p:nvSpPr>
+          <p:cNvPr id="2" name="Titel 1">
+            <a:extLst>
+              <a:ext uri="{FF2B5EF4-FFF2-40B4-BE49-F238E27FC236}">
+                <a16:creationId xmlns:a16="http://schemas.microsoft.com/office/drawing/2014/main" id="{1E252453-49FB-5BCE-B647-57900ED570A3}"/>
+              </a:ext>
+            </a:extLst>
+          </p:cNvPr>
+          <p:cNvSpPr>
+            <a:spLocks noGrp="1"/>
+          </p:cNvSpPr>
+          <p:nvPr>
+            <p:ph type="title"/>
+          </p:nvPr>
+        </p:nvSpPr>
+        <p:spPr/>
+        <p:txBody>
+          <a:bodyPr/>
+          <a:lstStyle/>
+          <a:p>
+            <a:r>
+              <a:rPr lang="de-DE" dirty="0" err="1"/>
+              <a:t>Frequency</a:t>
+            </a:r>
+            <a:r>
+              <a:rPr lang="de-DE" dirty="0"/>
+              <a:t> </a:t>
+            </a:r>
+            <a:r>
+              <a:rPr lang="de-DE" dirty="0" err="1"/>
+              <a:t>Warping</a:t>
+            </a:r>
+            <a:endParaRPr lang="de-DE" dirty="0"/>
+          </a:p>
+        </p:txBody>
+      </p:sp>
+      <p:sp>
+        <p:nvSpPr>
+          <p:cNvPr id="3" name="Inhaltsplatzhalter 2">
+            <a:extLst>
+              <a:ext uri="{FF2B5EF4-FFF2-40B4-BE49-F238E27FC236}">
+                <a16:creationId xmlns:a16="http://schemas.microsoft.com/office/drawing/2014/main" id="{44155171-0F07-F48C-4FC5-AD6A9501961D}"/>
+              </a:ext>
+            </a:extLst>
+          </p:cNvPr>
+          <p:cNvSpPr>
+            <a:spLocks noGrp="1"/>
+          </p:cNvSpPr>
+          <p:nvPr>
+            <p:ph idx="1"/>
+          </p:nvPr>
+        </p:nvSpPr>
+        <p:spPr/>
+        <p:txBody>
+          <a:bodyPr/>
+          <a:lstStyle/>
+          <a:p>
+            <a:r>
+              <a:rPr lang="de-DE" dirty="0" err="1"/>
+              <a:t>Tustin</a:t>
+            </a:r>
+            <a:r>
+              <a:rPr lang="de-DE" dirty="0"/>
+              <a:t> </a:t>
+            </a:r>
+            <a:r>
+              <a:rPr lang="de-DE" dirty="0" err="1"/>
+              <a:t>causes</a:t>
+            </a:r>
+            <a:r>
+              <a:rPr lang="de-DE" dirty="0"/>
+              <a:t>:</a:t>
+            </a:r>
+          </a:p>
+          <a:p>
+            <a:r>
+              <a:rPr lang="de-DE" dirty="0" err="1"/>
+              <a:t>Nonlinear</a:t>
+            </a:r>
+            <a:r>
+              <a:rPr lang="de-DE" dirty="0"/>
+              <a:t> </a:t>
+            </a:r>
+            <a:r>
+              <a:rPr lang="de-DE" dirty="0" err="1"/>
+              <a:t>frequency</a:t>
+            </a:r>
+            <a:r>
+              <a:rPr lang="de-DE" dirty="0"/>
+              <a:t> </a:t>
+            </a:r>
+            <a:r>
+              <a:rPr lang="de-DE" dirty="0" err="1"/>
+              <a:t>mapping</a:t>
+            </a:r>
+            <a:br>
+              <a:rPr lang="de-DE" dirty="0"/>
+            </a:br>
+            <a:endParaRPr lang="de-DE" dirty="0"/>
+          </a:p>
+          <a:p>
+            <a:r>
+              <a:rPr lang="de-DE" dirty="0" err="1"/>
+              <a:t>Correction</a:t>
+            </a:r>
+            <a:r>
+              <a:rPr lang="de-DE" dirty="0"/>
+              <a:t>:</a:t>
+            </a:r>
+          </a:p>
+          <a:p>
+            <a:r>
+              <a:rPr lang="de-DE" dirty="0" err="1"/>
+              <a:t>Prewarping</a:t>
+            </a:r>
+            <a:endParaRPr lang="de-DE" dirty="0"/>
+          </a:p>
+          <a:p>
+            <a:pPr marL="0" indent="0">
+              <a:buNone/>
+            </a:pPr>
+            <a:endParaRPr lang="de-DE" dirty="0"/>
+          </a:p>
+        </p:txBody>
+      </p:sp>
+      <p:sp>
+        <p:nvSpPr>
+          <p:cNvPr id="4" name="Foliennummernplatzhalter 3">
+            <a:extLst>
+              <a:ext uri="{FF2B5EF4-FFF2-40B4-BE49-F238E27FC236}">
+                <a16:creationId xmlns:a16="http://schemas.microsoft.com/office/drawing/2014/main" id="{004E2426-CC49-F7FA-FF4C-A2C893F55C3C}"/>
+              </a:ext>
+            </a:extLst>
+          </p:cNvPr>
+          <p:cNvSpPr>
+            <a:spLocks noGrp="1"/>
+          </p:cNvSpPr>
+          <p:nvPr>
+            <p:ph type="sldNum" sz="quarter" idx="12"/>
+          </p:nvPr>
+        </p:nvSpPr>
+        <p:spPr/>
+        <p:txBody>
+          <a:bodyPr/>
+          <a:lstStyle/>
+          <a:p>
+            <a:fld id="{08C366F5-AFAD-49CB-854A-9D9E238FCA13}" type="slidenum">
+              <a:rPr lang="en-GB" smtClean="0"/>
+              <a:t>35</a:t>
+            </a:fld>
+            <a:endParaRPr lang="en-GB"/>
+          </a:p>
+        </p:txBody>
+      </p:sp>
+    </p:spTree>
+    <p:extLst>
+      <p:ext uri="{BB962C8B-B14F-4D97-AF65-F5344CB8AC3E}">
+        <p14:creationId xmlns:p14="http://schemas.microsoft.com/office/powerpoint/2010/main" val="2869799986"/>
+      </p:ext>
+    </p:extLst>
+  </p:cSld>
+  <p:clrMapOvr>
+    <a:masterClrMapping/>
+  </p:clrMapOvr>
+</p:sld>
+</file>
+
+<file path=ppt/slides/slide36.xml><?xml version="1.0" encoding="utf-8"?>
+<p:sld xmlns:a="http://schemas.openxmlformats.org/drawingml/2006/main" xmlns:r="http://schemas.openxmlformats.org/officeDocument/2006/relationships" xmlns:p="http://schemas.openxmlformats.org/presentationml/2006/main">
+  <p:cSld>
+    <p:spTree>
+      <p:nvGrpSpPr>
+        <p:cNvPr id="1" name=""/>
+        <p:cNvGrpSpPr/>
+        <p:nvPr/>
+      </p:nvGrpSpPr>
+      <p:grpSpPr>
+        <a:xfrm>
+          <a:off x="0" y="0"/>
+          <a:ext cx="0" cy="0"/>
+          <a:chOff x="0" y="0"/>
+          <a:chExt cx="0" cy="0"/>
+        </a:xfrm>
+      </p:grpSpPr>
+      <p:sp>
+        <p:nvSpPr>
+          <p:cNvPr id="2" name="Titel 1">
+            <a:extLst>
+              <a:ext uri="{FF2B5EF4-FFF2-40B4-BE49-F238E27FC236}">
+                <a16:creationId xmlns:a16="http://schemas.microsoft.com/office/drawing/2014/main" id="{60711423-DF3C-B5DF-7E7E-40C6C2D140DA}"/>
+              </a:ext>
+            </a:extLst>
+          </p:cNvPr>
+          <p:cNvSpPr>
+            <a:spLocks noGrp="1"/>
+          </p:cNvSpPr>
+          <p:nvPr>
+            <p:ph type="title"/>
+          </p:nvPr>
+        </p:nvSpPr>
+        <p:spPr/>
+        <p:txBody>
+          <a:bodyPr/>
+          <a:lstStyle/>
+          <a:p>
+            <a:r>
+              <a:rPr lang="de-DE" dirty="0" err="1"/>
+              <a:t>Comparison</a:t>
+            </a:r>
+            <a:r>
+              <a:rPr lang="de-DE" dirty="0"/>
+              <a:t> </a:t>
+            </a:r>
+            <a:r>
+              <a:rPr lang="de-DE" dirty="0" err="1"/>
+              <a:t>of</a:t>
+            </a:r>
+            <a:r>
+              <a:rPr lang="de-DE" dirty="0"/>
+              <a:t> Methods</a:t>
+            </a:r>
+          </a:p>
+        </p:txBody>
+      </p:sp>
+      <p:sp>
+        <p:nvSpPr>
+          <p:cNvPr id="4" name="Foliennummernplatzhalter 3">
+            <a:extLst>
+              <a:ext uri="{FF2B5EF4-FFF2-40B4-BE49-F238E27FC236}">
+                <a16:creationId xmlns:a16="http://schemas.microsoft.com/office/drawing/2014/main" id="{EF7C8CBB-CFA2-E0E0-F55C-6CE0CE56B6A0}"/>
+              </a:ext>
+            </a:extLst>
+          </p:cNvPr>
+          <p:cNvSpPr>
+            <a:spLocks noGrp="1"/>
+          </p:cNvSpPr>
+          <p:nvPr>
+            <p:ph type="sldNum" sz="quarter" idx="12"/>
+          </p:nvPr>
+        </p:nvSpPr>
+        <p:spPr/>
+        <p:txBody>
+          <a:bodyPr/>
+          <a:lstStyle/>
+          <a:p>
+            <a:fld id="{08C366F5-AFAD-49CB-854A-9D9E238FCA13}" type="slidenum">
+              <a:rPr lang="en-GB" smtClean="0"/>
+              <a:t>36</a:t>
+            </a:fld>
+            <a:endParaRPr lang="en-GB"/>
+          </a:p>
+        </p:txBody>
+      </p:sp>
+      <p:graphicFrame>
+        <p:nvGraphicFramePr>
+          <p:cNvPr id="5" name="Tabelle 4">
+            <a:extLst>
+              <a:ext uri="{FF2B5EF4-FFF2-40B4-BE49-F238E27FC236}">
+                <a16:creationId xmlns:a16="http://schemas.microsoft.com/office/drawing/2014/main" id="{C3912ECF-7994-0EDE-C82B-186024CBFD59}"/>
+              </a:ext>
+            </a:extLst>
+          </p:cNvPr>
+          <p:cNvGraphicFramePr>
+            <a:graphicFrameLocks noGrp="1"/>
+          </p:cNvGraphicFramePr>
+          <p:nvPr/>
+        </p:nvGraphicFramePr>
+        <p:xfrm>
+          <a:off x="838200" y="3269774"/>
+          <a:ext cx="10515600" cy="1463040"/>
+        </p:xfrm>
+        <a:graphic>
+          <a:graphicData uri="http://schemas.openxmlformats.org/drawingml/2006/table">
+            <a:tbl>
+              <a:tblPr/>
+              <a:tblGrid>
+                <a:gridCol w="3505200">
+                  <a:extLst>
+                    <a:ext uri="{9D8B030D-6E8A-4147-A177-3AD203B41FA5}">
+                      <a16:colId xmlns:a16="http://schemas.microsoft.com/office/drawing/2014/main" val="707809539"/>
+                    </a:ext>
+                  </a:extLst>
+                </a:gridCol>
+                <a:gridCol w="3505200">
+                  <a:extLst>
+                    <a:ext uri="{9D8B030D-6E8A-4147-A177-3AD203B41FA5}">
+                      <a16:colId xmlns:a16="http://schemas.microsoft.com/office/drawing/2014/main" val="2314340506"/>
+                    </a:ext>
+                  </a:extLst>
+                </a:gridCol>
+                <a:gridCol w="3505200">
+                  <a:extLst>
+                    <a:ext uri="{9D8B030D-6E8A-4147-A177-3AD203B41FA5}">
+                      <a16:colId xmlns:a16="http://schemas.microsoft.com/office/drawing/2014/main" val="4067597396"/>
+                    </a:ext>
+                  </a:extLst>
+                </a:gridCol>
+              </a:tblGrid>
+              <a:tr h="0">
+                <a:tc>
+                  <a:txBody>
+                    <a:bodyPr/>
+                    <a:lstStyle/>
+                    <a:p>
+                      <a:pPr>
+                        <a:buNone/>
+                      </a:pPr>
+                      <a:r>
+                        <a:rPr lang="de-DE" b="1"/>
+                        <a:t>Method</a:t>
+                      </a:r>
+                      <a:endParaRPr lang="de-DE"/>
+                    </a:p>
+                  </a:txBody>
+                  <a:tcPr anchor="ctr">
+                    <a:lnL>
+                      <a:noFill/>
+                    </a:lnL>
+                    <a:lnR>
+                      <a:noFill/>
+                    </a:lnR>
+                    <a:lnT>
+                      <a:noFill/>
+                    </a:lnT>
+                    <a:lnB>
+                      <a:noFill/>
+                    </a:lnB>
+                    <a:noFill/>
+                  </a:tcPr>
+                </a:tc>
+                <a:tc>
+                  <a:txBody>
+                    <a:bodyPr/>
+                    <a:lstStyle/>
+                    <a:p>
+                      <a:pPr>
+                        <a:buNone/>
+                      </a:pPr>
+                      <a:r>
+                        <a:rPr lang="de-DE" b="1"/>
+                        <a:t>Accuracy</a:t>
+                      </a:r>
+                      <a:endParaRPr lang="de-DE"/>
+                    </a:p>
+                  </a:txBody>
+                  <a:tcPr anchor="ctr">
+                    <a:lnL>
+                      <a:noFill/>
+                    </a:lnL>
+                    <a:lnR>
+                      <a:noFill/>
+                    </a:lnR>
+                    <a:lnT>
+                      <a:noFill/>
+                    </a:lnT>
+                    <a:lnB>
+                      <a:noFill/>
+                    </a:lnB>
+                    <a:noFill/>
+                  </a:tcPr>
+                </a:tc>
+                <a:tc>
+                  <a:txBody>
+                    <a:bodyPr/>
+                    <a:lstStyle/>
+                    <a:p>
+                      <a:pPr>
+                        <a:buNone/>
+                      </a:pPr>
+                      <a:r>
+                        <a:rPr lang="de-DE" b="1"/>
+                        <a:t>Stability</a:t>
+                      </a:r>
+                      <a:endParaRPr lang="de-DE"/>
+                    </a:p>
+                  </a:txBody>
+                  <a:tcPr anchor="ctr">
+                    <a:lnL>
+                      <a:noFill/>
+                    </a:lnL>
+                    <a:lnR>
+                      <a:noFill/>
+                    </a:lnR>
+                    <a:lnT>
+                      <a:noFill/>
+                    </a:lnT>
+                    <a:lnB>
+                      <a:noFill/>
+                    </a:lnB>
+                    <a:noFill/>
+                  </a:tcPr>
+                </a:tc>
+                <a:extLst>
+                  <a:ext uri="{0D108BD9-81ED-4DB2-BD59-A6C34878D82A}">
+                    <a16:rowId xmlns:a16="http://schemas.microsoft.com/office/drawing/2014/main" val="540675038"/>
+                  </a:ext>
+                </a:extLst>
+              </a:tr>
+              <a:tr h="0">
+                <a:tc>
+                  <a:txBody>
+                    <a:bodyPr/>
+                    <a:lstStyle/>
+                    <a:p>
+                      <a:pPr>
+                        <a:buNone/>
+                      </a:pPr>
+                      <a:r>
+                        <a:rPr lang="de-DE"/>
+                        <a:t>Forward Euler</a:t>
+                      </a:r>
+                    </a:p>
+                  </a:txBody>
+                  <a:tcPr anchor="ctr">
+                    <a:lnL>
+                      <a:noFill/>
+                    </a:lnL>
+                    <a:lnR>
+                      <a:noFill/>
+                    </a:lnR>
+                    <a:lnT>
+                      <a:noFill/>
+                    </a:lnT>
+                    <a:lnB>
+                      <a:noFill/>
+                    </a:lnB>
+                    <a:noFill/>
+                  </a:tcPr>
+                </a:tc>
+                <a:tc>
+                  <a:txBody>
+                    <a:bodyPr/>
+                    <a:lstStyle/>
+                    <a:p>
+                      <a:pPr>
+                        <a:buNone/>
+                      </a:pPr>
+                      <a:r>
+                        <a:rPr lang="de-DE"/>
+                        <a:t>Low</a:t>
+                      </a:r>
+                    </a:p>
+                  </a:txBody>
+                  <a:tcPr anchor="ctr">
+                    <a:lnL>
+                      <a:noFill/>
+                    </a:lnL>
+                    <a:lnR>
+                      <a:noFill/>
+                    </a:lnR>
+                    <a:lnT>
+                      <a:noFill/>
+                    </a:lnT>
+                    <a:lnB>
+                      <a:noFill/>
+                    </a:lnB>
+                    <a:noFill/>
+                  </a:tcPr>
+                </a:tc>
+                <a:tc>
+                  <a:txBody>
+                    <a:bodyPr/>
+                    <a:lstStyle/>
+                    <a:p>
+                      <a:pPr>
+                        <a:buNone/>
+                      </a:pPr>
+                      <a:r>
+                        <a:rPr lang="de-DE"/>
+                        <a:t>Poor</a:t>
+                      </a:r>
+                    </a:p>
+                  </a:txBody>
+                  <a:tcPr anchor="ctr">
+                    <a:lnL>
+                      <a:noFill/>
+                    </a:lnL>
+                    <a:lnR>
+                      <a:noFill/>
+                    </a:lnR>
+                    <a:lnT>
+                      <a:noFill/>
+                    </a:lnT>
+                    <a:lnB>
+                      <a:noFill/>
+                    </a:lnB>
+                    <a:noFill/>
+                  </a:tcPr>
+                </a:tc>
+                <a:extLst>
+                  <a:ext uri="{0D108BD9-81ED-4DB2-BD59-A6C34878D82A}">
+                    <a16:rowId xmlns:a16="http://schemas.microsoft.com/office/drawing/2014/main" val="1601581316"/>
+                  </a:ext>
+                </a:extLst>
+              </a:tr>
+              <a:tr h="0">
+                <a:tc>
+                  <a:txBody>
+                    <a:bodyPr/>
+                    <a:lstStyle/>
+                    <a:p>
+                      <a:pPr>
+                        <a:buNone/>
+                      </a:pPr>
+                      <a:r>
+                        <a:rPr lang="de-DE"/>
+                        <a:t>Backward Euler</a:t>
+                      </a:r>
+                    </a:p>
+                  </a:txBody>
+                  <a:tcPr anchor="ctr">
+                    <a:lnL>
+                      <a:noFill/>
+                    </a:lnL>
+                    <a:lnR>
+                      <a:noFill/>
+                    </a:lnR>
+                    <a:lnT>
+                      <a:noFill/>
+                    </a:lnT>
+                    <a:lnB>
+                      <a:noFill/>
+                    </a:lnB>
+                    <a:noFill/>
+                  </a:tcPr>
+                </a:tc>
+                <a:tc>
+                  <a:txBody>
+                    <a:bodyPr/>
+                    <a:lstStyle/>
+                    <a:p>
+                      <a:pPr>
+                        <a:buNone/>
+                      </a:pPr>
+                      <a:r>
+                        <a:rPr lang="de-DE"/>
+                        <a:t>Medium</a:t>
+                      </a:r>
+                    </a:p>
+                  </a:txBody>
+                  <a:tcPr anchor="ctr">
+                    <a:lnL>
+                      <a:noFill/>
+                    </a:lnL>
+                    <a:lnR>
+                      <a:noFill/>
+                    </a:lnR>
+                    <a:lnT>
+                      <a:noFill/>
+                    </a:lnT>
+                    <a:lnB>
+                      <a:noFill/>
+                    </a:lnB>
+                    <a:noFill/>
+                  </a:tcPr>
+                </a:tc>
+                <a:tc>
+                  <a:txBody>
+                    <a:bodyPr/>
+                    <a:lstStyle/>
+                    <a:p>
+                      <a:pPr>
+                        <a:buNone/>
+                      </a:pPr>
+                      <a:r>
+                        <a:rPr lang="de-DE"/>
+                        <a:t>Good</a:t>
+                      </a:r>
+                    </a:p>
+                  </a:txBody>
+                  <a:tcPr anchor="ctr">
+                    <a:lnL>
+                      <a:noFill/>
+                    </a:lnL>
+                    <a:lnR>
+                      <a:noFill/>
+                    </a:lnR>
+                    <a:lnT>
+                      <a:noFill/>
+                    </a:lnT>
+                    <a:lnB>
+                      <a:noFill/>
+                    </a:lnB>
+                    <a:noFill/>
+                  </a:tcPr>
+                </a:tc>
+                <a:extLst>
+                  <a:ext uri="{0D108BD9-81ED-4DB2-BD59-A6C34878D82A}">
+                    <a16:rowId xmlns:a16="http://schemas.microsoft.com/office/drawing/2014/main" val="3798352914"/>
+                  </a:ext>
+                </a:extLst>
+              </a:tr>
+              <a:tr h="0">
+                <a:tc>
+                  <a:txBody>
+                    <a:bodyPr/>
+                    <a:lstStyle/>
+                    <a:p>
+                      <a:pPr>
+                        <a:buNone/>
+                      </a:pPr>
+                      <a:r>
+                        <a:rPr lang="de-DE"/>
+                        <a:t>Tustin</a:t>
+                      </a:r>
+                    </a:p>
+                  </a:txBody>
+                  <a:tcPr anchor="ctr">
+                    <a:lnL>
+                      <a:noFill/>
+                    </a:lnL>
+                    <a:lnR>
+                      <a:noFill/>
+                    </a:lnR>
+                    <a:lnT>
+                      <a:noFill/>
+                    </a:lnT>
+                    <a:lnB>
+                      <a:noFill/>
+                    </a:lnB>
+                    <a:noFill/>
+                  </a:tcPr>
+                </a:tc>
+                <a:tc>
+                  <a:txBody>
+                    <a:bodyPr/>
+                    <a:lstStyle/>
+                    <a:p>
+                      <a:pPr>
+                        <a:buNone/>
+                      </a:pPr>
+                      <a:r>
+                        <a:rPr lang="de-DE"/>
+                        <a:t>High</a:t>
+                      </a:r>
+                    </a:p>
+                  </a:txBody>
+                  <a:tcPr anchor="ctr">
+                    <a:lnL>
+                      <a:noFill/>
+                    </a:lnL>
+                    <a:lnR>
+                      <a:noFill/>
+                    </a:lnR>
+                    <a:lnT>
+                      <a:noFill/>
+                    </a:lnT>
+                    <a:lnB>
+                      <a:noFill/>
+                    </a:lnB>
+                    <a:noFill/>
+                  </a:tcPr>
+                </a:tc>
+                <a:tc>
+                  <a:txBody>
+                    <a:bodyPr/>
+                    <a:lstStyle/>
+                    <a:p>
+                      <a:pPr>
+                        <a:buNone/>
+                      </a:pPr>
+                      <a:r>
+                        <a:rPr lang="de-DE" dirty="0" err="1"/>
+                        <a:t>Good</a:t>
+                      </a:r>
+                      <a:endParaRPr lang="de-DE" dirty="0"/>
+                    </a:p>
+                  </a:txBody>
+                  <a:tcPr anchor="ctr">
+                    <a:lnL>
+                      <a:noFill/>
+                    </a:lnL>
+                    <a:lnR>
+                      <a:noFill/>
+                    </a:lnR>
+                    <a:lnT>
+                      <a:noFill/>
+                    </a:lnT>
+                    <a:lnB>
+                      <a:noFill/>
+                    </a:lnB>
+                    <a:noFill/>
+                  </a:tcPr>
+                </a:tc>
+                <a:extLst>
+                  <a:ext uri="{0D108BD9-81ED-4DB2-BD59-A6C34878D82A}">
+                    <a16:rowId xmlns:a16="http://schemas.microsoft.com/office/drawing/2014/main" val="425994814"/>
+                  </a:ext>
+                </a:extLst>
+              </a:tr>
+            </a:tbl>
+          </a:graphicData>
+        </a:graphic>
+      </p:graphicFrame>
+    </p:spTree>
+    <p:extLst>
+      <p:ext uri="{BB962C8B-B14F-4D97-AF65-F5344CB8AC3E}">
+        <p14:creationId xmlns:p14="http://schemas.microsoft.com/office/powerpoint/2010/main" val="1206638551"/>
+      </p:ext>
+    </p:extLst>
+  </p:cSld>
+  <p:clrMapOvr>
+    <a:masterClrMapping/>
+  </p:clrMapOvr>
+</p:sld>
+</file>
+
+<file path=ppt/slides/slide37.xml><?xml version="1.0" encoding="utf-8"?>
+<p:sld xmlns:a="http://schemas.openxmlformats.org/drawingml/2006/main" xmlns:r="http://schemas.openxmlformats.org/officeDocument/2006/relationships" xmlns:p="http://schemas.openxmlformats.org/presentationml/2006/main">
+  <p:cSld>
+    <p:spTree>
+      <p:nvGrpSpPr>
+        <p:cNvPr id="1" name=""/>
+        <p:cNvGrpSpPr/>
+        <p:nvPr/>
+      </p:nvGrpSpPr>
+      <p:grpSpPr>
+        <a:xfrm>
+          <a:off x="0" y="0"/>
+          <a:ext cx="0" cy="0"/>
+          <a:chOff x="0" y="0"/>
+          <a:chExt cx="0" cy="0"/>
+        </a:xfrm>
+      </p:grpSpPr>
+      <p:sp>
+        <p:nvSpPr>
+          <p:cNvPr id="2" name="Titel 1">
+            <a:extLst>
+              <a:ext uri="{FF2B5EF4-FFF2-40B4-BE49-F238E27FC236}">
+                <a16:creationId xmlns:a16="http://schemas.microsoft.com/office/drawing/2014/main" id="{1065F0A0-A42C-3D79-A55E-025579828B1A}"/>
+              </a:ext>
+            </a:extLst>
+          </p:cNvPr>
+          <p:cNvSpPr>
+            <a:spLocks noGrp="1"/>
+          </p:cNvSpPr>
+          <p:nvPr>
+            <p:ph type="title"/>
+          </p:nvPr>
+        </p:nvSpPr>
+        <p:spPr/>
+        <p:txBody>
+          <a:bodyPr/>
+          <a:lstStyle/>
+          <a:p>
+            <a:r>
+              <a:rPr lang="de-DE" dirty="0" err="1"/>
+              <a:t>Graphical</a:t>
+            </a:r>
+            <a:r>
+              <a:rPr lang="de-DE" dirty="0"/>
+              <a:t> </a:t>
+            </a:r>
+            <a:r>
+              <a:rPr lang="de-DE" dirty="0" err="1"/>
+              <a:t>Comparison</a:t>
+            </a:r>
+            <a:endParaRPr lang="de-DE" dirty="0"/>
+          </a:p>
+        </p:txBody>
+      </p:sp>
+      <p:sp>
+        <p:nvSpPr>
+          <p:cNvPr id="3" name="Inhaltsplatzhalter 2">
+            <a:extLst>
+              <a:ext uri="{FF2B5EF4-FFF2-40B4-BE49-F238E27FC236}">
+                <a16:creationId xmlns:a16="http://schemas.microsoft.com/office/drawing/2014/main" id="{190D9D23-BE92-4ADF-768F-04E580FE9EEA}"/>
+              </a:ext>
+            </a:extLst>
+          </p:cNvPr>
+          <p:cNvSpPr>
+            <a:spLocks noGrp="1"/>
+          </p:cNvSpPr>
+          <p:nvPr>
+            <p:ph idx="1"/>
+          </p:nvPr>
+        </p:nvSpPr>
+        <p:spPr/>
+        <p:txBody>
+          <a:bodyPr/>
+          <a:lstStyle/>
+          <a:p>
+            <a:pPr marL="0" indent="0">
+              <a:buNone/>
+            </a:pPr>
+            <a:r>
+              <a:rPr lang="de-DE" dirty="0"/>
+              <a:t>Plot:</a:t>
+            </a:r>
+          </a:p>
+          <a:p>
+            <a:r>
+              <a:rPr lang="de-DE" dirty="0" err="1"/>
+              <a:t>Frequency</a:t>
+            </a:r>
+            <a:r>
+              <a:rPr lang="de-DE" dirty="0"/>
+              <a:t> </a:t>
+            </a:r>
+            <a:r>
+              <a:rPr lang="de-DE" dirty="0" err="1"/>
+              <a:t>response</a:t>
+            </a:r>
+            <a:r>
+              <a:rPr lang="de-DE" dirty="0"/>
+              <a:t> </a:t>
+            </a:r>
+            <a:r>
+              <a:rPr lang="de-DE" dirty="0" err="1"/>
+              <a:t>of</a:t>
+            </a:r>
+            <a:r>
+              <a:rPr lang="de-DE" dirty="0"/>
+              <a:t> all </a:t>
+            </a:r>
+            <a:r>
+              <a:rPr lang="de-DE" dirty="0" err="1"/>
+              <a:t>methods</a:t>
+            </a:r>
+            <a:r>
+              <a:rPr lang="de-DE" dirty="0"/>
+              <a:t> </a:t>
+            </a:r>
+            <a:r>
+              <a:rPr lang="de-DE" dirty="0" err="1"/>
+              <a:t>vs</a:t>
+            </a:r>
+            <a:r>
+              <a:rPr lang="de-DE" dirty="0"/>
+              <a:t> </a:t>
+            </a:r>
+            <a:r>
+              <a:rPr lang="de-DE" dirty="0" err="1"/>
+              <a:t>continuous</a:t>
+            </a:r>
+            <a:r>
+              <a:rPr lang="de-DE" dirty="0"/>
+              <a:t> </a:t>
+            </a:r>
+            <a:r>
+              <a:rPr lang="de-DE" dirty="0" err="1"/>
+              <a:t>system</a:t>
+            </a:r>
+            <a:endParaRPr lang="de-DE" dirty="0"/>
+          </a:p>
+        </p:txBody>
+      </p:sp>
+      <p:sp>
+        <p:nvSpPr>
+          <p:cNvPr id="4" name="Foliennummernplatzhalter 3">
+            <a:extLst>
+              <a:ext uri="{FF2B5EF4-FFF2-40B4-BE49-F238E27FC236}">
+                <a16:creationId xmlns:a16="http://schemas.microsoft.com/office/drawing/2014/main" id="{638F5954-4206-7552-2B67-6728152699C0}"/>
+              </a:ext>
+            </a:extLst>
+          </p:cNvPr>
+          <p:cNvSpPr>
+            <a:spLocks noGrp="1"/>
+          </p:cNvSpPr>
+          <p:nvPr>
+            <p:ph type="sldNum" sz="quarter" idx="12"/>
+          </p:nvPr>
+        </p:nvSpPr>
+        <p:spPr/>
+        <p:txBody>
+          <a:bodyPr/>
+          <a:lstStyle/>
+          <a:p>
+            <a:fld id="{08C366F5-AFAD-49CB-854A-9D9E238FCA13}" type="slidenum">
+              <a:rPr lang="en-GB" smtClean="0"/>
+              <a:t>37</a:t>
+            </a:fld>
+            <a:endParaRPr lang="en-GB"/>
+          </a:p>
+        </p:txBody>
+      </p:sp>
+    </p:spTree>
+    <p:extLst>
+      <p:ext uri="{BB962C8B-B14F-4D97-AF65-F5344CB8AC3E}">
+        <p14:creationId xmlns:p14="http://schemas.microsoft.com/office/powerpoint/2010/main" val="3800920879"/>
+      </p:ext>
+    </p:extLst>
+  </p:cSld>
+  <p:clrMapOvr>
+    <a:masterClrMapping/>
+  </p:clrMapOvr>
+</p:sld>
+</file>
+
+<file path=ppt/slides/slide38.xml><?xml version="1.0" encoding="utf-8"?>
+<p:sld xmlns:a="http://schemas.openxmlformats.org/drawingml/2006/main" xmlns:r="http://schemas.openxmlformats.org/officeDocument/2006/relationships" xmlns:p="http://schemas.openxmlformats.org/presentationml/2006/main">
+  <p:cSld>
+    <p:spTree>
+      <p:nvGrpSpPr>
+        <p:cNvPr id="1" name=""/>
+        <p:cNvGrpSpPr/>
+        <p:nvPr/>
+      </p:nvGrpSpPr>
+      <p:grpSpPr>
+        <a:xfrm>
+          <a:off x="0" y="0"/>
+          <a:ext cx="0" cy="0"/>
+          <a:chOff x="0" y="0"/>
+          <a:chExt cx="0" cy="0"/>
+        </a:xfrm>
+      </p:grpSpPr>
+      <p:sp>
+        <p:nvSpPr>
+          <p:cNvPr id="2" name="Titel 1">
+            <a:extLst>
+              <a:ext uri="{FF2B5EF4-FFF2-40B4-BE49-F238E27FC236}">
+                <a16:creationId xmlns:a16="http://schemas.microsoft.com/office/drawing/2014/main" id="{127BFA6C-0A38-374F-945C-AC62249259F5}"/>
+              </a:ext>
+            </a:extLst>
+          </p:cNvPr>
+          <p:cNvSpPr>
+            <a:spLocks noGrp="1"/>
+          </p:cNvSpPr>
+          <p:nvPr>
+            <p:ph type="title"/>
+          </p:nvPr>
+        </p:nvSpPr>
+        <p:spPr/>
+        <p:txBody>
+          <a:bodyPr/>
+          <a:lstStyle/>
+          <a:p>
+            <a:r>
+              <a:rPr lang="de-DE" dirty="0"/>
+              <a:t>Implementation </a:t>
+            </a:r>
+            <a:r>
+              <a:rPr lang="de-DE" dirty="0" err="1"/>
+              <a:t>Issues</a:t>
+            </a:r>
+            <a:endParaRPr lang="de-DE" dirty="0"/>
+          </a:p>
+        </p:txBody>
+      </p:sp>
+      <p:sp>
+        <p:nvSpPr>
+          <p:cNvPr id="3" name="Inhaltsplatzhalter 2">
+            <a:extLst>
+              <a:ext uri="{FF2B5EF4-FFF2-40B4-BE49-F238E27FC236}">
+                <a16:creationId xmlns:a16="http://schemas.microsoft.com/office/drawing/2014/main" id="{A528764C-E616-37B1-6C5F-EC8409FD4500}"/>
+              </a:ext>
+            </a:extLst>
+          </p:cNvPr>
+          <p:cNvSpPr>
+            <a:spLocks noGrp="1"/>
+          </p:cNvSpPr>
+          <p:nvPr>
+            <p:ph idx="1"/>
+          </p:nvPr>
+        </p:nvSpPr>
+        <p:spPr/>
+        <p:txBody>
+          <a:bodyPr/>
+          <a:lstStyle/>
+          <a:p>
+            <a:r>
+              <a:rPr lang="de-DE" dirty="0" err="1"/>
+              <a:t>Quantization</a:t>
+            </a:r>
+            <a:endParaRPr lang="de-DE" dirty="0"/>
+          </a:p>
+          <a:p>
+            <a:r>
+              <a:rPr lang="de-DE" dirty="0" err="1"/>
+              <a:t>Computation</a:t>
+            </a:r>
+            <a:r>
+              <a:rPr lang="de-DE" dirty="0"/>
+              <a:t> </a:t>
+            </a:r>
+            <a:r>
+              <a:rPr lang="de-DE" dirty="0" err="1"/>
+              <a:t>delay</a:t>
+            </a:r>
+            <a:endParaRPr lang="de-DE" dirty="0"/>
+          </a:p>
+          <a:p>
+            <a:r>
+              <a:rPr lang="de-DE" dirty="0" err="1"/>
+              <a:t>Numerical</a:t>
+            </a:r>
+            <a:r>
+              <a:rPr lang="de-DE" dirty="0"/>
+              <a:t> </a:t>
+            </a:r>
+            <a:r>
+              <a:rPr lang="de-DE" dirty="0" err="1"/>
+              <a:t>precision</a:t>
+            </a:r>
+            <a:endParaRPr lang="de-DE" dirty="0"/>
+          </a:p>
+        </p:txBody>
+      </p:sp>
+      <p:sp>
+        <p:nvSpPr>
+          <p:cNvPr id="4" name="Foliennummernplatzhalter 3">
+            <a:extLst>
+              <a:ext uri="{FF2B5EF4-FFF2-40B4-BE49-F238E27FC236}">
+                <a16:creationId xmlns:a16="http://schemas.microsoft.com/office/drawing/2014/main" id="{EF66F0F8-6AC5-36AB-811E-3A7AD0150C3A}"/>
+              </a:ext>
+            </a:extLst>
+          </p:cNvPr>
+          <p:cNvSpPr>
+            <a:spLocks noGrp="1"/>
+          </p:cNvSpPr>
+          <p:nvPr>
+            <p:ph type="sldNum" sz="quarter" idx="12"/>
+          </p:nvPr>
+        </p:nvSpPr>
+        <p:spPr/>
+        <p:txBody>
+          <a:bodyPr/>
+          <a:lstStyle/>
+          <a:p>
+            <a:fld id="{08C366F5-AFAD-49CB-854A-9D9E238FCA13}" type="slidenum">
+              <a:rPr lang="en-GB" smtClean="0"/>
+              <a:t>38</a:t>
+            </a:fld>
+            <a:endParaRPr lang="en-GB"/>
+          </a:p>
+        </p:txBody>
+      </p:sp>
+    </p:spTree>
+    <p:extLst>
+      <p:ext uri="{BB962C8B-B14F-4D97-AF65-F5344CB8AC3E}">
+        <p14:creationId xmlns:p14="http://schemas.microsoft.com/office/powerpoint/2010/main" val="1177416121"/>
+      </p:ext>
+    </p:extLst>
+  </p:cSld>
+  <p:clrMapOvr>
+    <a:masterClrMapping/>
+  </p:clrMapOvr>
+</p:sld>
+</file>
+
+<file path=ppt/slides/slide39.xml><?xml version="1.0" encoding="utf-8"?>
+<p:sld xmlns:a="http://schemas.openxmlformats.org/drawingml/2006/main" xmlns:r="http://schemas.openxmlformats.org/officeDocument/2006/relationships" xmlns:p="http://schemas.openxmlformats.org/presentationml/2006/main">
+  <p:cSld>
+    <p:spTree>
+      <p:nvGrpSpPr>
+        <p:cNvPr id="1" name=""/>
+        <p:cNvGrpSpPr/>
+        <p:nvPr/>
+      </p:nvGrpSpPr>
+      <p:grpSpPr>
+        <a:xfrm>
+          <a:off x="0" y="0"/>
+          <a:ext cx="0" cy="0"/>
+          <a:chOff x="0" y="0"/>
+          <a:chExt cx="0" cy="0"/>
+        </a:xfrm>
+      </p:grpSpPr>
+      <p:sp>
+        <p:nvSpPr>
+          <p:cNvPr id="2" name="Titel 1">
+            <a:extLst>
+              <a:ext uri="{FF2B5EF4-FFF2-40B4-BE49-F238E27FC236}">
+                <a16:creationId xmlns:a16="http://schemas.microsoft.com/office/drawing/2014/main" id="{0FE57CB0-68EE-10C7-5453-73406DEF5701}"/>
+              </a:ext>
+            </a:extLst>
+          </p:cNvPr>
+          <p:cNvSpPr>
+            <a:spLocks noGrp="1"/>
+          </p:cNvSpPr>
+          <p:nvPr>
+            <p:ph type="title"/>
+          </p:nvPr>
+        </p:nvSpPr>
+        <p:spPr/>
+        <p:txBody>
+          <a:bodyPr/>
+          <a:lstStyle/>
+          <a:p>
+            <a:endParaRPr lang="de-DE"/>
+          </a:p>
+        </p:txBody>
+      </p:sp>
+      <p:sp>
+        <p:nvSpPr>
+          <p:cNvPr id="3" name="Inhaltsplatzhalter 2">
+            <a:extLst>
+              <a:ext uri="{FF2B5EF4-FFF2-40B4-BE49-F238E27FC236}">
+                <a16:creationId xmlns:a16="http://schemas.microsoft.com/office/drawing/2014/main" id="{D2ABE800-372C-8D4C-9A1B-E3DEA80268FF}"/>
+              </a:ext>
+            </a:extLst>
+          </p:cNvPr>
+          <p:cNvSpPr>
+            <a:spLocks noGrp="1"/>
+          </p:cNvSpPr>
+          <p:nvPr>
+            <p:ph idx="1"/>
+          </p:nvPr>
+        </p:nvSpPr>
+        <p:spPr/>
+        <p:txBody>
+          <a:bodyPr/>
+          <a:lstStyle/>
+          <a:p>
+            <a:endParaRPr lang="de-DE"/>
+          </a:p>
+        </p:txBody>
+      </p:sp>
+      <p:sp>
+        <p:nvSpPr>
+          <p:cNvPr id="4" name="Foliennummernplatzhalter 3">
+            <a:extLst>
+              <a:ext uri="{FF2B5EF4-FFF2-40B4-BE49-F238E27FC236}">
+                <a16:creationId xmlns:a16="http://schemas.microsoft.com/office/drawing/2014/main" id="{AC57B4AE-55A5-192B-142D-941AA068807B}"/>
+              </a:ext>
+            </a:extLst>
+          </p:cNvPr>
+          <p:cNvSpPr>
+            <a:spLocks noGrp="1"/>
+          </p:cNvSpPr>
+          <p:nvPr>
+            <p:ph type="sldNum" sz="quarter" idx="12"/>
+          </p:nvPr>
+        </p:nvSpPr>
+        <p:spPr/>
+        <p:txBody>
+          <a:bodyPr/>
+          <a:lstStyle/>
+          <a:p>
+            <a:fld id="{08C366F5-AFAD-49CB-854A-9D9E238FCA13}" type="slidenum">
+              <a:rPr lang="en-GB" smtClean="0"/>
+              <a:t>39</a:t>
+            </a:fld>
+            <a:endParaRPr lang="en-GB"/>
+          </a:p>
+        </p:txBody>
+      </p:sp>
+    </p:spTree>
+    <p:extLst>
+      <p:ext uri="{BB962C8B-B14F-4D97-AF65-F5344CB8AC3E}">
+        <p14:creationId xmlns:p14="http://schemas.microsoft.com/office/powerpoint/2010/main" val="4081185293"/>
+      </p:ext>
+    </p:extLst>
+  </p:cSld>
+  <p:clrMapOvr>
+    <a:masterClrMapping/>
+  </p:clrMapOvr>
+</p:sld>
+</file>
+
 <file path=ppt/slides/slide4.xml><?xml version="1.0" encoding="utf-8"?>
 <p:sld xmlns:a="http://schemas.openxmlformats.org/drawingml/2006/main" xmlns:r="http://schemas.openxmlformats.org/officeDocument/2006/relationships" xmlns:p="http://schemas.openxmlformats.org/presentationml/2006/main">
   <p:cSld>
@@ -15487,6 +18307,1156 @@
     <p:extLst>
       <p:ext uri="{BB962C8B-B14F-4D97-AF65-F5344CB8AC3E}">
         <p14:creationId xmlns:p14="http://schemas.microsoft.com/office/powerpoint/2010/main" val="2270854930"/>
+      </p:ext>
+    </p:extLst>
+  </p:cSld>
+  <p:clrMapOvr>
+    <a:masterClrMapping/>
+  </p:clrMapOvr>
+</p:sld>
+</file>
+
+<file path=ppt/slides/slide40.xml><?xml version="1.0" encoding="utf-8"?>
+<p:sld xmlns:a="http://schemas.openxmlformats.org/drawingml/2006/main" xmlns:r="http://schemas.openxmlformats.org/officeDocument/2006/relationships" xmlns:p="http://schemas.openxmlformats.org/presentationml/2006/main">
+  <p:cSld>
+    <p:spTree>
+      <p:nvGrpSpPr>
+        <p:cNvPr id="1" name=""/>
+        <p:cNvGrpSpPr/>
+        <p:nvPr/>
+      </p:nvGrpSpPr>
+      <p:grpSpPr>
+        <a:xfrm>
+          <a:off x="0" y="0"/>
+          <a:ext cx="0" cy="0"/>
+          <a:chOff x="0" y="0"/>
+          <a:chExt cx="0" cy="0"/>
+        </a:xfrm>
+      </p:grpSpPr>
+      <p:sp>
+        <p:nvSpPr>
+          <p:cNvPr id="2" name="Titel 1">
+            <a:extLst>
+              <a:ext uri="{FF2B5EF4-FFF2-40B4-BE49-F238E27FC236}">
+                <a16:creationId xmlns:a16="http://schemas.microsoft.com/office/drawing/2014/main" id="{0928A614-DFBF-9C8B-344A-5180371F0262}"/>
+              </a:ext>
+            </a:extLst>
+          </p:cNvPr>
+          <p:cNvSpPr>
+            <a:spLocks noGrp="1"/>
+          </p:cNvSpPr>
+          <p:nvPr>
+            <p:ph type="title"/>
+          </p:nvPr>
+        </p:nvSpPr>
+        <p:spPr/>
+        <p:txBody>
+          <a:bodyPr/>
+          <a:lstStyle/>
+          <a:p>
+            <a:r>
+              <a:rPr lang="de-DE" dirty="0" err="1"/>
+              <a:t>Discrete</a:t>
+            </a:r>
+            <a:r>
+              <a:rPr lang="de-DE" dirty="0"/>
+              <a:t>-Time PID Tuning</a:t>
+            </a:r>
+          </a:p>
+        </p:txBody>
+      </p:sp>
+      <p:sp>
+        <p:nvSpPr>
+          <p:cNvPr id="3" name="Inhaltsplatzhalter 2">
+            <a:extLst>
+              <a:ext uri="{FF2B5EF4-FFF2-40B4-BE49-F238E27FC236}">
+                <a16:creationId xmlns:a16="http://schemas.microsoft.com/office/drawing/2014/main" id="{8F5456DF-6701-1B36-6F40-82DE65498C00}"/>
+              </a:ext>
+            </a:extLst>
+          </p:cNvPr>
+          <p:cNvSpPr>
+            <a:spLocks noGrp="1"/>
+          </p:cNvSpPr>
+          <p:nvPr>
+            <p:ph idx="1"/>
+          </p:nvPr>
+        </p:nvSpPr>
+        <p:spPr/>
+        <p:txBody>
+          <a:bodyPr/>
+          <a:lstStyle/>
+          <a:p>
+            <a:r>
+              <a:rPr lang="de-DE" dirty="0"/>
+              <a:t>PID </a:t>
+            </a:r>
+            <a:r>
+              <a:rPr lang="de-DE" dirty="0" err="1"/>
+              <a:t>controller</a:t>
+            </a:r>
+            <a:r>
+              <a:rPr lang="de-DE" dirty="0"/>
+              <a:t> (</a:t>
+            </a:r>
+            <a:r>
+              <a:rPr lang="de-DE" dirty="0" err="1"/>
+              <a:t>continuous</a:t>
+            </a:r>
+            <a:r>
+              <a:rPr lang="de-DE" dirty="0"/>
+              <a:t>-time):</a:t>
+            </a:r>
+          </a:p>
+          <a:p>
+            <a:r>
+              <a:rPr lang="de-DE" dirty="0" err="1"/>
+              <a:t>u</a:t>
+            </a:r>
+            <a:r>
+              <a:rPr lang="de-DE" dirty="0"/>
+              <a:t>(t) = </a:t>
+            </a:r>
+            <a:r>
+              <a:rPr lang="de-DE" dirty="0" err="1"/>
+              <a:t>K_p</a:t>
+            </a:r>
+            <a:r>
+              <a:rPr lang="de-DE" dirty="0"/>
+              <a:t> </a:t>
+            </a:r>
+            <a:r>
+              <a:rPr lang="de-DE" dirty="0" err="1"/>
+              <a:t>e</a:t>
+            </a:r>
+            <a:r>
+              <a:rPr lang="de-DE" dirty="0"/>
+              <a:t>(t) + </a:t>
+            </a:r>
+            <a:r>
+              <a:rPr lang="de-DE" dirty="0" err="1"/>
+              <a:t>K_i</a:t>
+            </a:r>
+            <a:r>
+              <a:rPr lang="de-DE" dirty="0"/>
+              <a:t> \</a:t>
+            </a:r>
+            <a:r>
+              <a:rPr lang="de-DE" dirty="0" err="1"/>
+              <a:t>int</a:t>
+            </a:r>
+            <a:r>
+              <a:rPr lang="de-DE" dirty="0"/>
+              <a:t> </a:t>
+            </a:r>
+            <a:r>
+              <a:rPr lang="de-DE" dirty="0" err="1"/>
+              <a:t>e</a:t>
+            </a:r>
+            <a:r>
+              <a:rPr lang="de-DE" dirty="0"/>
+              <a:t>(t)\,</a:t>
+            </a:r>
+            <a:r>
+              <a:rPr lang="de-DE" dirty="0" err="1"/>
+              <a:t>dt</a:t>
+            </a:r>
+            <a:r>
+              <a:rPr lang="de-DE" dirty="0"/>
+              <a:t> + </a:t>
+            </a:r>
+            <a:r>
+              <a:rPr lang="de-DE" dirty="0" err="1"/>
+              <a:t>K_d</a:t>
+            </a:r>
+            <a:r>
+              <a:rPr lang="de-DE" dirty="0"/>
+              <a:t> \</a:t>
+            </a:r>
+            <a:r>
+              <a:rPr lang="de-DE" dirty="0" err="1"/>
+              <a:t>frac</a:t>
+            </a:r>
+            <a:r>
+              <a:rPr lang="de-DE" dirty="0"/>
+              <a:t>{de(t)}{</a:t>
+            </a:r>
+            <a:r>
+              <a:rPr lang="de-DE" dirty="0" err="1"/>
+              <a:t>dt</a:t>
+            </a:r>
+            <a:r>
+              <a:rPr lang="de-DE" dirty="0"/>
+              <a:t>}</a:t>
+            </a:r>
+          </a:p>
+          <a:p>
+            <a:br>
+              <a:rPr lang="de-DE" dirty="0"/>
+            </a:br>
+            <a:endParaRPr lang="de-DE" dirty="0"/>
+          </a:p>
+          <a:p>
+            <a:r>
+              <a:rPr lang="de-DE" dirty="0"/>
+              <a:t>Goal:</a:t>
+            </a:r>
+          </a:p>
+          <a:p>
+            <a:r>
+              <a:rPr lang="de-DE" dirty="0"/>
+              <a:t>→ Implement </a:t>
+            </a:r>
+            <a:r>
+              <a:rPr lang="de-DE" dirty="0" err="1"/>
+              <a:t>this</a:t>
+            </a:r>
+            <a:r>
+              <a:rPr lang="de-DE" dirty="0"/>
+              <a:t> in </a:t>
+            </a:r>
+            <a:r>
+              <a:rPr lang="de-DE" dirty="0" err="1"/>
+              <a:t>discrete</a:t>
+            </a:r>
+            <a:r>
+              <a:rPr lang="de-DE" dirty="0"/>
+              <a:t>-time</a:t>
+            </a:r>
+          </a:p>
+        </p:txBody>
+      </p:sp>
+      <p:sp>
+        <p:nvSpPr>
+          <p:cNvPr id="4" name="Foliennummernplatzhalter 3">
+            <a:extLst>
+              <a:ext uri="{FF2B5EF4-FFF2-40B4-BE49-F238E27FC236}">
+                <a16:creationId xmlns:a16="http://schemas.microsoft.com/office/drawing/2014/main" id="{34A1D167-F509-C713-3874-CD31804652C1}"/>
+              </a:ext>
+            </a:extLst>
+          </p:cNvPr>
+          <p:cNvSpPr>
+            <a:spLocks noGrp="1"/>
+          </p:cNvSpPr>
+          <p:nvPr>
+            <p:ph type="sldNum" sz="quarter" idx="12"/>
+          </p:nvPr>
+        </p:nvSpPr>
+        <p:spPr/>
+        <p:txBody>
+          <a:bodyPr/>
+          <a:lstStyle/>
+          <a:p>
+            <a:fld id="{08C366F5-AFAD-49CB-854A-9D9E238FCA13}" type="slidenum">
+              <a:rPr lang="en-GB" smtClean="0"/>
+              <a:t>40</a:t>
+            </a:fld>
+            <a:endParaRPr lang="en-GB"/>
+          </a:p>
+        </p:txBody>
+      </p:sp>
+    </p:spTree>
+    <p:extLst>
+      <p:ext uri="{BB962C8B-B14F-4D97-AF65-F5344CB8AC3E}">
+        <p14:creationId xmlns:p14="http://schemas.microsoft.com/office/powerpoint/2010/main" val="266018624"/>
+      </p:ext>
+    </p:extLst>
+  </p:cSld>
+  <p:clrMapOvr>
+    <a:masterClrMapping/>
+  </p:clrMapOvr>
+</p:sld>
+</file>
+
+<file path=ppt/slides/slide41.xml><?xml version="1.0" encoding="utf-8"?>
+<p:sld xmlns:a="http://schemas.openxmlformats.org/drawingml/2006/main" xmlns:r="http://schemas.openxmlformats.org/officeDocument/2006/relationships" xmlns:p="http://schemas.openxmlformats.org/presentationml/2006/main">
+  <p:cSld>
+    <p:spTree>
+      <p:nvGrpSpPr>
+        <p:cNvPr id="1" name=""/>
+        <p:cNvGrpSpPr/>
+        <p:nvPr/>
+      </p:nvGrpSpPr>
+      <p:grpSpPr>
+        <a:xfrm>
+          <a:off x="0" y="0"/>
+          <a:ext cx="0" cy="0"/>
+          <a:chOff x="0" y="0"/>
+          <a:chExt cx="0" cy="0"/>
+        </a:xfrm>
+      </p:grpSpPr>
+      <p:sp>
+        <p:nvSpPr>
+          <p:cNvPr id="2" name="Titel 1">
+            <a:extLst>
+              <a:ext uri="{FF2B5EF4-FFF2-40B4-BE49-F238E27FC236}">
+                <a16:creationId xmlns:a16="http://schemas.microsoft.com/office/drawing/2014/main" id="{DC97D1B7-F407-EF19-8DA6-F79E26E07B77}"/>
+              </a:ext>
+            </a:extLst>
+          </p:cNvPr>
+          <p:cNvSpPr>
+            <a:spLocks noGrp="1"/>
+          </p:cNvSpPr>
+          <p:nvPr>
+            <p:ph type="title"/>
+          </p:nvPr>
+        </p:nvSpPr>
+        <p:spPr/>
+        <p:txBody>
+          <a:bodyPr/>
+          <a:lstStyle/>
+          <a:p>
+            <a:r>
+              <a:rPr lang="de-DE" dirty="0" err="1"/>
+              <a:t>Why</a:t>
+            </a:r>
+            <a:r>
+              <a:rPr lang="de-DE" dirty="0"/>
+              <a:t> </a:t>
+            </a:r>
+            <a:r>
+              <a:rPr lang="de-DE" dirty="0" err="1"/>
+              <a:t>Discrete</a:t>
+            </a:r>
+            <a:r>
+              <a:rPr lang="de-DE" dirty="0"/>
+              <a:t> PID </a:t>
+            </a:r>
+            <a:r>
+              <a:rPr lang="de-DE" dirty="0" err="1"/>
+              <a:t>is</a:t>
+            </a:r>
+            <a:r>
+              <a:rPr lang="de-DE" dirty="0"/>
+              <a:t> Different</a:t>
+            </a:r>
+          </a:p>
+        </p:txBody>
+      </p:sp>
+      <p:sp>
+        <p:nvSpPr>
+          <p:cNvPr id="3" name="Inhaltsplatzhalter 2">
+            <a:extLst>
+              <a:ext uri="{FF2B5EF4-FFF2-40B4-BE49-F238E27FC236}">
+                <a16:creationId xmlns:a16="http://schemas.microsoft.com/office/drawing/2014/main" id="{752C2A3D-7981-8C67-3B45-297C73508168}"/>
+              </a:ext>
+            </a:extLst>
+          </p:cNvPr>
+          <p:cNvSpPr>
+            <a:spLocks noGrp="1"/>
+          </p:cNvSpPr>
+          <p:nvPr>
+            <p:ph idx="1"/>
+          </p:nvPr>
+        </p:nvSpPr>
+        <p:spPr/>
+        <p:txBody>
+          <a:bodyPr/>
+          <a:lstStyle/>
+          <a:p>
+            <a:r>
+              <a:rPr lang="de-DE" dirty="0"/>
+              <a:t>Key </a:t>
+            </a:r>
+            <a:r>
+              <a:rPr lang="de-DE" dirty="0" err="1"/>
+              <a:t>differences</a:t>
+            </a:r>
+            <a:r>
+              <a:rPr lang="de-DE" dirty="0"/>
+              <a:t> </a:t>
+            </a:r>
+            <a:r>
+              <a:rPr lang="de-DE" dirty="0" err="1"/>
+              <a:t>from</a:t>
+            </a:r>
+            <a:r>
+              <a:rPr lang="de-DE" dirty="0"/>
+              <a:t> </a:t>
+            </a:r>
+            <a:r>
+              <a:rPr lang="de-DE" dirty="0" err="1"/>
+              <a:t>continuous</a:t>
+            </a:r>
+            <a:r>
+              <a:rPr lang="de-DE" dirty="0"/>
+              <a:t> PID:</a:t>
+            </a:r>
+          </a:p>
+          <a:p>
+            <a:r>
+              <a:rPr lang="de-DE" dirty="0"/>
+              <a:t>Signals </a:t>
+            </a:r>
+            <a:r>
+              <a:rPr lang="de-DE" dirty="0" err="1"/>
+              <a:t>are</a:t>
+            </a:r>
+            <a:r>
+              <a:rPr lang="de-DE" dirty="0"/>
+              <a:t> </a:t>
+            </a:r>
+            <a:r>
+              <a:rPr lang="de-DE" dirty="0" err="1"/>
+              <a:t>sampled</a:t>
+            </a:r>
+            <a:r>
+              <a:rPr lang="de-DE" dirty="0"/>
+              <a:t>:</a:t>
+            </a:r>
+          </a:p>
+          <a:p>
+            <a:r>
+              <a:rPr lang="de-DE" dirty="0" err="1"/>
+              <a:t>e</a:t>
+            </a:r>
+            <a:r>
+              <a:rPr lang="de-DE" dirty="0"/>
+              <a:t>[</a:t>
+            </a:r>
+            <a:r>
+              <a:rPr lang="de-DE" dirty="0" err="1"/>
+              <a:t>k</a:t>
+            </a:r>
+            <a:r>
+              <a:rPr lang="de-DE" dirty="0"/>
+              <a:t>] = </a:t>
+            </a:r>
+            <a:r>
+              <a:rPr lang="de-DE" dirty="0" err="1"/>
+              <a:t>e</a:t>
+            </a:r>
+            <a:r>
+              <a:rPr lang="de-DE" dirty="0"/>
+              <a:t>(</a:t>
+            </a:r>
+            <a:r>
+              <a:rPr lang="de-DE" dirty="0" err="1"/>
+              <a:t>kT</a:t>
+            </a:r>
+            <a:r>
+              <a:rPr lang="de-DE" dirty="0"/>
+              <a:t>)</a:t>
+            </a:r>
+          </a:p>
+          <a:p>
+            <a:r>
+              <a:rPr lang="de-DE" dirty="0"/>
+              <a:t>Integration </a:t>
+            </a:r>
+            <a:r>
+              <a:rPr lang="de-DE" dirty="0" err="1"/>
+              <a:t>becomes</a:t>
+            </a:r>
+            <a:r>
+              <a:rPr lang="de-DE" dirty="0"/>
+              <a:t> </a:t>
+            </a:r>
+            <a:r>
+              <a:rPr lang="de-DE" dirty="0" err="1"/>
+              <a:t>summation</a:t>
+            </a:r>
+            <a:endParaRPr lang="de-DE" dirty="0"/>
+          </a:p>
+          <a:p>
+            <a:r>
+              <a:rPr lang="de-DE" dirty="0"/>
+              <a:t>Derivative </a:t>
+            </a:r>
+            <a:r>
+              <a:rPr lang="de-DE" dirty="0" err="1"/>
+              <a:t>becomes</a:t>
+            </a:r>
+            <a:r>
+              <a:rPr lang="de-DE" dirty="0"/>
+              <a:t> </a:t>
+            </a:r>
+            <a:r>
+              <a:rPr lang="de-DE" dirty="0" err="1"/>
+              <a:t>difference</a:t>
+            </a:r>
+            <a:endParaRPr lang="de-DE" dirty="0"/>
+          </a:p>
+          <a:p>
+            <a:r>
+              <a:rPr lang="de-DE" dirty="0" err="1"/>
+              <a:t>Numerical</a:t>
+            </a:r>
+            <a:r>
+              <a:rPr lang="de-DE" dirty="0"/>
+              <a:t> </a:t>
+            </a:r>
+            <a:r>
+              <a:rPr lang="de-DE" dirty="0" err="1"/>
+              <a:t>approximation</a:t>
+            </a:r>
+            <a:r>
+              <a:rPr lang="de-DE" dirty="0"/>
+              <a:t> </a:t>
+            </a:r>
+            <a:r>
+              <a:rPr lang="de-DE" dirty="0" err="1"/>
+              <a:t>required</a:t>
+            </a:r>
+            <a:endParaRPr lang="de-DE" dirty="0"/>
+          </a:p>
+        </p:txBody>
+      </p:sp>
+      <p:sp>
+        <p:nvSpPr>
+          <p:cNvPr id="4" name="Foliennummernplatzhalter 3">
+            <a:extLst>
+              <a:ext uri="{FF2B5EF4-FFF2-40B4-BE49-F238E27FC236}">
+                <a16:creationId xmlns:a16="http://schemas.microsoft.com/office/drawing/2014/main" id="{A8D74D38-3849-86C7-1380-A543C57ADEC6}"/>
+              </a:ext>
+            </a:extLst>
+          </p:cNvPr>
+          <p:cNvSpPr>
+            <a:spLocks noGrp="1"/>
+          </p:cNvSpPr>
+          <p:nvPr>
+            <p:ph type="sldNum" sz="quarter" idx="12"/>
+          </p:nvPr>
+        </p:nvSpPr>
+        <p:spPr/>
+        <p:txBody>
+          <a:bodyPr/>
+          <a:lstStyle/>
+          <a:p>
+            <a:fld id="{08C366F5-AFAD-49CB-854A-9D9E238FCA13}" type="slidenum">
+              <a:rPr lang="en-GB" smtClean="0"/>
+              <a:t>41</a:t>
+            </a:fld>
+            <a:endParaRPr lang="en-GB"/>
+          </a:p>
+        </p:txBody>
+      </p:sp>
+    </p:spTree>
+    <p:extLst>
+      <p:ext uri="{BB962C8B-B14F-4D97-AF65-F5344CB8AC3E}">
+        <p14:creationId xmlns:p14="http://schemas.microsoft.com/office/powerpoint/2010/main" val="2281482200"/>
+      </p:ext>
+    </p:extLst>
+  </p:cSld>
+  <p:clrMapOvr>
+    <a:masterClrMapping/>
+  </p:clrMapOvr>
+</p:sld>
+</file>
+
+<file path=ppt/slides/slide42.xml><?xml version="1.0" encoding="utf-8"?>
+<p:sld xmlns:a="http://schemas.openxmlformats.org/drawingml/2006/main" xmlns:r="http://schemas.openxmlformats.org/officeDocument/2006/relationships" xmlns:p="http://schemas.openxmlformats.org/presentationml/2006/main">
+  <p:cSld>
+    <p:spTree>
+      <p:nvGrpSpPr>
+        <p:cNvPr id="1" name=""/>
+        <p:cNvGrpSpPr/>
+        <p:nvPr/>
+      </p:nvGrpSpPr>
+      <p:grpSpPr>
+        <a:xfrm>
+          <a:off x="0" y="0"/>
+          <a:ext cx="0" cy="0"/>
+          <a:chOff x="0" y="0"/>
+          <a:chExt cx="0" cy="0"/>
+        </a:xfrm>
+      </p:grpSpPr>
+      <p:sp>
+        <p:nvSpPr>
+          <p:cNvPr id="2" name="Titel 1">
+            <a:extLst>
+              <a:ext uri="{FF2B5EF4-FFF2-40B4-BE49-F238E27FC236}">
+                <a16:creationId xmlns:a16="http://schemas.microsoft.com/office/drawing/2014/main" id="{2D3EA822-1872-313C-1FDE-1AF5CF99851E}"/>
+              </a:ext>
+            </a:extLst>
+          </p:cNvPr>
+          <p:cNvSpPr>
+            <a:spLocks noGrp="1"/>
+          </p:cNvSpPr>
+          <p:nvPr>
+            <p:ph type="title"/>
+          </p:nvPr>
+        </p:nvSpPr>
+        <p:spPr/>
+        <p:txBody>
+          <a:bodyPr/>
+          <a:lstStyle/>
+          <a:p>
+            <a:r>
+              <a:rPr lang="de-DE" dirty="0" err="1"/>
+              <a:t>Discrete</a:t>
+            </a:r>
+            <a:r>
+              <a:rPr lang="de-DE" dirty="0"/>
+              <a:t>-Time PID Goal</a:t>
+            </a:r>
+          </a:p>
+        </p:txBody>
+      </p:sp>
+      <p:sp>
+        <p:nvSpPr>
+          <p:cNvPr id="3" name="Inhaltsplatzhalter 2">
+            <a:extLst>
+              <a:ext uri="{FF2B5EF4-FFF2-40B4-BE49-F238E27FC236}">
+                <a16:creationId xmlns:a16="http://schemas.microsoft.com/office/drawing/2014/main" id="{E4EE34C3-6427-614D-303E-E101FEFEAB5B}"/>
+              </a:ext>
+            </a:extLst>
+          </p:cNvPr>
+          <p:cNvSpPr>
+            <a:spLocks noGrp="1"/>
+          </p:cNvSpPr>
+          <p:nvPr>
+            <p:ph idx="1"/>
+          </p:nvPr>
+        </p:nvSpPr>
+        <p:spPr/>
+        <p:txBody>
+          <a:bodyPr/>
+          <a:lstStyle/>
+          <a:p>
+            <a:r>
+              <a:rPr lang="de-DE" dirty="0" err="1"/>
+              <a:t>We</a:t>
+            </a:r>
+            <a:r>
+              <a:rPr lang="de-DE" dirty="0"/>
+              <a:t> </a:t>
+            </a:r>
+            <a:r>
+              <a:rPr lang="de-DE" dirty="0" err="1"/>
+              <a:t>want</a:t>
+            </a:r>
+            <a:r>
+              <a:rPr lang="de-DE" dirty="0"/>
+              <a:t>:</a:t>
+            </a:r>
+          </a:p>
+          <a:p>
+            <a:r>
+              <a:rPr lang="de-DE" dirty="0" err="1"/>
+              <a:t>u</a:t>
+            </a:r>
+            <a:r>
+              <a:rPr lang="de-DE" dirty="0"/>
+              <a:t>[</a:t>
+            </a:r>
+            <a:r>
+              <a:rPr lang="de-DE" dirty="0" err="1"/>
+              <a:t>k</a:t>
+            </a:r>
+            <a:r>
+              <a:rPr lang="de-DE" dirty="0"/>
+              <a:t>] = \</a:t>
+            </a:r>
+            <a:r>
+              <a:rPr lang="de-DE" dirty="0" err="1"/>
+              <a:t>text</a:t>
+            </a:r>
+            <a:r>
+              <a:rPr lang="de-DE" dirty="0"/>
+              <a:t>{</a:t>
+            </a:r>
+            <a:r>
+              <a:rPr lang="de-DE" dirty="0" err="1"/>
+              <a:t>function</a:t>
+            </a:r>
+            <a:r>
+              <a:rPr lang="de-DE" dirty="0"/>
+              <a:t> </a:t>
+            </a:r>
+            <a:r>
+              <a:rPr lang="de-DE" dirty="0" err="1"/>
+              <a:t>of</a:t>
+            </a:r>
+            <a:r>
+              <a:rPr lang="de-DE" dirty="0"/>
+              <a:t> } </a:t>
+            </a:r>
+            <a:r>
+              <a:rPr lang="de-DE" dirty="0" err="1"/>
+              <a:t>e</a:t>
+            </a:r>
+            <a:r>
+              <a:rPr lang="de-DE" dirty="0"/>
+              <a:t>[</a:t>
+            </a:r>
+            <a:r>
+              <a:rPr lang="de-DE" dirty="0" err="1"/>
+              <a:t>k</a:t>
+            </a:r>
+            <a:r>
+              <a:rPr lang="de-DE" dirty="0"/>
+              <a:t>], </a:t>
+            </a:r>
+            <a:r>
+              <a:rPr lang="de-DE" dirty="0" err="1"/>
+              <a:t>e</a:t>
+            </a:r>
+            <a:r>
+              <a:rPr lang="de-DE" dirty="0"/>
+              <a:t>[k-1], </a:t>
+            </a:r>
+            <a:r>
+              <a:rPr lang="de-DE" dirty="0" err="1"/>
+              <a:t>e</a:t>
+            </a:r>
+            <a:r>
+              <a:rPr lang="de-DE" dirty="0"/>
+              <a:t>[k-2], \</a:t>
+            </a:r>
+            <a:r>
+              <a:rPr lang="de-DE" dirty="0" err="1"/>
+              <a:t>dots</a:t>
+            </a:r>
+            <a:endParaRPr lang="de-DE" dirty="0"/>
+          </a:p>
+          <a:p>
+            <a:br>
+              <a:rPr lang="de-DE" dirty="0"/>
+            </a:br>
+            <a:endParaRPr lang="de-DE" dirty="0"/>
+          </a:p>
+          <a:p>
+            <a:r>
+              <a:rPr lang="de-DE" dirty="0" err="1"/>
+              <a:t>Two</a:t>
+            </a:r>
+            <a:r>
+              <a:rPr lang="de-DE" dirty="0"/>
+              <a:t> </a:t>
+            </a:r>
+            <a:r>
+              <a:rPr lang="de-DE" dirty="0" err="1"/>
+              <a:t>main</a:t>
+            </a:r>
+            <a:r>
+              <a:rPr lang="de-DE" dirty="0"/>
+              <a:t> </a:t>
+            </a:r>
+            <a:r>
+              <a:rPr lang="de-DE" dirty="0" err="1"/>
+              <a:t>forms</a:t>
+            </a:r>
+            <a:r>
+              <a:rPr lang="de-DE" dirty="0"/>
+              <a:t>:</a:t>
+            </a:r>
+          </a:p>
+          <a:p>
+            <a:r>
+              <a:rPr lang="de-DE" dirty="0"/>
+              <a:t>Position form</a:t>
+            </a:r>
+          </a:p>
+          <a:p>
+            <a:r>
+              <a:rPr lang="de-DE" dirty="0"/>
+              <a:t>Velocity (</a:t>
+            </a:r>
+            <a:r>
+              <a:rPr lang="de-DE" dirty="0" err="1"/>
+              <a:t>incremental</a:t>
+            </a:r>
+            <a:r>
+              <a:rPr lang="de-DE" dirty="0"/>
+              <a:t>) form</a:t>
+            </a:r>
+          </a:p>
+        </p:txBody>
+      </p:sp>
+      <p:sp>
+        <p:nvSpPr>
+          <p:cNvPr id="4" name="Foliennummernplatzhalter 3">
+            <a:extLst>
+              <a:ext uri="{FF2B5EF4-FFF2-40B4-BE49-F238E27FC236}">
+                <a16:creationId xmlns:a16="http://schemas.microsoft.com/office/drawing/2014/main" id="{736231E0-3954-F05D-0A6C-F8F01344E392}"/>
+              </a:ext>
+            </a:extLst>
+          </p:cNvPr>
+          <p:cNvSpPr>
+            <a:spLocks noGrp="1"/>
+          </p:cNvSpPr>
+          <p:nvPr>
+            <p:ph type="sldNum" sz="quarter" idx="12"/>
+          </p:nvPr>
+        </p:nvSpPr>
+        <p:spPr/>
+        <p:txBody>
+          <a:bodyPr/>
+          <a:lstStyle/>
+          <a:p>
+            <a:fld id="{08C366F5-AFAD-49CB-854A-9D9E238FCA13}" type="slidenum">
+              <a:rPr lang="en-GB" smtClean="0"/>
+              <a:t>42</a:t>
+            </a:fld>
+            <a:endParaRPr lang="en-GB"/>
+          </a:p>
+        </p:txBody>
+      </p:sp>
+    </p:spTree>
+    <p:extLst>
+      <p:ext uri="{BB962C8B-B14F-4D97-AF65-F5344CB8AC3E}">
+        <p14:creationId xmlns:p14="http://schemas.microsoft.com/office/powerpoint/2010/main" val="3628429894"/>
+      </p:ext>
+    </p:extLst>
+  </p:cSld>
+  <p:clrMapOvr>
+    <a:masterClrMapping/>
+  </p:clrMapOvr>
+</p:sld>
+</file>
+
+<file path=ppt/slides/slide43.xml><?xml version="1.0" encoding="utf-8"?>
+<p:sld xmlns:a="http://schemas.openxmlformats.org/drawingml/2006/main" xmlns:r="http://schemas.openxmlformats.org/officeDocument/2006/relationships" xmlns:p="http://schemas.openxmlformats.org/presentationml/2006/main">
+  <p:cSld>
+    <p:spTree>
+      <p:nvGrpSpPr>
+        <p:cNvPr id="1" name=""/>
+        <p:cNvGrpSpPr/>
+        <p:nvPr/>
+      </p:nvGrpSpPr>
+      <p:grpSpPr>
+        <a:xfrm>
+          <a:off x="0" y="0"/>
+          <a:ext cx="0" cy="0"/>
+          <a:chOff x="0" y="0"/>
+          <a:chExt cx="0" cy="0"/>
+        </a:xfrm>
+      </p:grpSpPr>
+      <p:sp>
+        <p:nvSpPr>
+          <p:cNvPr id="2" name="Titel 1">
+            <a:extLst>
+              <a:ext uri="{FF2B5EF4-FFF2-40B4-BE49-F238E27FC236}">
+                <a16:creationId xmlns:a16="http://schemas.microsoft.com/office/drawing/2014/main" id="{B8D0DE3C-E0D6-53A5-DAF7-4070AE5044D6}"/>
+              </a:ext>
+            </a:extLst>
+          </p:cNvPr>
+          <p:cNvSpPr>
+            <a:spLocks noGrp="1"/>
+          </p:cNvSpPr>
+          <p:nvPr>
+            <p:ph type="title"/>
+          </p:nvPr>
+        </p:nvSpPr>
+        <p:spPr/>
+        <p:txBody>
+          <a:bodyPr/>
+          <a:lstStyle/>
+          <a:p>
+            <a:endParaRPr lang="de-DE"/>
+          </a:p>
+        </p:txBody>
+      </p:sp>
+      <p:sp>
+        <p:nvSpPr>
+          <p:cNvPr id="3" name="Inhaltsplatzhalter 2">
+            <a:extLst>
+              <a:ext uri="{FF2B5EF4-FFF2-40B4-BE49-F238E27FC236}">
+                <a16:creationId xmlns:a16="http://schemas.microsoft.com/office/drawing/2014/main" id="{8B0433CE-B24F-C4B3-567B-85D31A5A76AD}"/>
+              </a:ext>
+            </a:extLst>
+          </p:cNvPr>
+          <p:cNvSpPr>
+            <a:spLocks noGrp="1"/>
+          </p:cNvSpPr>
+          <p:nvPr>
+            <p:ph idx="1"/>
+          </p:nvPr>
+        </p:nvSpPr>
+        <p:spPr/>
+        <p:txBody>
+          <a:bodyPr/>
+          <a:lstStyle/>
+          <a:p>
+            <a:endParaRPr lang="de-DE"/>
+          </a:p>
+        </p:txBody>
+      </p:sp>
+      <p:sp>
+        <p:nvSpPr>
+          <p:cNvPr id="4" name="Foliennummernplatzhalter 3">
+            <a:extLst>
+              <a:ext uri="{FF2B5EF4-FFF2-40B4-BE49-F238E27FC236}">
+                <a16:creationId xmlns:a16="http://schemas.microsoft.com/office/drawing/2014/main" id="{CB85D072-5C98-4066-50D2-642CD5D0BA09}"/>
+              </a:ext>
+            </a:extLst>
+          </p:cNvPr>
+          <p:cNvSpPr>
+            <a:spLocks noGrp="1"/>
+          </p:cNvSpPr>
+          <p:nvPr>
+            <p:ph type="sldNum" sz="quarter" idx="12"/>
+          </p:nvPr>
+        </p:nvSpPr>
+        <p:spPr/>
+        <p:txBody>
+          <a:bodyPr/>
+          <a:lstStyle/>
+          <a:p>
+            <a:fld id="{08C366F5-AFAD-49CB-854A-9D9E238FCA13}" type="slidenum">
+              <a:rPr lang="en-GB" smtClean="0"/>
+              <a:t>43</a:t>
+            </a:fld>
+            <a:endParaRPr lang="en-GB"/>
+          </a:p>
+        </p:txBody>
+      </p:sp>
+    </p:spTree>
+    <p:extLst>
+      <p:ext uri="{BB962C8B-B14F-4D97-AF65-F5344CB8AC3E}">
+        <p14:creationId xmlns:p14="http://schemas.microsoft.com/office/powerpoint/2010/main" val="1090511166"/>
+      </p:ext>
+    </p:extLst>
+  </p:cSld>
+  <p:clrMapOvr>
+    <a:masterClrMapping/>
+  </p:clrMapOvr>
+</p:sld>
+</file>
+
+<file path=ppt/slides/slide44.xml><?xml version="1.0" encoding="utf-8"?>
+<p:sld xmlns:a="http://schemas.openxmlformats.org/drawingml/2006/main" xmlns:r="http://schemas.openxmlformats.org/officeDocument/2006/relationships" xmlns:p="http://schemas.openxmlformats.org/presentationml/2006/main">
+  <p:cSld>
+    <p:spTree>
+      <p:nvGrpSpPr>
+        <p:cNvPr id="1" name=""/>
+        <p:cNvGrpSpPr/>
+        <p:nvPr/>
+      </p:nvGrpSpPr>
+      <p:grpSpPr>
+        <a:xfrm>
+          <a:off x="0" y="0"/>
+          <a:ext cx="0" cy="0"/>
+          <a:chOff x="0" y="0"/>
+          <a:chExt cx="0" cy="0"/>
+        </a:xfrm>
+      </p:grpSpPr>
+      <p:sp>
+        <p:nvSpPr>
+          <p:cNvPr id="2" name="Titel 1">
+            <a:extLst>
+              <a:ext uri="{FF2B5EF4-FFF2-40B4-BE49-F238E27FC236}">
+                <a16:creationId xmlns:a16="http://schemas.microsoft.com/office/drawing/2014/main" id="{6C208CCB-605E-513B-1BC3-36C369993B8C}"/>
+              </a:ext>
+            </a:extLst>
+          </p:cNvPr>
+          <p:cNvSpPr>
+            <a:spLocks noGrp="1"/>
+          </p:cNvSpPr>
+          <p:nvPr>
+            <p:ph type="title"/>
+          </p:nvPr>
+        </p:nvSpPr>
+        <p:spPr/>
+        <p:txBody>
+          <a:bodyPr/>
+          <a:lstStyle/>
+          <a:p>
+            <a:r>
+              <a:rPr lang="de-DE" dirty="0"/>
+              <a:t>Summary</a:t>
+            </a:r>
+          </a:p>
+        </p:txBody>
+      </p:sp>
+      <p:sp>
+        <p:nvSpPr>
+          <p:cNvPr id="3" name="Inhaltsplatzhalter 2">
+            <a:extLst>
+              <a:ext uri="{FF2B5EF4-FFF2-40B4-BE49-F238E27FC236}">
+                <a16:creationId xmlns:a16="http://schemas.microsoft.com/office/drawing/2014/main" id="{717F2BDD-E451-7A8E-F095-CE64538B4F58}"/>
+              </a:ext>
+            </a:extLst>
+          </p:cNvPr>
+          <p:cNvSpPr>
+            <a:spLocks noGrp="1"/>
+          </p:cNvSpPr>
+          <p:nvPr>
+            <p:ph idx="1"/>
+          </p:nvPr>
+        </p:nvSpPr>
+        <p:spPr/>
+        <p:txBody>
+          <a:bodyPr/>
+          <a:lstStyle/>
+          <a:p>
+            <a:r>
+              <a:rPr lang="de-DE" dirty="0"/>
+              <a:t>Digital </a:t>
+            </a:r>
+            <a:r>
+              <a:rPr lang="de-DE" dirty="0" err="1"/>
+              <a:t>control</a:t>
+            </a:r>
+            <a:r>
+              <a:rPr lang="de-DE" dirty="0"/>
+              <a:t> </a:t>
+            </a:r>
+            <a:r>
+              <a:rPr lang="de-DE" dirty="0" err="1"/>
+              <a:t>is</a:t>
+            </a:r>
+            <a:r>
+              <a:rPr lang="de-DE" dirty="0"/>
+              <a:t> essential in modern </a:t>
+            </a:r>
+            <a:r>
+              <a:rPr lang="de-DE" dirty="0" err="1"/>
+              <a:t>systems</a:t>
+            </a:r>
+            <a:endParaRPr lang="de-DE" dirty="0"/>
+          </a:p>
+          <a:p>
+            <a:r>
+              <a:rPr lang="de-DE" dirty="0"/>
+              <a:t>Sampling </a:t>
+            </a:r>
+            <a:r>
+              <a:rPr lang="de-DE" dirty="0" err="1"/>
+              <a:t>introduces</a:t>
+            </a:r>
+            <a:r>
+              <a:rPr lang="de-DE" dirty="0"/>
+              <a:t> </a:t>
+            </a:r>
+            <a:r>
+              <a:rPr lang="de-DE" dirty="0" err="1"/>
+              <a:t>constraints</a:t>
+            </a:r>
+            <a:endParaRPr lang="de-DE" dirty="0"/>
+          </a:p>
+          <a:p>
+            <a:r>
+              <a:rPr lang="de-DE" dirty="0"/>
+              <a:t>ZOH </a:t>
+            </a:r>
+            <a:r>
+              <a:rPr lang="de-DE" dirty="0" err="1"/>
+              <a:t>connects</a:t>
+            </a:r>
+            <a:r>
+              <a:rPr lang="de-DE" dirty="0"/>
+              <a:t> </a:t>
+            </a:r>
+            <a:r>
+              <a:rPr lang="de-DE" dirty="0" err="1"/>
+              <a:t>discrete</a:t>
+            </a:r>
+            <a:r>
+              <a:rPr lang="de-DE" dirty="0"/>
+              <a:t> and </a:t>
+            </a:r>
+            <a:r>
+              <a:rPr lang="de-DE" dirty="0" err="1"/>
+              <a:t>continuous</a:t>
+            </a:r>
+            <a:r>
+              <a:rPr lang="de-DE" dirty="0"/>
+              <a:t> </a:t>
+            </a:r>
+            <a:r>
+              <a:rPr lang="de-DE" dirty="0" err="1"/>
+              <a:t>worlds</a:t>
+            </a:r>
+            <a:endParaRPr lang="de-DE" dirty="0"/>
+          </a:p>
+          <a:p>
+            <a:r>
+              <a:rPr lang="de-DE" dirty="0" err="1"/>
+              <a:t>z-transform</a:t>
+            </a:r>
+            <a:r>
+              <a:rPr lang="de-DE" dirty="0"/>
+              <a:t> </a:t>
+            </a:r>
+            <a:r>
+              <a:rPr lang="de-DE" dirty="0" err="1"/>
+              <a:t>is</a:t>
+            </a:r>
+            <a:r>
+              <a:rPr lang="de-DE" dirty="0"/>
+              <a:t> </a:t>
+            </a:r>
+            <a:r>
+              <a:rPr lang="de-DE" dirty="0" err="1"/>
+              <a:t>key</a:t>
+            </a:r>
+            <a:r>
+              <a:rPr lang="de-DE" dirty="0"/>
+              <a:t> </a:t>
+            </a:r>
+            <a:r>
+              <a:rPr lang="de-DE" dirty="0" err="1"/>
+              <a:t>analysis</a:t>
+            </a:r>
+            <a:r>
+              <a:rPr lang="de-DE" dirty="0"/>
+              <a:t> </a:t>
+            </a:r>
+            <a:r>
+              <a:rPr lang="de-DE" dirty="0" err="1"/>
+              <a:t>tool</a:t>
+            </a:r>
+            <a:endParaRPr lang="de-DE" dirty="0"/>
+          </a:p>
+          <a:p>
+            <a:r>
+              <a:rPr lang="de-DE" dirty="0" err="1"/>
+              <a:t>Discretization</a:t>
+            </a:r>
+            <a:r>
+              <a:rPr lang="de-DE" dirty="0"/>
+              <a:t> </a:t>
+            </a:r>
+            <a:r>
+              <a:rPr lang="de-DE" dirty="0" err="1"/>
+              <a:t>method</a:t>
+            </a:r>
+            <a:r>
+              <a:rPr lang="de-DE" dirty="0"/>
+              <a:t> </a:t>
+            </a:r>
+            <a:r>
+              <a:rPr lang="de-DE" dirty="0" err="1"/>
+              <a:t>matters</a:t>
+            </a:r>
+            <a:endParaRPr lang="de-DE" dirty="0"/>
+          </a:p>
+        </p:txBody>
+      </p:sp>
+      <p:sp>
+        <p:nvSpPr>
+          <p:cNvPr id="4" name="Foliennummernplatzhalter 3">
+            <a:extLst>
+              <a:ext uri="{FF2B5EF4-FFF2-40B4-BE49-F238E27FC236}">
+                <a16:creationId xmlns:a16="http://schemas.microsoft.com/office/drawing/2014/main" id="{FA27C285-2CA8-7C1D-7B48-526D96B9D6D1}"/>
+              </a:ext>
+            </a:extLst>
+          </p:cNvPr>
+          <p:cNvSpPr>
+            <a:spLocks noGrp="1"/>
+          </p:cNvSpPr>
+          <p:nvPr>
+            <p:ph type="sldNum" sz="quarter" idx="12"/>
+          </p:nvPr>
+        </p:nvSpPr>
+        <p:spPr/>
+        <p:txBody>
+          <a:bodyPr/>
+          <a:lstStyle/>
+          <a:p>
+            <a:fld id="{08C366F5-AFAD-49CB-854A-9D9E238FCA13}" type="slidenum">
+              <a:rPr lang="en-GB" smtClean="0"/>
+              <a:t>44</a:t>
+            </a:fld>
+            <a:endParaRPr lang="en-GB"/>
+          </a:p>
+        </p:txBody>
+      </p:sp>
+    </p:spTree>
+    <p:extLst>
+      <p:ext uri="{BB962C8B-B14F-4D97-AF65-F5344CB8AC3E}">
+        <p14:creationId xmlns:p14="http://schemas.microsoft.com/office/powerpoint/2010/main" val="4139900114"/>
       </p:ext>
     </p:extLst>
   </p:cSld>
@@ -15553,8 +19523,8 @@
           </a:p>
         </p:txBody>
       </p:sp>
-      <mc:AlternateContent xmlns:mc="http://schemas.openxmlformats.org/markup-compatibility/2006">
-        <mc:Choice xmlns:a14="http://schemas.microsoft.com/office/drawing/2010/main" Requires="a14">
+      <mc:AlternateContent xmlns:mc="http://schemas.openxmlformats.org/markup-compatibility/2006" xmlns:a14="http://schemas.microsoft.com/office/drawing/2010/main">
+        <mc:Choice Requires="a14">
           <p:sp>
             <p:nvSpPr>
               <p:cNvPr id="3" name="Inhaltsplatzhalter 2">
@@ -15798,7 +19768,7 @@
             </p:txBody>
           </p:sp>
         </mc:Choice>
-        <mc:Fallback>
+        <mc:Fallback xmlns="">
           <p:sp>
             <p:nvSpPr>
               <p:cNvPr id="3" name="Inhaltsplatzhalter 2">
@@ -15897,162 +19867,36 @@
           <a:chExt cx="0" cy="0"/>
         </a:xfrm>
       </p:grpSpPr>
-      <p:sp>
-        <p:nvSpPr>
-          <p:cNvPr id="2" name="Titel 1">
+      <p:pic>
+        <p:nvPicPr>
+          <p:cNvPr id="17" name="Grafik 16">
             <a:extLst>
               <a:ext uri="{FF2B5EF4-FFF2-40B4-BE49-F238E27FC236}">
-                <a16:creationId xmlns:a16="http://schemas.microsoft.com/office/drawing/2014/main" id="{3C846500-91EB-8DC0-44F0-7BCC5A65BCAE}"/>
+                <a16:creationId xmlns:a16="http://schemas.microsoft.com/office/drawing/2014/main" id="{8909347D-4D00-308C-BF8B-7A79F13B1B4F}"/>
               </a:ext>
             </a:extLst>
           </p:cNvPr>
-          <p:cNvSpPr>
-            <a:spLocks noGrp="1"/>
-          </p:cNvSpPr>
-          <p:nvPr>
-            <p:ph type="title"/>
-          </p:nvPr>
-        </p:nvSpPr>
-        <p:spPr/>
-        <p:txBody>
-          <a:bodyPr/>
-          <a:lstStyle/>
-          <a:p>
-            <a:r>
-              <a:rPr lang="de-DE" dirty="0" err="1"/>
-              <a:t>Structure</a:t>
-            </a:r>
-            <a:r>
-              <a:rPr lang="de-DE" dirty="0"/>
-              <a:t> </a:t>
-            </a:r>
-            <a:r>
-              <a:rPr lang="de-DE" dirty="0" err="1"/>
-              <a:t>of</a:t>
-            </a:r>
-            <a:r>
-              <a:rPr lang="de-DE" dirty="0"/>
-              <a:t> a Digital Control System</a:t>
-            </a:r>
-          </a:p>
-        </p:txBody>
-      </p:sp>
-      <p:sp>
-        <p:nvSpPr>
-          <p:cNvPr id="3" name="Inhaltsplatzhalter 2">
-            <a:extLst>
-              <a:ext uri="{FF2B5EF4-FFF2-40B4-BE49-F238E27FC236}">
-                <a16:creationId xmlns:a16="http://schemas.microsoft.com/office/drawing/2014/main" id="{D0408597-7170-30AC-D7D6-4EF581F9DBAD}"/>
-              </a:ext>
-            </a:extLst>
-          </p:cNvPr>
-          <p:cNvSpPr>
-            <a:spLocks noGrp="1"/>
-          </p:cNvSpPr>
-          <p:nvPr>
-            <p:ph idx="1"/>
-          </p:nvPr>
-        </p:nvSpPr>
-        <p:spPr/>
-        <p:txBody>
-          <a:bodyPr>
-            <a:normAutofit/>
-          </a:bodyPr>
-          <a:lstStyle/>
-          <a:p>
-            <a:pPr marL="0" indent="0">
-              <a:buNone/>
-            </a:pPr>
-            <a:r>
-              <a:rPr lang="de-DE" dirty="0"/>
-              <a:t>Blocks:</a:t>
-            </a:r>
-          </a:p>
-          <a:p>
-            <a:r>
-              <a:rPr lang="de-DE" dirty="0"/>
-              <a:t>Sampler</a:t>
-            </a:r>
-          </a:p>
-          <a:p>
-            <a:r>
-              <a:rPr lang="de-DE" dirty="0"/>
-              <a:t>Digital Controller</a:t>
-            </a:r>
-          </a:p>
-          <a:p>
-            <a:r>
-              <a:rPr lang="de-DE" dirty="0"/>
-              <a:t>Zero-Order Hold (ZOH)</a:t>
-            </a:r>
-          </a:p>
-          <a:p>
-            <a:r>
-              <a:rPr lang="de-DE" dirty="0" err="1"/>
-              <a:t>Continuous</a:t>
-            </a:r>
-            <a:r>
-              <a:rPr lang="de-DE" dirty="0"/>
-              <a:t> Plant</a:t>
-            </a:r>
-            <a:br>
-              <a:rPr lang="de-DE" dirty="0"/>
-            </a:br>
-            <a:endParaRPr lang="de-DE" dirty="0"/>
-          </a:p>
-          <a:p>
-            <a:pPr marL="0" indent="0">
-              <a:buNone/>
-            </a:pPr>
-            <a:r>
-              <a:rPr lang="de-DE" b="1" dirty="0"/>
-              <a:t>Include block </a:t>
-            </a:r>
-            <a:r>
-              <a:rPr lang="de-DE" b="1" dirty="0" err="1"/>
-              <a:t>diagram</a:t>
-            </a:r>
-            <a:r>
-              <a:rPr lang="de-DE" b="1" dirty="0"/>
-              <a:t>:</a:t>
-            </a:r>
-            <a:endParaRPr lang="de-DE" dirty="0"/>
-          </a:p>
-          <a:p>
-            <a:pPr marL="0" indent="0">
-              <a:buNone/>
-            </a:pPr>
-            <a:r>
-              <a:rPr lang="de-DE" dirty="0"/>
-              <a:t>👉 Plot: </a:t>
-            </a:r>
-            <a:r>
-              <a:rPr lang="de-DE" dirty="0" err="1"/>
-              <a:t>Continuous</a:t>
-            </a:r>
-            <a:r>
-              <a:rPr lang="de-DE" dirty="0"/>
-              <a:t> plant + </a:t>
-            </a:r>
-            <a:r>
-              <a:rPr lang="de-DE" dirty="0" err="1"/>
-              <a:t>sampler</a:t>
-            </a:r>
-            <a:r>
-              <a:rPr lang="de-DE" dirty="0"/>
-              <a:t> + digital </a:t>
-            </a:r>
-            <a:r>
-              <a:rPr lang="de-DE" dirty="0" err="1"/>
-              <a:t>controller</a:t>
-            </a:r>
-            <a:r>
-              <a:rPr lang="de-DE" dirty="0"/>
-              <a:t> + ZOH</a:t>
-            </a:r>
-          </a:p>
-        </p:txBody>
-      </p:sp>
+          <p:cNvPicPr>
+            <a:picLocks noChangeAspect="1"/>
+          </p:cNvPicPr>
+          <p:nvPr/>
+        </p:nvPicPr>
+        <p:blipFill>
+          <a:blip r:embed="rId2"/>
+          <a:stretch>
+            <a:fillRect/>
+          </a:stretch>
+        </p:blipFill>
+        <p:spPr>
+          <a:xfrm rot="5400000">
+            <a:off x="2857696" y="-1423468"/>
+            <a:ext cx="6858000" cy="9704936"/>
+          </a:xfrm>
+          <a:prstGeom prst="rect">
+            <a:avLst/>
+          </a:prstGeom>
+        </p:spPr>
+      </p:pic>
       <p:sp>
         <p:nvSpPr>
           <p:cNvPr id="4" name="Foliennummernplatzhalter 3">
@@ -16079,6 +19923,88 @@
               <a:t>6</a:t>
             </a:fld>
             <a:endParaRPr lang="en-GB"/>
+          </a:p>
+        </p:txBody>
+      </p:sp>
+      <p:sp>
+        <p:nvSpPr>
+          <p:cNvPr id="11" name="Textfeld 10">
+            <a:extLst>
+              <a:ext uri="{FF2B5EF4-FFF2-40B4-BE49-F238E27FC236}">
+                <a16:creationId xmlns:a16="http://schemas.microsoft.com/office/drawing/2014/main" id="{C22B8CB9-A9B1-B1AD-2B8A-0EB3E995B833}"/>
+              </a:ext>
+            </a:extLst>
+          </p:cNvPr>
+          <p:cNvSpPr txBox="1"/>
+          <p:nvPr/>
+        </p:nvSpPr>
+        <p:spPr>
+          <a:xfrm>
+            <a:off x="1544031" y="5176739"/>
+            <a:ext cx="9485331" cy="892552"/>
+          </a:xfrm>
+          <a:prstGeom prst="rect">
+            <a:avLst/>
+          </a:prstGeom>
+          <a:noFill/>
+        </p:spPr>
+        <p:txBody>
+          <a:bodyPr wrap="square">
+            <a:spAutoFit/>
+          </a:bodyPr>
+          <a:lstStyle/>
+          <a:p>
+            <a:r>
+              <a:rPr lang="de-DE" sz="2600" dirty="0"/>
+              <a:t>Idea:</a:t>
+            </a:r>
+          </a:p>
+          <a:p>
+            <a:r>
+              <a:rPr lang="de-DE" sz="2600" dirty="0" err="1"/>
+              <a:t>controlling</a:t>
+            </a:r>
+            <a:r>
+              <a:rPr lang="de-DE" sz="2600" dirty="0"/>
+              <a:t> a </a:t>
+            </a:r>
+            <a:r>
+              <a:rPr lang="de-DE" sz="2600" dirty="0" err="1"/>
+              <a:t>continuous</a:t>
+            </a:r>
+            <a:r>
+              <a:rPr lang="de-DE" sz="2600" dirty="0"/>
+              <a:t> </a:t>
+            </a:r>
+            <a:r>
+              <a:rPr lang="de-DE" sz="2600" dirty="0" err="1"/>
+              <a:t>physical</a:t>
+            </a:r>
+            <a:r>
+              <a:rPr lang="de-DE" sz="2600" dirty="0"/>
+              <a:t> </a:t>
+            </a:r>
+            <a:r>
+              <a:rPr lang="de-DE" sz="2600" dirty="0" err="1"/>
+              <a:t>system</a:t>
+            </a:r>
+            <a:r>
+              <a:rPr lang="de-DE" sz="2600" dirty="0"/>
+              <a:t> </a:t>
+            </a:r>
+            <a:r>
+              <a:rPr lang="de-DE" sz="2600" dirty="0" err="1"/>
+              <a:t>using</a:t>
+            </a:r>
+            <a:r>
+              <a:rPr lang="de-DE" sz="2600" dirty="0"/>
+              <a:t> a digital </a:t>
+            </a:r>
+            <a:r>
+              <a:rPr lang="de-DE" sz="2600" dirty="0" err="1"/>
+              <a:t>computer</a:t>
+            </a:r>
+            <a:endParaRPr lang="de-DE" sz="2600" dirty="0"/>
           </a:p>
         </p:txBody>
       </p:sp>
@@ -16140,8 +20066,8 @@
           </a:p>
         </p:txBody>
       </p:sp>
-      <mc:AlternateContent xmlns:mc="http://schemas.openxmlformats.org/markup-compatibility/2006">
-        <mc:Choice xmlns:a14="http://schemas.microsoft.com/office/drawing/2010/main" Requires="a14">
+      <mc:AlternateContent xmlns:mc="http://schemas.openxmlformats.org/markup-compatibility/2006" xmlns:a14="http://schemas.microsoft.com/office/drawing/2010/main">
+        <mc:Choice Requires="a14">
           <p:sp>
             <p:nvSpPr>
               <p:cNvPr id="3" name="Inhaltsplatzhalter 2">
@@ -16493,7 +20419,7 @@
             </p:txBody>
           </p:sp>
         </mc:Choice>
-        <mc:Fallback>
+        <mc:Fallback xmlns="">
           <p:sp>
             <p:nvSpPr>
               <p:cNvPr id="3" name="Inhaltsplatzhalter 2">
@@ -16562,8 +20488,8 @@
           </a:p>
         </p:txBody>
       </p:sp>
-      <mc:AlternateContent xmlns:mc="http://schemas.openxmlformats.org/markup-compatibility/2006">
-        <mc:Choice xmlns:a14="http://schemas.microsoft.com/office/drawing/2010/main" Requires="a14">
+      <mc:AlternateContent xmlns:mc="http://schemas.openxmlformats.org/markup-compatibility/2006" xmlns:a14="http://schemas.microsoft.com/office/drawing/2010/main">
+        <mc:Choice Requires="a14">
           <p:sp>
             <p:nvSpPr>
               <p:cNvPr id="6" name="Textfeld 5">
@@ -16781,7 +20707,7 @@
             </p:txBody>
           </p:sp>
         </mc:Choice>
-        <mc:Fallback>
+        <mc:Fallback xmlns="">
           <p:sp>
             <p:nvSpPr>
               <p:cNvPr id="6" name="Textfeld 5">

--- a/slides/6_discrete_controllers.pptx
+++ b/slides/6_discrete_controllers.pptx
@@ -5,7 +5,7 @@
     <p:sldMasterId id="2147483648" r:id="rId1"/>
   </p:sldMasterIdLst>
   <p:notesMasterIdLst>
-    <p:notesMasterId r:id="rId46"/>
+    <p:notesMasterId r:id="rId41"/>
   </p:notesMasterIdLst>
   <p:sldIdLst>
     <p:sldId id="256" r:id="rId2"/>
@@ -30,28 +30,23 @@
     <p:sldId id="271" r:id="rId21"/>
     <p:sldId id="385" r:id="rId22"/>
     <p:sldId id="388" r:id="rId23"/>
-    <p:sldId id="389" r:id="rId24"/>
+    <p:sldId id="405" r:id="rId24"/>
     <p:sldId id="374" r:id="rId25"/>
     <p:sldId id="375" r:id="rId26"/>
     <p:sldId id="387" r:id="rId27"/>
     <p:sldId id="390" r:id="rId28"/>
     <p:sldId id="272" r:id="rId29"/>
     <p:sldId id="391" r:id="rId30"/>
-    <p:sldId id="392" r:id="rId31"/>
-    <p:sldId id="393" r:id="rId32"/>
-    <p:sldId id="394" r:id="rId33"/>
-    <p:sldId id="273" r:id="rId34"/>
-    <p:sldId id="395" r:id="rId35"/>
-    <p:sldId id="396" r:id="rId36"/>
-    <p:sldId id="397" r:id="rId37"/>
-    <p:sldId id="398" r:id="rId38"/>
-    <p:sldId id="274" r:id="rId39"/>
-    <p:sldId id="400" r:id="rId40"/>
-    <p:sldId id="401" r:id="rId41"/>
-    <p:sldId id="402" r:id="rId42"/>
-    <p:sldId id="403" r:id="rId43"/>
-    <p:sldId id="404" r:id="rId44"/>
-    <p:sldId id="399" r:id="rId45"/>
+    <p:sldId id="393" r:id="rId31"/>
+    <p:sldId id="273" r:id="rId32"/>
+    <p:sldId id="395" r:id="rId33"/>
+    <p:sldId id="396" r:id="rId34"/>
+    <p:sldId id="398" r:id="rId35"/>
+    <p:sldId id="274" r:id="rId36"/>
+    <p:sldId id="401" r:id="rId37"/>
+    <p:sldId id="402" r:id="rId38"/>
+    <p:sldId id="403" r:id="rId39"/>
+    <p:sldId id="399" r:id="rId40"/>
   </p:sldIdLst>
   <p:sldSz cx="12192000" cy="6858000"/>
   <p:notesSz cx="6858000" cy="9144000"/>
@@ -13107,8 +13102,8 @@
           </a:p>
         </p:txBody>
       </p:sp>
-      <mc:AlternateContent xmlns:mc="http://schemas.openxmlformats.org/markup-compatibility/2006">
-        <mc:Choice xmlns:a14="http://schemas.microsoft.com/office/drawing/2010/main" Requires="a14">
+      <mc:AlternateContent xmlns:mc="http://schemas.openxmlformats.org/markup-compatibility/2006" xmlns:a14="http://schemas.microsoft.com/office/drawing/2010/main">
+        <mc:Choice Requires="a14">
           <p:sp>
             <p:nvSpPr>
               <p:cNvPr id="3" name="Inhaltsplatzhalter 2">
@@ -13654,7 +13649,7 @@
             </p:txBody>
           </p:sp>
         </mc:Choice>
-        <mc:Fallback>
+        <mc:Fallback xmlns="">
           <p:sp>
             <p:nvSpPr>
               <p:cNvPr id="3" name="Inhaltsplatzhalter 2">
@@ -13788,7 +13783,7 @@
             </a:r>
             <a:r>
               <a:rPr lang="de-DE" dirty="0"/>
-              <a:t>-Time</a:t>
+              <a:t>-Time Systems</a:t>
             </a:r>
           </a:p>
         </p:txBody>
@@ -13809,7 +13804,12 @@
             <p:ph idx="1"/>
           </p:nvPr>
         </p:nvSpPr>
-        <p:spPr/>
+        <p:spPr>
+          <a:xfrm>
+            <a:off x="6585526" y="1825625"/>
+            <a:ext cx="4768273" cy="4351338"/>
+          </a:xfrm>
+        </p:spPr>
         <p:txBody>
           <a:bodyPr/>
           <a:lstStyle/>
@@ -13887,50 +13887,8 @@
             </a:pPr>
             <a:r>
               <a:rPr lang="de-DE" dirty="0"/>
-              <a:t>Plot:</a:t>
-            </a:r>
-          </a:p>
-          <a:p>
-            <a:r>
-              <a:rPr lang="de-DE" dirty="0"/>
-              <a:t>Unit </a:t>
-            </a:r>
-            <a:r>
-              <a:rPr lang="de-DE" dirty="0" err="1"/>
-              <a:t>circle</a:t>
-            </a:r>
-            <a:endParaRPr lang="de-DE" dirty="0"/>
-          </a:p>
-          <a:p>
-            <a:r>
-              <a:rPr lang="de-DE" dirty="0" err="1"/>
-              <a:t>Stable</a:t>
-            </a:r>
-            <a:r>
-              <a:rPr lang="de-DE" dirty="0"/>
-              <a:t> </a:t>
-            </a:r>
-            <a:r>
-              <a:rPr lang="de-DE" dirty="0" err="1"/>
-              <a:t>vs</a:t>
-            </a:r>
-            <a:r>
-              <a:rPr lang="de-DE" dirty="0"/>
-              <a:t> </a:t>
-            </a:r>
-            <a:r>
-              <a:rPr lang="de-DE" dirty="0" err="1"/>
-              <a:t>unstable</a:t>
-            </a:r>
-            <a:r>
-              <a:rPr lang="de-DE" dirty="0"/>
-              <a:t> </a:t>
-            </a:r>
-            <a:r>
-              <a:rPr lang="de-DE" dirty="0" err="1"/>
-              <a:t>poles</a:t>
-            </a:r>
-            <a:endParaRPr lang="de-DE" dirty="0"/>
+              <a:t>…</a:t>
+            </a:r>
           </a:p>
         </p:txBody>
       </p:sp>
@@ -13963,6 +13921,36 @@
           </a:p>
         </p:txBody>
       </p:sp>
+      <p:pic>
+        <p:nvPicPr>
+          <p:cNvPr id="5" name="Grafik 4">
+            <a:extLst>
+              <a:ext uri="{FF2B5EF4-FFF2-40B4-BE49-F238E27FC236}">
+                <a16:creationId xmlns:a16="http://schemas.microsoft.com/office/drawing/2014/main" id="{3ACFABF2-7282-8193-93F4-5770C78395DD}"/>
+              </a:ext>
+            </a:extLst>
+          </p:cNvPr>
+          <p:cNvPicPr>
+            <a:picLocks noChangeAspect="1"/>
+          </p:cNvPicPr>
+          <p:nvPr/>
+        </p:nvPicPr>
+        <p:blipFill>
+          <a:blip r:embed="rId2"/>
+          <a:stretch>
+            <a:fillRect/>
+          </a:stretch>
+        </p:blipFill>
+        <p:spPr>
+          <a:xfrm>
+            <a:off x="838200" y="1539463"/>
+            <a:ext cx="5257800" cy="5182012"/>
+          </a:xfrm>
+          <a:prstGeom prst="rect">
+            <a:avLst/>
+          </a:prstGeom>
+        </p:spPr>
+      </p:pic>
     </p:spTree>
     <p:extLst>
       <p:ext uri="{BB962C8B-B14F-4D97-AF65-F5344CB8AC3E}">
@@ -14016,11 +14004,11 @@
           <a:p>
             <a:r>
               <a:rPr lang="de-DE" dirty="0"/>
-              <a:t>s-plane </a:t>
+              <a:t>s-Plane </a:t>
             </a:r>
             <a:r>
               <a:rPr lang="de-DE" dirty="0" err="1"/>
-              <a:t>vs</a:t>
+              <a:t>Mapped</a:t>
             </a:r>
             <a:r>
               <a:rPr lang="de-DE" dirty="0"/>
@@ -14028,69 +14016,139 @@
             </a:r>
             <a:r>
               <a:rPr lang="de-DE" dirty="0" err="1"/>
+              <a:t>to</a:t>
+            </a:r>
+            <a:r>
+              <a:rPr lang="de-DE" dirty="0"/>
+              <a:t> </a:t>
+            </a:r>
+            <a:r>
+              <a:rPr lang="de-DE" dirty="0" err="1"/>
               <a:t>z</a:t>
             </a:r>
             <a:r>
               <a:rPr lang="de-DE" dirty="0"/>
-              <a:t>-plane Mapping</a:t>
+              <a:t>-Plane</a:t>
             </a:r>
           </a:p>
         </p:txBody>
       </p:sp>
-      <p:sp>
-        <p:nvSpPr>
-          <p:cNvPr id="3" name="Inhaltsplatzhalter 2">
-            <a:extLst>
-              <a:ext uri="{FF2B5EF4-FFF2-40B4-BE49-F238E27FC236}">
-                <a16:creationId xmlns:a16="http://schemas.microsoft.com/office/drawing/2014/main" id="{8A098AEA-3D94-690F-6D1B-9AC99359E4F3}"/>
-              </a:ext>
-            </a:extLst>
-          </p:cNvPr>
-          <p:cNvSpPr>
-            <a:spLocks noGrp="1"/>
-          </p:cNvSpPr>
-          <p:nvPr>
-            <p:ph idx="1"/>
-          </p:nvPr>
-        </p:nvSpPr>
-        <p:spPr/>
-        <p:txBody>
-          <a:bodyPr/>
-          <a:lstStyle/>
-          <a:p>
-            <a:r>
-              <a:rPr lang="de-DE" dirty="0"/>
-              <a:t>Relation:</a:t>
-            </a:r>
-          </a:p>
-          <a:p>
-            <a:r>
-              <a:rPr lang="de-DE" dirty="0" err="1"/>
-              <a:t>z</a:t>
-            </a:r>
-            <a:r>
-              <a:rPr lang="de-DE" dirty="0"/>
-              <a:t> = </a:t>
-            </a:r>
-            <a:r>
-              <a:rPr lang="de-DE" dirty="0" err="1"/>
-              <a:t>e</a:t>
-            </a:r>
-            <a:r>
-              <a:rPr lang="de-DE" dirty="0"/>
-              <a:t>^{</a:t>
-            </a:r>
-            <a:r>
-              <a:rPr lang="de-DE" dirty="0" err="1"/>
-              <a:t>sT</a:t>
-            </a:r>
-            <a:r>
-              <a:rPr lang="de-DE" dirty="0"/>
-              <a:t>}</a:t>
-            </a:r>
-          </a:p>
-        </p:txBody>
-      </p:sp>
+      <mc:AlternateContent xmlns:mc="http://schemas.openxmlformats.org/markup-compatibility/2006">
+        <mc:Choice xmlns:a14="http://schemas.microsoft.com/office/drawing/2010/main" Requires="a14">
+          <p:sp>
+            <p:nvSpPr>
+              <p:cNvPr id="3" name="Inhaltsplatzhalter 2">
+                <a:extLst>
+                  <a:ext uri="{FF2B5EF4-FFF2-40B4-BE49-F238E27FC236}">
+                    <a16:creationId xmlns:a16="http://schemas.microsoft.com/office/drawing/2014/main" id="{8A098AEA-3D94-690F-6D1B-9AC99359E4F3}"/>
+                  </a:ext>
+                </a:extLst>
+              </p:cNvPr>
+              <p:cNvSpPr>
+                <a:spLocks noGrp="1"/>
+              </p:cNvSpPr>
+              <p:nvPr>
+                <p:ph idx="1"/>
+              </p:nvPr>
+            </p:nvSpPr>
+            <p:spPr/>
+            <p:txBody>
+              <a:bodyPr/>
+              <a:lstStyle/>
+              <a:p>
+                <a:pPr marL="0" indent="0">
+                  <a:buNone/>
+                </a:pPr>
+                <a:r>
+                  <a:rPr lang="de-DE" dirty="0"/>
+                  <a:t>Relation: </a:t>
+                </a:r>
+                <a14:m>
+                  <m:oMath xmlns:m="http://schemas.openxmlformats.org/officeDocument/2006/math">
+                    <m:r>
+                      <a:rPr lang="de-DE" b="0" i="1" smtClean="0">
+                        <a:latin typeface="Cambria Math" panose="02040503050406030204" pitchFamily="18" charset="0"/>
+                      </a:rPr>
+                      <m:t>𝑧</m:t>
+                    </m:r>
+                    <m:r>
+                      <a:rPr lang="de-DE" b="0" i="1" smtClean="0">
+                        <a:latin typeface="Cambria Math" panose="02040503050406030204" pitchFamily="18" charset="0"/>
+                      </a:rPr>
+                      <m:t>=</m:t>
+                    </m:r>
+                    <m:sSup>
+                      <m:sSupPr>
+                        <m:ctrlPr>
+                          <a:rPr lang="de-DE" b="0" i="1" smtClean="0">
+                            <a:latin typeface="Cambria Math" panose="02040503050406030204" pitchFamily="18" charset="0"/>
+                          </a:rPr>
+                        </m:ctrlPr>
+                      </m:sSupPr>
+                      <m:e>
+                        <m:r>
+                          <a:rPr lang="de-DE" b="0" i="1" smtClean="0">
+                            <a:latin typeface="Cambria Math" panose="02040503050406030204" pitchFamily="18" charset="0"/>
+                          </a:rPr>
+                          <m:t>𝑒</m:t>
+                        </m:r>
+                      </m:e>
+                      <m:sup>
+                        <m:r>
+                          <a:rPr lang="de-DE" b="0" i="1" smtClean="0">
+                            <a:latin typeface="Cambria Math" panose="02040503050406030204" pitchFamily="18" charset="0"/>
+                          </a:rPr>
+                          <m:t>𝑠𝑡</m:t>
+                        </m:r>
+                      </m:sup>
+                    </m:sSup>
+                  </m:oMath>
+                </a14:m>
+                <a:endParaRPr lang="de-DE" dirty="0"/>
+              </a:p>
+            </p:txBody>
+          </p:sp>
+        </mc:Choice>
+        <mc:Fallback>
+          <p:sp>
+            <p:nvSpPr>
+              <p:cNvPr id="3" name="Inhaltsplatzhalter 2">
+                <a:extLst>
+                  <a:ext uri="{FF2B5EF4-FFF2-40B4-BE49-F238E27FC236}">
+                    <a16:creationId xmlns:a16="http://schemas.microsoft.com/office/drawing/2014/main" id="{8A098AEA-3D94-690F-6D1B-9AC99359E4F3}"/>
+                  </a:ext>
+                </a:extLst>
+              </p:cNvPr>
+              <p:cNvSpPr>
+                <a:spLocks noGrp="1" noRot="1" noChangeAspect="1" noMove="1" noResize="1" noEditPoints="1" noAdjustHandles="1" noChangeArrowheads="1" noChangeShapeType="1" noTextEdit="1"/>
+              </p:cNvSpPr>
+              <p:nvPr>
+                <p:ph idx="1"/>
+              </p:nvPr>
+            </p:nvSpPr>
+            <p:spPr>
+              <a:blipFill>
+                <a:blip r:embed="rId2"/>
+                <a:stretch>
+                  <a:fillRect l="-1206" t="-2326"/>
+                </a:stretch>
+              </a:blipFill>
+            </p:spPr>
+            <p:txBody>
+              <a:bodyPr/>
+              <a:lstStyle/>
+              <a:p>
+                <a:r>
+                  <a:rPr lang="de-DE">
+                    <a:noFill/>
+                  </a:rPr>
+                  <a:t> </a:t>
+                </a:r>
+              </a:p>
+            </p:txBody>
+          </p:sp>
+        </mc:Fallback>
+      </mc:AlternateContent>
       <p:sp>
         <p:nvSpPr>
           <p:cNvPr id="4" name="Foliennummernplatzhalter 3">
@@ -14120,6 +14178,36 @@
           </a:p>
         </p:txBody>
       </p:sp>
+      <p:pic>
+        <p:nvPicPr>
+          <p:cNvPr id="7" name="Grafik 6">
+            <a:extLst>
+              <a:ext uri="{FF2B5EF4-FFF2-40B4-BE49-F238E27FC236}">
+                <a16:creationId xmlns:a16="http://schemas.microsoft.com/office/drawing/2014/main" id="{54A30DB2-44CF-6D11-AD01-903F3A9DDB6C}"/>
+              </a:ext>
+            </a:extLst>
+          </p:cNvPr>
+          <p:cNvPicPr>
+            <a:picLocks noChangeAspect="1"/>
+          </p:cNvPicPr>
+          <p:nvPr/>
+        </p:nvPicPr>
+        <p:blipFill>
+          <a:blip r:embed="rId3"/>
+          <a:stretch>
+            <a:fillRect/>
+          </a:stretch>
+        </p:blipFill>
+        <p:spPr>
+          <a:xfrm>
+            <a:off x="1329206" y="2413000"/>
+            <a:ext cx="9533588" cy="4079875"/>
+          </a:xfrm>
+          <a:prstGeom prst="rect">
+            <a:avLst/>
+          </a:prstGeom>
+        </p:spPr>
+      </p:pic>
     </p:spTree>
     <p:extLst>
       <p:ext uri="{BB962C8B-B14F-4D97-AF65-F5344CB8AC3E}">
@@ -14155,7 +14243,7 @@
           <p:cNvPr id="2" name="Titel 1">
             <a:extLst>
               <a:ext uri="{FF2B5EF4-FFF2-40B4-BE49-F238E27FC236}">
-                <a16:creationId xmlns:a16="http://schemas.microsoft.com/office/drawing/2014/main" id="{30ADDD21-7738-55E6-EA8C-D8F54A42799D}"/>
+                <a16:creationId xmlns:a16="http://schemas.microsoft.com/office/drawing/2014/main" id="{A150C91F-7B71-019B-8D54-371DC7F558C8}"/>
               </a:ext>
             </a:extLst>
           </p:cNvPr>
@@ -14173,119 +14261,592 @@
           <a:p>
             <a:r>
               <a:rPr lang="de-DE" dirty="0"/>
-              <a:t>Mapping Insight</a:t>
-            </a:r>
+              <a:t>ZOH </a:t>
+            </a:r>
+            <a:r>
+              <a:rPr lang="de-DE" dirty="0" err="1"/>
+              <a:t>Equivalent</a:t>
+            </a:r>
+            <a:r>
+              <a:rPr lang="de-DE" dirty="0"/>
+              <a:t> </a:t>
+            </a:r>
+            <a:r>
+              <a:rPr lang="de-DE" dirty="0" err="1"/>
+              <a:t>Discretization</a:t>
+            </a:r>
+            <a:endParaRPr lang="de-DE" dirty="0"/>
           </a:p>
         </p:txBody>
       </p:sp>
-      <p:sp>
-        <p:nvSpPr>
-          <p:cNvPr id="3" name="Inhaltsplatzhalter 2">
-            <a:extLst>
-              <a:ext uri="{FF2B5EF4-FFF2-40B4-BE49-F238E27FC236}">
-                <a16:creationId xmlns:a16="http://schemas.microsoft.com/office/drawing/2014/main" id="{6A3740CA-DD6C-7618-E642-D223D34007A0}"/>
-              </a:ext>
-            </a:extLst>
-          </p:cNvPr>
-          <p:cNvSpPr>
-            <a:spLocks noGrp="1"/>
-          </p:cNvSpPr>
-          <p:nvPr>
-            <p:ph idx="1"/>
-          </p:nvPr>
-        </p:nvSpPr>
-        <p:spPr/>
-        <p:txBody>
-          <a:bodyPr/>
-          <a:lstStyle/>
-          <a:p>
-            <a:r>
-              <a:rPr lang="de-DE" dirty="0" err="1"/>
-              <a:t>Left</a:t>
-            </a:r>
-            <a:r>
-              <a:rPr lang="de-DE" dirty="0"/>
-              <a:t> half-plane → </a:t>
-            </a:r>
-            <a:r>
-              <a:rPr lang="de-DE" dirty="0" err="1"/>
-              <a:t>inside</a:t>
-            </a:r>
-            <a:r>
-              <a:rPr lang="de-DE" dirty="0"/>
-              <a:t> </a:t>
-            </a:r>
-            <a:r>
-              <a:rPr lang="de-DE" dirty="0" err="1"/>
-              <a:t>unit</a:t>
-            </a:r>
-            <a:r>
-              <a:rPr lang="de-DE" dirty="0"/>
-              <a:t> </a:t>
-            </a:r>
-            <a:r>
-              <a:rPr lang="de-DE" dirty="0" err="1"/>
-              <a:t>circle</a:t>
-            </a:r>
-            <a:endParaRPr lang="de-DE" dirty="0"/>
-          </a:p>
-          <a:p>
-            <a:r>
-              <a:rPr lang="de-DE" dirty="0"/>
-              <a:t>Right half-plane → outside</a:t>
-            </a:r>
-            <a:br>
-              <a:rPr lang="de-DE" dirty="0"/>
-            </a:br>
-            <a:endParaRPr lang="de-DE" dirty="0"/>
-          </a:p>
-          <a:p>
-            <a:pPr marL="0" indent="0">
-              <a:buNone/>
-            </a:pPr>
-            <a:r>
-              <a:rPr lang="de-DE" dirty="0"/>
-              <a:t>Plot:</a:t>
-            </a:r>
-          </a:p>
-          <a:p>
-            <a:r>
-              <a:rPr lang="de-DE" dirty="0"/>
-              <a:t>s-plane </a:t>
-            </a:r>
-            <a:r>
-              <a:rPr lang="de-DE" dirty="0" err="1"/>
-              <a:t>mapped</a:t>
-            </a:r>
-            <a:r>
-              <a:rPr lang="de-DE" dirty="0"/>
-              <a:t> </a:t>
-            </a:r>
-            <a:r>
-              <a:rPr lang="de-DE" dirty="0" err="1"/>
-              <a:t>to</a:t>
-            </a:r>
-            <a:r>
-              <a:rPr lang="de-DE" dirty="0"/>
-              <a:t> </a:t>
-            </a:r>
-            <a:r>
-              <a:rPr lang="de-DE" dirty="0" err="1"/>
-              <a:t>z</a:t>
-            </a:r>
-            <a:r>
-              <a:rPr lang="de-DE" dirty="0"/>
-              <a:t>-plane</a:t>
-            </a:r>
-          </a:p>
-        </p:txBody>
-      </p:sp>
+      <mc:AlternateContent xmlns:mc="http://schemas.openxmlformats.org/markup-compatibility/2006">
+        <mc:Choice xmlns:a14="http://schemas.microsoft.com/office/drawing/2010/main" Requires="a14">
+          <p:sp>
+            <p:nvSpPr>
+              <p:cNvPr id="3" name="Inhaltsplatzhalter 2">
+                <a:extLst>
+                  <a:ext uri="{FF2B5EF4-FFF2-40B4-BE49-F238E27FC236}">
+                    <a16:creationId xmlns:a16="http://schemas.microsoft.com/office/drawing/2014/main" id="{F0064A3B-B62B-C624-2470-28812383F697}"/>
+                  </a:ext>
+                </a:extLst>
+              </p:cNvPr>
+              <p:cNvSpPr>
+                <a:spLocks noGrp="1"/>
+              </p:cNvSpPr>
+              <p:nvPr>
+                <p:ph idx="1"/>
+              </p:nvPr>
+            </p:nvSpPr>
+            <p:spPr/>
+            <p:txBody>
+              <a:bodyPr>
+                <a:normAutofit lnSpcReduction="10000"/>
+              </a:bodyPr>
+              <a:lstStyle/>
+              <a:p>
+                <a:pPr marL="0" indent="0">
+                  <a:buNone/>
+                </a:pPr>
+                <a:r>
+                  <a:rPr lang="de-DE" dirty="0"/>
+                  <a:t>Goal: </a:t>
+                </a:r>
+                <a:r>
+                  <a:rPr lang="de-DE" dirty="0" err="1"/>
+                  <a:t>direct</a:t>
+                </a:r>
+                <a:r>
+                  <a:rPr lang="de-DE" dirty="0"/>
+                  <a:t> </a:t>
+                </a:r>
+                <a:r>
+                  <a:rPr lang="de-DE" dirty="0" err="1"/>
+                  <a:t>mapping</a:t>
+                </a:r>
+                <a:r>
+                  <a:rPr lang="de-DE" dirty="0"/>
+                  <a:t>	</a:t>
+                </a:r>
+                <a14:m>
+                  <m:oMath xmlns:m="http://schemas.openxmlformats.org/officeDocument/2006/math">
+                    <m:r>
+                      <a:rPr lang="de-DE" i="1">
+                        <a:latin typeface="Cambria Math" panose="02040503050406030204" pitchFamily="18" charset="0"/>
+                      </a:rPr>
+                      <m:t>𝑢</m:t>
+                    </m:r>
+                    <m:d>
+                      <m:dPr>
+                        <m:begChr m:val="["/>
+                        <m:endChr m:val="]"/>
+                        <m:ctrlPr>
+                          <a:rPr lang="de-DE" i="1">
+                            <a:latin typeface="Cambria Math" panose="02040503050406030204" pitchFamily="18" charset="0"/>
+                          </a:rPr>
+                        </m:ctrlPr>
+                      </m:dPr>
+                      <m:e>
+                        <m:r>
+                          <a:rPr lang="de-DE" i="1">
+                            <a:latin typeface="Cambria Math" panose="02040503050406030204" pitchFamily="18" charset="0"/>
+                          </a:rPr>
+                          <m:t>𝑘</m:t>
+                        </m:r>
+                      </m:e>
+                    </m:d>
+                    <m:r>
+                      <a:rPr lang="de-DE" i="1">
+                        <a:latin typeface="Cambria Math" panose="02040503050406030204" pitchFamily="18" charset="0"/>
+                        <a:ea typeface="Cambria Math" panose="02040503050406030204" pitchFamily="18" charset="0"/>
+                      </a:rPr>
+                      <m:t>→</m:t>
+                    </m:r>
+                    <m:r>
+                      <a:rPr lang="de-DE" i="1">
+                        <a:latin typeface="Cambria Math" panose="02040503050406030204" pitchFamily="18" charset="0"/>
+                      </a:rPr>
+                      <m:t>𝑦</m:t>
+                    </m:r>
+                    <m:d>
+                      <m:dPr>
+                        <m:begChr m:val="["/>
+                        <m:endChr m:val="]"/>
+                        <m:ctrlPr>
+                          <a:rPr lang="de-DE" i="1">
+                            <a:latin typeface="Cambria Math" panose="02040503050406030204" pitchFamily="18" charset="0"/>
+                          </a:rPr>
+                        </m:ctrlPr>
+                      </m:dPr>
+                      <m:e>
+                        <m:r>
+                          <a:rPr lang="de-DE" i="1">
+                            <a:latin typeface="Cambria Math" panose="02040503050406030204" pitchFamily="18" charset="0"/>
+                          </a:rPr>
+                          <m:t>𝑘</m:t>
+                        </m:r>
+                      </m:e>
+                    </m:d>
+                  </m:oMath>
+                </a14:m>
+                <a:endParaRPr lang="de-DE" dirty="0"/>
+              </a:p>
+              <a:p>
+                <a:pPr marL="0" indent="0">
+                  <a:buNone/>
+                </a:pPr>
+                <a:endParaRPr lang="de-DE" dirty="0"/>
+              </a:p>
+              <a:p>
+                <a:pPr marL="0" indent="0">
+                  <a:buNone/>
+                </a:pPr>
+                <a:r>
+                  <a:rPr lang="de-DE" dirty="0" err="1"/>
+                  <a:t>Steps</a:t>
+                </a:r>
+                <a:r>
+                  <a:rPr lang="de-DE" dirty="0"/>
+                  <a:t>:	</a:t>
+                </a:r>
+                <a14:m>
+                  <m:oMath xmlns:m="http://schemas.openxmlformats.org/officeDocument/2006/math">
+                    <m:r>
+                      <a:rPr lang="de-DE" i="1">
+                        <a:latin typeface="Cambria Math" panose="02040503050406030204" pitchFamily="18" charset="0"/>
+                      </a:rPr>
+                      <m:t>𝑢</m:t>
+                    </m:r>
+                    <m:d>
+                      <m:dPr>
+                        <m:begChr m:val="["/>
+                        <m:endChr m:val="]"/>
+                        <m:ctrlPr>
+                          <a:rPr lang="de-DE" i="1">
+                            <a:latin typeface="Cambria Math" panose="02040503050406030204" pitchFamily="18" charset="0"/>
+                          </a:rPr>
+                        </m:ctrlPr>
+                      </m:dPr>
+                      <m:e>
+                        <m:r>
+                          <a:rPr lang="de-DE" i="1">
+                            <a:latin typeface="Cambria Math" panose="02040503050406030204" pitchFamily="18" charset="0"/>
+                          </a:rPr>
+                          <m:t>𝑘</m:t>
+                        </m:r>
+                      </m:e>
+                    </m:d>
+                    <m:groupChr>
+                      <m:groupChrPr>
+                        <m:chr m:val="→"/>
+                        <m:vertJc m:val="bot"/>
+                        <m:ctrlPr>
+                          <a:rPr lang="de-DE" i="1" smtClean="0">
+                            <a:latin typeface="Cambria Math" panose="02040503050406030204" pitchFamily="18" charset="0"/>
+                          </a:rPr>
+                        </m:ctrlPr>
+                      </m:groupChrPr>
+                      <m:e>
+                        <m:r>
+                          <m:rPr>
+                            <m:sty m:val="p"/>
+                            <m:brk m:alnAt="2"/>
+                          </m:rPr>
+                          <a:rPr lang="de-DE" b="0" i="0" smtClean="0">
+                            <a:latin typeface="Cambria Math" panose="02040503050406030204" pitchFamily="18" charset="0"/>
+                          </a:rPr>
+                          <m:t>ZOH</m:t>
+                        </m:r>
+                      </m:e>
+                    </m:groupChr>
+                    <m:r>
+                      <a:rPr lang="de-DE" i="1">
+                        <a:latin typeface="Cambria Math" panose="02040503050406030204" pitchFamily="18" charset="0"/>
+                      </a:rPr>
+                      <m:t>𝑢</m:t>
+                    </m:r>
+                    <m:r>
+                      <a:rPr lang="de-DE" b="0" i="1" smtClean="0">
+                        <a:latin typeface="Cambria Math" panose="02040503050406030204" pitchFamily="18" charset="0"/>
+                      </a:rPr>
+                      <m:t>(</m:t>
+                    </m:r>
+                    <m:r>
+                      <a:rPr lang="de-DE" b="0" i="1" smtClean="0">
+                        <a:latin typeface="Cambria Math" panose="02040503050406030204" pitchFamily="18" charset="0"/>
+                      </a:rPr>
+                      <m:t>𝑡</m:t>
+                    </m:r>
+                    <m:r>
+                      <a:rPr lang="de-DE" b="0" i="1" smtClean="0">
+                        <a:latin typeface="Cambria Math" panose="02040503050406030204" pitchFamily="18" charset="0"/>
+                      </a:rPr>
+                      <m:t>)</m:t>
+                    </m:r>
+                    <m:groupChr>
+                      <m:groupChrPr>
+                        <m:chr m:val="→"/>
+                        <m:vertJc m:val="bot"/>
+                        <m:ctrlPr>
+                          <a:rPr lang="de-DE" b="0" i="1" smtClean="0">
+                            <a:latin typeface="Cambria Math" panose="02040503050406030204" pitchFamily="18" charset="0"/>
+                          </a:rPr>
+                        </m:ctrlPr>
+                      </m:groupChrPr>
+                      <m:e>
+                        <m:r>
+                          <m:rPr>
+                            <m:brk m:alnAt="2"/>
+                          </m:rPr>
+                          <a:rPr lang="de-DE" b="0" i="1" smtClean="0">
+                            <a:latin typeface="Cambria Math" panose="02040503050406030204" pitchFamily="18" charset="0"/>
+                          </a:rPr>
+                          <m:t>𝐺</m:t>
+                        </m:r>
+                        <m:r>
+                          <a:rPr lang="de-DE" b="0" i="1" smtClean="0">
+                            <a:latin typeface="Cambria Math" panose="02040503050406030204" pitchFamily="18" charset="0"/>
+                          </a:rPr>
+                          <m:t>(</m:t>
+                        </m:r>
+                        <m:r>
+                          <a:rPr lang="de-DE" b="0" i="1" smtClean="0">
+                            <a:latin typeface="Cambria Math" panose="02040503050406030204" pitchFamily="18" charset="0"/>
+                          </a:rPr>
+                          <m:t>𝑠</m:t>
+                        </m:r>
+                        <m:r>
+                          <a:rPr lang="de-DE" b="0" i="1" smtClean="0">
+                            <a:latin typeface="Cambria Math" panose="02040503050406030204" pitchFamily="18" charset="0"/>
+                          </a:rPr>
+                          <m:t>)</m:t>
+                        </m:r>
+                      </m:e>
+                    </m:groupChr>
+                    <m:r>
+                      <a:rPr lang="de-DE" b="0" i="1" smtClean="0">
+                        <a:latin typeface="Cambria Math" panose="02040503050406030204" pitchFamily="18" charset="0"/>
+                      </a:rPr>
+                      <m:t>𝑦</m:t>
+                    </m:r>
+                    <m:r>
+                      <a:rPr lang="de-DE" b="0" i="1" smtClean="0">
+                        <a:latin typeface="Cambria Math" panose="02040503050406030204" pitchFamily="18" charset="0"/>
+                      </a:rPr>
+                      <m:t>(</m:t>
+                    </m:r>
+                    <m:r>
+                      <a:rPr lang="de-DE" b="0" i="1" smtClean="0">
+                        <a:latin typeface="Cambria Math" panose="02040503050406030204" pitchFamily="18" charset="0"/>
+                      </a:rPr>
+                      <m:t>𝑡</m:t>
+                    </m:r>
+                    <m:r>
+                      <a:rPr lang="de-DE" b="0" i="1" smtClean="0">
+                        <a:latin typeface="Cambria Math" panose="02040503050406030204" pitchFamily="18" charset="0"/>
+                      </a:rPr>
+                      <m:t>)</m:t>
+                    </m:r>
+                    <m:groupChr>
+                      <m:groupChrPr>
+                        <m:chr m:val="→"/>
+                        <m:vertJc m:val="bot"/>
+                        <m:ctrlPr>
+                          <a:rPr lang="de-DE" b="0" i="1" smtClean="0">
+                            <a:latin typeface="Cambria Math" panose="02040503050406030204" pitchFamily="18" charset="0"/>
+                          </a:rPr>
+                        </m:ctrlPr>
+                      </m:groupChrPr>
+                      <m:e>
+                        <m:r>
+                          <m:rPr>
+                            <m:sty m:val="p"/>
+                            <m:brk m:alnAt="2"/>
+                          </m:rPr>
+                          <a:rPr lang="de-DE" b="0" i="0" smtClean="0">
+                            <a:latin typeface="Cambria Math" panose="02040503050406030204" pitchFamily="18" charset="0"/>
+                          </a:rPr>
+                          <m:t>sampling</m:t>
+                        </m:r>
+                      </m:e>
+                    </m:groupChr>
+                    <m:r>
+                      <a:rPr lang="de-DE" b="0" i="1" smtClean="0">
+                        <a:latin typeface="Cambria Math" panose="02040503050406030204" pitchFamily="18" charset="0"/>
+                      </a:rPr>
+                      <m:t>𝑦</m:t>
+                    </m:r>
+                    <m:d>
+                      <m:dPr>
+                        <m:begChr m:val="["/>
+                        <m:endChr m:val="]"/>
+                        <m:ctrlPr>
+                          <a:rPr lang="de-DE" i="1">
+                            <a:latin typeface="Cambria Math" panose="02040503050406030204" pitchFamily="18" charset="0"/>
+                          </a:rPr>
+                        </m:ctrlPr>
+                      </m:dPr>
+                      <m:e>
+                        <m:r>
+                          <a:rPr lang="de-DE" i="1">
+                            <a:latin typeface="Cambria Math" panose="02040503050406030204" pitchFamily="18" charset="0"/>
+                          </a:rPr>
+                          <m:t>𝑘</m:t>
+                        </m:r>
+                      </m:e>
+                    </m:d>
+                  </m:oMath>
+                </a14:m>
+                <a:endParaRPr lang="de-DE" dirty="0"/>
+              </a:p>
+              <a:p>
+                <a:pPr marL="0" indent="0">
+                  <a:buNone/>
+                </a:pPr>
+                <a:endParaRPr lang="de-DE" dirty="0"/>
+              </a:p>
+              <a:p>
+                <a:pPr marL="0" indent="0">
+                  <a:buNone/>
+                </a:pPr>
+                <a:r>
+                  <a:rPr lang="de-DE" dirty="0"/>
+                  <a:t>ZOH </a:t>
+                </a:r>
+                <a:r>
+                  <a:rPr lang="de-DE" dirty="0" err="1"/>
+                  <a:t>modifies</a:t>
+                </a:r>
+                <a:r>
+                  <a:rPr lang="de-DE" dirty="0"/>
+                  <a:t> </a:t>
+                </a:r>
+                <a:r>
+                  <a:rPr lang="de-DE" dirty="0" err="1"/>
+                  <a:t>input</a:t>
+                </a:r>
+                <a:r>
+                  <a:rPr lang="de-DE" dirty="0"/>
+                  <a:t> </a:t>
+                </a:r>
+                <a:r>
+                  <a:rPr lang="de-DE" dirty="0" err="1"/>
+                  <a:t>as</a:t>
+                </a:r>
+                <a:r>
+                  <a:rPr lang="de-DE" dirty="0"/>
+                  <a:t> </a:t>
+                </a:r>
+                <a:r>
+                  <a:rPr lang="de-DE" dirty="0" err="1"/>
+                  <a:t>seen</a:t>
+                </a:r>
+                <a:r>
+                  <a:rPr lang="de-DE" dirty="0"/>
+                  <a:t> </a:t>
+                </a:r>
+                <a:r>
+                  <a:rPr lang="de-DE" dirty="0" err="1"/>
+                  <a:t>by</a:t>
+                </a:r>
+                <a:r>
+                  <a:rPr lang="de-DE" dirty="0"/>
+                  <a:t> </a:t>
+                </a:r>
+                <a:r>
+                  <a:rPr lang="de-DE" dirty="0" err="1"/>
+                  <a:t>the</a:t>
+                </a:r>
+                <a:r>
+                  <a:rPr lang="de-DE" dirty="0"/>
+                  <a:t> plant</a:t>
+                </a:r>
+              </a:p>
+              <a:p>
+                <a:pPr marL="0" indent="0">
+                  <a:buNone/>
+                </a:pPr>
+                <a:endParaRPr lang="de-DE" b="1" dirty="0"/>
+              </a:p>
+              <a:p>
+                <a:pPr marL="0" indent="0">
+                  <a:buNone/>
+                </a:pPr>
+                <a:r>
+                  <a:rPr lang="de-DE" dirty="0"/>
+                  <a:t>ZOH </a:t>
+                </a:r>
+                <a:r>
+                  <a:rPr lang="de-DE" dirty="0" err="1"/>
+                  <a:t>equivalent</a:t>
+                </a:r>
+                <a:r>
+                  <a:rPr lang="de-DE" dirty="0"/>
+                  <a:t> </a:t>
+                </a:r>
+                <a:r>
+                  <a:rPr lang="de-DE" dirty="0" err="1"/>
+                  <a:t>discretization</a:t>
+                </a:r>
+                <a:r>
+                  <a:rPr lang="de-DE" dirty="0"/>
+                  <a:t>:</a:t>
+                </a:r>
+              </a:p>
+              <a:p>
+                <a:pPr marL="0" indent="0">
+                  <a:buNone/>
+                </a:pPr>
+                <a:r>
+                  <a:rPr lang="de-DE" dirty="0" err="1"/>
+                  <a:t>Discrete</a:t>
+                </a:r>
+                <a:r>
+                  <a:rPr lang="de-DE" dirty="0"/>
+                  <a:t>-time </a:t>
+                </a:r>
+                <a:r>
+                  <a:rPr lang="de-DE" dirty="0" err="1"/>
+                  <a:t>system</a:t>
+                </a:r>
+                <a:r>
+                  <a:rPr lang="de-DE" dirty="0"/>
+                  <a:t> </a:t>
+                </a:r>
+                <a:r>
+                  <a:rPr lang="de-DE" dirty="0" err="1"/>
+                  <a:t>that</a:t>
+                </a:r>
+                <a:r>
+                  <a:rPr lang="de-DE" dirty="0"/>
+                  <a:t> </a:t>
+                </a:r>
+                <a:r>
+                  <a:rPr lang="de-DE" dirty="0" err="1"/>
+                  <a:t>produces</a:t>
+                </a:r>
+                <a:r>
+                  <a:rPr lang="de-DE" dirty="0"/>
+                  <a:t> </a:t>
+                </a:r>
+                <a:r>
+                  <a:rPr lang="de-DE" dirty="0" err="1"/>
+                  <a:t>exactly</a:t>
+                </a:r>
+                <a:r>
+                  <a:rPr lang="de-DE" dirty="0"/>
+                  <a:t> </a:t>
+                </a:r>
+                <a:r>
+                  <a:rPr lang="de-DE" dirty="0" err="1"/>
+                  <a:t>the</a:t>
+                </a:r>
+                <a:r>
+                  <a:rPr lang="de-DE" dirty="0"/>
+                  <a:t> same </a:t>
+                </a:r>
+                <a:r>
+                  <a:rPr lang="de-DE" dirty="0" err="1"/>
+                  <a:t>sampled</a:t>
+                </a:r>
+                <a:r>
+                  <a:rPr lang="de-DE" dirty="0"/>
+                  <a:t> </a:t>
+                </a:r>
+                <a:r>
+                  <a:rPr lang="de-DE" dirty="0" err="1"/>
+                  <a:t>output</a:t>
+                </a:r>
+                <a:r>
+                  <a:rPr lang="de-DE" dirty="0"/>
+                  <a:t> </a:t>
+                </a:r>
+                <a:r>
+                  <a:rPr lang="de-DE" dirty="0" err="1"/>
+                  <a:t>as</a:t>
+                </a:r>
+                <a:r>
+                  <a:rPr lang="de-DE" dirty="0"/>
+                  <a:t> </a:t>
+                </a:r>
+                <a:r>
+                  <a:rPr lang="de-DE" dirty="0" err="1"/>
+                  <a:t>the</a:t>
+                </a:r>
+                <a:r>
+                  <a:rPr lang="de-DE" dirty="0"/>
+                  <a:t> </a:t>
+                </a:r>
+                <a:r>
+                  <a:rPr lang="de-DE" dirty="0" err="1"/>
+                  <a:t>continuous</a:t>
+                </a:r>
+                <a:r>
+                  <a:rPr lang="de-DE" dirty="0"/>
+                  <a:t>-time plant </a:t>
+                </a:r>
+                <a:r>
+                  <a:rPr lang="de-DE" dirty="0" err="1"/>
+                  <a:t>under</a:t>
+                </a:r>
+                <a:r>
+                  <a:rPr lang="de-DE" dirty="0"/>
+                  <a:t> ZOH </a:t>
+                </a:r>
+                <a:r>
+                  <a:rPr lang="de-DE" dirty="0" err="1"/>
+                  <a:t>input</a:t>
+                </a:r>
+                <a:endParaRPr lang="de-DE" dirty="0"/>
+              </a:p>
+            </p:txBody>
+          </p:sp>
+        </mc:Choice>
+        <mc:Fallback>
+          <p:sp>
+            <p:nvSpPr>
+              <p:cNvPr id="3" name="Inhaltsplatzhalter 2">
+                <a:extLst>
+                  <a:ext uri="{FF2B5EF4-FFF2-40B4-BE49-F238E27FC236}">
+                    <a16:creationId xmlns:a16="http://schemas.microsoft.com/office/drawing/2014/main" id="{F0064A3B-B62B-C624-2470-28812383F697}"/>
+                  </a:ext>
+                </a:extLst>
+              </p:cNvPr>
+              <p:cNvSpPr>
+                <a:spLocks noGrp="1" noRot="1" noChangeAspect="1" noMove="1" noResize="1" noEditPoints="1" noAdjustHandles="1" noChangeArrowheads="1" noChangeShapeType="1" noTextEdit="1"/>
+              </p:cNvSpPr>
+              <p:nvPr>
+                <p:ph idx="1"/>
+              </p:nvPr>
+            </p:nvSpPr>
+            <p:spPr>
+              <a:blipFill>
+                <a:blip r:embed="rId2"/>
+                <a:stretch>
+                  <a:fillRect l="-1206" t="-3198" b="-581"/>
+                </a:stretch>
+              </a:blipFill>
+            </p:spPr>
+            <p:txBody>
+              <a:bodyPr/>
+              <a:lstStyle/>
+              <a:p>
+                <a:r>
+                  <a:rPr lang="de-DE">
+                    <a:noFill/>
+                  </a:rPr>
+                  <a:t> </a:t>
+                </a:r>
+              </a:p>
+            </p:txBody>
+          </p:sp>
+        </mc:Fallback>
+      </mc:AlternateContent>
       <p:sp>
         <p:nvSpPr>
           <p:cNvPr id="4" name="Foliennummernplatzhalter 3">
             <a:extLst>
               <a:ext uri="{FF2B5EF4-FFF2-40B4-BE49-F238E27FC236}">
-                <a16:creationId xmlns:a16="http://schemas.microsoft.com/office/drawing/2014/main" id="{B25C9A42-B536-1345-92B5-F23E8A0F728B}"/>
+                <a16:creationId xmlns:a16="http://schemas.microsoft.com/office/drawing/2014/main" id="{CD2B7F34-CD61-7C91-E7F0-FD7BB70BA73F}"/>
               </a:ext>
             </a:extLst>
           </p:cNvPr>
@@ -14312,7 +14873,7 @@
     </p:spTree>
     <p:extLst>
       <p:ext uri="{BB962C8B-B14F-4D97-AF65-F5344CB8AC3E}">
-        <p14:creationId xmlns:p14="http://schemas.microsoft.com/office/powerpoint/2010/main" val="550617143"/>
+        <p14:creationId xmlns:p14="http://schemas.microsoft.com/office/powerpoint/2010/main" val="864202986"/>
       </p:ext>
     </p:extLst>
   </p:cSld>
@@ -14380,8 +14941,8 @@
           </a:p>
         </p:txBody>
       </p:sp>
-      <mc:AlternateContent xmlns:mc="http://schemas.openxmlformats.org/markup-compatibility/2006" xmlns:a14="http://schemas.microsoft.com/office/drawing/2010/main">
-        <mc:Choice Requires="a14">
+      <mc:AlternateContent xmlns:mc="http://schemas.openxmlformats.org/markup-compatibility/2006">
+        <mc:Choice xmlns:a14="http://schemas.microsoft.com/office/drawing/2010/main" Requires="a14">
           <p:sp>
             <p:nvSpPr>
               <p:cNvPr id="3" name="Inhaltsplatzhalter 2">
@@ -14398,24 +14959,91 @@
                 <p:ph idx="1"/>
               </p:nvPr>
             </p:nvSpPr>
-            <p:spPr/>
+            <p:spPr>
+              <a:xfrm>
+                <a:off x="838199" y="1825625"/>
+                <a:ext cx="11353801" cy="4351338"/>
+              </a:xfrm>
+            </p:spPr>
             <p:txBody>
-              <a:bodyPr/>
+              <a:bodyPr>
+                <a:normAutofit fontScale="92500" lnSpcReduction="10000"/>
+              </a:bodyPr>
               <a:lstStyle/>
               <a:p>
                 <a:pPr marL="0" indent="0">
                   <a:buNone/>
                 </a:pPr>
                 <a:r>
-                  <a:rPr lang="de-DE" dirty="0"/>
-                  <a:t>Discrete </a:t>
-                </a:r>
-                <a:r>
-                  <a:rPr lang="de-DE" dirty="0" err="1"/>
+                  <a:rPr lang="de-DE" sz="2600" dirty="0"/>
+                  <a:t>Converts a </a:t>
+                </a:r>
+                <a:r>
+                  <a:rPr lang="de-DE" sz="2600" dirty="0" err="1"/>
+                  <a:t>continuous</a:t>
+                </a:r>
+                <a:r>
+                  <a:rPr lang="de-DE" sz="2600" dirty="0"/>
+                  <a:t>-time plant </a:t>
+                </a:r>
+                <a14:m>
+                  <m:oMath xmlns:m="http://schemas.openxmlformats.org/officeDocument/2006/math">
+                    <m:r>
+                      <a:rPr lang="de-DE" sz="2600" i="1">
+                        <a:latin typeface="Cambria Math" panose="02040503050406030204" pitchFamily="18" charset="0"/>
+                        <a:ea typeface="Cambria Math" panose="02040503050406030204" pitchFamily="18" charset="0"/>
+                      </a:rPr>
+                      <m:t>𝐺</m:t>
+                    </m:r>
+                    <m:r>
+                      <a:rPr lang="de-DE" sz="2600" i="1">
+                        <a:latin typeface="Cambria Math" panose="02040503050406030204" pitchFamily="18" charset="0"/>
+                        <a:ea typeface="Cambria Math" panose="02040503050406030204" pitchFamily="18" charset="0"/>
+                      </a:rPr>
+                      <m:t>(</m:t>
+                    </m:r>
+                    <m:r>
+                      <a:rPr lang="de-DE" sz="2600" i="1">
+                        <a:latin typeface="Cambria Math" panose="02040503050406030204" pitchFamily="18" charset="0"/>
+                        <a:ea typeface="Cambria Math" panose="02040503050406030204" pitchFamily="18" charset="0"/>
+                      </a:rPr>
+                      <m:t>𝑠</m:t>
+                    </m:r>
+                    <m:r>
+                      <a:rPr lang="de-DE" sz="2600" i="1">
+                        <a:latin typeface="Cambria Math" panose="02040503050406030204" pitchFamily="18" charset="0"/>
+                        <a:ea typeface="Cambria Math" panose="02040503050406030204" pitchFamily="18" charset="0"/>
+                      </a:rPr>
+                      <m:t>)</m:t>
+                    </m:r>
+                  </m:oMath>
+                </a14:m>
+                <a:r>
+                  <a:rPr lang="de-DE" sz="2600" dirty="0"/>
+                  <a:t> </a:t>
+                </a:r>
+                <a:r>
+                  <a:rPr lang="de-DE" sz="2600" dirty="0" err="1"/>
+                  <a:t>into</a:t>
+                </a:r>
+                <a:r>
+                  <a:rPr lang="de-DE" sz="2600" dirty="0"/>
+                  <a:t> a </a:t>
+                </a:r>
+                <a:r>
+                  <a:rPr lang="de-DE" sz="2600" dirty="0" err="1"/>
+                  <a:t>discrete</a:t>
+                </a:r>
+                <a:r>
+                  <a:rPr lang="de-DE" sz="2600" dirty="0"/>
+                  <a:t>-time </a:t>
+                </a:r>
+                <a:r>
+                  <a:rPr lang="de-DE" sz="2600" dirty="0" err="1"/>
                   <a:t>equivalent</a:t>
                 </a:r>
                 <a:r>
-                  <a:rPr lang="de-DE" dirty="0"/>
+                  <a:rPr lang="de-DE" sz="2600" dirty="0"/>
                   <a:t>:</a:t>
                 </a:r>
               </a:p>
@@ -14424,13 +15052,13 @@
                   <a:buNone/>
                 </a:pPr>
                 <a:r>
-                  <a:rPr lang="de-DE" b="0" dirty="0"/>
+                  <a:rPr lang="de-DE" sz="2600" b="0" dirty="0"/>
                   <a:t>	</a:t>
                 </a:r>
                 <a14:m>
                   <m:oMath xmlns:m="http://schemas.openxmlformats.org/officeDocument/2006/math">
                     <m:r>
-                      <a:rPr lang="de-DE" b="0" i="1" smtClean="0">
+                      <a:rPr lang="de-DE" sz="2600" b="0" i="1" smtClean="0">
                         <a:latin typeface="Cambria Math" panose="02040503050406030204" pitchFamily="18" charset="0"/>
                       </a:rPr>
                       <m:t>𝐺</m:t>
@@ -14438,14 +15066,14 @@
                     <m:d>
                       <m:dPr>
                         <m:ctrlPr>
-                          <a:rPr lang="de-DE" b="0" i="1" smtClean="0">
+                          <a:rPr lang="de-DE" sz="2600" b="0" i="1" smtClean="0">
                             <a:latin typeface="Cambria Math" panose="02040503050406030204" pitchFamily="18" charset="0"/>
                           </a:rPr>
                         </m:ctrlPr>
                       </m:dPr>
                       <m:e>
                         <m:r>
-                          <a:rPr lang="de-DE" b="0" i="1" smtClean="0">
+                          <a:rPr lang="de-DE" sz="2600" b="0" i="1" smtClean="0">
                             <a:latin typeface="Cambria Math" panose="02040503050406030204" pitchFamily="18" charset="0"/>
                           </a:rPr>
                           <m:t>𝑧</m:t>
@@ -14453,13 +15081,13 @@
                       </m:e>
                     </m:d>
                     <m:r>
-                      <a:rPr lang="de-DE" b="0" i="1" smtClean="0">
+                      <a:rPr lang="de-DE" sz="2600" b="0" i="1" smtClean="0">
                         <a:latin typeface="Cambria Math" panose="02040503050406030204" pitchFamily="18" charset="0"/>
                       </a:rPr>
                       <m:t>=</m:t>
                     </m:r>
                     <m:r>
-                      <a:rPr lang="de-DE" i="1">
+                      <a:rPr lang="de-DE" sz="2600" i="1">
                         <a:latin typeface="Cambria Math" panose="02040503050406030204" pitchFamily="18" charset="0"/>
                         <a:ea typeface="Cambria Math" panose="02040503050406030204" pitchFamily="18" charset="0"/>
                       </a:rPr>
@@ -14470,7 +15098,7 @@
                         <m:begChr m:val="{"/>
                         <m:endChr m:val="}"/>
                         <m:ctrlPr>
-                          <a:rPr lang="de-DE" i="1">
+                          <a:rPr lang="de-DE" sz="2600" i="1">
                             <a:latin typeface="Cambria Math" panose="02040503050406030204" pitchFamily="18" charset="0"/>
                             <a:ea typeface="Cambria Math" panose="02040503050406030204" pitchFamily="18" charset="0"/>
                           </a:rPr>
@@ -14478,28 +15106,28 @@
                       </m:dPr>
                       <m:e>
                         <m:r>
-                          <a:rPr lang="de-DE" b="0" i="1" smtClean="0">
+                          <a:rPr lang="de-DE" sz="2600" b="0" i="1" smtClean="0">
                             <a:latin typeface="Cambria Math" panose="02040503050406030204" pitchFamily="18" charset="0"/>
                             <a:ea typeface="Cambria Math" panose="02040503050406030204" pitchFamily="18" charset="0"/>
                           </a:rPr>
                           <m:t>𝐺</m:t>
                         </m:r>
                         <m:r>
-                          <a:rPr lang="de-DE" b="0" i="1" smtClean="0">
+                          <a:rPr lang="de-DE" sz="2600" b="0" i="1" smtClean="0">
                             <a:latin typeface="Cambria Math" panose="02040503050406030204" pitchFamily="18" charset="0"/>
                             <a:ea typeface="Cambria Math" panose="02040503050406030204" pitchFamily="18" charset="0"/>
                           </a:rPr>
                           <m:t>(</m:t>
                         </m:r>
                         <m:r>
-                          <a:rPr lang="de-DE" b="0" i="1" smtClean="0">
+                          <a:rPr lang="de-DE" sz="2600" b="0" i="1" smtClean="0">
                             <a:latin typeface="Cambria Math" panose="02040503050406030204" pitchFamily="18" charset="0"/>
                             <a:ea typeface="Cambria Math" panose="02040503050406030204" pitchFamily="18" charset="0"/>
                           </a:rPr>
                           <m:t>𝑠</m:t>
                         </m:r>
                         <m:r>
-                          <a:rPr lang="de-DE" b="0" i="1" smtClean="0">
+                          <a:rPr lang="de-DE" sz="2600" b="0" i="1" smtClean="0">
                             <a:latin typeface="Cambria Math" panose="02040503050406030204" pitchFamily="18" charset="0"/>
                             <a:ea typeface="Cambria Math" panose="02040503050406030204" pitchFamily="18" charset="0"/>
                           </a:rPr>
@@ -14508,7 +15136,7 @@
                         <m:f>
                           <m:fPr>
                             <m:ctrlPr>
-                              <a:rPr lang="de-DE" b="0" i="1" smtClean="0">
+                              <a:rPr lang="de-DE" sz="2600" b="0" i="1" smtClean="0">
                                 <a:latin typeface="Cambria Math" panose="02040503050406030204" pitchFamily="18" charset="0"/>
                                 <a:ea typeface="Cambria Math" panose="02040503050406030204" pitchFamily="18" charset="0"/>
                               </a:rPr>
@@ -14516,7 +15144,7 @@
                           </m:fPr>
                           <m:num>
                             <m:r>
-                              <a:rPr lang="de-DE" b="0" i="1" smtClean="0">
+                              <a:rPr lang="de-DE" sz="2600" b="0" i="1" smtClean="0">
                                 <a:latin typeface="Cambria Math" panose="02040503050406030204" pitchFamily="18" charset="0"/>
                                 <a:ea typeface="Cambria Math" panose="02040503050406030204" pitchFamily="18" charset="0"/>
                               </a:rPr>
@@ -14525,7 +15153,7 @@
                             <m:sSup>
                               <m:sSupPr>
                                 <m:ctrlPr>
-                                  <a:rPr lang="de-DE" b="0" i="1" smtClean="0">
+                                  <a:rPr lang="de-DE" sz="2600" b="0" i="1" smtClean="0">
                                     <a:latin typeface="Cambria Math" panose="02040503050406030204" pitchFamily="18" charset="0"/>
                                     <a:ea typeface="Cambria Math" panose="02040503050406030204" pitchFamily="18" charset="0"/>
                                   </a:rPr>
@@ -14533,7 +15161,7 @@
                               </m:sSupPr>
                               <m:e>
                                 <m:r>
-                                  <a:rPr lang="de-DE" b="0" i="1" smtClean="0">
+                                  <a:rPr lang="de-DE" sz="2600" b="0" i="1" smtClean="0">
                                     <a:latin typeface="Cambria Math" panose="02040503050406030204" pitchFamily="18" charset="0"/>
                                     <a:ea typeface="Cambria Math" panose="02040503050406030204" pitchFamily="18" charset="0"/>
                                   </a:rPr>
@@ -14542,14 +15170,14 @@
                               </m:e>
                               <m:sup>
                                 <m:r>
-                                  <a:rPr lang="de-DE" b="0" i="1" smtClean="0">
+                                  <a:rPr lang="de-DE" sz="2600" b="0" i="1" smtClean="0">
                                     <a:latin typeface="Cambria Math" panose="02040503050406030204" pitchFamily="18" charset="0"/>
                                     <a:ea typeface="Cambria Math" panose="02040503050406030204" pitchFamily="18" charset="0"/>
                                   </a:rPr>
                                   <m:t>−</m:t>
                                 </m:r>
                                 <m:r>
-                                  <a:rPr lang="de-DE" b="0" i="1" smtClean="0">
+                                  <a:rPr lang="de-DE" sz="2600" b="0" i="1" smtClean="0">
                                     <a:latin typeface="Cambria Math" panose="02040503050406030204" pitchFamily="18" charset="0"/>
                                     <a:ea typeface="Cambria Math" panose="02040503050406030204" pitchFamily="18" charset="0"/>
                                   </a:rPr>
@@ -14560,7 +15188,7 @@
                           </m:num>
                           <m:den>
                             <m:r>
-                              <a:rPr lang="de-DE" b="0" i="1" smtClean="0">
+                              <a:rPr lang="de-DE" sz="2600" b="0" i="1" smtClean="0">
                                 <a:latin typeface="Cambria Math" panose="02040503050406030204" pitchFamily="18" charset="0"/>
                                 <a:ea typeface="Cambria Math" panose="02040503050406030204" pitchFamily="18" charset="0"/>
                               </a:rPr>
@@ -14572,12 +15200,439 @@
                     </m:d>
                   </m:oMath>
                 </a14:m>
-                <a:endParaRPr lang="de-DE" dirty="0"/>
+                <a:endParaRPr lang="de-DE" sz="2600" dirty="0"/>
+              </a:p>
+              <a:p>
+                <a:pPr marL="0" indent="0">
+                  <a:buNone/>
+                </a:pPr>
+                <a:endParaRPr lang="de-DE" sz="2600" dirty="0"/>
+              </a:p>
+              <a:p>
+                <a:pPr marL="0" indent="0">
+                  <a:buNone/>
+                </a:pPr>
+                <a:endParaRPr lang="de-DE" sz="2600" dirty="0"/>
+              </a:p>
+              <a:p>
+                <a:pPr marL="0" indent="0">
+                  <a:buNone/>
+                </a:pPr>
+                <a:endParaRPr lang="de-DE" sz="2600" dirty="0"/>
+              </a:p>
+              <a:p>
+                <a:pPr marL="0" indent="0">
+                  <a:buNone/>
+                </a:pPr>
+                <a:endParaRPr lang="de-DE" sz="2600" dirty="0"/>
+              </a:p>
+              <a:p>
+                <a:pPr marL="0" indent="0">
+                  <a:buNone/>
+                </a:pPr>
+                <a:r>
+                  <a:rPr lang="de-DE" sz="2600" dirty="0" err="1"/>
+                  <a:t>input</a:t>
+                </a:r>
+                <a:r>
+                  <a:rPr lang="de-DE" sz="2600" dirty="0"/>
+                  <a:t> </a:t>
+                </a:r>
+                <a:r>
+                  <a:rPr lang="de-DE" sz="2600" dirty="0" err="1"/>
+                  <a:t>is</a:t>
+                </a:r>
+                <a:r>
+                  <a:rPr lang="de-DE" sz="2600" dirty="0"/>
+                  <a:t> </a:t>
+                </a:r>
+                <a:r>
+                  <a:rPr lang="de-DE" sz="2600" dirty="0" err="1"/>
+                  <a:t>sequence</a:t>
+                </a:r>
+                <a:r>
+                  <a:rPr lang="de-DE" sz="2600" dirty="0"/>
+                  <a:t> </a:t>
+                </a:r>
+                <a:r>
+                  <a:rPr lang="de-DE" sz="2600" dirty="0" err="1"/>
+                  <a:t>of</a:t>
+                </a:r>
+                <a:r>
+                  <a:rPr lang="de-DE" sz="2600" dirty="0"/>
+                  <a:t> </a:t>
+                </a:r>
+                <a:r>
+                  <a:rPr lang="de-DE" sz="2600" b="1" dirty="0" err="1"/>
+                  <a:t>rectangular</a:t>
+                </a:r>
+                <a:r>
+                  <a:rPr lang="de-DE" sz="2600" b="1" dirty="0"/>
+                  <a:t> </a:t>
+                </a:r>
+                <a:r>
+                  <a:rPr lang="de-DE" sz="2600" b="1" dirty="0" err="1"/>
+                  <a:t>pulses</a:t>
+                </a:r>
+                <a:r>
+                  <a:rPr lang="de-DE" sz="2600" dirty="0"/>
+                  <a:t>: </a:t>
+                </a:r>
+                <a:r>
+                  <a:rPr lang="de-DE" sz="2600" dirty="0" err="1"/>
+                  <a:t>step</a:t>
+                </a:r>
+                <a:r>
+                  <a:rPr lang="de-DE" sz="2600" dirty="0"/>
+                  <a:t> </a:t>
+                </a:r>
+                <a:r>
+                  <a:rPr lang="de-DE" sz="2600" dirty="0" err="1"/>
+                  <a:t>responses</a:t>
+                </a:r>
+                <a:r>
+                  <a:rPr lang="de-DE" sz="2600" dirty="0"/>
+                  <a:t> </a:t>
+                </a:r>
+                <a:r>
+                  <a:rPr lang="de-DE" sz="2600" dirty="0" err="1"/>
+                  <a:t>over</a:t>
+                </a:r>
+                <a:r>
+                  <a:rPr lang="de-DE" sz="2600" dirty="0"/>
+                  <a:t> </a:t>
+                </a:r>
+                <a:r>
+                  <a:rPr lang="de-DE" sz="2600" dirty="0" err="1"/>
+                  <a:t>one</a:t>
+                </a:r>
+                <a:r>
+                  <a:rPr lang="de-DE" sz="2600" dirty="0"/>
+                  <a:t> </a:t>
+                </a:r>
+                <a:r>
+                  <a:rPr lang="de-DE" sz="2600" dirty="0" err="1"/>
+                  <a:t>interval</a:t>
+                </a:r>
+                <a:endParaRPr lang="de-DE" sz="2600" dirty="0"/>
+              </a:p>
+              <a:p>
+                <a14:m>
+                  <m:oMath xmlns:m="http://schemas.openxmlformats.org/officeDocument/2006/math">
+                    <m:f>
+                      <m:fPr>
+                        <m:ctrlPr>
+                          <a:rPr lang="de-DE" sz="2600" i="1" smtClean="0">
+                            <a:latin typeface="Cambria Math" panose="02040503050406030204" pitchFamily="18" charset="0"/>
+                          </a:rPr>
+                        </m:ctrlPr>
+                      </m:fPr>
+                      <m:num>
+                        <m:r>
+                          <a:rPr lang="de-DE" sz="2600" b="0" i="1" smtClean="0">
+                            <a:latin typeface="Cambria Math" panose="02040503050406030204" pitchFamily="18" charset="0"/>
+                          </a:rPr>
+                          <m:t>1</m:t>
+                        </m:r>
+                      </m:num>
+                      <m:den>
+                        <m:r>
+                          <a:rPr lang="de-DE" sz="2600" b="0" i="1" smtClean="0">
+                            <a:latin typeface="Cambria Math" panose="02040503050406030204" pitchFamily="18" charset="0"/>
+                          </a:rPr>
+                          <m:t>𝑠</m:t>
+                        </m:r>
+                      </m:den>
+                    </m:f>
+                  </m:oMath>
+                </a14:m>
+                <a:r>
+                  <a:rPr lang="de-DE" sz="2600" dirty="0"/>
+                  <a:t> </a:t>
+                </a:r>
+                <a:r>
+                  <a:rPr lang="de-DE" sz="2600" dirty="0" err="1"/>
+                  <a:t>corresponds</a:t>
+                </a:r>
+                <a:r>
+                  <a:rPr lang="de-DE" sz="2600" dirty="0"/>
+                  <a:t> </a:t>
+                </a:r>
+                <a:r>
+                  <a:rPr lang="de-DE" sz="2600" dirty="0" err="1"/>
+                  <a:t>to</a:t>
+                </a:r>
+                <a:r>
+                  <a:rPr lang="de-DE" sz="2600" dirty="0"/>
+                  <a:t> </a:t>
+                </a:r>
+                <a:r>
+                  <a:rPr lang="de-DE" sz="2600" dirty="0" err="1"/>
+                  <a:t>constant</a:t>
+                </a:r>
+                <a:r>
+                  <a:rPr lang="de-DE" sz="2600" dirty="0"/>
+                  <a:t> </a:t>
+                </a:r>
+                <a:r>
+                  <a:rPr lang="de-DE" sz="2600" dirty="0" err="1"/>
+                  <a:t>signal</a:t>
+                </a:r>
+                <a:r>
+                  <a:rPr lang="de-DE" sz="2600" dirty="0"/>
+                  <a:t>					turn ON at </a:t>
+                </a:r>
+                <a14:m>
+                  <m:oMath xmlns:m="http://schemas.openxmlformats.org/officeDocument/2006/math">
+                    <m:r>
+                      <a:rPr lang="de-DE" sz="2600" b="0" i="1" smtClean="0">
+                        <a:latin typeface="Cambria Math" panose="02040503050406030204" pitchFamily="18" charset="0"/>
+                      </a:rPr>
+                      <m:t>𝑡</m:t>
+                    </m:r>
+                    <m:r>
+                      <a:rPr lang="de-DE" sz="2600" b="0" i="1" smtClean="0">
+                        <a:latin typeface="Cambria Math" panose="02040503050406030204" pitchFamily="18" charset="0"/>
+                      </a:rPr>
+                      <m:t>=0</m:t>
+                    </m:r>
+                  </m:oMath>
+                </a14:m>
+                <a:endParaRPr lang="de-DE" sz="2600" dirty="0"/>
+              </a:p>
+              <a:p>
+                <a14:m>
+                  <m:oMath xmlns:m="http://schemas.openxmlformats.org/officeDocument/2006/math">
+                    <m:sSup>
+                      <m:sSupPr>
+                        <m:ctrlPr>
+                          <a:rPr lang="de-DE" sz="2600" i="1">
+                            <a:latin typeface="Cambria Math" panose="02040503050406030204" pitchFamily="18" charset="0"/>
+                            <a:ea typeface="Cambria Math" panose="02040503050406030204" pitchFamily="18" charset="0"/>
+                          </a:rPr>
+                        </m:ctrlPr>
+                      </m:sSupPr>
+                      <m:e>
+                        <m:r>
+                          <a:rPr lang="de-DE" sz="2600" i="1">
+                            <a:latin typeface="Cambria Math" panose="02040503050406030204" pitchFamily="18" charset="0"/>
+                            <a:ea typeface="Cambria Math" panose="02040503050406030204" pitchFamily="18" charset="0"/>
+                          </a:rPr>
+                          <m:t>𝑒</m:t>
+                        </m:r>
+                      </m:e>
+                      <m:sup>
+                        <m:r>
+                          <a:rPr lang="de-DE" sz="2600" i="1">
+                            <a:latin typeface="Cambria Math" panose="02040503050406030204" pitchFamily="18" charset="0"/>
+                            <a:ea typeface="Cambria Math" panose="02040503050406030204" pitchFamily="18" charset="0"/>
+                          </a:rPr>
+                          <m:t>−</m:t>
+                        </m:r>
+                        <m:r>
+                          <a:rPr lang="de-DE" sz="2600" i="1">
+                            <a:latin typeface="Cambria Math" panose="02040503050406030204" pitchFamily="18" charset="0"/>
+                            <a:ea typeface="Cambria Math" panose="02040503050406030204" pitchFamily="18" charset="0"/>
+                          </a:rPr>
+                          <m:t>𝑠𝑇</m:t>
+                        </m:r>
+                      </m:sup>
+                    </m:sSup>
+                  </m:oMath>
+                </a14:m>
+                <a:r>
+                  <a:rPr lang="de-DE" sz="2600" dirty="0"/>
+                  <a:t> </a:t>
+                </a:r>
+                <a:r>
+                  <a:rPr lang="de-DE" sz="2600" dirty="0" err="1"/>
+                  <a:t>corresponds</a:t>
+                </a:r>
+                <a:r>
+                  <a:rPr lang="de-DE" sz="2600" dirty="0"/>
+                  <a:t> </a:t>
+                </a:r>
+                <a:r>
+                  <a:rPr lang="de-DE" sz="2600" dirty="0" err="1"/>
+                  <a:t>to</a:t>
+                </a:r>
+                <a:r>
+                  <a:rPr lang="de-DE" sz="2600" dirty="0"/>
+                  <a:t> </a:t>
+                </a:r>
+                <a:r>
+                  <a:rPr lang="de-DE" sz="2600" dirty="0" err="1"/>
+                  <a:t>delay</a:t>
+                </a:r>
+                <a:r>
+                  <a:rPr lang="de-DE" sz="2600" dirty="0"/>
+                  <a:t> </a:t>
+                </a:r>
+                <a:r>
+                  <a:rPr lang="de-DE" sz="2600" dirty="0" err="1"/>
+                  <a:t>by</a:t>
+                </a:r>
+                <a:r>
+                  <a:rPr lang="de-DE" sz="2600" dirty="0"/>
+                  <a:t> </a:t>
+                </a:r>
+                <a14:m>
+                  <m:oMath xmlns:m="http://schemas.openxmlformats.org/officeDocument/2006/math">
+                    <m:r>
+                      <a:rPr lang="de-DE" sz="2600" b="0" i="1" smtClean="0">
+                        <a:latin typeface="Cambria Math" panose="02040503050406030204" pitchFamily="18" charset="0"/>
+                      </a:rPr>
+                      <m:t>𝑇</m:t>
+                    </m:r>
+                  </m:oMath>
+                </a14:m>
+                <a:r>
+                  <a:rPr lang="de-DE" sz="2600" dirty="0"/>
+                  <a:t> </a:t>
+                </a:r>
+                <a:r>
+                  <a:rPr lang="de-DE" sz="2600" dirty="0">
+                    <a:sym typeface="Wingdings" pitchFamily="2" charset="2"/>
+                  </a:rPr>
+                  <a:t> </a:t>
+                </a:r>
+                <a:r>
+                  <a:rPr lang="de-DE" sz="2600" dirty="0" err="1">
+                    <a:sym typeface="Wingdings" pitchFamily="2" charset="2"/>
+                  </a:rPr>
+                  <a:t>delayed</a:t>
+                </a:r>
+                <a:r>
+                  <a:rPr lang="de-DE" sz="2600" dirty="0">
+                    <a:sym typeface="Wingdings" pitchFamily="2" charset="2"/>
+                  </a:rPr>
+                  <a:t> </a:t>
+                </a:r>
+                <a:r>
+                  <a:rPr lang="de-DE" sz="2600" dirty="0" err="1">
+                    <a:sym typeface="Wingdings" pitchFamily="2" charset="2"/>
+                  </a:rPr>
+                  <a:t>constant</a:t>
+                </a:r>
+                <a:r>
+                  <a:rPr lang="de-DE" sz="2600" dirty="0">
+                    <a:sym typeface="Wingdings" pitchFamily="2" charset="2"/>
+                  </a:rPr>
+                  <a:t>: </a:t>
+                </a:r>
+                <a14:m>
+                  <m:oMath xmlns:m="http://schemas.openxmlformats.org/officeDocument/2006/math">
+                    <m:f>
+                      <m:fPr>
+                        <m:ctrlPr>
+                          <a:rPr lang="de-DE" sz="2600" i="1" smtClean="0">
+                            <a:latin typeface="Cambria Math" panose="02040503050406030204" pitchFamily="18" charset="0"/>
+                            <a:sym typeface="Wingdings" pitchFamily="2" charset="2"/>
+                          </a:rPr>
+                        </m:ctrlPr>
+                      </m:fPr>
+                      <m:num>
+                        <m:sSup>
+                          <m:sSupPr>
+                            <m:ctrlPr>
+                              <a:rPr lang="de-DE" sz="2600" i="1">
+                                <a:latin typeface="Cambria Math" panose="02040503050406030204" pitchFamily="18" charset="0"/>
+                                <a:ea typeface="Cambria Math" panose="02040503050406030204" pitchFamily="18" charset="0"/>
+                              </a:rPr>
+                            </m:ctrlPr>
+                          </m:sSupPr>
+                          <m:e>
+                            <m:r>
+                              <a:rPr lang="de-DE" sz="2600" i="1">
+                                <a:latin typeface="Cambria Math" panose="02040503050406030204" pitchFamily="18" charset="0"/>
+                                <a:ea typeface="Cambria Math" panose="02040503050406030204" pitchFamily="18" charset="0"/>
+                              </a:rPr>
+                              <m:t>𝑒</m:t>
+                            </m:r>
+                          </m:e>
+                          <m:sup>
+                            <m:r>
+                              <a:rPr lang="de-DE" sz="2600" i="1">
+                                <a:latin typeface="Cambria Math" panose="02040503050406030204" pitchFamily="18" charset="0"/>
+                                <a:ea typeface="Cambria Math" panose="02040503050406030204" pitchFamily="18" charset="0"/>
+                              </a:rPr>
+                              <m:t>−</m:t>
+                            </m:r>
+                            <m:r>
+                              <a:rPr lang="de-DE" sz="2600" i="1">
+                                <a:latin typeface="Cambria Math" panose="02040503050406030204" pitchFamily="18" charset="0"/>
+                                <a:ea typeface="Cambria Math" panose="02040503050406030204" pitchFamily="18" charset="0"/>
+                              </a:rPr>
+                              <m:t>𝑠𝑇</m:t>
+                            </m:r>
+                          </m:sup>
+                        </m:sSup>
+                      </m:num>
+                      <m:den>
+                        <m:r>
+                          <a:rPr lang="de-DE" sz="2600" b="0" i="1" smtClean="0">
+                            <a:latin typeface="Cambria Math" panose="02040503050406030204" pitchFamily="18" charset="0"/>
+                            <a:sym typeface="Wingdings" pitchFamily="2" charset="2"/>
+                          </a:rPr>
+                          <m:t>𝑠</m:t>
+                        </m:r>
+                      </m:den>
+                    </m:f>
+                  </m:oMath>
+                </a14:m>
+                <a:r>
+                  <a:rPr lang="de-DE" sz="2600" dirty="0"/>
+                  <a:t>	turn OFF (</a:t>
+                </a:r>
+                <a14:m>
+                  <m:oMath xmlns:m="http://schemas.openxmlformats.org/officeDocument/2006/math">
+                    <m:r>
+                      <a:rPr lang="de-DE" sz="2600" i="1">
+                        <a:latin typeface="Cambria Math" panose="02040503050406030204" pitchFamily="18" charset="0"/>
+                        <a:ea typeface="Cambria Math" panose="02040503050406030204" pitchFamily="18" charset="0"/>
+                      </a:rPr>
+                      <m:t>−</m:t>
+                    </m:r>
+                  </m:oMath>
+                </a14:m>
+                <a:r>
+                  <a:rPr lang="de-DE" sz="2600" dirty="0"/>
+                  <a:t>) at </a:t>
+                </a:r>
+                <a14:m>
+                  <m:oMath xmlns:m="http://schemas.openxmlformats.org/officeDocument/2006/math">
+                    <m:r>
+                      <a:rPr lang="de-DE" sz="2600" b="0" i="1" smtClean="0">
+                        <a:latin typeface="Cambria Math" panose="02040503050406030204" pitchFamily="18" charset="0"/>
+                      </a:rPr>
+                      <m:t>𝑡</m:t>
+                    </m:r>
+                    <m:r>
+                      <a:rPr lang="de-DE" sz="2600" b="0" i="1" smtClean="0">
+                        <a:latin typeface="Cambria Math" panose="02040503050406030204" pitchFamily="18" charset="0"/>
+                      </a:rPr>
+                      <m:t>=</m:t>
+                    </m:r>
+                    <m:r>
+                      <a:rPr lang="de-DE" sz="2600" b="0" i="1" smtClean="0">
+                        <a:latin typeface="Cambria Math" panose="02040503050406030204" pitchFamily="18" charset="0"/>
+                      </a:rPr>
+                      <m:t>𝑇</m:t>
+                    </m:r>
+                  </m:oMath>
+                </a14:m>
+                <a:endParaRPr lang="de-DE" sz="2600" dirty="0"/>
+              </a:p>
+              <a:p>
+                <a:pPr marL="0" indent="0">
+                  <a:buNone/>
+                </a:pPr>
+                <a:endParaRPr lang="de-DE" sz="2600" dirty="0"/>
               </a:p>
             </p:txBody>
           </p:sp>
         </mc:Choice>
-        <mc:Fallback xmlns="">
+        <mc:Fallback>
           <p:sp>
             <p:nvSpPr>
               <p:cNvPr id="3" name="Inhaltsplatzhalter 2">
@@ -14595,10 +15650,14 @@
               </p:nvPr>
             </p:nvSpPr>
             <p:spPr>
+              <a:xfrm>
+                <a:off x="838199" y="1825625"/>
+                <a:ext cx="11353801" cy="4351338"/>
+              </a:xfrm>
               <a:blipFill>
                 <a:blip r:embed="rId2"/>
                 <a:stretch>
-                  <a:fillRect l="-1206" t="-2326"/>
+                  <a:fillRect l="-781" t="-2616"/>
                 </a:stretch>
               </a:blipFill>
             </p:spPr>
@@ -14646,6 +15705,499 @@
           </a:p>
         </p:txBody>
       </p:sp>
+      <mc:AlternateContent xmlns:mc="http://schemas.openxmlformats.org/markup-compatibility/2006">
+        <mc:Choice xmlns:a14="http://schemas.microsoft.com/office/drawing/2010/main" Requires="a14">
+          <p:sp>
+            <p:nvSpPr>
+              <p:cNvPr id="7" name="Textfeld 6">
+                <a:extLst>
+                  <a:ext uri="{FF2B5EF4-FFF2-40B4-BE49-F238E27FC236}">
+                    <a16:creationId xmlns:a16="http://schemas.microsoft.com/office/drawing/2014/main" id="{719B8D5B-0D47-31FD-6845-F893C48FEACC}"/>
+                  </a:ext>
+                </a:extLst>
+              </p:cNvPr>
+              <p:cNvSpPr txBox="1"/>
+              <p:nvPr/>
+            </p:nvSpPr>
+            <p:spPr>
+              <a:xfrm>
+                <a:off x="4077433" y="3174443"/>
+                <a:ext cx="1133707" cy="369332"/>
+              </a:xfrm>
+              <a:prstGeom prst="rect">
+                <a:avLst/>
+              </a:prstGeom>
+              <a:noFill/>
+            </p:spPr>
+            <p:txBody>
+              <a:bodyPr wrap="none" lIns="0" tIns="0" rIns="0" bIns="0" rtlCol="0">
+                <a:spAutoFit/>
+              </a:bodyPr>
+              <a:lstStyle/>
+              <a:p>
+                <a14:m>
+                  <m:oMathPara xmlns:m="http://schemas.openxmlformats.org/officeDocument/2006/math">
+                    <m:oMathParaPr>
+                      <m:jc m:val="centerGroup"/>
+                    </m:oMathParaPr>
+                    <m:oMath xmlns:m="http://schemas.openxmlformats.org/officeDocument/2006/math">
+                      <m:sSub>
+                        <m:sSubPr>
+                          <m:ctrlPr>
+                            <a:rPr lang="de-DE" sz="2400" i="1" smtClean="0">
+                              <a:latin typeface="Cambria Math" panose="02040503050406030204" pitchFamily="18" charset="0"/>
+                            </a:rPr>
+                          </m:ctrlPr>
+                        </m:sSubPr>
+                        <m:e>
+                          <m:r>
+                            <a:rPr lang="de-DE" sz="2400" b="0" i="1" smtClean="0">
+                              <a:latin typeface="Cambria Math" panose="02040503050406030204" pitchFamily="18" charset="0"/>
+                            </a:rPr>
+                            <m:t>𝐺</m:t>
+                          </m:r>
+                        </m:e>
+                        <m:sub>
+                          <m:r>
+                            <m:rPr>
+                              <m:sty m:val="p"/>
+                            </m:rPr>
+                            <a:rPr lang="de-DE" sz="2400" b="0" i="0" smtClean="0">
+                              <a:latin typeface="Cambria Math" panose="02040503050406030204" pitchFamily="18" charset="0"/>
+                            </a:rPr>
+                            <m:t>ZOH</m:t>
+                          </m:r>
+                        </m:sub>
+                      </m:sSub>
+                      <m:r>
+                        <a:rPr lang="de-DE" sz="2400" b="0" i="1" smtClean="0">
+                          <a:latin typeface="Cambria Math" panose="02040503050406030204" pitchFamily="18" charset="0"/>
+                        </a:rPr>
+                        <m:t>(</m:t>
+                      </m:r>
+                      <m:r>
+                        <a:rPr lang="de-DE" sz="2400" b="0" i="1" smtClean="0">
+                          <a:latin typeface="Cambria Math" panose="02040503050406030204" pitchFamily="18" charset="0"/>
+                        </a:rPr>
+                        <m:t>𝑠</m:t>
+                      </m:r>
+                      <m:r>
+                        <a:rPr lang="de-DE" sz="2400" b="0" i="1" smtClean="0">
+                          <a:latin typeface="Cambria Math" panose="02040503050406030204" pitchFamily="18" charset="0"/>
+                        </a:rPr>
+                        <m:t>)</m:t>
+                      </m:r>
+                    </m:oMath>
+                  </m:oMathPara>
+                </a14:m>
+                <a:endParaRPr lang="de-DE" sz="2400" dirty="0"/>
+              </a:p>
+            </p:txBody>
+          </p:sp>
+        </mc:Choice>
+        <mc:Fallback>
+          <p:sp>
+            <p:nvSpPr>
+              <p:cNvPr id="7" name="Textfeld 6">
+                <a:extLst>
+                  <a:ext uri="{FF2B5EF4-FFF2-40B4-BE49-F238E27FC236}">
+                    <a16:creationId xmlns:a16="http://schemas.microsoft.com/office/drawing/2014/main" id="{719B8D5B-0D47-31FD-6845-F893C48FEACC}"/>
+                  </a:ext>
+                </a:extLst>
+              </p:cNvPr>
+              <p:cNvSpPr txBox="1">
+                <a:spLocks noRot="1" noChangeAspect="1" noMove="1" noResize="1" noEditPoints="1" noAdjustHandles="1" noChangeArrowheads="1" noChangeShapeType="1" noTextEdit="1"/>
+              </p:cNvSpPr>
+              <p:nvPr/>
+            </p:nvSpPr>
+            <p:spPr>
+              <a:xfrm>
+                <a:off x="4077433" y="3174443"/>
+                <a:ext cx="1133707" cy="369332"/>
+              </a:xfrm>
+              <a:prstGeom prst="rect">
+                <a:avLst/>
+              </a:prstGeom>
+              <a:blipFill>
+                <a:blip r:embed="rId3"/>
+                <a:stretch>
+                  <a:fillRect l="-6667" t="-3448" r="-8889" b="-31034"/>
+                </a:stretch>
+              </a:blipFill>
+            </p:spPr>
+            <p:txBody>
+              <a:bodyPr/>
+              <a:lstStyle/>
+              <a:p>
+                <a:r>
+                  <a:rPr lang="de-DE">
+                    <a:noFill/>
+                  </a:rPr>
+                  <a:t> </a:t>
+                </a:r>
+              </a:p>
+            </p:txBody>
+          </p:sp>
+        </mc:Fallback>
+      </mc:AlternateContent>
+      <p:sp>
+        <p:nvSpPr>
+          <p:cNvPr id="8" name="Geschweifte Klammer links 7">
+            <a:extLst>
+              <a:ext uri="{FF2B5EF4-FFF2-40B4-BE49-F238E27FC236}">
+                <a16:creationId xmlns:a16="http://schemas.microsoft.com/office/drawing/2014/main" id="{92FC6A8B-5B78-D197-1045-16CE651414C8}"/>
+              </a:ext>
+            </a:extLst>
+          </p:cNvPr>
+          <p:cNvSpPr/>
+          <p:nvPr/>
+        </p:nvSpPr>
+        <p:spPr>
+          <a:xfrm rot="16200000">
+            <a:off x="4366431" y="2604700"/>
+            <a:ext cx="302808" cy="836678"/>
+          </a:xfrm>
+          <a:prstGeom prst="leftBrace">
+            <a:avLst/>
+          </a:prstGeom>
+        </p:spPr>
+        <p:style>
+          <a:lnRef idx="2">
+            <a:schemeClr val="accent1"/>
+          </a:lnRef>
+          <a:fillRef idx="0">
+            <a:schemeClr val="accent1"/>
+          </a:fillRef>
+          <a:effectRef idx="1">
+            <a:schemeClr val="accent1"/>
+          </a:effectRef>
+          <a:fontRef idx="minor">
+            <a:schemeClr val="tx1"/>
+          </a:fontRef>
+        </p:style>
+        <p:txBody>
+          <a:bodyPr rtlCol="0" anchor="ctr"/>
+          <a:lstStyle/>
+          <a:p>
+            <a:pPr algn="ctr"/>
+            <a:endParaRPr lang="de-DE"/>
+          </a:p>
+        </p:txBody>
+      </p:sp>
+      <p:pic>
+        <p:nvPicPr>
+          <p:cNvPr id="9" name="Picture 2">
+            <a:extLst>
+              <a:ext uri="{FF2B5EF4-FFF2-40B4-BE49-F238E27FC236}">
+                <a16:creationId xmlns:a16="http://schemas.microsoft.com/office/drawing/2014/main" id="{8E192C18-A674-1CDA-B15C-26B4E9ED0A03}"/>
+              </a:ext>
+            </a:extLst>
+          </p:cNvPr>
+          <p:cNvPicPr>
+            <a:picLocks noChangeAspect="1" noChangeArrowheads="1"/>
+          </p:cNvPicPr>
+          <p:nvPr/>
+        </p:nvPicPr>
+        <p:blipFill>
+          <a:blip r:embed="rId4">
+            <a:extLst>
+              <a:ext uri="{28A0092B-C50C-407E-A947-70E740481C1C}">
+                <a14:useLocalDpi xmlns:a14="http://schemas.microsoft.com/office/drawing/2010/main" val="0"/>
+              </a:ext>
+            </a:extLst>
+          </a:blip>
+          <a:srcRect/>
+          <a:stretch>
+            <a:fillRect/>
+          </a:stretch>
+        </p:blipFill>
+        <p:spPr bwMode="auto">
+          <a:xfrm>
+            <a:off x="9040656" y="2760758"/>
+            <a:ext cx="2842207" cy="1627589"/>
+          </a:xfrm>
+          <a:prstGeom prst="rect">
+            <a:avLst/>
+          </a:prstGeom>
+          <a:noFill/>
+          <a:extLst>
+            <a:ext uri="{909E8E84-426E-40DD-AFC4-6F175D3DCCD1}">
+              <a14:hiddenFill xmlns:a14="http://schemas.microsoft.com/office/drawing/2010/main">
+                <a:solidFill>
+                  <a:srgbClr val="FFFFFF"/>
+                </a:solidFill>
+              </a14:hiddenFill>
+            </a:ext>
+          </a:extLst>
+        </p:spPr>
+      </p:pic>
+      <p:cxnSp>
+        <p:nvCxnSpPr>
+          <p:cNvPr id="11" name="Gerade Verbindung mit Pfeil 10">
+            <a:extLst>
+              <a:ext uri="{FF2B5EF4-FFF2-40B4-BE49-F238E27FC236}">
+                <a16:creationId xmlns:a16="http://schemas.microsoft.com/office/drawing/2014/main" id="{22C0B4EE-ACD1-333E-F7FA-6584238C715B}"/>
+              </a:ext>
+            </a:extLst>
+          </p:cNvPr>
+          <p:cNvCxnSpPr>
+            <a:cxnSpLocks/>
+          </p:cNvCxnSpPr>
+          <p:nvPr/>
+        </p:nvCxnSpPr>
+        <p:spPr>
+          <a:xfrm>
+            <a:off x="4599709" y="3574552"/>
+            <a:ext cx="336465" cy="930207"/>
+          </a:xfrm>
+          <a:prstGeom prst="straightConnector1">
+            <a:avLst/>
+          </a:prstGeom>
+          <a:ln>
+            <a:tailEnd type="triangle"/>
+          </a:ln>
+        </p:spPr>
+        <p:style>
+          <a:lnRef idx="2">
+            <a:schemeClr val="accent1"/>
+          </a:lnRef>
+          <a:fillRef idx="0">
+            <a:schemeClr val="accent1"/>
+          </a:fillRef>
+          <a:effectRef idx="1">
+            <a:schemeClr val="accent1"/>
+          </a:effectRef>
+          <a:fontRef idx="minor">
+            <a:schemeClr val="tx1"/>
+          </a:fontRef>
+        </p:style>
+      </p:cxnSp>
+      <mc:AlternateContent xmlns:mc="http://schemas.openxmlformats.org/markup-compatibility/2006">
+        <mc:Choice xmlns:a14="http://schemas.microsoft.com/office/drawing/2010/main" Requires="a14">
+          <p:sp>
+            <p:nvSpPr>
+              <p:cNvPr id="17" name="Textfeld 16">
+                <a:extLst>
+                  <a:ext uri="{FF2B5EF4-FFF2-40B4-BE49-F238E27FC236}">
+                    <a16:creationId xmlns:a16="http://schemas.microsoft.com/office/drawing/2014/main" id="{36766D84-3271-8FAA-B992-2C6F5891BF0A}"/>
+                  </a:ext>
+                </a:extLst>
+              </p:cNvPr>
+              <p:cNvSpPr txBox="1"/>
+              <p:nvPr/>
+            </p:nvSpPr>
+            <p:spPr>
+              <a:xfrm>
+                <a:off x="5718849" y="3574552"/>
+                <a:ext cx="3321807" cy="617861"/>
+              </a:xfrm>
+              <a:prstGeom prst="rect">
+                <a:avLst/>
+              </a:prstGeom>
+              <a:noFill/>
+              <a:ln>
+                <a:solidFill>
+                  <a:schemeClr val="tx1"/>
+                </a:solidFill>
+              </a:ln>
+            </p:spPr>
+            <p:txBody>
+              <a:bodyPr wrap="none" lIns="0" tIns="0" rIns="0" bIns="0" rtlCol="0">
+                <a:spAutoFit/>
+              </a:bodyPr>
+              <a:lstStyle/>
+              <a:p>
+                <a14:m>
+                  <m:oMathPara xmlns:m="http://schemas.openxmlformats.org/officeDocument/2006/math">
+                    <m:oMathParaPr>
+                      <m:jc m:val="centerGroup"/>
+                    </m:oMathParaPr>
+                    <m:oMath xmlns:m="http://schemas.openxmlformats.org/officeDocument/2006/math">
+                      <m:r>
+                        <a:rPr lang="de-DE" b="0" i="1" smtClean="0">
+                          <a:latin typeface="Cambria Math" panose="02040503050406030204" pitchFamily="18" charset="0"/>
+                        </a:rPr>
+                        <m:t>1−</m:t>
+                      </m:r>
+                      <m:r>
+                        <a:rPr lang="de-DE" b="0" i="1" smtClean="0">
+                          <a:latin typeface="Cambria Math" panose="02040503050406030204" pitchFamily="18" charset="0"/>
+                        </a:rPr>
+                        <m:t>𝑢</m:t>
+                      </m:r>
+                      <m:d>
+                        <m:dPr>
+                          <m:ctrlPr>
+                            <a:rPr lang="de-DE" b="0" i="1" smtClean="0">
+                              <a:latin typeface="Cambria Math" panose="02040503050406030204" pitchFamily="18" charset="0"/>
+                            </a:rPr>
+                          </m:ctrlPr>
+                        </m:dPr>
+                        <m:e>
+                          <m:r>
+                            <a:rPr lang="de-DE" b="0" i="1" smtClean="0">
+                              <a:latin typeface="Cambria Math" panose="02040503050406030204" pitchFamily="18" charset="0"/>
+                            </a:rPr>
+                            <m:t>𝑡</m:t>
+                          </m:r>
+                          <m:r>
+                            <a:rPr lang="de-DE" b="0" i="1" smtClean="0">
+                              <a:latin typeface="Cambria Math" panose="02040503050406030204" pitchFamily="18" charset="0"/>
+                            </a:rPr>
+                            <m:t>−</m:t>
+                          </m:r>
+                          <m:r>
+                            <a:rPr lang="de-DE" b="0" i="1" smtClean="0">
+                              <a:latin typeface="Cambria Math" panose="02040503050406030204" pitchFamily="18" charset="0"/>
+                            </a:rPr>
+                            <m:t>𝑇</m:t>
+                          </m:r>
+                        </m:e>
+                      </m:d>
+                      <m:r>
+                        <a:rPr lang="de-DE" b="0" i="1" smtClean="0">
+                          <a:latin typeface="Cambria Math" panose="02040503050406030204" pitchFamily="18" charset="0"/>
+                        </a:rPr>
+                        <m:t>=</m:t>
+                      </m:r>
+                      <m:d>
+                        <m:dPr>
+                          <m:begChr m:val="{"/>
+                          <m:endChr m:val=""/>
+                          <m:ctrlPr>
+                            <a:rPr lang="de-DE" b="0" i="1" smtClean="0">
+                              <a:latin typeface="Cambria Math" panose="02040503050406030204" pitchFamily="18" charset="0"/>
+                            </a:rPr>
+                          </m:ctrlPr>
+                        </m:dPr>
+                        <m:e>
+                          <m:eqArr>
+                            <m:eqArrPr>
+                              <m:ctrlPr>
+                                <a:rPr lang="de-DE" b="0" i="1" smtClean="0">
+                                  <a:latin typeface="Cambria Math" panose="02040503050406030204" pitchFamily="18" charset="0"/>
+                                </a:rPr>
+                              </m:ctrlPr>
+                            </m:eqArrPr>
+                            <m:e>
+                              <m:r>
+                                <a:rPr lang="de-DE" b="0" i="1" smtClean="0">
+                                  <a:latin typeface="Cambria Math" panose="02040503050406030204" pitchFamily="18" charset="0"/>
+                                </a:rPr>
+                                <m:t>1</m:t>
+                              </m:r>
+                              <m:r>
+                                <a:rPr lang="de-DE" b="0" i="1" smtClean="0">
+                                  <a:latin typeface="Cambria Math" panose="02040503050406030204" pitchFamily="18" charset="0"/>
+                                </a:rPr>
+                                <m:t>,  0&lt;</m:t>
+                              </m:r>
+                              <m:r>
+                                <a:rPr lang="de-DE" b="0" i="1" smtClean="0">
+                                  <a:latin typeface="Cambria Math" panose="02040503050406030204" pitchFamily="18" charset="0"/>
+                                </a:rPr>
+                                <m:t>𝑡</m:t>
+                              </m:r>
+                              <m:r>
+                                <a:rPr lang="de-DE" b="0" i="1" smtClean="0">
+                                  <a:latin typeface="Cambria Math" panose="02040503050406030204" pitchFamily="18" charset="0"/>
+                                </a:rPr>
+                                <m:t>&lt;</m:t>
+                              </m:r>
+                              <m:r>
+                                <a:rPr lang="de-DE" b="0" i="1" smtClean="0">
+                                  <a:latin typeface="Cambria Math" panose="02040503050406030204" pitchFamily="18" charset="0"/>
+                                </a:rPr>
+                                <m:t>𝑇</m:t>
+                              </m:r>
+                            </m:e>
+                            <m:e>
+                              <m:r>
+                                <a:rPr lang="de-DE" b="0" i="1" smtClean="0">
+                                  <a:latin typeface="Cambria Math" panose="02040503050406030204" pitchFamily="18" charset="0"/>
+                                </a:rPr>
+                                <m:t>0,          </m:t>
+                              </m:r>
+                              <m:r>
+                                <a:rPr lang="de-DE" b="0" i="1" smtClean="0">
+                                  <a:latin typeface="Cambria Math" panose="02040503050406030204" pitchFamily="18" charset="0"/>
+                                </a:rPr>
+                                <m:t>𝑡</m:t>
+                              </m:r>
+                              <m:r>
+                                <a:rPr lang="de-DE" b="0" i="1" smtClean="0">
+                                  <a:latin typeface="Cambria Math" panose="02040503050406030204" pitchFamily="18" charset="0"/>
+                                </a:rPr>
+                                <m:t>≥</m:t>
+                              </m:r>
+                              <m:r>
+                                <a:rPr lang="de-DE" b="0" i="1" smtClean="0">
+                                  <a:latin typeface="Cambria Math" panose="02040503050406030204" pitchFamily="18" charset="0"/>
+                                </a:rPr>
+                                <m:t>𝑇</m:t>
+                              </m:r>
+                            </m:e>
+                          </m:eqArr>
+                        </m:e>
+                      </m:d>
+                    </m:oMath>
+                  </m:oMathPara>
+                </a14:m>
+                <a:endParaRPr lang="de-DE" dirty="0"/>
+              </a:p>
+            </p:txBody>
+          </p:sp>
+        </mc:Choice>
+        <mc:Fallback>
+          <p:sp>
+            <p:nvSpPr>
+              <p:cNvPr id="17" name="Textfeld 16">
+                <a:extLst>
+                  <a:ext uri="{FF2B5EF4-FFF2-40B4-BE49-F238E27FC236}">
+                    <a16:creationId xmlns:a16="http://schemas.microsoft.com/office/drawing/2014/main" id="{36766D84-3271-8FAA-B992-2C6F5891BF0A}"/>
+                  </a:ext>
+                </a:extLst>
+              </p:cNvPr>
+              <p:cNvSpPr txBox="1">
+                <a:spLocks noRot="1" noChangeAspect="1" noMove="1" noResize="1" noEditPoints="1" noAdjustHandles="1" noChangeArrowheads="1" noChangeShapeType="1" noTextEdit="1"/>
+              </p:cNvSpPr>
+              <p:nvPr/>
+            </p:nvSpPr>
+            <p:spPr>
+              <a:xfrm>
+                <a:off x="5718849" y="3574552"/>
+                <a:ext cx="3321807" cy="617861"/>
+              </a:xfrm>
+              <a:prstGeom prst="rect">
+                <a:avLst/>
+              </a:prstGeom>
+              <a:blipFill>
+                <a:blip r:embed="rId5"/>
+                <a:stretch>
+                  <a:fillRect l="-1136" t="-217647" r="-758" b="-315686"/>
+                </a:stretch>
+              </a:blipFill>
+              <a:ln>
+                <a:solidFill>
+                  <a:schemeClr val="tx1"/>
+                </a:solidFill>
+              </a:ln>
+            </p:spPr>
+            <p:txBody>
+              <a:bodyPr/>
+              <a:lstStyle/>
+              <a:p>
+                <a:r>
+                  <a:rPr lang="de-DE">
+                    <a:noFill/>
+                  </a:rPr>
+                  <a:t> </a:t>
+                </a:r>
+              </a:p>
+            </p:txBody>
+          </p:sp>
+        </mc:Fallback>
+      </mc:AlternateContent>
     </p:spTree>
     <p:extLst>
       <p:ext uri="{BB962C8B-B14F-4D97-AF65-F5344CB8AC3E}">
@@ -14717,8 +16269,8 @@
           </a:p>
         </p:txBody>
       </p:sp>
-      <mc:AlternateContent xmlns:mc="http://schemas.openxmlformats.org/markup-compatibility/2006" xmlns:a14="http://schemas.microsoft.com/office/drawing/2010/main">
-        <mc:Choice Requires="a14">
+      <mc:AlternateContent xmlns:mc="http://schemas.openxmlformats.org/markup-compatibility/2006">
+        <mc:Choice xmlns:a14="http://schemas.microsoft.com/office/drawing/2010/main" Requires="a14">
           <p:sp>
             <p:nvSpPr>
               <p:cNvPr id="3" name="Inhaltsplatzhalter 2">
@@ -14738,7 +16290,7 @@
             <p:spPr/>
             <p:txBody>
               <a:bodyPr>
-                <a:normAutofit lnSpcReduction="10000"/>
+                <a:noAutofit/>
               </a:bodyPr>
               <a:lstStyle/>
               <a:p>
@@ -14746,23 +16298,23 @@
                   <a:buNone/>
                 </a:pPr>
                 <a:r>
-                  <a:rPr lang="de-DE" dirty="0"/>
+                  <a:rPr lang="de-DE" sz="2200" dirty="0"/>
                   <a:t>Given </a:t>
                 </a:r>
                 <a:r>
-                  <a:rPr lang="de-DE" dirty="0" err="1"/>
+                  <a:rPr lang="de-DE" sz="2200" dirty="0" err="1"/>
                   <a:t>continuous</a:t>
                 </a:r>
                 <a:r>
-                  <a:rPr lang="de-DE" dirty="0"/>
+                  <a:rPr lang="de-DE" sz="2200" dirty="0"/>
                   <a:t>-time </a:t>
                 </a:r>
                 <a:r>
-                  <a:rPr lang="de-DE" dirty="0" err="1"/>
+                  <a:rPr lang="de-DE" sz="2200" dirty="0" err="1"/>
                   <a:t>system</a:t>
                 </a:r>
                 <a:r>
-                  <a:rPr lang="de-DE" dirty="0"/>
+                  <a:rPr lang="de-DE" sz="2200" dirty="0"/>
                   <a:t>:</a:t>
                 </a:r>
               </a:p>
@@ -14771,13 +16323,13 @@
                   <a:buNone/>
                 </a:pPr>
                 <a:r>
-                  <a:rPr lang="de-DE" b="0" dirty="0"/>
+                  <a:rPr lang="de-DE" sz="2200" b="0" dirty="0"/>
                   <a:t>	</a:t>
                 </a:r>
                 <a14:m>
                   <m:oMath xmlns:m="http://schemas.openxmlformats.org/officeDocument/2006/math">
                     <m:r>
-                      <a:rPr lang="de-DE" b="0" i="1" smtClean="0">
+                      <a:rPr lang="de-DE" sz="2200" b="0" i="1" smtClean="0">
                         <a:latin typeface="Cambria Math" panose="02040503050406030204" pitchFamily="18" charset="0"/>
                       </a:rPr>
                       <m:t>𝐺</m:t>
@@ -14785,14 +16337,14 @@
                     <m:d>
                       <m:dPr>
                         <m:ctrlPr>
-                          <a:rPr lang="de-DE" b="0" i="1" smtClean="0">
+                          <a:rPr lang="de-DE" sz="2200" b="0" i="1" smtClean="0">
                             <a:latin typeface="Cambria Math" panose="02040503050406030204" pitchFamily="18" charset="0"/>
                           </a:rPr>
                         </m:ctrlPr>
                       </m:dPr>
                       <m:e>
                         <m:r>
-                          <a:rPr lang="de-DE" b="0" i="1" smtClean="0">
+                          <a:rPr lang="de-DE" sz="2200" b="0" i="1" smtClean="0">
                             <a:latin typeface="Cambria Math" panose="02040503050406030204" pitchFamily="18" charset="0"/>
                           </a:rPr>
                           <m:t>𝑠</m:t>
@@ -14800,7 +16352,7 @@
                       </m:e>
                     </m:d>
                     <m:r>
-                      <a:rPr lang="de-DE" b="0" i="1" smtClean="0">
+                      <a:rPr lang="de-DE" sz="2200" b="0" i="1" smtClean="0">
                         <a:latin typeface="Cambria Math" panose="02040503050406030204" pitchFamily="18" charset="0"/>
                       </a:rPr>
                       <m:t>=</m:t>
@@ -14808,14 +16360,14 @@
                     <m:f>
                       <m:fPr>
                         <m:ctrlPr>
-                          <a:rPr lang="de-DE" b="0" i="1" smtClean="0">
+                          <a:rPr lang="de-DE" sz="2200" b="0" i="1" smtClean="0">
                             <a:latin typeface="Cambria Math" panose="02040503050406030204" pitchFamily="18" charset="0"/>
                           </a:rPr>
                         </m:ctrlPr>
                       </m:fPr>
                       <m:num>
                         <m:r>
-                          <a:rPr lang="de-DE" b="0" i="1" smtClean="0">
+                          <a:rPr lang="de-DE" sz="2200" b="0" i="1" smtClean="0">
                             <a:latin typeface="Cambria Math" panose="02040503050406030204" pitchFamily="18" charset="0"/>
                           </a:rPr>
                           <m:t>1</m:t>
@@ -14823,13 +16375,13 @@
                       </m:num>
                       <m:den>
                         <m:r>
-                          <a:rPr lang="de-DE" b="0" i="1" smtClean="0">
+                          <a:rPr lang="de-DE" sz="2200" b="0" i="1" smtClean="0">
                             <a:latin typeface="Cambria Math" panose="02040503050406030204" pitchFamily="18" charset="0"/>
                           </a:rPr>
                           <m:t>𝑠</m:t>
                         </m:r>
                         <m:r>
-                          <a:rPr lang="de-DE" b="0" i="1" smtClean="0">
+                          <a:rPr lang="de-DE" sz="2200" b="0" i="1" smtClean="0">
                             <a:latin typeface="Cambria Math" panose="02040503050406030204" pitchFamily="18" charset="0"/>
                           </a:rPr>
                           <m:t>+1</m:t>
@@ -14838,130 +16390,1126 @@
                     </m:f>
                   </m:oMath>
                 </a14:m>
-                <a:br>
-                  <a:rPr lang="de-DE" dirty="0"/>
-                </a:br>
-                <a:endParaRPr lang="de-DE" dirty="0"/>
+                <a:endParaRPr lang="de-DE" sz="2200" dirty="0"/>
               </a:p>
               <a:p>
                 <a:pPr marL="0" indent="0">
                   <a:buNone/>
                 </a:pPr>
                 <a:r>
-                  <a:rPr lang="de-DE" dirty="0"/>
+                  <a:rPr lang="de-DE" sz="2200" dirty="0"/>
                   <a:t>Goal: Find </a:t>
                 </a:r>
                 <a:r>
-                  <a:rPr lang="de-DE" dirty="0" err="1"/>
+                  <a:rPr lang="de-DE" sz="2200" dirty="0" err="1"/>
                   <a:t>discrete</a:t>
                 </a:r>
                 <a:r>
-                  <a:rPr lang="de-DE" dirty="0"/>
+                  <a:rPr lang="de-DE" sz="2200" dirty="0"/>
                   <a:t>-time </a:t>
                 </a:r>
                 <a:r>
-                  <a:rPr lang="de-DE" dirty="0" err="1"/>
+                  <a:rPr lang="de-DE" sz="2200" dirty="0" err="1"/>
                   <a:t>transfer</a:t>
                 </a:r>
                 <a:r>
-                  <a:rPr lang="de-DE" dirty="0"/>
+                  <a:rPr lang="de-DE" sz="2200" dirty="0"/>
                   <a:t> </a:t>
                 </a:r>
                 <a:r>
-                  <a:rPr lang="de-DE" dirty="0" err="1"/>
+                  <a:rPr lang="de-DE" sz="2200" dirty="0" err="1"/>
                   <a:t>function</a:t>
                 </a:r>
                 <a:r>
-                  <a:rPr lang="de-DE" dirty="0"/>
+                  <a:rPr lang="de-DE" sz="2200" dirty="0"/>
                   <a:t>, </a:t>
                 </a:r>
                 <a:r>
-                  <a:rPr lang="de-DE" dirty="0" err="1"/>
+                  <a:rPr lang="de-DE" sz="2200" dirty="0" err="1"/>
                   <a:t>using</a:t>
                 </a:r>
                 <a:r>
-                  <a:rPr lang="de-DE" dirty="0"/>
+                  <a:rPr lang="de-DE" sz="2200" dirty="0"/>
                   <a:t> ZOH </a:t>
                 </a:r>
                 <a:r>
-                  <a:rPr lang="de-DE" dirty="0" err="1"/>
+                  <a:rPr lang="de-DE" sz="2200" dirty="0" err="1"/>
                   <a:t>with</a:t>
                 </a:r>
                 <a:r>
-                  <a:rPr lang="de-DE" dirty="0"/>
+                  <a:rPr lang="de-DE" sz="2200" dirty="0"/>
                   <a:t> </a:t>
                 </a:r>
                 <a:r>
-                  <a:rPr lang="de-DE" dirty="0" err="1"/>
+                  <a:rPr lang="de-DE" sz="2200" dirty="0" err="1"/>
                   <a:t>sampling</a:t>
                 </a:r>
                 <a:r>
-                  <a:rPr lang="de-DE" dirty="0"/>
+                  <a:rPr lang="de-DE" sz="2200" dirty="0"/>
                   <a:t> time </a:t>
                 </a:r>
                 <a14:m>
                   <m:oMath xmlns:m="http://schemas.openxmlformats.org/officeDocument/2006/math">
                     <m:r>
-                      <a:rPr lang="de-DE" b="0" i="1" smtClean="0">
+                      <a:rPr lang="de-DE" sz="2200" b="0" i="1" smtClean="0">
                         <a:latin typeface="Cambria Math" panose="02040503050406030204" pitchFamily="18" charset="0"/>
                       </a:rPr>
                       <m:t>𝑇</m:t>
                     </m:r>
                   </m:oMath>
                 </a14:m>
-                <a:endParaRPr lang="de-DE" dirty="0"/>
+                <a:endParaRPr lang="de-DE" sz="2200" dirty="0"/>
               </a:p>
               <a:p>
                 <a:pPr marL="0" indent="0">
                   <a:buNone/>
                 </a:pPr>
-                <a:endParaRPr lang="de-DE" dirty="0"/>
+                <a:endParaRPr lang="de-DE" sz="2200" dirty="0"/>
               </a:p>
               <a:p>
-                <a:pPr marL="0" indent="0">
-                  <a:buNone/>
+                <a:pPr marL="457200" indent="-457200">
+                  <a:buFont typeface="+mj-lt"/>
+                  <a:buAutoNum type="arabicPeriod"/>
                 </a:pPr>
                 <a:r>
-                  <a:rPr lang="de-DE" dirty="0" err="1"/>
-                  <a:t>Steps</a:t>
-                </a:r>
-                <a:r>
-                  <a:rPr lang="de-DE" dirty="0"/>
-                  <a:t>:</a:t>
-                </a:r>
+                  <a:rPr lang="de-DE" sz="2200" dirty="0" err="1"/>
+                  <a:t>Apply</a:t>
+                </a:r>
+                <a:r>
+                  <a:rPr lang="de-DE" sz="2200" dirty="0"/>
+                  <a:t> ZOH: </a:t>
+                </a:r>
+                <a14:m>
+                  <m:oMath xmlns:m="http://schemas.openxmlformats.org/officeDocument/2006/math">
+                    <m:r>
+                      <a:rPr lang="de-DE" sz="2200" i="1">
+                        <a:latin typeface="Cambria Math" panose="02040503050406030204" pitchFamily="18" charset="0"/>
+                        <a:ea typeface="Cambria Math" panose="02040503050406030204" pitchFamily="18" charset="0"/>
+                      </a:rPr>
+                      <m:t>𝐺</m:t>
+                    </m:r>
+                    <m:d>
+                      <m:dPr>
+                        <m:ctrlPr>
+                          <a:rPr lang="de-DE" sz="2200" i="1">
+                            <a:latin typeface="Cambria Math" panose="02040503050406030204" pitchFamily="18" charset="0"/>
+                            <a:ea typeface="Cambria Math" panose="02040503050406030204" pitchFamily="18" charset="0"/>
+                          </a:rPr>
+                        </m:ctrlPr>
+                      </m:dPr>
+                      <m:e>
+                        <m:r>
+                          <a:rPr lang="de-DE" sz="2200" i="1">
+                            <a:latin typeface="Cambria Math" panose="02040503050406030204" pitchFamily="18" charset="0"/>
+                            <a:ea typeface="Cambria Math" panose="02040503050406030204" pitchFamily="18" charset="0"/>
+                          </a:rPr>
+                          <m:t>𝑠</m:t>
+                        </m:r>
+                      </m:e>
+                    </m:d>
+                    <m:r>
+                      <a:rPr lang="de-DE" sz="2200" i="1">
+                        <a:latin typeface="Cambria Math" panose="02040503050406030204" pitchFamily="18" charset="0"/>
+                        <a:ea typeface="Cambria Math" panose="02040503050406030204" pitchFamily="18" charset="0"/>
+                      </a:rPr>
+                      <m:t>∙</m:t>
+                    </m:r>
+                    <m:f>
+                      <m:fPr>
+                        <m:ctrlPr>
+                          <a:rPr lang="de-DE" sz="2200" i="1">
+                            <a:latin typeface="Cambria Math" panose="02040503050406030204" pitchFamily="18" charset="0"/>
+                            <a:ea typeface="Cambria Math" panose="02040503050406030204" pitchFamily="18" charset="0"/>
+                          </a:rPr>
+                        </m:ctrlPr>
+                      </m:fPr>
+                      <m:num>
+                        <m:r>
+                          <a:rPr lang="de-DE" sz="2200" i="1">
+                            <a:latin typeface="Cambria Math" panose="02040503050406030204" pitchFamily="18" charset="0"/>
+                            <a:ea typeface="Cambria Math" panose="02040503050406030204" pitchFamily="18" charset="0"/>
+                          </a:rPr>
+                          <m:t>1−</m:t>
+                        </m:r>
+                        <m:sSup>
+                          <m:sSupPr>
+                            <m:ctrlPr>
+                              <a:rPr lang="de-DE" sz="2200" i="1">
+                                <a:latin typeface="Cambria Math" panose="02040503050406030204" pitchFamily="18" charset="0"/>
+                                <a:ea typeface="Cambria Math" panose="02040503050406030204" pitchFamily="18" charset="0"/>
+                              </a:rPr>
+                            </m:ctrlPr>
+                          </m:sSupPr>
+                          <m:e>
+                            <m:r>
+                              <a:rPr lang="de-DE" sz="2200" i="1">
+                                <a:latin typeface="Cambria Math" panose="02040503050406030204" pitchFamily="18" charset="0"/>
+                                <a:ea typeface="Cambria Math" panose="02040503050406030204" pitchFamily="18" charset="0"/>
+                              </a:rPr>
+                              <m:t>𝑒</m:t>
+                            </m:r>
+                          </m:e>
+                          <m:sup>
+                            <m:r>
+                              <a:rPr lang="de-DE" sz="2200" i="1">
+                                <a:latin typeface="Cambria Math" panose="02040503050406030204" pitchFamily="18" charset="0"/>
+                                <a:ea typeface="Cambria Math" panose="02040503050406030204" pitchFamily="18" charset="0"/>
+                              </a:rPr>
+                              <m:t>−</m:t>
+                            </m:r>
+                            <m:r>
+                              <a:rPr lang="de-DE" sz="2200" i="1">
+                                <a:latin typeface="Cambria Math" panose="02040503050406030204" pitchFamily="18" charset="0"/>
+                                <a:ea typeface="Cambria Math" panose="02040503050406030204" pitchFamily="18" charset="0"/>
+                              </a:rPr>
+                              <m:t>𝑠𝑇</m:t>
+                            </m:r>
+                          </m:sup>
+                        </m:sSup>
+                      </m:num>
+                      <m:den>
+                        <m:r>
+                          <a:rPr lang="de-DE" sz="2200" i="1">
+                            <a:latin typeface="Cambria Math" panose="02040503050406030204" pitchFamily="18" charset="0"/>
+                            <a:ea typeface="Cambria Math" panose="02040503050406030204" pitchFamily="18" charset="0"/>
+                          </a:rPr>
+                          <m:t>𝑠</m:t>
+                        </m:r>
+                      </m:den>
+                    </m:f>
+                    <m:r>
+                      <a:rPr lang="de-DE" sz="2200" b="0" i="1" smtClean="0">
+                        <a:latin typeface="Cambria Math" panose="02040503050406030204" pitchFamily="18" charset="0"/>
+                        <a:ea typeface="Cambria Math" panose="02040503050406030204" pitchFamily="18" charset="0"/>
+                      </a:rPr>
+                      <m:t>=</m:t>
+                    </m:r>
+                    <m:f>
+                      <m:fPr>
+                        <m:ctrlPr>
+                          <a:rPr lang="de-DE" sz="2200" i="1">
+                            <a:latin typeface="Cambria Math" panose="02040503050406030204" pitchFamily="18" charset="0"/>
+                          </a:rPr>
+                        </m:ctrlPr>
+                      </m:fPr>
+                      <m:num>
+                        <m:r>
+                          <a:rPr lang="de-DE" sz="2200" i="1">
+                            <a:latin typeface="Cambria Math" panose="02040503050406030204" pitchFamily="18" charset="0"/>
+                          </a:rPr>
+                          <m:t>1</m:t>
+                        </m:r>
+                      </m:num>
+                      <m:den>
+                        <m:r>
+                          <a:rPr lang="de-DE" sz="2200" i="1">
+                            <a:latin typeface="Cambria Math" panose="02040503050406030204" pitchFamily="18" charset="0"/>
+                          </a:rPr>
+                          <m:t>𝑠</m:t>
+                        </m:r>
+                        <m:r>
+                          <a:rPr lang="de-DE" sz="2200" i="1">
+                            <a:latin typeface="Cambria Math" panose="02040503050406030204" pitchFamily="18" charset="0"/>
+                          </a:rPr>
+                          <m:t>+1</m:t>
+                        </m:r>
+                      </m:den>
+                    </m:f>
+                    <m:r>
+                      <a:rPr lang="de-DE" sz="2200" i="1">
+                        <a:latin typeface="Cambria Math" panose="02040503050406030204" pitchFamily="18" charset="0"/>
+                        <a:ea typeface="Cambria Math" panose="02040503050406030204" pitchFamily="18" charset="0"/>
+                      </a:rPr>
+                      <m:t>∙</m:t>
+                    </m:r>
+                    <m:f>
+                      <m:fPr>
+                        <m:ctrlPr>
+                          <a:rPr lang="de-DE" sz="2200" i="1">
+                            <a:latin typeface="Cambria Math" panose="02040503050406030204" pitchFamily="18" charset="0"/>
+                            <a:ea typeface="Cambria Math" panose="02040503050406030204" pitchFamily="18" charset="0"/>
+                          </a:rPr>
+                        </m:ctrlPr>
+                      </m:fPr>
+                      <m:num>
+                        <m:r>
+                          <a:rPr lang="de-DE" sz="2200" i="1">
+                            <a:latin typeface="Cambria Math" panose="02040503050406030204" pitchFamily="18" charset="0"/>
+                            <a:ea typeface="Cambria Math" panose="02040503050406030204" pitchFamily="18" charset="0"/>
+                          </a:rPr>
+                          <m:t>1−</m:t>
+                        </m:r>
+                        <m:sSup>
+                          <m:sSupPr>
+                            <m:ctrlPr>
+                              <a:rPr lang="de-DE" sz="2200" i="1">
+                                <a:latin typeface="Cambria Math" panose="02040503050406030204" pitchFamily="18" charset="0"/>
+                                <a:ea typeface="Cambria Math" panose="02040503050406030204" pitchFamily="18" charset="0"/>
+                              </a:rPr>
+                            </m:ctrlPr>
+                          </m:sSupPr>
+                          <m:e>
+                            <m:r>
+                              <a:rPr lang="de-DE" sz="2200" i="1">
+                                <a:latin typeface="Cambria Math" panose="02040503050406030204" pitchFamily="18" charset="0"/>
+                                <a:ea typeface="Cambria Math" panose="02040503050406030204" pitchFamily="18" charset="0"/>
+                              </a:rPr>
+                              <m:t>𝑒</m:t>
+                            </m:r>
+                          </m:e>
+                          <m:sup>
+                            <m:r>
+                              <a:rPr lang="de-DE" sz="2200" i="1">
+                                <a:latin typeface="Cambria Math" panose="02040503050406030204" pitchFamily="18" charset="0"/>
+                                <a:ea typeface="Cambria Math" panose="02040503050406030204" pitchFamily="18" charset="0"/>
+                              </a:rPr>
+                              <m:t>−</m:t>
+                            </m:r>
+                            <m:r>
+                              <a:rPr lang="de-DE" sz="2200" i="1">
+                                <a:latin typeface="Cambria Math" panose="02040503050406030204" pitchFamily="18" charset="0"/>
+                                <a:ea typeface="Cambria Math" panose="02040503050406030204" pitchFamily="18" charset="0"/>
+                              </a:rPr>
+                              <m:t>𝑠𝑇</m:t>
+                            </m:r>
+                          </m:sup>
+                        </m:sSup>
+                      </m:num>
+                      <m:den>
+                        <m:r>
+                          <a:rPr lang="de-DE" sz="2200" i="1">
+                            <a:latin typeface="Cambria Math" panose="02040503050406030204" pitchFamily="18" charset="0"/>
+                            <a:ea typeface="Cambria Math" panose="02040503050406030204" pitchFamily="18" charset="0"/>
+                          </a:rPr>
+                          <m:t>𝑠</m:t>
+                        </m:r>
+                      </m:den>
+                    </m:f>
+                  </m:oMath>
+                </a14:m>
+                <a:endParaRPr lang="de-DE" sz="2200" dirty="0"/>
               </a:p>
               <a:p>
-                <a:r>
-                  <a:rPr lang="de-DE" dirty="0" err="1"/>
-                  <a:t>Apply</a:t>
-                </a:r>
-                <a:r>
-                  <a:rPr lang="de-DE" dirty="0"/>
-                  <a:t> ZOH</a:t>
-                </a:r>
+                <a:pPr marL="457200" indent="-457200">
+                  <a:buFont typeface="+mj-lt"/>
+                  <a:buAutoNum type="arabicPeriod"/>
+                </a:pPr>
+                <a:r>
+                  <a:rPr lang="de-DE" sz="2200" dirty="0"/>
+                  <a:t>Go </a:t>
+                </a:r>
+                <a:r>
+                  <a:rPr lang="de-DE" sz="2200" dirty="0" err="1"/>
+                  <a:t>to</a:t>
+                </a:r>
+                <a:r>
+                  <a:rPr lang="de-DE" sz="2200" dirty="0"/>
+                  <a:t> time </a:t>
+                </a:r>
+                <a:r>
+                  <a:rPr lang="de-DE" sz="2200" dirty="0" err="1"/>
+                  <a:t>domain</a:t>
+                </a:r>
+                <a:r>
+                  <a:rPr lang="de-DE" sz="2200" dirty="0"/>
+                  <a:t>: </a:t>
+                </a:r>
+                <a14:m>
+                  <m:oMath xmlns:m="http://schemas.openxmlformats.org/officeDocument/2006/math">
+                    <m:sSup>
+                      <m:sSupPr>
+                        <m:ctrlPr>
+                          <a:rPr lang="de-DE" sz="2200" i="1" smtClean="0">
+                            <a:latin typeface="Cambria Math" panose="02040503050406030204" pitchFamily="18" charset="0"/>
+                          </a:rPr>
+                        </m:ctrlPr>
+                      </m:sSupPr>
+                      <m:e>
+                        <m:r>
+                          <a:rPr lang="de-DE" sz="2200" b="0" i="1" smtClean="0">
+                            <a:latin typeface="Cambria Math" panose="02040503050406030204" pitchFamily="18" charset="0"/>
+                          </a:rPr>
+                          <m:t>𝑦</m:t>
+                        </m:r>
+                        <m:d>
+                          <m:dPr>
+                            <m:ctrlPr>
+                              <a:rPr lang="de-DE" sz="2200" b="0" i="1" smtClean="0">
+                                <a:latin typeface="Cambria Math" panose="02040503050406030204" pitchFamily="18" charset="0"/>
+                              </a:rPr>
+                            </m:ctrlPr>
+                          </m:dPr>
+                          <m:e>
+                            <m:r>
+                              <a:rPr lang="de-DE" sz="2200" b="0" i="1" smtClean="0">
+                                <a:latin typeface="Cambria Math" panose="02040503050406030204" pitchFamily="18" charset="0"/>
+                              </a:rPr>
+                              <m:t>𝑡</m:t>
+                            </m:r>
+                          </m:e>
+                        </m:d>
+                        <m:r>
+                          <a:rPr lang="de-DE" sz="2200" b="0" i="1" smtClean="0">
+                            <a:latin typeface="Cambria Math" panose="02040503050406030204" pitchFamily="18" charset="0"/>
+                          </a:rPr>
+                          <m:t>=</m:t>
+                        </m:r>
+                        <m:r>
+                          <a:rPr lang="de-DE" sz="2200" i="1" smtClean="0">
+                            <a:latin typeface="Cambria Math" panose="02040503050406030204" pitchFamily="18" charset="0"/>
+                            <a:ea typeface="Cambria Math" panose="02040503050406030204" pitchFamily="18" charset="0"/>
+                          </a:rPr>
+                          <m:t>ℒ</m:t>
+                        </m:r>
+                      </m:e>
+                      <m:sup>
+                        <m:r>
+                          <a:rPr lang="de-DE" sz="2200" b="0" i="1" smtClean="0">
+                            <a:latin typeface="Cambria Math" panose="02040503050406030204" pitchFamily="18" charset="0"/>
+                          </a:rPr>
+                          <m:t>−1</m:t>
+                        </m:r>
+                      </m:sup>
+                    </m:sSup>
+                    <m:d>
+                      <m:dPr>
+                        <m:begChr m:val="{"/>
+                        <m:endChr m:val="}"/>
+                        <m:ctrlPr>
+                          <a:rPr lang="de-DE" sz="2200" i="1" smtClean="0">
+                            <a:latin typeface="Cambria Math" panose="02040503050406030204" pitchFamily="18" charset="0"/>
+                          </a:rPr>
+                        </m:ctrlPr>
+                      </m:dPr>
+                      <m:e>
+                        <m:f>
+                          <m:fPr>
+                            <m:ctrlPr>
+                              <a:rPr lang="de-DE" sz="2200" i="1">
+                                <a:latin typeface="Cambria Math" panose="02040503050406030204" pitchFamily="18" charset="0"/>
+                              </a:rPr>
+                            </m:ctrlPr>
+                          </m:fPr>
+                          <m:num>
+                            <m:r>
+                              <a:rPr lang="de-DE" sz="2200" i="1">
+                                <a:latin typeface="Cambria Math" panose="02040503050406030204" pitchFamily="18" charset="0"/>
+                              </a:rPr>
+                              <m:t>1</m:t>
+                            </m:r>
+                          </m:num>
+                          <m:den>
+                            <m:r>
+                              <a:rPr lang="de-DE" sz="2200" i="1">
+                                <a:latin typeface="Cambria Math" panose="02040503050406030204" pitchFamily="18" charset="0"/>
+                              </a:rPr>
+                              <m:t>𝑠</m:t>
+                            </m:r>
+                            <m:r>
+                              <a:rPr lang="de-DE" sz="2200" i="1">
+                                <a:latin typeface="Cambria Math" panose="02040503050406030204" pitchFamily="18" charset="0"/>
+                              </a:rPr>
+                              <m:t>+1</m:t>
+                            </m:r>
+                          </m:den>
+                        </m:f>
+                        <m:r>
+                          <a:rPr lang="de-DE" sz="2200" i="1">
+                            <a:latin typeface="Cambria Math" panose="02040503050406030204" pitchFamily="18" charset="0"/>
+                            <a:ea typeface="Cambria Math" panose="02040503050406030204" pitchFamily="18" charset="0"/>
+                          </a:rPr>
+                          <m:t>∙</m:t>
+                        </m:r>
+                        <m:f>
+                          <m:fPr>
+                            <m:ctrlPr>
+                              <a:rPr lang="de-DE" sz="2200" i="1">
+                                <a:latin typeface="Cambria Math" panose="02040503050406030204" pitchFamily="18" charset="0"/>
+                                <a:ea typeface="Cambria Math" panose="02040503050406030204" pitchFamily="18" charset="0"/>
+                              </a:rPr>
+                            </m:ctrlPr>
+                          </m:fPr>
+                          <m:num>
+                            <m:r>
+                              <a:rPr lang="de-DE" sz="2200" i="1">
+                                <a:latin typeface="Cambria Math" panose="02040503050406030204" pitchFamily="18" charset="0"/>
+                                <a:ea typeface="Cambria Math" panose="02040503050406030204" pitchFamily="18" charset="0"/>
+                              </a:rPr>
+                              <m:t>1−</m:t>
+                            </m:r>
+                            <m:sSup>
+                              <m:sSupPr>
+                                <m:ctrlPr>
+                                  <a:rPr lang="de-DE" sz="2200" i="1">
+                                    <a:latin typeface="Cambria Math" panose="02040503050406030204" pitchFamily="18" charset="0"/>
+                                    <a:ea typeface="Cambria Math" panose="02040503050406030204" pitchFamily="18" charset="0"/>
+                                  </a:rPr>
+                                </m:ctrlPr>
+                              </m:sSupPr>
+                              <m:e>
+                                <m:r>
+                                  <a:rPr lang="de-DE" sz="2200" i="1">
+                                    <a:latin typeface="Cambria Math" panose="02040503050406030204" pitchFamily="18" charset="0"/>
+                                    <a:ea typeface="Cambria Math" panose="02040503050406030204" pitchFamily="18" charset="0"/>
+                                  </a:rPr>
+                                  <m:t>𝑒</m:t>
+                                </m:r>
+                              </m:e>
+                              <m:sup>
+                                <m:r>
+                                  <a:rPr lang="de-DE" sz="2200" i="1">
+                                    <a:latin typeface="Cambria Math" panose="02040503050406030204" pitchFamily="18" charset="0"/>
+                                    <a:ea typeface="Cambria Math" panose="02040503050406030204" pitchFamily="18" charset="0"/>
+                                  </a:rPr>
+                                  <m:t>−</m:t>
+                                </m:r>
+                                <m:r>
+                                  <a:rPr lang="de-DE" sz="2200" i="1">
+                                    <a:latin typeface="Cambria Math" panose="02040503050406030204" pitchFamily="18" charset="0"/>
+                                    <a:ea typeface="Cambria Math" panose="02040503050406030204" pitchFamily="18" charset="0"/>
+                                  </a:rPr>
+                                  <m:t>𝑠𝑇</m:t>
+                                </m:r>
+                              </m:sup>
+                            </m:sSup>
+                          </m:num>
+                          <m:den>
+                            <m:r>
+                              <a:rPr lang="de-DE" sz="2200" i="1">
+                                <a:latin typeface="Cambria Math" panose="02040503050406030204" pitchFamily="18" charset="0"/>
+                                <a:ea typeface="Cambria Math" panose="02040503050406030204" pitchFamily="18" charset="0"/>
+                              </a:rPr>
+                              <m:t>𝑠</m:t>
+                            </m:r>
+                          </m:den>
+                        </m:f>
+                      </m:e>
+                    </m:d>
+                    <m:r>
+                      <a:rPr lang="de-DE" sz="2200" b="0" i="1" smtClean="0">
+                        <a:latin typeface="Cambria Math" panose="02040503050406030204" pitchFamily="18" charset="0"/>
+                      </a:rPr>
+                      <m:t>=</m:t>
+                    </m:r>
+                    <m:d>
+                      <m:dPr>
+                        <m:ctrlPr>
+                          <a:rPr lang="de-DE" sz="2200" b="0" i="1" smtClean="0">
+                            <a:latin typeface="Cambria Math" panose="02040503050406030204" pitchFamily="18" charset="0"/>
+                          </a:rPr>
+                        </m:ctrlPr>
+                      </m:dPr>
+                      <m:e>
+                        <m:r>
+                          <a:rPr lang="de-DE" sz="2200" b="0" i="1" smtClean="0">
+                            <a:latin typeface="Cambria Math" panose="02040503050406030204" pitchFamily="18" charset="0"/>
+                          </a:rPr>
+                          <m:t>1−</m:t>
+                        </m:r>
+                        <m:sSup>
+                          <m:sSupPr>
+                            <m:ctrlPr>
+                              <a:rPr lang="de-DE" sz="2200" i="1">
+                                <a:latin typeface="Cambria Math" panose="02040503050406030204" pitchFamily="18" charset="0"/>
+                                <a:ea typeface="Cambria Math" panose="02040503050406030204" pitchFamily="18" charset="0"/>
+                              </a:rPr>
+                            </m:ctrlPr>
+                          </m:sSupPr>
+                          <m:e>
+                            <m:r>
+                              <a:rPr lang="de-DE" sz="2200" i="1">
+                                <a:latin typeface="Cambria Math" panose="02040503050406030204" pitchFamily="18" charset="0"/>
+                                <a:ea typeface="Cambria Math" panose="02040503050406030204" pitchFamily="18" charset="0"/>
+                              </a:rPr>
+                              <m:t>𝑒</m:t>
+                            </m:r>
+                          </m:e>
+                          <m:sup>
+                            <m:r>
+                              <a:rPr lang="de-DE" sz="2200" i="1">
+                                <a:latin typeface="Cambria Math" panose="02040503050406030204" pitchFamily="18" charset="0"/>
+                                <a:ea typeface="Cambria Math" panose="02040503050406030204" pitchFamily="18" charset="0"/>
+                              </a:rPr>
+                              <m:t>−</m:t>
+                            </m:r>
+                            <m:r>
+                              <a:rPr lang="de-DE" sz="2200" b="0" i="1" smtClean="0">
+                                <a:latin typeface="Cambria Math" panose="02040503050406030204" pitchFamily="18" charset="0"/>
+                                <a:ea typeface="Cambria Math" panose="02040503050406030204" pitchFamily="18" charset="0"/>
+                              </a:rPr>
+                              <m:t>𝑡</m:t>
+                            </m:r>
+                          </m:sup>
+                        </m:sSup>
+                      </m:e>
+                    </m:d>
+                    <m:r>
+                      <a:rPr lang="de-DE" sz="2200" b="0" i="1" smtClean="0">
+                        <a:latin typeface="Cambria Math" panose="02040503050406030204" pitchFamily="18" charset="0"/>
+                      </a:rPr>
+                      <m:t>−</m:t>
+                    </m:r>
+                    <m:d>
+                      <m:dPr>
+                        <m:ctrlPr>
+                          <a:rPr lang="de-DE" sz="2200" b="0" i="1" smtClean="0">
+                            <a:latin typeface="Cambria Math" panose="02040503050406030204" pitchFamily="18" charset="0"/>
+                          </a:rPr>
+                        </m:ctrlPr>
+                      </m:dPr>
+                      <m:e>
+                        <m:r>
+                          <a:rPr lang="de-DE" sz="2200" b="0" i="1" smtClean="0">
+                            <a:latin typeface="Cambria Math" panose="02040503050406030204" pitchFamily="18" charset="0"/>
+                          </a:rPr>
+                          <m:t>1−</m:t>
+                        </m:r>
+                        <m:sSup>
+                          <m:sSupPr>
+                            <m:ctrlPr>
+                              <a:rPr lang="de-DE" sz="2200" i="1">
+                                <a:latin typeface="Cambria Math" panose="02040503050406030204" pitchFamily="18" charset="0"/>
+                                <a:ea typeface="Cambria Math" panose="02040503050406030204" pitchFamily="18" charset="0"/>
+                              </a:rPr>
+                            </m:ctrlPr>
+                          </m:sSupPr>
+                          <m:e>
+                            <m:r>
+                              <a:rPr lang="de-DE" sz="2200" i="1">
+                                <a:latin typeface="Cambria Math" panose="02040503050406030204" pitchFamily="18" charset="0"/>
+                                <a:ea typeface="Cambria Math" panose="02040503050406030204" pitchFamily="18" charset="0"/>
+                              </a:rPr>
+                              <m:t>𝑒</m:t>
+                            </m:r>
+                          </m:e>
+                          <m:sup>
+                            <m:r>
+                              <a:rPr lang="de-DE" sz="2200" i="1">
+                                <a:latin typeface="Cambria Math" panose="02040503050406030204" pitchFamily="18" charset="0"/>
+                                <a:ea typeface="Cambria Math" panose="02040503050406030204" pitchFamily="18" charset="0"/>
+                              </a:rPr>
+                              <m:t>−</m:t>
+                            </m:r>
+                            <m:d>
+                              <m:dPr>
+                                <m:ctrlPr>
+                                  <a:rPr lang="de-DE" sz="2200" i="1" smtClean="0">
+                                    <a:latin typeface="Cambria Math" panose="02040503050406030204" pitchFamily="18" charset="0"/>
+                                    <a:ea typeface="Cambria Math" panose="02040503050406030204" pitchFamily="18" charset="0"/>
+                                  </a:rPr>
+                                </m:ctrlPr>
+                              </m:dPr>
+                              <m:e>
+                                <m:r>
+                                  <a:rPr lang="de-DE" sz="2200" b="0" i="1" smtClean="0">
+                                    <a:latin typeface="Cambria Math" panose="02040503050406030204" pitchFamily="18" charset="0"/>
+                                    <a:ea typeface="Cambria Math" panose="02040503050406030204" pitchFamily="18" charset="0"/>
+                                  </a:rPr>
+                                  <m:t>𝑡</m:t>
+                                </m:r>
+                                <m:r>
+                                  <a:rPr lang="de-DE" sz="2200" b="0" i="1" smtClean="0">
+                                    <a:latin typeface="Cambria Math" panose="02040503050406030204" pitchFamily="18" charset="0"/>
+                                    <a:ea typeface="Cambria Math" panose="02040503050406030204" pitchFamily="18" charset="0"/>
+                                  </a:rPr>
+                                  <m:t>−</m:t>
+                                </m:r>
+                                <m:r>
+                                  <a:rPr lang="de-DE" sz="2200" b="0" i="1" smtClean="0">
+                                    <a:latin typeface="Cambria Math" panose="02040503050406030204" pitchFamily="18" charset="0"/>
+                                    <a:ea typeface="Cambria Math" panose="02040503050406030204" pitchFamily="18" charset="0"/>
+                                  </a:rPr>
+                                  <m:t>𝑇</m:t>
+                                </m:r>
+                              </m:e>
+                            </m:d>
+                          </m:sup>
+                        </m:sSup>
+                      </m:e>
+                    </m:d>
+                    <m:r>
+                      <a:rPr lang="de-DE" sz="2200" b="0" i="1" smtClean="0">
+                        <a:latin typeface="Cambria Math" panose="02040503050406030204" pitchFamily="18" charset="0"/>
+                      </a:rPr>
+                      <m:t>𝑢</m:t>
+                    </m:r>
+                    <m:d>
+                      <m:dPr>
+                        <m:ctrlPr>
+                          <a:rPr lang="de-DE" sz="2200" b="0" i="1" smtClean="0">
+                            <a:latin typeface="Cambria Math" panose="02040503050406030204" pitchFamily="18" charset="0"/>
+                          </a:rPr>
+                        </m:ctrlPr>
+                      </m:dPr>
+                      <m:e>
+                        <m:r>
+                          <a:rPr lang="de-DE" sz="2200" b="0" i="1" smtClean="0">
+                            <a:latin typeface="Cambria Math" panose="02040503050406030204" pitchFamily="18" charset="0"/>
+                          </a:rPr>
+                          <m:t>𝑡</m:t>
+                        </m:r>
+                        <m:r>
+                          <a:rPr lang="de-DE" sz="2200" b="0" i="1" smtClean="0">
+                            <a:latin typeface="Cambria Math" panose="02040503050406030204" pitchFamily="18" charset="0"/>
+                          </a:rPr>
+                          <m:t>−</m:t>
+                        </m:r>
+                        <m:r>
+                          <a:rPr lang="de-DE" sz="2200" b="0" i="1" smtClean="0">
+                            <a:latin typeface="Cambria Math" panose="02040503050406030204" pitchFamily="18" charset="0"/>
+                          </a:rPr>
+                          <m:t>𝑇</m:t>
+                        </m:r>
+                      </m:e>
+                    </m:d>
+                  </m:oMath>
+                </a14:m>
+                <a:endParaRPr lang="de-DE" sz="2200" b="0" dirty="0"/>
               </a:p>
               <a:p>
-                <a:r>
-                  <a:rPr lang="de-DE" dirty="0" err="1"/>
-                  <a:t>Compute</a:t>
-                </a:r>
-                <a:r>
-                  <a:rPr lang="de-DE" dirty="0"/>
-                  <a:t> G(</a:t>
-                </a:r>
-                <a:r>
-                  <a:rPr lang="de-DE" dirty="0" err="1"/>
-                  <a:t>z</a:t>
-                </a:r>
-                <a:r>
-                  <a:rPr lang="de-DE" dirty="0"/>
-                  <a:t>)</a:t>
-                </a:r>
+                <a:pPr marL="457200" indent="-457200">
+                  <a:buFont typeface="+mj-lt"/>
+                  <a:buAutoNum type="arabicPeriod"/>
+                </a:pPr>
+                <a:r>
+                  <a:rPr lang="de-DE" sz="2200" dirty="0"/>
+                  <a:t>Sample </a:t>
+                </a:r>
+                <a:r>
+                  <a:rPr lang="de-DE" sz="2200" dirty="0" err="1"/>
+                  <a:t>output</a:t>
+                </a:r>
+                <a:r>
+                  <a:rPr lang="de-DE" sz="2200" dirty="0"/>
+                  <a:t>: </a:t>
+                </a:r>
+                <a14:m>
+                  <m:oMath xmlns:m="http://schemas.openxmlformats.org/officeDocument/2006/math">
+                    <m:r>
+                      <a:rPr lang="de-DE" sz="2200" i="1">
+                        <a:latin typeface="Cambria Math" panose="02040503050406030204" pitchFamily="18" charset="0"/>
+                        <a:ea typeface="Cambria Math" panose="02040503050406030204" pitchFamily="18" charset="0"/>
+                      </a:rPr>
+                      <m:t>𝑦</m:t>
+                    </m:r>
+                    <m:d>
+                      <m:dPr>
+                        <m:begChr m:val="["/>
+                        <m:endChr m:val="]"/>
+                        <m:ctrlPr>
+                          <a:rPr lang="de-DE" sz="2200" i="1">
+                            <a:latin typeface="Cambria Math" panose="02040503050406030204" pitchFamily="18" charset="0"/>
+                            <a:ea typeface="Cambria Math" panose="02040503050406030204" pitchFamily="18" charset="0"/>
+                          </a:rPr>
+                        </m:ctrlPr>
+                      </m:dPr>
+                      <m:e>
+                        <m:r>
+                          <a:rPr lang="de-DE" sz="2200" i="1">
+                            <a:latin typeface="Cambria Math" panose="02040503050406030204" pitchFamily="18" charset="0"/>
+                            <a:ea typeface="Cambria Math" panose="02040503050406030204" pitchFamily="18" charset="0"/>
+                          </a:rPr>
+                          <m:t>𝑘</m:t>
+                        </m:r>
+                      </m:e>
+                    </m:d>
+                    <m:r>
+                      <a:rPr lang="de-DE" sz="2200" b="0" i="1" smtClean="0">
+                        <a:latin typeface="Cambria Math" panose="02040503050406030204" pitchFamily="18" charset="0"/>
+                        <a:ea typeface="Cambria Math" panose="02040503050406030204" pitchFamily="18" charset="0"/>
+                      </a:rPr>
+                      <m:t>=</m:t>
+                    </m:r>
+                    <m:r>
+                      <a:rPr lang="de-DE" sz="2200" b="0" i="1" smtClean="0">
+                        <a:latin typeface="Cambria Math" panose="02040503050406030204" pitchFamily="18" charset="0"/>
+                        <a:ea typeface="Cambria Math" panose="02040503050406030204" pitchFamily="18" charset="0"/>
+                      </a:rPr>
+                      <m:t>𝑦</m:t>
+                    </m:r>
+                    <m:d>
+                      <m:dPr>
+                        <m:ctrlPr>
+                          <a:rPr lang="de-DE" sz="2200" b="0" i="1" smtClean="0">
+                            <a:latin typeface="Cambria Math" panose="02040503050406030204" pitchFamily="18" charset="0"/>
+                            <a:ea typeface="Cambria Math" panose="02040503050406030204" pitchFamily="18" charset="0"/>
+                          </a:rPr>
+                        </m:ctrlPr>
+                      </m:dPr>
+                      <m:e>
+                        <m:r>
+                          <a:rPr lang="de-DE" sz="2200" b="0" i="1" smtClean="0">
+                            <a:latin typeface="Cambria Math" panose="02040503050406030204" pitchFamily="18" charset="0"/>
+                            <a:ea typeface="Cambria Math" panose="02040503050406030204" pitchFamily="18" charset="0"/>
+                          </a:rPr>
+                          <m:t>𝑘𝑇</m:t>
+                        </m:r>
+                      </m:e>
+                    </m:d>
+                    <m:r>
+                      <a:rPr lang="de-DE" sz="2200" b="0" i="1" smtClean="0">
+                        <a:latin typeface="Cambria Math" panose="02040503050406030204" pitchFamily="18" charset="0"/>
+                        <a:ea typeface="Cambria Math" panose="02040503050406030204" pitchFamily="18" charset="0"/>
+                      </a:rPr>
+                      <m:t>=</m:t>
+                    </m:r>
+                    <m:sSup>
+                      <m:sSupPr>
+                        <m:ctrlPr>
+                          <a:rPr lang="de-DE" sz="2200" b="0" i="1" smtClean="0">
+                            <a:latin typeface="Cambria Math" panose="02040503050406030204" pitchFamily="18" charset="0"/>
+                            <a:ea typeface="Cambria Math" panose="02040503050406030204" pitchFamily="18" charset="0"/>
+                          </a:rPr>
+                        </m:ctrlPr>
+                      </m:sSupPr>
+                      <m:e>
+                        <m:r>
+                          <a:rPr lang="de-DE" sz="2200" b="0" i="1" smtClean="0">
+                            <a:latin typeface="Cambria Math" panose="02040503050406030204" pitchFamily="18" charset="0"/>
+                            <a:ea typeface="Cambria Math" panose="02040503050406030204" pitchFamily="18" charset="0"/>
+                          </a:rPr>
+                          <m:t>𝑒</m:t>
+                        </m:r>
+                      </m:e>
+                      <m:sup>
+                        <m:r>
+                          <a:rPr lang="de-DE" sz="2200" b="0" i="1" smtClean="0">
+                            <a:latin typeface="Cambria Math" panose="02040503050406030204" pitchFamily="18" charset="0"/>
+                            <a:ea typeface="Cambria Math" panose="02040503050406030204" pitchFamily="18" charset="0"/>
+                          </a:rPr>
+                          <m:t>−</m:t>
+                        </m:r>
+                        <m:d>
+                          <m:dPr>
+                            <m:ctrlPr>
+                              <a:rPr lang="de-DE" sz="2200" b="0" i="1" smtClean="0">
+                                <a:latin typeface="Cambria Math" panose="02040503050406030204" pitchFamily="18" charset="0"/>
+                                <a:ea typeface="Cambria Math" panose="02040503050406030204" pitchFamily="18" charset="0"/>
+                              </a:rPr>
+                            </m:ctrlPr>
+                          </m:dPr>
+                          <m:e>
+                            <m:r>
+                              <a:rPr lang="de-DE" sz="2200" b="0" i="1" smtClean="0">
+                                <a:latin typeface="Cambria Math" panose="02040503050406030204" pitchFamily="18" charset="0"/>
+                                <a:ea typeface="Cambria Math" panose="02040503050406030204" pitchFamily="18" charset="0"/>
+                              </a:rPr>
+                              <m:t>𝑘</m:t>
+                            </m:r>
+                            <m:r>
+                              <a:rPr lang="de-DE" sz="2200" b="0" i="1" smtClean="0">
+                                <a:latin typeface="Cambria Math" panose="02040503050406030204" pitchFamily="18" charset="0"/>
+                                <a:ea typeface="Cambria Math" panose="02040503050406030204" pitchFamily="18" charset="0"/>
+                              </a:rPr>
+                              <m:t>−1</m:t>
+                            </m:r>
+                          </m:e>
+                        </m:d>
+                        <m:r>
+                          <a:rPr lang="de-DE" sz="2200" b="0" i="1" smtClean="0">
+                            <a:latin typeface="Cambria Math" panose="02040503050406030204" pitchFamily="18" charset="0"/>
+                            <a:ea typeface="Cambria Math" panose="02040503050406030204" pitchFamily="18" charset="0"/>
+                          </a:rPr>
+                          <m:t>𝑇</m:t>
+                        </m:r>
+                      </m:sup>
+                    </m:sSup>
+                    <m:d>
+                      <m:dPr>
+                        <m:ctrlPr>
+                          <a:rPr lang="de-DE" sz="2200" b="0" i="1" smtClean="0">
+                            <a:latin typeface="Cambria Math" panose="02040503050406030204" pitchFamily="18" charset="0"/>
+                            <a:ea typeface="Cambria Math" panose="02040503050406030204" pitchFamily="18" charset="0"/>
+                          </a:rPr>
+                        </m:ctrlPr>
+                      </m:dPr>
+                      <m:e>
+                        <m:r>
+                          <a:rPr lang="de-DE" sz="2200" b="0" i="1" smtClean="0">
+                            <a:latin typeface="Cambria Math" panose="02040503050406030204" pitchFamily="18" charset="0"/>
+                            <a:ea typeface="Cambria Math" panose="02040503050406030204" pitchFamily="18" charset="0"/>
+                          </a:rPr>
+                          <m:t>1−</m:t>
+                        </m:r>
+                        <m:sSup>
+                          <m:sSupPr>
+                            <m:ctrlPr>
+                              <a:rPr lang="de-DE" sz="2200" b="0" i="1" smtClean="0">
+                                <a:latin typeface="Cambria Math" panose="02040503050406030204" pitchFamily="18" charset="0"/>
+                                <a:ea typeface="Cambria Math" panose="02040503050406030204" pitchFamily="18" charset="0"/>
+                              </a:rPr>
+                            </m:ctrlPr>
+                          </m:sSupPr>
+                          <m:e>
+                            <m:r>
+                              <a:rPr lang="de-DE" sz="2200" b="0" i="1" smtClean="0">
+                                <a:latin typeface="Cambria Math" panose="02040503050406030204" pitchFamily="18" charset="0"/>
+                                <a:ea typeface="Cambria Math" panose="02040503050406030204" pitchFamily="18" charset="0"/>
+                              </a:rPr>
+                              <m:t>𝑒</m:t>
+                            </m:r>
+                          </m:e>
+                          <m:sup>
+                            <m:r>
+                              <a:rPr lang="de-DE" sz="2200" b="0" i="1" smtClean="0">
+                                <a:latin typeface="Cambria Math" panose="02040503050406030204" pitchFamily="18" charset="0"/>
+                                <a:ea typeface="Cambria Math" panose="02040503050406030204" pitchFamily="18" charset="0"/>
+                              </a:rPr>
+                              <m:t>−</m:t>
+                            </m:r>
+                            <m:r>
+                              <a:rPr lang="de-DE" sz="2200" b="0" i="1" smtClean="0">
+                                <a:latin typeface="Cambria Math" panose="02040503050406030204" pitchFamily="18" charset="0"/>
+                                <a:ea typeface="Cambria Math" panose="02040503050406030204" pitchFamily="18" charset="0"/>
+                              </a:rPr>
+                              <m:t>𝑇</m:t>
+                            </m:r>
+                          </m:sup>
+                        </m:sSup>
+                      </m:e>
+                    </m:d>
+                    <m:r>
+                      <a:rPr lang="de-DE" sz="2200" b="0" i="1" smtClean="0">
+                        <a:latin typeface="Cambria Math" panose="02040503050406030204" pitchFamily="18" charset="0"/>
+                        <a:ea typeface="Cambria Math" panose="02040503050406030204" pitchFamily="18" charset="0"/>
+                      </a:rPr>
+                      <m:t>,    </m:t>
+                    </m:r>
+                    <m:r>
+                      <a:rPr lang="de-DE" sz="2200" b="0" i="1" smtClean="0">
+                        <a:latin typeface="Cambria Math" panose="02040503050406030204" pitchFamily="18" charset="0"/>
+                        <a:ea typeface="Cambria Math" panose="02040503050406030204" pitchFamily="18" charset="0"/>
+                      </a:rPr>
+                      <m:t>𝑘</m:t>
+                    </m:r>
+                    <m:r>
+                      <a:rPr lang="de-DE" sz="2200" b="0" i="1" smtClean="0">
+                        <a:latin typeface="Cambria Math" panose="02040503050406030204" pitchFamily="18" charset="0"/>
+                        <a:ea typeface="Cambria Math" panose="02040503050406030204" pitchFamily="18" charset="0"/>
+                      </a:rPr>
+                      <m:t>≥1</m:t>
+                    </m:r>
+                  </m:oMath>
+                </a14:m>
+                <a:endParaRPr lang="de-DE" sz="2200" dirty="0"/>
+              </a:p>
+              <a:p>
+                <a:pPr marL="457200" indent="-457200">
+                  <a:buFont typeface="+mj-lt"/>
+                  <a:buAutoNum type="arabicPeriod"/>
+                </a:pPr>
+                <a:r>
+                  <a:rPr lang="de-DE" sz="2200" dirty="0"/>
+                  <a:t>Take </a:t>
+                </a:r>
+                <a:r>
+                  <a:rPr lang="de-DE" sz="2200" dirty="0" err="1"/>
+                  <a:t>z-transform</a:t>
+                </a:r>
+                <a:r>
+                  <a:rPr lang="de-DE" sz="2200" dirty="0"/>
+                  <a:t>: </a:t>
+                </a:r>
+                <a14:m>
+                  <m:oMath xmlns:m="http://schemas.openxmlformats.org/officeDocument/2006/math">
+                    <m:r>
+                      <a:rPr lang="de-DE" sz="2200" i="1">
+                        <a:latin typeface="Cambria Math" panose="02040503050406030204" pitchFamily="18" charset="0"/>
+                      </a:rPr>
+                      <m:t>𝐺</m:t>
+                    </m:r>
+                    <m:d>
+                      <m:dPr>
+                        <m:ctrlPr>
+                          <a:rPr lang="de-DE" sz="2200" i="1">
+                            <a:latin typeface="Cambria Math" panose="02040503050406030204" pitchFamily="18" charset="0"/>
+                          </a:rPr>
+                        </m:ctrlPr>
+                      </m:dPr>
+                      <m:e>
+                        <m:r>
+                          <a:rPr lang="de-DE" sz="2200" i="1">
+                            <a:latin typeface="Cambria Math" panose="02040503050406030204" pitchFamily="18" charset="0"/>
+                          </a:rPr>
+                          <m:t>𝑧</m:t>
+                        </m:r>
+                      </m:e>
+                    </m:d>
+                    <m:r>
+                      <a:rPr lang="de-DE" sz="2200" i="1">
+                        <a:latin typeface="Cambria Math" panose="02040503050406030204" pitchFamily="18" charset="0"/>
+                      </a:rPr>
+                      <m:t>=</m:t>
+                    </m:r>
+                    <m:r>
+                      <a:rPr lang="de-DE" sz="2200" i="1">
+                        <a:latin typeface="Cambria Math" panose="02040503050406030204" pitchFamily="18" charset="0"/>
+                        <a:ea typeface="Cambria Math" panose="02040503050406030204" pitchFamily="18" charset="0"/>
+                      </a:rPr>
+                      <m:t>𝒵</m:t>
+                    </m:r>
+                    <m:d>
+                      <m:dPr>
+                        <m:begChr m:val="{"/>
+                        <m:endChr m:val="}"/>
+                        <m:ctrlPr>
+                          <a:rPr lang="de-DE" sz="2200" i="1" smtClean="0">
+                            <a:latin typeface="Cambria Math" panose="02040503050406030204" pitchFamily="18" charset="0"/>
+                            <a:ea typeface="Cambria Math" panose="02040503050406030204" pitchFamily="18" charset="0"/>
+                          </a:rPr>
+                        </m:ctrlPr>
+                      </m:dPr>
+                      <m:e>
+                        <m:r>
+                          <a:rPr lang="de-DE" sz="2200" b="0" i="1" smtClean="0">
+                            <a:latin typeface="Cambria Math" panose="02040503050406030204" pitchFamily="18" charset="0"/>
+                            <a:ea typeface="Cambria Math" panose="02040503050406030204" pitchFamily="18" charset="0"/>
+                          </a:rPr>
+                          <m:t>𝑦</m:t>
+                        </m:r>
+                        <m:d>
+                          <m:dPr>
+                            <m:begChr m:val="["/>
+                            <m:endChr m:val="]"/>
+                            <m:ctrlPr>
+                              <a:rPr lang="de-DE" sz="2200" b="0" i="1" smtClean="0">
+                                <a:latin typeface="Cambria Math" panose="02040503050406030204" pitchFamily="18" charset="0"/>
+                                <a:ea typeface="Cambria Math" panose="02040503050406030204" pitchFamily="18" charset="0"/>
+                              </a:rPr>
+                            </m:ctrlPr>
+                          </m:dPr>
+                          <m:e>
+                            <m:r>
+                              <a:rPr lang="de-DE" sz="2200" b="0" i="1" smtClean="0">
+                                <a:latin typeface="Cambria Math" panose="02040503050406030204" pitchFamily="18" charset="0"/>
+                                <a:ea typeface="Cambria Math" panose="02040503050406030204" pitchFamily="18" charset="0"/>
+                              </a:rPr>
+                              <m:t>𝑘</m:t>
+                            </m:r>
+                          </m:e>
+                        </m:d>
+                      </m:e>
+                    </m:d>
+                    <m:r>
+                      <a:rPr lang="de-DE" sz="2200" b="0" i="1" smtClean="0">
+                        <a:latin typeface="Cambria Math" panose="02040503050406030204" pitchFamily="18" charset="0"/>
+                        <a:ea typeface="Cambria Math" panose="02040503050406030204" pitchFamily="18" charset="0"/>
+                      </a:rPr>
+                      <m:t>=</m:t>
+                    </m:r>
+                    <m:f>
+                      <m:fPr>
+                        <m:ctrlPr>
+                          <a:rPr lang="de-DE" sz="2200" b="0" i="1" smtClean="0">
+                            <a:latin typeface="Cambria Math" panose="02040503050406030204" pitchFamily="18" charset="0"/>
+                            <a:ea typeface="Cambria Math" panose="02040503050406030204" pitchFamily="18" charset="0"/>
+                          </a:rPr>
+                        </m:ctrlPr>
+                      </m:fPr>
+                      <m:num>
+                        <m:r>
+                          <a:rPr lang="de-DE" sz="2200" b="0" i="1" smtClean="0">
+                            <a:latin typeface="Cambria Math" panose="02040503050406030204" pitchFamily="18" charset="0"/>
+                            <a:ea typeface="Cambria Math" panose="02040503050406030204" pitchFamily="18" charset="0"/>
+                          </a:rPr>
+                          <m:t>1−</m:t>
+                        </m:r>
+                        <m:sSup>
+                          <m:sSupPr>
+                            <m:ctrlPr>
+                              <a:rPr lang="de-DE" sz="2200" i="1">
+                                <a:latin typeface="Cambria Math" panose="02040503050406030204" pitchFamily="18" charset="0"/>
+                                <a:ea typeface="Cambria Math" panose="02040503050406030204" pitchFamily="18" charset="0"/>
+                              </a:rPr>
+                            </m:ctrlPr>
+                          </m:sSupPr>
+                          <m:e>
+                            <m:r>
+                              <a:rPr lang="de-DE" sz="2200" i="1">
+                                <a:latin typeface="Cambria Math" panose="02040503050406030204" pitchFamily="18" charset="0"/>
+                                <a:ea typeface="Cambria Math" panose="02040503050406030204" pitchFamily="18" charset="0"/>
+                              </a:rPr>
+                              <m:t>𝑒</m:t>
+                            </m:r>
+                          </m:e>
+                          <m:sup>
+                            <m:r>
+                              <a:rPr lang="de-DE" sz="2200" i="1">
+                                <a:latin typeface="Cambria Math" panose="02040503050406030204" pitchFamily="18" charset="0"/>
+                                <a:ea typeface="Cambria Math" panose="02040503050406030204" pitchFamily="18" charset="0"/>
+                              </a:rPr>
+                              <m:t>−</m:t>
+                            </m:r>
+                            <m:r>
+                              <a:rPr lang="de-DE" sz="2200" i="1">
+                                <a:latin typeface="Cambria Math" panose="02040503050406030204" pitchFamily="18" charset="0"/>
+                                <a:ea typeface="Cambria Math" panose="02040503050406030204" pitchFamily="18" charset="0"/>
+                              </a:rPr>
+                              <m:t>𝑇</m:t>
+                            </m:r>
+                          </m:sup>
+                        </m:sSup>
+                      </m:num>
+                      <m:den>
+                        <m:r>
+                          <a:rPr lang="de-DE" sz="2200" b="0" i="1" smtClean="0">
+                            <a:latin typeface="Cambria Math" panose="02040503050406030204" pitchFamily="18" charset="0"/>
+                            <a:ea typeface="Cambria Math" panose="02040503050406030204" pitchFamily="18" charset="0"/>
+                          </a:rPr>
+                          <m:t>𝑧</m:t>
+                        </m:r>
+                        <m:r>
+                          <a:rPr lang="de-DE" sz="2200" b="0" i="1" smtClean="0">
+                            <a:latin typeface="Cambria Math" panose="02040503050406030204" pitchFamily="18" charset="0"/>
+                            <a:ea typeface="Cambria Math" panose="02040503050406030204" pitchFamily="18" charset="0"/>
+                          </a:rPr>
+                          <m:t>−</m:t>
+                        </m:r>
+                        <m:sSup>
+                          <m:sSupPr>
+                            <m:ctrlPr>
+                              <a:rPr lang="de-DE" sz="2200" i="1">
+                                <a:latin typeface="Cambria Math" panose="02040503050406030204" pitchFamily="18" charset="0"/>
+                                <a:ea typeface="Cambria Math" panose="02040503050406030204" pitchFamily="18" charset="0"/>
+                              </a:rPr>
+                            </m:ctrlPr>
+                          </m:sSupPr>
+                          <m:e>
+                            <m:r>
+                              <a:rPr lang="de-DE" sz="2200" i="1">
+                                <a:latin typeface="Cambria Math" panose="02040503050406030204" pitchFamily="18" charset="0"/>
+                                <a:ea typeface="Cambria Math" panose="02040503050406030204" pitchFamily="18" charset="0"/>
+                              </a:rPr>
+                              <m:t>𝑒</m:t>
+                            </m:r>
+                          </m:e>
+                          <m:sup>
+                            <m:r>
+                              <a:rPr lang="de-DE" sz="2200" i="1">
+                                <a:latin typeface="Cambria Math" panose="02040503050406030204" pitchFamily="18" charset="0"/>
+                                <a:ea typeface="Cambria Math" panose="02040503050406030204" pitchFamily="18" charset="0"/>
+                              </a:rPr>
+                              <m:t>−</m:t>
+                            </m:r>
+                            <m:r>
+                              <a:rPr lang="de-DE" sz="2200" i="1">
+                                <a:latin typeface="Cambria Math" panose="02040503050406030204" pitchFamily="18" charset="0"/>
+                                <a:ea typeface="Cambria Math" panose="02040503050406030204" pitchFamily="18" charset="0"/>
+                              </a:rPr>
+                              <m:t>𝑇</m:t>
+                            </m:r>
+                          </m:sup>
+                        </m:sSup>
+                      </m:den>
+                    </m:f>
+                  </m:oMath>
+                </a14:m>
+                <a:endParaRPr lang="de-DE" sz="2200" dirty="0"/>
               </a:p>
             </p:txBody>
           </p:sp>
         </mc:Choice>
-        <mc:Fallback xmlns="">
+        <mc:Fallback>
           <p:sp>
             <p:nvSpPr>
               <p:cNvPr id="3" name="Inhaltsplatzhalter 2">
@@ -14982,7 +17530,7 @@
               <a:blipFill>
                 <a:blip r:embed="rId2"/>
                 <a:stretch>
-                  <a:fillRect l="-1206" t="-3198" r="-603"/>
+                  <a:fillRect l="-844" t="-1453"/>
                 </a:stretch>
               </a:blipFill>
             </p:spPr>
@@ -15060,6 +17608,36 @@
           <a:chExt cx="0" cy="0"/>
         </a:xfrm>
       </p:grpSpPr>
+      <p:pic>
+        <p:nvPicPr>
+          <p:cNvPr id="7" name="Grafik 6">
+            <a:extLst>
+              <a:ext uri="{FF2B5EF4-FFF2-40B4-BE49-F238E27FC236}">
+                <a16:creationId xmlns:a16="http://schemas.microsoft.com/office/drawing/2014/main" id="{752144E6-9A4A-09D2-9156-53D959141375}"/>
+              </a:ext>
+            </a:extLst>
+          </p:cNvPr>
+          <p:cNvPicPr>
+            <a:picLocks noChangeAspect="1"/>
+          </p:cNvPicPr>
+          <p:nvPr/>
+        </p:nvPicPr>
+        <p:blipFill>
+          <a:blip r:embed="rId2"/>
+          <a:stretch>
+            <a:fillRect/>
+          </a:stretch>
+        </p:blipFill>
+        <p:spPr>
+          <a:xfrm>
+            <a:off x="6162122" y="1803626"/>
+            <a:ext cx="6029879" cy="4552724"/>
+          </a:xfrm>
+          <a:prstGeom prst="rect">
+            <a:avLst/>
+          </a:prstGeom>
+        </p:spPr>
+      </p:pic>
       <p:sp>
         <p:nvSpPr>
           <p:cNvPr id="2" name="Titel 1">
@@ -15092,75 +17670,6 @@
             <a:r>
               <a:rPr lang="de-DE" dirty="0" err="1"/>
               <a:t>Comparison</a:t>
-            </a:r>
-            <a:endParaRPr lang="de-DE" dirty="0"/>
-          </a:p>
-        </p:txBody>
-      </p:sp>
-      <p:sp>
-        <p:nvSpPr>
-          <p:cNvPr id="3" name="Inhaltsplatzhalter 2">
-            <a:extLst>
-              <a:ext uri="{FF2B5EF4-FFF2-40B4-BE49-F238E27FC236}">
-                <a16:creationId xmlns:a16="http://schemas.microsoft.com/office/drawing/2014/main" id="{871BA06C-6235-55DD-183D-969F2FB06439}"/>
-              </a:ext>
-            </a:extLst>
-          </p:cNvPr>
-          <p:cNvSpPr>
-            <a:spLocks noGrp="1"/>
-          </p:cNvSpPr>
-          <p:nvPr>
-            <p:ph idx="1"/>
-          </p:nvPr>
-        </p:nvSpPr>
-        <p:spPr/>
-        <p:txBody>
-          <a:bodyPr/>
-          <a:lstStyle/>
-          <a:p>
-            <a:pPr marL="0" indent="0">
-              <a:buNone/>
-            </a:pPr>
-            <a:r>
-              <a:rPr lang="de-DE" dirty="0"/>
-              <a:t>👉 Plot:</a:t>
-            </a:r>
-          </a:p>
-          <a:p>
-            <a:r>
-              <a:rPr lang="de-DE" dirty="0" err="1"/>
-              <a:t>Continuous</a:t>
-            </a:r>
-            <a:r>
-              <a:rPr lang="de-DE" dirty="0"/>
-              <a:t> </a:t>
-            </a:r>
-            <a:r>
-              <a:rPr lang="de-DE" dirty="0" err="1"/>
-              <a:t>system</a:t>
-            </a:r>
-            <a:r>
-              <a:rPr lang="de-DE" dirty="0"/>
-              <a:t> </a:t>
-            </a:r>
-            <a:r>
-              <a:rPr lang="de-DE" dirty="0" err="1"/>
-              <a:t>response</a:t>
-            </a:r>
-            <a:endParaRPr lang="de-DE" dirty="0"/>
-          </a:p>
-          <a:p>
-            <a:r>
-              <a:rPr lang="de-DE" dirty="0" err="1"/>
-              <a:t>Discrete</a:t>
-            </a:r>
-            <a:r>
-              <a:rPr lang="de-DE" dirty="0"/>
-              <a:t> ZOH </a:t>
-            </a:r>
-            <a:r>
-              <a:rPr lang="de-DE" dirty="0" err="1"/>
-              <a:t>response</a:t>
             </a:r>
             <a:endParaRPr lang="de-DE" dirty="0"/>
           </a:p>
@@ -15195,6 +17704,36 @@
           </a:p>
         </p:txBody>
       </p:sp>
+      <p:pic>
+        <p:nvPicPr>
+          <p:cNvPr id="5" name="Grafik 4">
+            <a:extLst>
+              <a:ext uri="{FF2B5EF4-FFF2-40B4-BE49-F238E27FC236}">
+                <a16:creationId xmlns:a16="http://schemas.microsoft.com/office/drawing/2014/main" id="{6F836160-3C06-D090-4A1C-195F52AE825C}"/>
+              </a:ext>
+            </a:extLst>
+          </p:cNvPr>
+          <p:cNvPicPr>
+            <a:picLocks noChangeAspect="1"/>
+          </p:cNvPicPr>
+          <p:nvPr/>
+        </p:nvPicPr>
+        <p:blipFill>
+          <a:blip r:embed="rId3"/>
+          <a:stretch>
+            <a:fillRect/>
+          </a:stretch>
+        </p:blipFill>
+        <p:spPr>
+          <a:xfrm>
+            <a:off x="66122" y="1803627"/>
+            <a:ext cx="6029878" cy="4552723"/>
+          </a:xfrm>
+          <a:prstGeom prst="rect">
+            <a:avLst/>
+          </a:prstGeom>
+        </p:spPr>
+      </p:pic>
     </p:spTree>
     <p:extLst>
       <p:ext uri="{BB962C8B-B14F-4D97-AF65-F5344CB8AC3E}">
@@ -15247,6 +17786,10 @@
           <a:lstStyle/>
           <a:p>
             <a:r>
+              <a:rPr lang="de-DE" dirty="0"/>
+              <a:t>Alternative </a:t>
+            </a:r>
+            <a:r>
               <a:rPr lang="de-DE" dirty="0" err="1"/>
               <a:t>Discretization</a:t>
             </a:r>
@@ -15257,122 +17800,275 @@
           </a:p>
         </p:txBody>
       </p:sp>
-      <p:sp>
-        <p:nvSpPr>
-          <p:cNvPr id="3" name="Inhaltsplatzhalter 2">
-            <a:extLst>
-              <a:ext uri="{FF2B5EF4-FFF2-40B4-BE49-F238E27FC236}">
-                <a16:creationId xmlns:a16="http://schemas.microsoft.com/office/drawing/2014/main" id="{12F07B9D-09CF-1A1F-5CD8-5F69FA091070}"/>
-              </a:ext>
-            </a:extLst>
-          </p:cNvPr>
-          <p:cNvSpPr>
-            <a:spLocks noGrp="1"/>
-          </p:cNvSpPr>
-          <p:nvPr>
-            <p:ph idx="1"/>
-          </p:nvPr>
-        </p:nvSpPr>
-        <p:spPr/>
-        <p:txBody>
-          <a:bodyPr/>
-          <a:lstStyle/>
-          <a:p>
-            <a:r>
-              <a:rPr lang="de-DE" dirty="0" err="1"/>
-              <a:t>We</a:t>
-            </a:r>
-            <a:r>
-              <a:rPr lang="de-DE" dirty="0"/>
-              <a:t> </a:t>
-            </a:r>
-            <a:r>
-              <a:rPr lang="de-DE" dirty="0" err="1"/>
-              <a:t>need</a:t>
-            </a:r>
-            <a:r>
-              <a:rPr lang="de-DE" dirty="0"/>
-              <a:t> </a:t>
-            </a:r>
-            <a:r>
-              <a:rPr lang="de-DE" dirty="0" err="1"/>
-              <a:t>to</a:t>
-            </a:r>
-            <a:r>
-              <a:rPr lang="de-DE" dirty="0"/>
-              <a:t> </a:t>
-            </a:r>
-            <a:r>
-              <a:rPr lang="de-DE" dirty="0" err="1"/>
-              <a:t>convert</a:t>
-            </a:r>
-            <a:r>
-              <a:rPr lang="de-DE" dirty="0"/>
-              <a:t>:</a:t>
-            </a:r>
-          </a:p>
-          <a:p>
-            <a:r>
-              <a:rPr lang="de-DE" dirty="0"/>
-              <a:t>G(s) \</a:t>
-            </a:r>
-            <a:r>
-              <a:rPr lang="de-DE" dirty="0" err="1"/>
-              <a:t>rightarrow</a:t>
-            </a:r>
-            <a:r>
-              <a:rPr lang="de-DE" dirty="0"/>
-              <a:t> G(</a:t>
-            </a:r>
-            <a:r>
-              <a:rPr lang="de-DE" dirty="0" err="1"/>
-              <a:t>z</a:t>
-            </a:r>
-            <a:r>
-              <a:rPr lang="de-DE" dirty="0"/>
-              <a:t>)</a:t>
-            </a:r>
-          </a:p>
-          <a:p>
-            <a:br>
-              <a:rPr lang="de-DE" dirty="0"/>
-            </a:br>
-            <a:endParaRPr lang="de-DE" dirty="0"/>
-          </a:p>
-          <a:p>
-            <a:r>
-              <a:rPr lang="de-DE" dirty="0"/>
-              <a:t>Methods:</a:t>
-            </a:r>
-          </a:p>
-          <a:p>
-            <a:r>
-              <a:rPr lang="de-DE" dirty="0"/>
-              <a:t>Forward Euler</a:t>
-            </a:r>
-          </a:p>
-          <a:p>
-            <a:r>
-              <a:rPr lang="de-DE" dirty="0" err="1"/>
-              <a:t>Backward</a:t>
-            </a:r>
-            <a:r>
-              <a:rPr lang="de-DE" dirty="0"/>
-              <a:t> Euler</a:t>
-            </a:r>
-          </a:p>
-          <a:p>
-            <a:r>
-              <a:rPr lang="de-DE" dirty="0" err="1"/>
-              <a:t>Tustin</a:t>
-            </a:r>
-            <a:r>
-              <a:rPr lang="de-DE" dirty="0"/>
-              <a:t> (bilinear)</a:t>
-            </a:r>
-          </a:p>
-        </p:txBody>
-      </p:sp>
+      <mc:AlternateContent xmlns:mc="http://schemas.openxmlformats.org/markup-compatibility/2006">
+        <mc:Choice xmlns:a14="http://schemas.microsoft.com/office/drawing/2010/main" Requires="a14">
+          <p:sp>
+            <p:nvSpPr>
+              <p:cNvPr id="3" name="Inhaltsplatzhalter 2">
+                <a:extLst>
+                  <a:ext uri="{FF2B5EF4-FFF2-40B4-BE49-F238E27FC236}">
+                    <a16:creationId xmlns:a16="http://schemas.microsoft.com/office/drawing/2014/main" id="{12F07B9D-09CF-1A1F-5CD8-5F69FA091070}"/>
+                  </a:ext>
+                </a:extLst>
+              </p:cNvPr>
+              <p:cNvSpPr>
+                <a:spLocks noGrp="1"/>
+              </p:cNvSpPr>
+              <p:nvPr>
+                <p:ph idx="1"/>
+              </p:nvPr>
+            </p:nvSpPr>
+            <p:spPr/>
+            <p:txBody>
+              <a:bodyPr>
+                <a:normAutofit fontScale="92500" lnSpcReduction="10000"/>
+              </a:bodyPr>
+              <a:lstStyle/>
+              <a:p>
+                <a:pPr marL="0" indent="0">
+                  <a:buNone/>
+                </a:pPr>
+                <a:r>
+                  <a:rPr lang="de-DE" dirty="0"/>
+                  <a:t>How </a:t>
+                </a:r>
+                <a:r>
+                  <a:rPr lang="de-DE" dirty="0" err="1"/>
+                  <a:t>can</a:t>
+                </a:r>
+                <a:r>
+                  <a:rPr lang="de-DE" dirty="0"/>
+                  <a:t> I </a:t>
+                </a:r>
+                <a:r>
+                  <a:rPr lang="de-DE" dirty="0" err="1"/>
+                  <a:t>approximate</a:t>
+                </a:r>
+                <a:r>
+                  <a:rPr lang="de-DE" dirty="0"/>
+                  <a:t> a </a:t>
+                </a:r>
+                <a:r>
+                  <a:rPr lang="de-DE" dirty="0" err="1"/>
+                  <a:t>continuous</a:t>
+                </a:r>
+                <a:r>
+                  <a:rPr lang="de-DE" dirty="0"/>
+                  <a:t> </a:t>
+                </a:r>
+                <a:r>
+                  <a:rPr lang="de-DE" dirty="0" err="1"/>
+                  <a:t>transfer</a:t>
+                </a:r>
+                <a:r>
+                  <a:rPr lang="de-DE" dirty="0"/>
+                  <a:t> </a:t>
+                </a:r>
+                <a:r>
+                  <a:rPr lang="de-DE" dirty="0" err="1"/>
+                  <a:t>function</a:t>
+                </a:r>
+                <a:r>
+                  <a:rPr lang="de-DE" dirty="0"/>
+                  <a:t> in </a:t>
+                </a:r>
+                <a:r>
+                  <a:rPr lang="de-DE" dirty="0" err="1"/>
+                  <a:t>discrete</a:t>
+                </a:r>
+                <a:r>
+                  <a:rPr lang="de-DE" dirty="0"/>
+                  <a:t> time </a:t>
+                </a:r>
+                <a:r>
+                  <a:rPr lang="de-DE" dirty="0" err="1"/>
+                  <a:t>without</a:t>
+                </a:r>
+                <a:r>
+                  <a:rPr lang="de-DE" dirty="0"/>
+                  <a:t> </a:t>
+                </a:r>
+                <a:r>
+                  <a:rPr lang="de-DE" dirty="0" err="1"/>
+                  <a:t>modeling</a:t>
+                </a:r>
+                <a:r>
+                  <a:rPr lang="de-DE" dirty="0"/>
+                  <a:t> ZOH </a:t>
+                </a:r>
+                <a:r>
+                  <a:rPr lang="de-DE" dirty="0" err="1"/>
+                  <a:t>explicitly</a:t>
+                </a:r>
+                <a:r>
+                  <a:rPr lang="de-DE" dirty="0"/>
+                  <a:t>?</a:t>
+                </a:r>
+              </a:p>
+              <a:p>
+                <a:pPr marL="0" indent="0">
+                  <a:buNone/>
+                </a:pPr>
+                <a:endParaRPr lang="de-DE" dirty="0"/>
+              </a:p>
+              <a:p>
+                <a:pPr marL="0" indent="0">
+                  <a:buNone/>
+                </a:pPr>
+                <a:r>
+                  <a:rPr lang="de-DE" dirty="0"/>
+                  <a:t>Goal:</a:t>
+                </a:r>
+              </a:p>
+              <a:p>
+                <a:pPr marL="0" indent="0">
+                  <a:buNone/>
+                </a:pPr>
+                <a14:m>
+                  <m:oMath xmlns:m="http://schemas.openxmlformats.org/officeDocument/2006/math">
+                    <m:r>
+                      <a:rPr lang="de-DE" b="0" i="1" smtClean="0">
+                        <a:latin typeface="Cambria Math" panose="02040503050406030204" pitchFamily="18" charset="0"/>
+                      </a:rPr>
+                      <m:t>𝐺</m:t>
+                    </m:r>
+                    <m:r>
+                      <a:rPr lang="de-DE" b="0" i="1" smtClean="0">
+                        <a:latin typeface="Cambria Math" panose="02040503050406030204" pitchFamily="18" charset="0"/>
+                      </a:rPr>
+                      <m:t>(</m:t>
+                    </m:r>
+                    <m:r>
+                      <a:rPr lang="de-DE" b="0" i="1" smtClean="0">
+                        <a:latin typeface="Cambria Math" panose="02040503050406030204" pitchFamily="18" charset="0"/>
+                      </a:rPr>
+                      <m:t>𝑠</m:t>
+                    </m:r>
+                    <m:r>
+                      <a:rPr lang="de-DE" b="0" i="1" smtClean="0">
+                        <a:latin typeface="Cambria Math" panose="02040503050406030204" pitchFamily="18" charset="0"/>
+                      </a:rPr>
+                      <m:t>)→</m:t>
+                    </m:r>
+                    <m:r>
+                      <a:rPr lang="de-DE" b="0" i="1" smtClean="0">
+                        <a:latin typeface="Cambria Math" panose="02040503050406030204" pitchFamily="18" charset="0"/>
+                        <a:ea typeface="Cambria Math" panose="02040503050406030204" pitchFamily="18" charset="0"/>
+                      </a:rPr>
+                      <m:t>𝐺</m:t>
+                    </m:r>
+                    <m:r>
+                      <a:rPr lang="de-DE" b="0" i="1" smtClean="0">
+                        <a:latin typeface="Cambria Math" panose="02040503050406030204" pitchFamily="18" charset="0"/>
+                        <a:ea typeface="Cambria Math" panose="02040503050406030204" pitchFamily="18" charset="0"/>
+                      </a:rPr>
+                      <m:t>(</m:t>
+                    </m:r>
+                    <m:r>
+                      <a:rPr lang="de-DE" b="0" i="1" smtClean="0">
+                        <a:latin typeface="Cambria Math" panose="02040503050406030204" pitchFamily="18" charset="0"/>
+                        <a:ea typeface="Cambria Math" panose="02040503050406030204" pitchFamily="18" charset="0"/>
+                      </a:rPr>
+                      <m:t>𝑧</m:t>
+                    </m:r>
+                    <m:r>
+                      <a:rPr lang="de-DE" b="0" i="1" smtClean="0">
+                        <a:latin typeface="Cambria Math" panose="02040503050406030204" pitchFamily="18" charset="0"/>
+                        <a:ea typeface="Cambria Math" panose="02040503050406030204" pitchFamily="18" charset="0"/>
+                      </a:rPr>
+                      <m:t>)</m:t>
+                    </m:r>
+                  </m:oMath>
+                </a14:m>
+                <a:r>
+                  <a:rPr lang="de-DE" dirty="0"/>
+                  <a:t> (approximative)</a:t>
+                </a:r>
+              </a:p>
+              <a:p>
+                <a:pPr marL="0" indent="0">
+                  <a:buNone/>
+                </a:pPr>
+                <a:endParaRPr lang="de-DE" dirty="0"/>
+              </a:p>
+              <a:p>
+                <a:pPr marL="0" indent="0">
+                  <a:buNone/>
+                </a:pPr>
+                <a:r>
+                  <a:rPr lang="de-DE" dirty="0"/>
+                  <a:t>Methods:</a:t>
+                </a:r>
+              </a:p>
+              <a:p>
+                <a:r>
+                  <a:rPr lang="de-DE" dirty="0"/>
+                  <a:t>Forward Euler</a:t>
+                </a:r>
+              </a:p>
+              <a:p>
+                <a:r>
+                  <a:rPr lang="de-DE" dirty="0" err="1"/>
+                  <a:t>Backward</a:t>
+                </a:r>
+                <a:r>
+                  <a:rPr lang="de-DE" dirty="0"/>
+                  <a:t> Euler</a:t>
+                </a:r>
+              </a:p>
+              <a:p>
+                <a:r>
+                  <a:rPr lang="de-DE" dirty="0" err="1"/>
+                  <a:t>Tustin</a:t>
+                </a:r>
+                <a:r>
+                  <a:rPr lang="de-DE" dirty="0"/>
+                  <a:t> (bilinear)</a:t>
+                </a:r>
+              </a:p>
+            </p:txBody>
+          </p:sp>
+        </mc:Choice>
+        <mc:Fallback>
+          <p:sp>
+            <p:nvSpPr>
+              <p:cNvPr id="3" name="Inhaltsplatzhalter 2">
+                <a:extLst>
+                  <a:ext uri="{FF2B5EF4-FFF2-40B4-BE49-F238E27FC236}">
+                    <a16:creationId xmlns:a16="http://schemas.microsoft.com/office/drawing/2014/main" id="{12F07B9D-09CF-1A1F-5CD8-5F69FA091070}"/>
+                  </a:ext>
+                </a:extLst>
+              </p:cNvPr>
+              <p:cNvSpPr>
+                <a:spLocks noGrp="1" noRot="1" noChangeAspect="1" noMove="1" noResize="1" noEditPoints="1" noAdjustHandles="1" noChangeArrowheads="1" noChangeShapeType="1" noTextEdit="1"/>
+              </p:cNvSpPr>
+              <p:nvPr>
+                <p:ph idx="1"/>
+              </p:nvPr>
+            </p:nvSpPr>
+            <p:spPr>
+              <a:blipFill>
+                <a:blip r:embed="rId2"/>
+                <a:stretch>
+                  <a:fillRect l="-1086" t="-2616" b="-1744"/>
+                </a:stretch>
+              </a:blipFill>
+            </p:spPr>
+            <p:txBody>
+              <a:bodyPr/>
+              <a:lstStyle/>
+              <a:p>
+                <a:r>
+                  <a:rPr lang="de-DE">
+                    <a:noFill/>
+                  </a:rPr>
+                  <a:t> </a:t>
+                </a:r>
+              </a:p>
+            </p:txBody>
+          </p:sp>
+        </mc:Fallback>
+      </mc:AlternateContent>
       <p:sp>
         <p:nvSpPr>
           <p:cNvPr id="4" name="Foliennummernplatzhalter 3">
@@ -15460,108 +18156,187 @@
           </a:p>
         </p:txBody>
       </p:sp>
-      <p:sp>
-        <p:nvSpPr>
-          <p:cNvPr id="3" name="Inhaltsplatzhalter 2">
-            <a:extLst>
-              <a:ext uri="{FF2B5EF4-FFF2-40B4-BE49-F238E27FC236}">
-                <a16:creationId xmlns:a16="http://schemas.microsoft.com/office/drawing/2014/main" id="{310AC651-4ADB-CB27-8745-B7F22B02E970}"/>
-              </a:ext>
-            </a:extLst>
-          </p:cNvPr>
-          <p:cNvSpPr>
-            <a:spLocks noGrp="1"/>
-          </p:cNvSpPr>
-          <p:nvPr>
-            <p:ph idx="1"/>
-          </p:nvPr>
-        </p:nvSpPr>
-        <p:spPr/>
-        <p:txBody>
-          <a:bodyPr/>
-          <a:lstStyle/>
-          <a:p>
-            <a:r>
-              <a:rPr lang="de-DE" dirty="0"/>
-              <a:t>Simple </a:t>
-            </a:r>
-            <a:r>
-              <a:rPr lang="de-DE" dirty="0" err="1"/>
-              <a:t>numerical</a:t>
-            </a:r>
-            <a:r>
-              <a:rPr lang="de-DE" dirty="0"/>
-              <a:t> </a:t>
-            </a:r>
-            <a:r>
-              <a:rPr lang="de-DE" dirty="0" err="1"/>
-              <a:t>approximation</a:t>
-            </a:r>
-            <a:endParaRPr lang="de-DE" dirty="0"/>
-          </a:p>
-          <a:p>
-            <a:r>
-              <a:rPr lang="de-DE" dirty="0"/>
-              <a:t>Can </a:t>
-            </a:r>
-            <a:r>
-              <a:rPr lang="de-DE" dirty="0" err="1"/>
-              <a:t>distort</a:t>
-            </a:r>
-            <a:r>
-              <a:rPr lang="de-DE" dirty="0"/>
-              <a:t> </a:t>
-            </a:r>
-            <a:r>
-              <a:rPr lang="de-DE" dirty="0" err="1"/>
-              <a:t>dynamics</a:t>
-            </a:r>
-            <a:endParaRPr lang="de-DE" dirty="0"/>
-          </a:p>
-          <a:p>
-            <a:pPr marL="0" indent="0">
-              <a:buNone/>
-            </a:pPr>
-            <a:endParaRPr lang="de-DE" dirty="0"/>
-          </a:p>
-          <a:p>
-            <a:r>
-              <a:rPr lang="de-DE" dirty="0"/>
-              <a:t>Approximation:</a:t>
-            </a:r>
-          </a:p>
-          <a:p>
-            <a:r>
-              <a:rPr lang="de-DE" dirty="0"/>
-              <a:t>s \</a:t>
-            </a:r>
-            <a:r>
-              <a:rPr lang="de-DE" dirty="0" err="1"/>
-              <a:t>approx</a:t>
-            </a:r>
-            <a:r>
-              <a:rPr lang="de-DE" dirty="0"/>
-              <a:t> \</a:t>
-            </a:r>
-            <a:r>
-              <a:rPr lang="de-DE" dirty="0" err="1"/>
-              <a:t>frac</a:t>
-            </a:r>
-            <a:r>
-              <a:rPr lang="de-DE" dirty="0"/>
-              <a:t>{</a:t>
-            </a:r>
-            <a:r>
-              <a:rPr lang="de-DE" dirty="0" err="1"/>
-              <a:t>z</a:t>
-            </a:r>
-            <a:r>
-              <a:rPr lang="de-DE" dirty="0"/>
-              <a:t> - 1}{T}</a:t>
-            </a:r>
-          </a:p>
-        </p:txBody>
-      </p:sp>
+      <mc:AlternateContent xmlns:mc="http://schemas.openxmlformats.org/markup-compatibility/2006">
+        <mc:Choice xmlns:a14="http://schemas.microsoft.com/office/drawing/2010/main" Requires="a14">
+          <p:sp>
+            <p:nvSpPr>
+              <p:cNvPr id="3" name="Inhaltsplatzhalter 2">
+                <a:extLst>
+                  <a:ext uri="{FF2B5EF4-FFF2-40B4-BE49-F238E27FC236}">
+                    <a16:creationId xmlns:a16="http://schemas.microsoft.com/office/drawing/2014/main" id="{310AC651-4ADB-CB27-8745-B7F22B02E970}"/>
+                  </a:ext>
+                </a:extLst>
+              </p:cNvPr>
+              <p:cNvSpPr>
+                <a:spLocks noGrp="1"/>
+              </p:cNvSpPr>
+              <p:nvPr>
+                <p:ph idx="1"/>
+              </p:nvPr>
+            </p:nvSpPr>
+            <p:spPr/>
+            <p:txBody>
+              <a:bodyPr/>
+              <a:lstStyle/>
+              <a:p>
+                <a:r>
+                  <a:rPr lang="de-DE" dirty="0"/>
+                  <a:t>Simple </a:t>
+                </a:r>
+                <a:r>
+                  <a:rPr lang="de-DE" dirty="0" err="1"/>
+                  <a:t>numerical</a:t>
+                </a:r>
+                <a:r>
+                  <a:rPr lang="de-DE" dirty="0"/>
+                  <a:t> </a:t>
+                </a:r>
+                <a:r>
+                  <a:rPr lang="de-DE" dirty="0" err="1"/>
+                  <a:t>approximation</a:t>
+                </a:r>
+                <a:endParaRPr lang="de-DE" dirty="0"/>
+              </a:p>
+              <a:p>
+                <a:r>
+                  <a:rPr lang="de-DE" dirty="0"/>
+                  <a:t>Can </a:t>
+                </a:r>
+                <a:r>
+                  <a:rPr lang="de-DE" dirty="0" err="1"/>
+                  <a:t>distort</a:t>
+                </a:r>
+                <a:r>
+                  <a:rPr lang="de-DE" dirty="0"/>
+                  <a:t> </a:t>
+                </a:r>
+                <a:r>
+                  <a:rPr lang="de-DE" dirty="0" err="1"/>
+                  <a:t>dynamics</a:t>
+                </a:r>
+                <a:endParaRPr lang="de-DE" dirty="0"/>
+              </a:p>
+              <a:p>
+                <a:pPr marL="0" indent="0">
+                  <a:buNone/>
+                </a:pPr>
+                <a:endParaRPr lang="de-DE" dirty="0"/>
+              </a:p>
+              <a:p>
+                <a:pPr marL="0" indent="0">
+                  <a:buNone/>
+                </a:pPr>
+                <a:r>
+                  <a:rPr lang="de-DE" dirty="0"/>
+                  <a:t>Approximation:</a:t>
+                </a:r>
+              </a:p>
+              <a:p>
+                <a:pPr marL="0" indent="0">
+                  <a:buNone/>
+                </a:pPr>
+                <a14:m>
+                  <m:oMathPara xmlns:m="http://schemas.openxmlformats.org/officeDocument/2006/math">
+                    <m:oMathParaPr>
+                      <m:jc m:val="left"/>
+                    </m:oMathParaPr>
+                    <m:oMath xmlns:m="http://schemas.openxmlformats.org/officeDocument/2006/math">
+                      <m:r>
+                        <a:rPr lang="de-DE" b="0" i="1" smtClean="0">
+                          <a:latin typeface="Cambria Math" panose="02040503050406030204" pitchFamily="18" charset="0"/>
+                        </a:rPr>
+                        <m:t>𝑠</m:t>
+                      </m:r>
+                      <m:r>
+                        <a:rPr lang="de-DE" b="0" i="1" smtClean="0">
+                          <a:latin typeface="Cambria Math" panose="02040503050406030204" pitchFamily="18" charset="0"/>
+                          <a:ea typeface="Cambria Math" panose="02040503050406030204" pitchFamily="18" charset="0"/>
+                        </a:rPr>
+                        <m:t>≈</m:t>
+                      </m:r>
+                      <m:f>
+                        <m:fPr>
+                          <m:ctrlPr>
+                            <a:rPr lang="de-DE" b="0" i="1" smtClean="0">
+                              <a:latin typeface="Cambria Math" panose="02040503050406030204" pitchFamily="18" charset="0"/>
+                              <a:ea typeface="Cambria Math" panose="02040503050406030204" pitchFamily="18" charset="0"/>
+                            </a:rPr>
+                          </m:ctrlPr>
+                        </m:fPr>
+                        <m:num>
+                          <m:r>
+                            <a:rPr lang="de-DE" b="0" i="1" smtClean="0">
+                              <a:latin typeface="Cambria Math" panose="02040503050406030204" pitchFamily="18" charset="0"/>
+                              <a:ea typeface="Cambria Math" panose="02040503050406030204" pitchFamily="18" charset="0"/>
+                            </a:rPr>
+                            <m:t>𝑧</m:t>
+                          </m:r>
+                          <m:r>
+                            <a:rPr lang="de-DE" b="0" i="1" smtClean="0">
+                              <a:latin typeface="Cambria Math" panose="02040503050406030204" pitchFamily="18" charset="0"/>
+                              <a:ea typeface="Cambria Math" panose="02040503050406030204" pitchFamily="18" charset="0"/>
+                            </a:rPr>
+                            <m:t>−1</m:t>
+                          </m:r>
+                        </m:num>
+                        <m:den>
+                          <m:r>
+                            <a:rPr lang="de-DE" b="0" i="1" smtClean="0">
+                              <a:latin typeface="Cambria Math" panose="02040503050406030204" pitchFamily="18" charset="0"/>
+                              <a:ea typeface="Cambria Math" panose="02040503050406030204" pitchFamily="18" charset="0"/>
+                            </a:rPr>
+                            <m:t>𝑇</m:t>
+                          </m:r>
+                        </m:den>
+                      </m:f>
+                    </m:oMath>
+                  </m:oMathPara>
+                </a14:m>
+                <a:endParaRPr lang="de-DE" dirty="0"/>
+              </a:p>
+            </p:txBody>
+          </p:sp>
+        </mc:Choice>
+        <mc:Fallback>
+          <p:sp>
+            <p:nvSpPr>
+              <p:cNvPr id="3" name="Inhaltsplatzhalter 2">
+                <a:extLst>
+                  <a:ext uri="{FF2B5EF4-FFF2-40B4-BE49-F238E27FC236}">
+                    <a16:creationId xmlns:a16="http://schemas.microsoft.com/office/drawing/2014/main" id="{310AC651-4ADB-CB27-8745-B7F22B02E970}"/>
+                  </a:ext>
+                </a:extLst>
+              </p:cNvPr>
+              <p:cNvSpPr>
+                <a:spLocks noGrp="1" noRot="1" noChangeAspect="1" noMove="1" noResize="1" noEditPoints="1" noAdjustHandles="1" noChangeArrowheads="1" noChangeShapeType="1" noTextEdit="1"/>
+              </p:cNvSpPr>
+              <p:nvPr>
+                <p:ph idx="1"/>
+              </p:nvPr>
+            </p:nvSpPr>
+            <p:spPr>
+              <a:blipFill>
+                <a:blip r:embed="rId2"/>
+                <a:stretch>
+                  <a:fillRect l="-1206" t="-2326"/>
+                </a:stretch>
+              </a:blipFill>
+            </p:spPr>
+            <p:txBody>
+              <a:bodyPr/>
+              <a:lstStyle/>
+              <a:p>
+                <a:r>
+                  <a:rPr lang="de-DE">
+                    <a:noFill/>
+                  </a:rPr>
+                  <a:t> </a:t>
+                </a:r>
+              </a:p>
+            </p:txBody>
+          </p:sp>
+        </mc:Fallback>
+      </mc:AlternateContent>
       <p:sp>
         <p:nvSpPr>
           <p:cNvPr id="4" name="Foliennummernplatzhalter 3">
@@ -15653,107 +18428,280 @@
           </a:p>
         </p:txBody>
       </p:sp>
-      <p:sp>
-        <p:nvSpPr>
-          <p:cNvPr id="3" name="Inhaltsplatzhalter 2">
-            <a:extLst>
-              <a:ext uri="{FF2B5EF4-FFF2-40B4-BE49-F238E27FC236}">
-                <a16:creationId xmlns:a16="http://schemas.microsoft.com/office/drawing/2014/main" id="{92E87A64-688D-3211-F2E5-F5ECC345E670}"/>
-              </a:ext>
-            </a:extLst>
-          </p:cNvPr>
-          <p:cNvSpPr>
-            <a:spLocks noGrp="1"/>
-          </p:cNvSpPr>
-          <p:nvPr>
-            <p:ph idx="1"/>
-          </p:nvPr>
-        </p:nvSpPr>
-        <p:spPr/>
-        <p:txBody>
-          <a:bodyPr/>
-          <a:lstStyle/>
-          <a:p>
-            <a:r>
-              <a:rPr lang="de-DE" dirty="0"/>
-              <a:t>Given:</a:t>
-            </a:r>
-          </a:p>
-          <a:p>
-            <a:r>
-              <a:rPr lang="de-DE" dirty="0"/>
-              <a:t>G(s) = \</a:t>
-            </a:r>
-            <a:r>
-              <a:rPr lang="de-DE" dirty="0" err="1"/>
-              <a:t>frac</a:t>
-            </a:r>
-            <a:r>
-              <a:rPr lang="de-DE" dirty="0"/>
-              <a:t>{1}{s+1}</a:t>
-            </a:r>
-          </a:p>
-          <a:p>
-            <a:br>
-              <a:rPr lang="de-DE" dirty="0"/>
-            </a:br>
-            <a:endParaRPr lang="de-DE" dirty="0"/>
-          </a:p>
-          <a:p>
-            <a:r>
-              <a:rPr lang="de-DE" dirty="0"/>
-              <a:t>Substitute:</a:t>
-            </a:r>
-          </a:p>
-          <a:p>
-            <a:r>
-              <a:rPr lang="de-DE" dirty="0"/>
-              <a:t>s = \</a:t>
-            </a:r>
-            <a:r>
-              <a:rPr lang="de-DE" dirty="0" err="1"/>
-              <a:t>frac</a:t>
-            </a:r>
-            <a:r>
-              <a:rPr lang="de-DE" dirty="0"/>
-              <a:t>{</a:t>
-            </a:r>
-            <a:r>
-              <a:rPr lang="de-DE" dirty="0" err="1"/>
-              <a:t>z</a:t>
-            </a:r>
-            <a:r>
-              <a:rPr lang="de-DE" dirty="0"/>
-              <a:t> - 1}{T}</a:t>
-            </a:r>
-          </a:p>
-          <a:p>
-            <a:br>
-              <a:rPr lang="de-DE" dirty="0"/>
-            </a:br>
-            <a:endParaRPr lang="de-DE" dirty="0"/>
-          </a:p>
-          <a:p>
-            <a:r>
-              <a:rPr lang="de-DE" dirty="0"/>
-              <a:t>👉 Show </a:t>
-            </a:r>
-            <a:r>
-              <a:rPr lang="de-DE" dirty="0" err="1"/>
-              <a:t>step-by-step</a:t>
-            </a:r>
-            <a:r>
-              <a:rPr lang="de-DE" dirty="0"/>
-              <a:t> </a:t>
-            </a:r>
-            <a:r>
-              <a:rPr lang="de-DE" dirty="0" err="1"/>
-              <a:t>derivation</a:t>
-            </a:r>
-            <a:endParaRPr lang="de-DE" dirty="0"/>
-          </a:p>
-        </p:txBody>
-      </p:sp>
+      <mc:AlternateContent xmlns:mc="http://schemas.openxmlformats.org/markup-compatibility/2006">
+        <mc:Choice xmlns:a14="http://schemas.microsoft.com/office/drawing/2010/main" Requires="a14">
+          <p:sp>
+            <p:nvSpPr>
+              <p:cNvPr id="3" name="Inhaltsplatzhalter 2">
+                <a:extLst>
+                  <a:ext uri="{FF2B5EF4-FFF2-40B4-BE49-F238E27FC236}">
+                    <a16:creationId xmlns:a16="http://schemas.microsoft.com/office/drawing/2014/main" id="{92E87A64-688D-3211-F2E5-F5ECC345E670}"/>
+                  </a:ext>
+                </a:extLst>
+              </p:cNvPr>
+              <p:cNvSpPr>
+                <a:spLocks noGrp="1"/>
+              </p:cNvSpPr>
+              <p:nvPr>
+                <p:ph idx="1"/>
+              </p:nvPr>
+            </p:nvSpPr>
+            <p:spPr/>
+            <p:txBody>
+              <a:bodyPr>
+                <a:normAutofit fontScale="92500" lnSpcReduction="20000"/>
+              </a:bodyPr>
+              <a:lstStyle/>
+              <a:p>
+                <a:pPr marL="0" indent="0">
+                  <a:buNone/>
+                </a:pPr>
+                <a:r>
+                  <a:rPr lang="de-DE" dirty="0"/>
+                  <a:t>Given:</a:t>
+                </a:r>
+              </a:p>
+              <a:p>
+                <a:pPr marL="0" indent="0">
+                  <a:buNone/>
+                </a:pPr>
+                <a14:m>
+                  <m:oMathPara xmlns:m="http://schemas.openxmlformats.org/officeDocument/2006/math">
+                    <m:oMathParaPr>
+                      <m:jc m:val="left"/>
+                    </m:oMathParaPr>
+                    <m:oMath xmlns:m="http://schemas.openxmlformats.org/officeDocument/2006/math">
+                      <m:r>
+                        <a:rPr lang="de-DE" b="0" i="1" smtClean="0">
+                          <a:latin typeface="Cambria Math" panose="02040503050406030204" pitchFamily="18" charset="0"/>
+                        </a:rPr>
+                        <m:t>𝐺</m:t>
+                      </m:r>
+                      <m:d>
+                        <m:dPr>
+                          <m:ctrlPr>
+                            <a:rPr lang="de-DE" b="0" i="1" smtClean="0">
+                              <a:latin typeface="Cambria Math" panose="02040503050406030204" pitchFamily="18" charset="0"/>
+                            </a:rPr>
+                          </m:ctrlPr>
+                        </m:dPr>
+                        <m:e>
+                          <m:r>
+                            <a:rPr lang="de-DE" b="0" i="1" smtClean="0">
+                              <a:latin typeface="Cambria Math" panose="02040503050406030204" pitchFamily="18" charset="0"/>
+                            </a:rPr>
+                            <m:t>𝑠</m:t>
+                          </m:r>
+                        </m:e>
+                      </m:d>
+                      <m:r>
+                        <a:rPr lang="de-DE" b="0" i="1" smtClean="0">
+                          <a:latin typeface="Cambria Math" panose="02040503050406030204" pitchFamily="18" charset="0"/>
+                        </a:rPr>
+                        <m:t>=</m:t>
+                      </m:r>
+                      <m:f>
+                        <m:fPr>
+                          <m:ctrlPr>
+                            <a:rPr lang="de-DE" b="0" i="1" smtClean="0">
+                              <a:latin typeface="Cambria Math" panose="02040503050406030204" pitchFamily="18" charset="0"/>
+                            </a:rPr>
+                          </m:ctrlPr>
+                        </m:fPr>
+                        <m:num>
+                          <m:r>
+                            <a:rPr lang="de-DE" b="0" i="1" smtClean="0">
+                              <a:latin typeface="Cambria Math" panose="02040503050406030204" pitchFamily="18" charset="0"/>
+                            </a:rPr>
+                            <m:t>1</m:t>
+                          </m:r>
+                        </m:num>
+                        <m:den>
+                          <m:r>
+                            <a:rPr lang="de-DE" b="0" i="1" smtClean="0">
+                              <a:latin typeface="Cambria Math" panose="02040503050406030204" pitchFamily="18" charset="0"/>
+                            </a:rPr>
+                            <m:t>𝑠</m:t>
+                          </m:r>
+                          <m:r>
+                            <a:rPr lang="de-DE" b="0" i="1" smtClean="0">
+                              <a:latin typeface="Cambria Math" panose="02040503050406030204" pitchFamily="18" charset="0"/>
+                            </a:rPr>
+                            <m:t>+1</m:t>
+                          </m:r>
+                        </m:den>
+                      </m:f>
+                    </m:oMath>
+                  </m:oMathPara>
+                </a14:m>
+                <a:endParaRPr lang="de-DE" dirty="0"/>
+              </a:p>
+              <a:p>
+                <a:pPr marL="0" indent="0">
+                  <a:buNone/>
+                </a:pPr>
+                <a:endParaRPr lang="de-DE" dirty="0"/>
+              </a:p>
+              <a:p>
+                <a:pPr marL="0" indent="0">
+                  <a:buNone/>
+                </a:pPr>
+                <a:r>
+                  <a:rPr lang="de-DE" dirty="0"/>
+                  <a:t>Substitute:</a:t>
+                </a:r>
+              </a:p>
+              <a:p>
+                <a:pPr marL="0" indent="0">
+                  <a:buNone/>
+                </a:pPr>
+                <a14:m>
+                  <m:oMathPara xmlns:m="http://schemas.openxmlformats.org/officeDocument/2006/math">
+                    <m:oMathParaPr>
+                      <m:jc m:val="left"/>
+                    </m:oMathParaPr>
+                    <m:oMath xmlns:m="http://schemas.openxmlformats.org/officeDocument/2006/math">
+                      <m:r>
+                        <a:rPr lang="de-DE" b="0" i="1" smtClean="0">
+                          <a:latin typeface="Cambria Math" panose="02040503050406030204" pitchFamily="18" charset="0"/>
+                        </a:rPr>
+                        <m:t>𝑠</m:t>
+                      </m:r>
+                      <m:r>
+                        <a:rPr lang="de-DE" b="0" i="1" smtClean="0">
+                          <a:latin typeface="Cambria Math" panose="02040503050406030204" pitchFamily="18" charset="0"/>
+                        </a:rPr>
+                        <m:t>=</m:t>
+                      </m:r>
+                      <m:f>
+                        <m:fPr>
+                          <m:ctrlPr>
+                            <a:rPr lang="de-DE" b="0" i="1" smtClean="0">
+                              <a:latin typeface="Cambria Math" panose="02040503050406030204" pitchFamily="18" charset="0"/>
+                            </a:rPr>
+                          </m:ctrlPr>
+                        </m:fPr>
+                        <m:num>
+                          <m:r>
+                            <a:rPr lang="de-DE" b="0" i="1" smtClean="0">
+                              <a:latin typeface="Cambria Math" panose="02040503050406030204" pitchFamily="18" charset="0"/>
+                            </a:rPr>
+                            <m:t>𝑧</m:t>
+                          </m:r>
+                          <m:r>
+                            <a:rPr lang="de-DE" b="0" i="1" smtClean="0">
+                              <a:latin typeface="Cambria Math" panose="02040503050406030204" pitchFamily="18" charset="0"/>
+                            </a:rPr>
+                            <m:t>−1</m:t>
+                          </m:r>
+                        </m:num>
+                        <m:den>
+                          <m:r>
+                            <a:rPr lang="de-DE" b="0" i="1" smtClean="0">
+                              <a:latin typeface="Cambria Math" panose="02040503050406030204" pitchFamily="18" charset="0"/>
+                            </a:rPr>
+                            <m:t>𝑇</m:t>
+                          </m:r>
+                        </m:den>
+                      </m:f>
+                    </m:oMath>
+                  </m:oMathPara>
+                </a14:m>
+                <a:endParaRPr lang="de-DE" dirty="0"/>
+              </a:p>
+              <a:p>
+                <a:pPr marL="0" indent="0">
+                  <a:buNone/>
+                </a:pPr>
+                <a:endParaRPr lang="de-DE" dirty="0"/>
+              </a:p>
+              <a:p>
+                <a:r>
+                  <a:rPr lang="de-DE" dirty="0"/>
+                  <a:t>Simple</a:t>
+                </a:r>
+              </a:p>
+              <a:p>
+                <a:r>
+                  <a:rPr lang="de-DE" dirty="0"/>
+                  <a:t>Poor </a:t>
+                </a:r>
+                <a:r>
+                  <a:rPr lang="de-DE" dirty="0" err="1"/>
+                  <a:t>stability</a:t>
+                </a:r>
+                <a:r>
+                  <a:rPr lang="de-DE" dirty="0"/>
+                  <a:t> </a:t>
+                </a:r>
+                <a:r>
+                  <a:rPr lang="de-DE" dirty="0" err="1"/>
+                  <a:t>properties</a:t>
+                </a:r>
+                <a:endParaRPr lang="de-DE" dirty="0"/>
+              </a:p>
+              <a:p>
+                <a:r>
+                  <a:rPr lang="de-DE" dirty="0"/>
+                  <a:t>Can </a:t>
+                </a:r>
+                <a:r>
+                  <a:rPr lang="de-DE" dirty="0" err="1"/>
+                  <a:t>destabilize</a:t>
+                </a:r>
+                <a:r>
+                  <a:rPr lang="de-DE" dirty="0"/>
+                  <a:t> </a:t>
+                </a:r>
+                <a:r>
+                  <a:rPr lang="de-DE" dirty="0" err="1"/>
+                  <a:t>system</a:t>
+                </a:r>
+                <a:endParaRPr lang="de-DE" dirty="0"/>
+              </a:p>
+            </p:txBody>
+          </p:sp>
+        </mc:Choice>
+        <mc:Fallback>
+          <p:sp>
+            <p:nvSpPr>
+              <p:cNvPr id="3" name="Inhaltsplatzhalter 2">
+                <a:extLst>
+                  <a:ext uri="{FF2B5EF4-FFF2-40B4-BE49-F238E27FC236}">
+                    <a16:creationId xmlns:a16="http://schemas.microsoft.com/office/drawing/2014/main" id="{92E87A64-688D-3211-F2E5-F5ECC345E670}"/>
+                  </a:ext>
+                </a:extLst>
+              </p:cNvPr>
+              <p:cNvSpPr>
+                <a:spLocks noGrp="1" noRot="1" noChangeAspect="1" noMove="1" noResize="1" noEditPoints="1" noAdjustHandles="1" noChangeArrowheads="1" noChangeShapeType="1" noTextEdit="1"/>
+              </p:cNvSpPr>
+              <p:nvPr>
+                <p:ph idx="1"/>
+              </p:nvPr>
+            </p:nvSpPr>
+            <p:spPr>
+              <a:blipFill>
+                <a:blip r:embed="rId2"/>
+                <a:stretch>
+                  <a:fillRect l="-1086" t="-3488"/>
+                </a:stretch>
+              </a:blipFill>
+            </p:spPr>
+            <p:txBody>
+              <a:bodyPr/>
+              <a:lstStyle/>
+              <a:p>
+                <a:r>
+                  <a:rPr lang="de-DE">
+                    <a:noFill/>
+                  </a:rPr>
+                  <a:t> </a:t>
+                </a:r>
+              </a:p>
+            </p:txBody>
+          </p:sp>
+        </mc:Fallback>
+      </mc:AlternateContent>
       <p:sp>
         <p:nvSpPr>
           <p:cNvPr id="4" name="Foliennummernplatzhalter 3">
@@ -15993,167 +18941,6 @@
           <p:cNvPr id="2" name="Titel 1">
             <a:extLst>
               <a:ext uri="{FF2B5EF4-FFF2-40B4-BE49-F238E27FC236}">
-                <a16:creationId xmlns:a16="http://schemas.microsoft.com/office/drawing/2014/main" id="{BD5ADC0D-2A4E-F24E-B3E7-A1EEC8833ABF}"/>
-              </a:ext>
-            </a:extLst>
-          </p:cNvPr>
-          <p:cNvSpPr>
-            <a:spLocks noGrp="1"/>
-          </p:cNvSpPr>
-          <p:nvPr>
-            <p:ph type="title"/>
-          </p:nvPr>
-        </p:nvSpPr>
-        <p:spPr/>
-        <p:txBody>
-          <a:bodyPr/>
-          <a:lstStyle/>
-          <a:p>
-            <a:r>
-              <a:rPr lang="de-DE" dirty="0"/>
-              <a:t>Properties </a:t>
-            </a:r>
-            <a:r>
-              <a:rPr lang="de-DE" dirty="0" err="1"/>
-              <a:t>of</a:t>
-            </a:r>
-            <a:r>
-              <a:rPr lang="de-DE" dirty="0"/>
-              <a:t> Forward Euler</a:t>
-            </a:r>
-          </a:p>
-        </p:txBody>
-      </p:sp>
-      <p:sp>
-        <p:nvSpPr>
-          <p:cNvPr id="3" name="Inhaltsplatzhalter 2">
-            <a:extLst>
-              <a:ext uri="{FF2B5EF4-FFF2-40B4-BE49-F238E27FC236}">
-                <a16:creationId xmlns:a16="http://schemas.microsoft.com/office/drawing/2014/main" id="{DC576364-121C-D5BD-B5C0-4BE68BECD63A}"/>
-              </a:ext>
-            </a:extLst>
-          </p:cNvPr>
-          <p:cNvSpPr>
-            <a:spLocks noGrp="1"/>
-          </p:cNvSpPr>
-          <p:nvPr>
-            <p:ph idx="1"/>
-          </p:nvPr>
-        </p:nvSpPr>
-        <p:spPr/>
-        <p:txBody>
-          <a:bodyPr/>
-          <a:lstStyle/>
-          <a:p>
-            <a:r>
-              <a:rPr lang="de-DE" dirty="0"/>
-              <a:t>Simple</a:t>
-            </a:r>
-          </a:p>
-          <a:p>
-            <a:r>
-              <a:rPr lang="de-DE" dirty="0"/>
-              <a:t>Poor </a:t>
-            </a:r>
-            <a:r>
-              <a:rPr lang="de-DE" dirty="0" err="1"/>
-              <a:t>stability</a:t>
-            </a:r>
-            <a:r>
-              <a:rPr lang="de-DE" dirty="0"/>
-              <a:t> </a:t>
-            </a:r>
-            <a:r>
-              <a:rPr lang="de-DE" dirty="0" err="1"/>
-              <a:t>properties</a:t>
-            </a:r>
-            <a:endParaRPr lang="de-DE" dirty="0"/>
-          </a:p>
-          <a:p>
-            <a:r>
-              <a:rPr lang="de-DE" dirty="0"/>
-              <a:t>Can </a:t>
-            </a:r>
-            <a:r>
-              <a:rPr lang="de-DE" dirty="0" err="1"/>
-              <a:t>destabilize</a:t>
-            </a:r>
-            <a:r>
-              <a:rPr lang="de-DE" dirty="0"/>
-              <a:t> </a:t>
-            </a:r>
-            <a:r>
-              <a:rPr lang="de-DE" dirty="0" err="1"/>
-              <a:t>system</a:t>
-            </a:r>
-            <a:endParaRPr lang="de-DE" dirty="0"/>
-          </a:p>
-        </p:txBody>
-      </p:sp>
-      <p:sp>
-        <p:nvSpPr>
-          <p:cNvPr id="4" name="Foliennummernplatzhalter 3">
-            <a:extLst>
-              <a:ext uri="{FF2B5EF4-FFF2-40B4-BE49-F238E27FC236}">
-                <a16:creationId xmlns:a16="http://schemas.microsoft.com/office/drawing/2014/main" id="{76E71E65-645B-BC88-8217-F3C2FBD6F446}"/>
-              </a:ext>
-            </a:extLst>
-          </p:cNvPr>
-          <p:cNvSpPr>
-            <a:spLocks noGrp="1"/>
-          </p:cNvSpPr>
-          <p:nvPr>
-            <p:ph type="sldNum" sz="quarter" idx="12"/>
-          </p:nvPr>
-        </p:nvSpPr>
-        <p:spPr/>
-        <p:txBody>
-          <a:bodyPr/>
-          <a:lstStyle/>
-          <a:p>
-            <a:fld id="{08C366F5-AFAD-49CB-854A-9D9E238FCA13}" type="slidenum">
-              <a:rPr lang="en-GB" smtClean="0"/>
-              <a:t>30</a:t>
-            </a:fld>
-            <a:endParaRPr lang="en-GB"/>
-          </a:p>
-        </p:txBody>
-      </p:sp>
-    </p:spTree>
-    <p:extLst>
-      <p:ext uri="{BB962C8B-B14F-4D97-AF65-F5344CB8AC3E}">
-        <p14:creationId xmlns:p14="http://schemas.microsoft.com/office/powerpoint/2010/main" val="1960818045"/>
-      </p:ext>
-    </p:extLst>
-  </p:cSld>
-  <p:clrMapOvr>
-    <a:masterClrMapping/>
-  </p:clrMapOvr>
-</p:sld>
-</file>
-
-<file path=ppt/slides/slide31.xml><?xml version="1.0" encoding="utf-8"?>
-<p:sld xmlns:a="http://schemas.openxmlformats.org/drawingml/2006/main" xmlns:r="http://schemas.openxmlformats.org/officeDocument/2006/relationships" xmlns:p="http://schemas.openxmlformats.org/presentationml/2006/main">
-  <p:cSld>
-    <p:spTree>
-      <p:nvGrpSpPr>
-        <p:cNvPr id="1" name=""/>
-        <p:cNvGrpSpPr/>
-        <p:nvPr/>
-      </p:nvGrpSpPr>
-      <p:grpSpPr>
-        <a:xfrm>
-          <a:off x="0" y="0"/>
-          <a:ext cx="0" cy="0"/>
-          <a:chOff x="0" y="0"/>
-          <a:chExt cx="0" cy="0"/>
-        </a:xfrm>
-      </p:grpSpPr>
-      <p:sp>
-        <p:nvSpPr>
-          <p:cNvPr id="2" name="Titel 1">
-            <a:extLst>
-              <a:ext uri="{FF2B5EF4-FFF2-40B4-BE49-F238E27FC236}">
                 <a16:creationId xmlns:a16="http://schemas.microsoft.com/office/drawing/2014/main" id="{40AC9EB8-E9B3-251E-BE78-E4D38AB67EAF}"/>
               </a:ext>
             </a:extLst>
@@ -16181,64 +18968,201 @@
           </a:p>
         </p:txBody>
       </p:sp>
-      <p:sp>
-        <p:nvSpPr>
-          <p:cNvPr id="3" name="Inhaltsplatzhalter 2">
-            <a:extLst>
-              <a:ext uri="{FF2B5EF4-FFF2-40B4-BE49-F238E27FC236}">
-                <a16:creationId xmlns:a16="http://schemas.microsoft.com/office/drawing/2014/main" id="{C1FDD0BB-F10B-A81F-CD00-93CAFD540859}"/>
-              </a:ext>
-            </a:extLst>
-          </p:cNvPr>
-          <p:cNvSpPr>
-            <a:spLocks noGrp="1"/>
-          </p:cNvSpPr>
-          <p:nvPr>
-            <p:ph idx="1"/>
-          </p:nvPr>
-        </p:nvSpPr>
-        <p:spPr/>
-        <p:txBody>
-          <a:bodyPr/>
-          <a:lstStyle/>
-          <a:p>
-            <a:r>
-              <a:rPr lang="de-DE" dirty="0"/>
-              <a:t>Approximation:</a:t>
-            </a:r>
-          </a:p>
-          <a:p>
-            <a:r>
-              <a:rPr lang="de-DE" dirty="0"/>
-              <a:t>s \</a:t>
-            </a:r>
-            <a:r>
-              <a:rPr lang="de-DE" dirty="0" err="1"/>
-              <a:t>approx</a:t>
-            </a:r>
-            <a:r>
-              <a:rPr lang="de-DE" dirty="0"/>
-              <a:t> \</a:t>
-            </a:r>
-            <a:r>
-              <a:rPr lang="de-DE" dirty="0" err="1"/>
-              <a:t>frac</a:t>
-            </a:r>
-            <a:r>
-              <a:rPr lang="de-DE" dirty="0"/>
-              <a:t>{</a:t>
-            </a:r>
-            <a:r>
-              <a:rPr lang="de-DE" dirty="0" err="1"/>
-              <a:t>z</a:t>
-            </a:r>
-            <a:r>
-              <a:rPr lang="de-DE" dirty="0"/>
-              <a:t> - 1}{Tz}</a:t>
-            </a:r>
-          </a:p>
-        </p:txBody>
-      </p:sp>
+      <mc:AlternateContent xmlns:mc="http://schemas.openxmlformats.org/markup-compatibility/2006">
+        <mc:Choice xmlns:a14="http://schemas.microsoft.com/office/drawing/2010/main" Requires="a14">
+          <p:sp>
+            <p:nvSpPr>
+              <p:cNvPr id="3" name="Inhaltsplatzhalter 2">
+                <a:extLst>
+                  <a:ext uri="{FF2B5EF4-FFF2-40B4-BE49-F238E27FC236}">
+                    <a16:creationId xmlns:a16="http://schemas.microsoft.com/office/drawing/2014/main" id="{C1FDD0BB-F10B-A81F-CD00-93CAFD540859}"/>
+                  </a:ext>
+                </a:extLst>
+              </p:cNvPr>
+              <p:cNvSpPr>
+                <a:spLocks noGrp="1"/>
+              </p:cNvSpPr>
+              <p:nvPr>
+                <p:ph idx="1"/>
+              </p:nvPr>
+            </p:nvSpPr>
+            <p:spPr/>
+            <p:txBody>
+              <a:bodyPr/>
+              <a:lstStyle/>
+              <a:p>
+                <a:pPr marL="0" indent="0">
+                  <a:buNone/>
+                </a:pPr>
+                <a:r>
+                  <a:rPr lang="de-DE" dirty="0"/>
+                  <a:t>Approximation:</a:t>
+                </a:r>
+              </a:p>
+              <a:p>
+                <a:pPr marL="0" indent="0">
+                  <a:buNone/>
+                </a:pPr>
+                <a14:m>
+                  <m:oMathPara xmlns:m="http://schemas.openxmlformats.org/officeDocument/2006/math">
+                    <m:oMathParaPr>
+                      <m:jc m:val="left"/>
+                    </m:oMathParaPr>
+                    <m:oMath xmlns:m="http://schemas.openxmlformats.org/officeDocument/2006/math">
+                      <m:r>
+                        <a:rPr lang="de-DE" i="1">
+                          <a:latin typeface="Cambria Math" panose="02040503050406030204" pitchFamily="18" charset="0"/>
+                        </a:rPr>
+                        <m:t>𝑠</m:t>
+                      </m:r>
+                      <m:r>
+                        <a:rPr lang="de-DE" i="1">
+                          <a:latin typeface="Cambria Math" panose="02040503050406030204" pitchFamily="18" charset="0"/>
+                          <a:ea typeface="Cambria Math" panose="02040503050406030204" pitchFamily="18" charset="0"/>
+                        </a:rPr>
+                        <m:t>≈</m:t>
+                      </m:r>
+                      <m:f>
+                        <m:fPr>
+                          <m:ctrlPr>
+                            <a:rPr lang="de-DE" i="1">
+                              <a:latin typeface="Cambria Math" panose="02040503050406030204" pitchFamily="18" charset="0"/>
+                              <a:ea typeface="Cambria Math" panose="02040503050406030204" pitchFamily="18" charset="0"/>
+                            </a:rPr>
+                          </m:ctrlPr>
+                        </m:fPr>
+                        <m:num>
+                          <m:r>
+                            <a:rPr lang="de-DE" i="1">
+                              <a:latin typeface="Cambria Math" panose="02040503050406030204" pitchFamily="18" charset="0"/>
+                              <a:ea typeface="Cambria Math" panose="02040503050406030204" pitchFamily="18" charset="0"/>
+                            </a:rPr>
+                            <m:t>𝑧</m:t>
+                          </m:r>
+                          <m:r>
+                            <a:rPr lang="de-DE" i="1">
+                              <a:latin typeface="Cambria Math" panose="02040503050406030204" pitchFamily="18" charset="0"/>
+                              <a:ea typeface="Cambria Math" panose="02040503050406030204" pitchFamily="18" charset="0"/>
+                            </a:rPr>
+                            <m:t>−1</m:t>
+                          </m:r>
+                        </m:num>
+                        <m:den>
+                          <m:r>
+                            <a:rPr lang="de-DE" i="1">
+                              <a:latin typeface="Cambria Math" panose="02040503050406030204" pitchFamily="18" charset="0"/>
+                              <a:ea typeface="Cambria Math" panose="02040503050406030204" pitchFamily="18" charset="0"/>
+                            </a:rPr>
+                            <m:t>𝑇</m:t>
+                          </m:r>
+                          <m:r>
+                            <a:rPr lang="de-DE" b="0" i="1" smtClean="0">
+                              <a:latin typeface="Cambria Math" panose="02040503050406030204" pitchFamily="18" charset="0"/>
+                              <a:ea typeface="Cambria Math" panose="02040503050406030204" pitchFamily="18" charset="0"/>
+                            </a:rPr>
+                            <m:t>𝑧</m:t>
+                          </m:r>
+                        </m:den>
+                      </m:f>
+                    </m:oMath>
+                  </m:oMathPara>
+                </a14:m>
+                <a:endParaRPr lang="de-DE" dirty="0"/>
+              </a:p>
+              <a:p>
+                <a:pPr marL="0" indent="0">
+                  <a:buNone/>
+                </a:pPr>
+                <a:endParaRPr lang="de-DE" dirty="0"/>
+              </a:p>
+              <a:p>
+                <a:r>
+                  <a:rPr lang="de-DE" dirty="0"/>
+                  <a:t>More </a:t>
+                </a:r>
+                <a:r>
+                  <a:rPr lang="de-DE" dirty="0" err="1"/>
+                  <a:t>stable</a:t>
+                </a:r>
+                <a:r>
+                  <a:rPr lang="de-DE" dirty="0"/>
+                  <a:t> </a:t>
+                </a:r>
+                <a:r>
+                  <a:rPr lang="de-DE" dirty="0" err="1"/>
+                  <a:t>than</a:t>
+                </a:r>
+                <a:r>
+                  <a:rPr lang="de-DE" dirty="0"/>
+                  <a:t> </a:t>
+                </a:r>
+                <a:r>
+                  <a:rPr lang="de-DE" dirty="0" err="1"/>
+                  <a:t>forward</a:t>
+                </a:r>
+                <a:r>
+                  <a:rPr lang="de-DE" dirty="0"/>
+                  <a:t> Euler</a:t>
+                </a:r>
+              </a:p>
+              <a:p>
+                <a:r>
+                  <a:rPr lang="de-DE" dirty="0" err="1"/>
+                  <a:t>Introduces</a:t>
+                </a:r>
+                <a:r>
+                  <a:rPr lang="de-DE" dirty="0"/>
+                  <a:t> </a:t>
+                </a:r>
+                <a:r>
+                  <a:rPr lang="de-DE" dirty="0" err="1"/>
+                  <a:t>damping</a:t>
+                </a:r>
+                <a:endParaRPr lang="de-DE" dirty="0"/>
+              </a:p>
+            </p:txBody>
+          </p:sp>
+        </mc:Choice>
+        <mc:Fallback>
+          <p:sp>
+            <p:nvSpPr>
+              <p:cNvPr id="3" name="Inhaltsplatzhalter 2">
+                <a:extLst>
+                  <a:ext uri="{FF2B5EF4-FFF2-40B4-BE49-F238E27FC236}">
+                    <a16:creationId xmlns:a16="http://schemas.microsoft.com/office/drawing/2014/main" id="{C1FDD0BB-F10B-A81F-CD00-93CAFD540859}"/>
+                  </a:ext>
+                </a:extLst>
+              </p:cNvPr>
+              <p:cNvSpPr>
+                <a:spLocks noGrp="1" noRot="1" noChangeAspect="1" noMove="1" noResize="1" noEditPoints="1" noAdjustHandles="1" noChangeArrowheads="1" noChangeShapeType="1" noTextEdit="1"/>
+              </p:cNvSpPr>
+              <p:nvPr>
+                <p:ph idx="1"/>
+              </p:nvPr>
+            </p:nvSpPr>
+            <p:spPr>
+              <a:blipFill>
+                <a:blip r:embed="rId2"/>
+                <a:stretch>
+                  <a:fillRect l="-1206" t="-2326"/>
+                </a:stretch>
+              </a:blipFill>
+            </p:spPr>
+            <p:txBody>
+              <a:bodyPr/>
+              <a:lstStyle/>
+              <a:p>
+                <a:r>
+                  <a:rPr lang="de-DE">
+                    <a:noFill/>
+                  </a:rPr>
+                  <a:t> </a:t>
+                </a:r>
+              </a:p>
+            </p:txBody>
+          </p:sp>
+        </mc:Fallback>
+      </mc:AlternateContent>
       <p:sp>
         <p:nvSpPr>
           <p:cNvPr id="4" name="Foliennummernplatzhalter 3">
@@ -16262,7 +19186,7 @@
           <a:p>
             <a:fld id="{08C366F5-AFAD-49CB-854A-9D9E238FCA13}" type="slidenum">
               <a:rPr lang="en-GB" smtClean="0"/>
-              <a:t>31</a:t>
+              <a:t>30</a:t>
             </a:fld>
             <a:endParaRPr lang="en-GB"/>
           </a:p>
@@ -16281,177 +19205,7 @@
 </p:sld>
 </file>
 
-<file path=ppt/slides/slide32.xml><?xml version="1.0" encoding="utf-8"?>
-<p:sld xmlns:a="http://schemas.openxmlformats.org/drawingml/2006/main" xmlns:r="http://schemas.openxmlformats.org/officeDocument/2006/relationships" xmlns:p="http://schemas.openxmlformats.org/presentationml/2006/main">
-  <p:cSld>
-    <p:spTree>
-      <p:nvGrpSpPr>
-        <p:cNvPr id="1" name=""/>
-        <p:cNvGrpSpPr/>
-        <p:nvPr/>
-      </p:nvGrpSpPr>
-      <p:grpSpPr>
-        <a:xfrm>
-          <a:off x="0" y="0"/>
-          <a:ext cx="0" cy="0"/>
-          <a:chOff x="0" y="0"/>
-          <a:chExt cx="0" cy="0"/>
-        </a:xfrm>
-      </p:grpSpPr>
-      <p:sp>
-        <p:nvSpPr>
-          <p:cNvPr id="2" name="Titel 1">
-            <a:extLst>
-              <a:ext uri="{FF2B5EF4-FFF2-40B4-BE49-F238E27FC236}">
-                <a16:creationId xmlns:a16="http://schemas.microsoft.com/office/drawing/2014/main" id="{9C0C49BC-D4E1-7D90-DC06-56A9F176D193}"/>
-              </a:ext>
-            </a:extLst>
-          </p:cNvPr>
-          <p:cNvSpPr>
-            <a:spLocks noGrp="1"/>
-          </p:cNvSpPr>
-          <p:nvPr>
-            <p:ph type="title"/>
-          </p:nvPr>
-        </p:nvSpPr>
-        <p:spPr/>
-        <p:txBody>
-          <a:bodyPr/>
-          <a:lstStyle/>
-          <a:p>
-            <a:r>
-              <a:rPr lang="de-DE" dirty="0"/>
-              <a:t>Properties </a:t>
-            </a:r>
-            <a:r>
-              <a:rPr lang="de-DE" dirty="0" err="1"/>
-              <a:t>of</a:t>
-            </a:r>
-            <a:r>
-              <a:rPr lang="de-DE" dirty="0"/>
-              <a:t> </a:t>
-            </a:r>
-            <a:r>
-              <a:rPr lang="de-DE" dirty="0" err="1"/>
-              <a:t>Backward</a:t>
-            </a:r>
-            <a:r>
-              <a:rPr lang="de-DE" dirty="0"/>
-              <a:t> Euler</a:t>
-            </a:r>
-          </a:p>
-        </p:txBody>
-      </p:sp>
-      <p:sp>
-        <p:nvSpPr>
-          <p:cNvPr id="3" name="Inhaltsplatzhalter 2">
-            <a:extLst>
-              <a:ext uri="{FF2B5EF4-FFF2-40B4-BE49-F238E27FC236}">
-                <a16:creationId xmlns:a16="http://schemas.microsoft.com/office/drawing/2014/main" id="{A1C7007C-D7B2-171C-E80E-4C82D2D0EABC}"/>
-              </a:ext>
-            </a:extLst>
-          </p:cNvPr>
-          <p:cNvSpPr>
-            <a:spLocks noGrp="1"/>
-          </p:cNvSpPr>
-          <p:nvPr>
-            <p:ph idx="1"/>
-          </p:nvPr>
-        </p:nvSpPr>
-        <p:spPr/>
-        <p:txBody>
-          <a:bodyPr/>
-          <a:lstStyle/>
-          <a:p>
-            <a:r>
-              <a:rPr lang="de-DE" dirty="0"/>
-              <a:t>More </a:t>
-            </a:r>
-            <a:r>
-              <a:rPr lang="de-DE" dirty="0" err="1"/>
-              <a:t>stable</a:t>
-            </a:r>
-            <a:r>
-              <a:rPr lang="de-DE" dirty="0"/>
-              <a:t> </a:t>
-            </a:r>
-            <a:r>
-              <a:rPr lang="de-DE" dirty="0" err="1"/>
-              <a:t>than</a:t>
-            </a:r>
-            <a:r>
-              <a:rPr lang="de-DE" dirty="0"/>
-              <a:t> </a:t>
-            </a:r>
-            <a:r>
-              <a:rPr lang="de-DE" dirty="0" err="1"/>
-              <a:t>forward</a:t>
-            </a:r>
-            <a:r>
-              <a:rPr lang="de-DE" dirty="0"/>
-              <a:t> Euler</a:t>
-            </a:r>
-          </a:p>
-          <a:p>
-            <a:r>
-              <a:rPr lang="de-DE" dirty="0" err="1"/>
-              <a:t>Introduces</a:t>
-            </a:r>
-            <a:r>
-              <a:rPr lang="de-DE" dirty="0"/>
-              <a:t> </a:t>
-            </a:r>
-            <a:r>
-              <a:rPr lang="de-DE" dirty="0" err="1"/>
-              <a:t>damping</a:t>
-            </a:r>
-            <a:endParaRPr lang="de-DE" dirty="0"/>
-          </a:p>
-        </p:txBody>
-      </p:sp>
-      <p:sp>
-        <p:nvSpPr>
-          <p:cNvPr id="4" name="Foliennummernplatzhalter 3">
-            <a:extLst>
-              <a:ext uri="{FF2B5EF4-FFF2-40B4-BE49-F238E27FC236}">
-                <a16:creationId xmlns:a16="http://schemas.microsoft.com/office/drawing/2014/main" id="{298F5794-2A54-31B0-269B-DFB2D3DFB20B}"/>
-              </a:ext>
-            </a:extLst>
-          </p:cNvPr>
-          <p:cNvSpPr>
-            <a:spLocks noGrp="1"/>
-          </p:cNvSpPr>
-          <p:nvPr>
-            <p:ph type="sldNum" sz="quarter" idx="12"/>
-          </p:nvPr>
-        </p:nvSpPr>
-        <p:spPr/>
-        <p:txBody>
-          <a:bodyPr/>
-          <a:lstStyle/>
-          <a:p>
-            <a:fld id="{08C366F5-AFAD-49CB-854A-9D9E238FCA13}" type="slidenum">
-              <a:rPr lang="en-GB" smtClean="0"/>
-              <a:t>32</a:t>
-            </a:fld>
-            <a:endParaRPr lang="en-GB"/>
-          </a:p>
-        </p:txBody>
-      </p:sp>
-    </p:spTree>
-    <p:extLst>
-      <p:ext uri="{BB962C8B-B14F-4D97-AF65-F5344CB8AC3E}">
-        <p14:creationId xmlns:p14="http://schemas.microsoft.com/office/powerpoint/2010/main" val="2798254879"/>
-      </p:ext>
-    </p:extLst>
-  </p:cSld>
-  <p:clrMapOvr>
-    <a:masterClrMapping/>
-  </p:clrMapOvr>
-</p:sld>
-</file>
-
-<file path=ppt/slides/slide33.xml><?xml version="1.0" encoding="utf-8"?>
+<file path=ppt/slides/slide31.xml><?xml version="1.0" encoding="utf-8"?>
 <p:sld xmlns:a="http://schemas.openxmlformats.org/drawingml/2006/main" xmlns:r="http://schemas.openxmlformats.org/officeDocument/2006/relationships" xmlns:p="http://schemas.openxmlformats.org/presentationml/2006/main">
   <p:cSld>
     <p:spTree>
@@ -16500,128 +19254,226 @@
           </a:p>
         </p:txBody>
       </p:sp>
-      <p:sp>
-        <p:nvSpPr>
-          <p:cNvPr id="3" name="Inhaltsplatzhalter 2">
-            <a:extLst>
-              <a:ext uri="{FF2B5EF4-FFF2-40B4-BE49-F238E27FC236}">
-                <a16:creationId xmlns:a16="http://schemas.microsoft.com/office/drawing/2014/main" id="{0BDC2B80-65D3-5892-4CF0-DAC832DAC831}"/>
-              </a:ext>
-            </a:extLst>
-          </p:cNvPr>
-          <p:cNvSpPr>
-            <a:spLocks noGrp="1"/>
-          </p:cNvSpPr>
-          <p:nvPr>
-            <p:ph idx="1"/>
-          </p:nvPr>
-        </p:nvSpPr>
-        <p:spPr/>
-        <p:txBody>
-          <a:bodyPr/>
-          <a:lstStyle/>
-          <a:p>
-            <a:r>
-              <a:rPr lang="de-DE" dirty="0"/>
-              <a:t>Bilinear </a:t>
-            </a:r>
-            <a:r>
-              <a:rPr lang="de-DE" dirty="0" err="1"/>
-              <a:t>transformation</a:t>
-            </a:r>
-            <a:endParaRPr lang="de-DE" dirty="0"/>
-          </a:p>
-          <a:p>
-            <a:r>
-              <a:rPr lang="de-DE" dirty="0" err="1"/>
-              <a:t>Preserves</a:t>
-            </a:r>
-            <a:r>
-              <a:rPr lang="de-DE" dirty="0"/>
-              <a:t> </a:t>
-            </a:r>
-            <a:r>
-              <a:rPr lang="de-DE" dirty="0" err="1"/>
-              <a:t>frequency</a:t>
-            </a:r>
-            <a:r>
-              <a:rPr lang="de-DE" dirty="0"/>
-              <a:t> </a:t>
-            </a:r>
-            <a:r>
-              <a:rPr lang="de-DE" dirty="0" err="1"/>
-              <a:t>characteristics</a:t>
-            </a:r>
-            <a:r>
-              <a:rPr lang="de-DE" dirty="0"/>
-              <a:t> </a:t>
-            </a:r>
-            <a:r>
-              <a:rPr lang="de-DE" dirty="0" err="1"/>
-              <a:t>better</a:t>
-            </a:r>
-            <a:endParaRPr lang="de-DE" dirty="0"/>
-          </a:p>
-          <a:p>
-            <a:pPr marL="0" indent="0">
-              <a:buNone/>
-            </a:pPr>
-            <a:endParaRPr lang="de-DE" dirty="0"/>
-          </a:p>
-          <a:p>
-            <a:r>
-              <a:rPr lang="de-DE" dirty="0"/>
-              <a:t>Approximation:</a:t>
-            </a:r>
-          </a:p>
-          <a:p>
-            <a:r>
-              <a:rPr lang="de-DE" dirty="0"/>
-              <a:t>s \</a:t>
-            </a:r>
-            <a:r>
-              <a:rPr lang="de-DE" dirty="0" err="1"/>
-              <a:t>approx</a:t>
-            </a:r>
-            <a:r>
-              <a:rPr lang="de-DE" dirty="0"/>
-              <a:t> \</a:t>
-            </a:r>
-            <a:r>
-              <a:rPr lang="de-DE" dirty="0" err="1"/>
-              <a:t>frac</a:t>
-            </a:r>
-            <a:r>
-              <a:rPr lang="de-DE" dirty="0"/>
-              <a:t>{2}{T} \</a:t>
-            </a:r>
-            <a:r>
-              <a:rPr lang="de-DE" dirty="0" err="1"/>
-              <a:t>frac</a:t>
-            </a:r>
-            <a:r>
-              <a:rPr lang="de-DE" dirty="0"/>
-              <a:t>{</a:t>
-            </a:r>
-            <a:r>
-              <a:rPr lang="de-DE" dirty="0" err="1"/>
-              <a:t>z</a:t>
-            </a:r>
-            <a:r>
-              <a:rPr lang="de-DE" dirty="0"/>
-              <a:t> - 1}{</a:t>
-            </a:r>
-            <a:r>
-              <a:rPr lang="de-DE" dirty="0" err="1"/>
-              <a:t>z</a:t>
-            </a:r>
-            <a:r>
-              <a:rPr lang="de-DE" dirty="0"/>
-              <a:t> + 1}</a:t>
-            </a:r>
-          </a:p>
-        </p:txBody>
-      </p:sp>
+      <mc:AlternateContent xmlns:mc="http://schemas.openxmlformats.org/markup-compatibility/2006">
+        <mc:Choice xmlns:a14="http://schemas.microsoft.com/office/drawing/2010/main" Requires="a14">
+          <p:sp>
+            <p:nvSpPr>
+              <p:cNvPr id="3" name="Inhaltsplatzhalter 2">
+                <a:extLst>
+                  <a:ext uri="{FF2B5EF4-FFF2-40B4-BE49-F238E27FC236}">
+                    <a16:creationId xmlns:a16="http://schemas.microsoft.com/office/drawing/2014/main" id="{0BDC2B80-65D3-5892-4CF0-DAC832DAC831}"/>
+                  </a:ext>
+                </a:extLst>
+              </p:cNvPr>
+              <p:cNvSpPr>
+                <a:spLocks noGrp="1"/>
+              </p:cNvSpPr>
+              <p:nvPr>
+                <p:ph idx="1"/>
+              </p:nvPr>
+            </p:nvSpPr>
+            <p:spPr/>
+            <p:txBody>
+              <a:bodyPr/>
+              <a:lstStyle/>
+              <a:p>
+                <a:r>
+                  <a:rPr lang="de-DE" dirty="0"/>
+                  <a:t>Bilinear </a:t>
+                </a:r>
+                <a:r>
+                  <a:rPr lang="de-DE" dirty="0" err="1"/>
+                  <a:t>transformation</a:t>
+                </a:r>
+                <a:endParaRPr lang="de-DE" dirty="0"/>
+              </a:p>
+              <a:p>
+                <a:r>
+                  <a:rPr lang="de-DE" dirty="0" err="1"/>
+                  <a:t>Preserves</a:t>
+                </a:r>
+                <a:r>
+                  <a:rPr lang="de-DE" dirty="0"/>
+                  <a:t> </a:t>
+                </a:r>
+                <a:r>
+                  <a:rPr lang="de-DE" dirty="0" err="1"/>
+                  <a:t>frequency</a:t>
+                </a:r>
+                <a:r>
+                  <a:rPr lang="de-DE" dirty="0"/>
+                  <a:t> </a:t>
+                </a:r>
+                <a:r>
+                  <a:rPr lang="de-DE" dirty="0" err="1"/>
+                  <a:t>characteristics</a:t>
+                </a:r>
+                <a:r>
+                  <a:rPr lang="de-DE" dirty="0"/>
+                  <a:t> </a:t>
+                </a:r>
+                <a:r>
+                  <a:rPr lang="de-DE" dirty="0" err="1"/>
+                  <a:t>better</a:t>
+                </a:r>
+                <a:endParaRPr lang="de-DE" dirty="0"/>
+              </a:p>
+              <a:p>
+                <a:pPr marL="0" indent="0">
+                  <a:buNone/>
+                </a:pPr>
+                <a:endParaRPr lang="de-DE" dirty="0"/>
+              </a:p>
+              <a:p>
+                <a:pPr marL="0" indent="0">
+                  <a:buNone/>
+                </a:pPr>
+                <a:r>
+                  <a:rPr lang="de-DE" dirty="0"/>
+                  <a:t>Approximation:</a:t>
+                </a:r>
+              </a:p>
+              <a:p>
+                <a:pPr marL="0" indent="0">
+                  <a:buNone/>
+                </a:pPr>
+                <a14:m>
+                  <m:oMathPara xmlns:m="http://schemas.openxmlformats.org/officeDocument/2006/math">
+                    <m:oMathParaPr>
+                      <m:jc m:val="left"/>
+                    </m:oMathParaPr>
+                    <m:oMath xmlns:m="http://schemas.openxmlformats.org/officeDocument/2006/math">
+                      <m:r>
+                        <a:rPr lang="de-DE" i="1">
+                          <a:latin typeface="Cambria Math" panose="02040503050406030204" pitchFamily="18" charset="0"/>
+                        </a:rPr>
+                        <m:t>𝑠</m:t>
+                      </m:r>
+                      <m:r>
+                        <a:rPr lang="de-DE" i="1">
+                          <a:latin typeface="Cambria Math" panose="02040503050406030204" pitchFamily="18" charset="0"/>
+                          <a:ea typeface="Cambria Math" panose="02040503050406030204" pitchFamily="18" charset="0"/>
+                        </a:rPr>
+                        <m:t>≈</m:t>
+                      </m:r>
+                      <m:f>
+                        <m:fPr>
+                          <m:ctrlPr>
+                            <a:rPr lang="de-DE" i="1" smtClean="0">
+                              <a:latin typeface="Cambria Math" panose="02040503050406030204" pitchFamily="18" charset="0"/>
+                              <a:ea typeface="Cambria Math" panose="02040503050406030204" pitchFamily="18" charset="0"/>
+                            </a:rPr>
+                          </m:ctrlPr>
+                        </m:fPr>
+                        <m:num>
+                          <m:r>
+                            <a:rPr lang="de-DE" b="0" i="1" smtClean="0">
+                              <a:latin typeface="Cambria Math" panose="02040503050406030204" pitchFamily="18" charset="0"/>
+                              <a:ea typeface="Cambria Math" panose="02040503050406030204" pitchFamily="18" charset="0"/>
+                            </a:rPr>
+                            <m:t>2</m:t>
+                          </m:r>
+                        </m:num>
+                        <m:den>
+                          <m:r>
+                            <a:rPr lang="de-DE" b="0" i="1" smtClean="0">
+                              <a:latin typeface="Cambria Math" panose="02040503050406030204" pitchFamily="18" charset="0"/>
+                              <a:ea typeface="Cambria Math" panose="02040503050406030204" pitchFamily="18" charset="0"/>
+                            </a:rPr>
+                            <m:t>𝑇</m:t>
+                          </m:r>
+                        </m:den>
+                      </m:f>
+                      <m:f>
+                        <m:fPr>
+                          <m:ctrlPr>
+                            <a:rPr lang="de-DE" i="1">
+                              <a:latin typeface="Cambria Math" panose="02040503050406030204" pitchFamily="18" charset="0"/>
+                              <a:ea typeface="Cambria Math" panose="02040503050406030204" pitchFamily="18" charset="0"/>
+                            </a:rPr>
+                          </m:ctrlPr>
+                        </m:fPr>
+                        <m:num>
+                          <m:r>
+                            <a:rPr lang="de-DE" i="1">
+                              <a:latin typeface="Cambria Math" panose="02040503050406030204" pitchFamily="18" charset="0"/>
+                              <a:ea typeface="Cambria Math" panose="02040503050406030204" pitchFamily="18" charset="0"/>
+                            </a:rPr>
+                            <m:t>𝑧</m:t>
+                          </m:r>
+                          <m:r>
+                            <a:rPr lang="de-DE" i="1">
+                              <a:latin typeface="Cambria Math" panose="02040503050406030204" pitchFamily="18" charset="0"/>
+                              <a:ea typeface="Cambria Math" panose="02040503050406030204" pitchFamily="18" charset="0"/>
+                            </a:rPr>
+                            <m:t>−1</m:t>
+                          </m:r>
+                        </m:num>
+                        <m:den>
+                          <m:r>
+                            <a:rPr lang="de-DE" i="1">
+                              <a:latin typeface="Cambria Math" panose="02040503050406030204" pitchFamily="18" charset="0"/>
+                              <a:ea typeface="Cambria Math" panose="02040503050406030204" pitchFamily="18" charset="0"/>
+                            </a:rPr>
+                            <m:t>𝑧</m:t>
+                          </m:r>
+                          <m:r>
+                            <a:rPr lang="de-DE" b="0" i="1" smtClean="0">
+                              <a:latin typeface="Cambria Math" panose="02040503050406030204" pitchFamily="18" charset="0"/>
+                              <a:ea typeface="Cambria Math" panose="02040503050406030204" pitchFamily="18" charset="0"/>
+                            </a:rPr>
+                            <m:t>+1</m:t>
+                          </m:r>
+                        </m:den>
+                      </m:f>
+                    </m:oMath>
+                  </m:oMathPara>
+                </a14:m>
+                <a:endParaRPr lang="de-DE" dirty="0"/>
+              </a:p>
+            </p:txBody>
+          </p:sp>
+        </mc:Choice>
+        <mc:Fallback>
+          <p:sp>
+            <p:nvSpPr>
+              <p:cNvPr id="3" name="Inhaltsplatzhalter 2">
+                <a:extLst>
+                  <a:ext uri="{FF2B5EF4-FFF2-40B4-BE49-F238E27FC236}">
+                    <a16:creationId xmlns:a16="http://schemas.microsoft.com/office/drawing/2014/main" id="{0BDC2B80-65D3-5892-4CF0-DAC832DAC831}"/>
+                  </a:ext>
+                </a:extLst>
+              </p:cNvPr>
+              <p:cNvSpPr>
+                <a:spLocks noGrp="1" noRot="1" noChangeAspect="1" noMove="1" noResize="1" noEditPoints="1" noAdjustHandles="1" noChangeArrowheads="1" noChangeShapeType="1" noTextEdit="1"/>
+              </p:cNvSpPr>
+              <p:nvPr>
+                <p:ph idx="1"/>
+              </p:nvPr>
+            </p:nvSpPr>
+            <p:spPr>
+              <a:blipFill>
+                <a:blip r:embed="rId2"/>
+                <a:stretch>
+                  <a:fillRect l="-1206" t="-2326"/>
+                </a:stretch>
+              </a:blipFill>
+            </p:spPr>
+            <p:txBody>
+              <a:bodyPr/>
+              <a:lstStyle/>
+              <a:p>
+                <a:r>
+                  <a:rPr lang="de-DE">
+                    <a:noFill/>
+                  </a:rPr>
+                  <a:t> </a:t>
+                </a:r>
+              </a:p>
+            </p:txBody>
+          </p:sp>
+        </mc:Fallback>
+      </mc:AlternateContent>
       <p:sp>
         <p:nvSpPr>
           <p:cNvPr id="4" name="Foliennummernplatzhalter 3">
@@ -16645,7 +19497,7 @@
           <a:p>
             <a:fld id="{08C366F5-AFAD-49CB-854A-9D9E238FCA13}" type="slidenum">
               <a:rPr lang="en-GB" smtClean="0"/>
-              <a:t>33</a:t>
+              <a:t>31</a:t>
             </a:fld>
             <a:endParaRPr lang="en-GB"/>
           </a:p>
@@ -16664,7 +19516,7 @@
 </p:sld>
 </file>
 
-<file path=ppt/slides/slide34.xml><?xml version="1.0" encoding="utf-8"?>
+<file path=ppt/slides/slide32.xml><?xml version="1.0" encoding="utf-8"?>
 <p:sld xmlns:a="http://schemas.openxmlformats.org/drawingml/2006/main" xmlns:r="http://schemas.openxmlformats.org/officeDocument/2006/relationships" xmlns:p="http://schemas.openxmlformats.org/presentationml/2006/main">
   <p:cSld>
     <p:spTree>
@@ -16721,96 +19573,192 @@
           </a:p>
         </p:txBody>
       </p:sp>
-      <p:sp>
-        <p:nvSpPr>
-          <p:cNvPr id="3" name="Inhaltsplatzhalter 2">
-            <a:extLst>
-              <a:ext uri="{FF2B5EF4-FFF2-40B4-BE49-F238E27FC236}">
-                <a16:creationId xmlns:a16="http://schemas.microsoft.com/office/drawing/2014/main" id="{689A3911-D8C7-1DE3-FBD4-A2A8BF7F6F3E}"/>
-              </a:ext>
-            </a:extLst>
-          </p:cNvPr>
-          <p:cNvSpPr>
-            <a:spLocks noGrp="1"/>
-          </p:cNvSpPr>
-          <p:nvPr>
-            <p:ph idx="1"/>
-          </p:nvPr>
-        </p:nvSpPr>
-        <p:spPr/>
-        <p:txBody>
-          <a:bodyPr/>
-          <a:lstStyle/>
-          <a:p>
-            <a:r>
-              <a:rPr lang="de-DE" dirty="0"/>
-              <a:t>Given:</a:t>
-            </a:r>
-          </a:p>
-          <a:p>
-            <a:r>
-              <a:rPr lang="de-DE" dirty="0"/>
-              <a:t>G(s) = \</a:t>
-            </a:r>
-            <a:r>
-              <a:rPr lang="de-DE" dirty="0" err="1"/>
-              <a:t>frac</a:t>
-            </a:r>
-            <a:r>
-              <a:rPr lang="de-DE" dirty="0"/>
-              <a:t>{1}{s+1}</a:t>
-            </a:r>
-            <a:br>
-              <a:rPr lang="de-DE" dirty="0"/>
-            </a:br>
-            <a:endParaRPr lang="de-DE" dirty="0"/>
-          </a:p>
-          <a:p>
-            <a:r>
-              <a:rPr lang="de-DE" dirty="0"/>
-              <a:t>Substitute </a:t>
-            </a:r>
-            <a:r>
-              <a:rPr lang="de-DE" dirty="0" err="1"/>
-              <a:t>Tustin</a:t>
-            </a:r>
-            <a:r>
-              <a:rPr lang="de-DE" dirty="0"/>
-              <a:t> </a:t>
-            </a:r>
-            <a:r>
-              <a:rPr lang="de-DE" dirty="0" err="1"/>
-              <a:t>approximation</a:t>
-            </a:r>
-            <a:br>
-              <a:rPr lang="de-DE" dirty="0"/>
-            </a:br>
-            <a:endParaRPr lang="de-DE" dirty="0"/>
-          </a:p>
-          <a:p>
-            <a:pPr marL="0" indent="0">
-              <a:buNone/>
-            </a:pPr>
-            <a:r>
-              <a:rPr lang="de-DE" dirty="0"/>
-              <a:t>Show </a:t>
-            </a:r>
-            <a:r>
-              <a:rPr lang="de-DE" dirty="0" err="1"/>
-              <a:t>full</a:t>
-            </a:r>
-            <a:r>
-              <a:rPr lang="de-DE" dirty="0"/>
-              <a:t> </a:t>
-            </a:r>
-            <a:r>
-              <a:rPr lang="de-DE" dirty="0" err="1"/>
-              <a:t>derivation</a:t>
-            </a:r>
-            <a:endParaRPr lang="de-DE" dirty="0"/>
-          </a:p>
-        </p:txBody>
-      </p:sp>
+      <mc:AlternateContent xmlns:mc="http://schemas.openxmlformats.org/markup-compatibility/2006">
+        <mc:Choice xmlns:a14="http://schemas.microsoft.com/office/drawing/2010/main" Requires="a14">
+          <p:sp>
+            <p:nvSpPr>
+              <p:cNvPr id="3" name="Inhaltsplatzhalter 2">
+                <a:extLst>
+                  <a:ext uri="{FF2B5EF4-FFF2-40B4-BE49-F238E27FC236}">
+                    <a16:creationId xmlns:a16="http://schemas.microsoft.com/office/drawing/2014/main" id="{689A3911-D8C7-1DE3-FBD4-A2A8BF7F6F3E}"/>
+                  </a:ext>
+                </a:extLst>
+              </p:cNvPr>
+              <p:cNvSpPr>
+                <a:spLocks noGrp="1"/>
+              </p:cNvSpPr>
+              <p:nvPr>
+                <p:ph idx="1"/>
+              </p:nvPr>
+            </p:nvSpPr>
+            <p:spPr/>
+            <p:txBody>
+              <a:bodyPr/>
+              <a:lstStyle/>
+              <a:p>
+                <a:pPr marL="0" indent="0">
+                  <a:buNone/>
+                </a:pPr>
+                <a:r>
+                  <a:rPr lang="de-DE" dirty="0"/>
+                  <a:t>Given:</a:t>
+                </a:r>
+              </a:p>
+              <a:p>
+                <a:pPr marL="0" indent="0">
+                  <a:buNone/>
+                </a:pPr>
+                <a14:m>
+                  <m:oMathPara xmlns:m="http://schemas.openxmlformats.org/officeDocument/2006/math">
+                    <m:oMathParaPr>
+                      <m:jc m:val="left"/>
+                    </m:oMathParaPr>
+                    <m:oMath xmlns:m="http://schemas.openxmlformats.org/officeDocument/2006/math">
+                      <m:r>
+                        <a:rPr lang="de-DE" i="1">
+                          <a:latin typeface="Cambria Math" panose="02040503050406030204" pitchFamily="18" charset="0"/>
+                        </a:rPr>
+                        <m:t>𝐺</m:t>
+                      </m:r>
+                      <m:d>
+                        <m:dPr>
+                          <m:ctrlPr>
+                            <a:rPr lang="de-DE" i="1">
+                              <a:latin typeface="Cambria Math" panose="02040503050406030204" pitchFamily="18" charset="0"/>
+                            </a:rPr>
+                          </m:ctrlPr>
+                        </m:dPr>
+                        <m:e>
+                          <m:r>
+                            <a:rPr lang="de-DE" i="1">
+                              <a:latin typeface="Cambria Math" panose="02040503050406030204" pitchFamily="18" charset="0"/>
+                            </a:rPr>
+                            <m:t>𝑠</m:t>
+                          </m:r>
+                        </m:e>
+                      </m:d>
+                      <m:r>
+                        <a:rPr lang="de-DE" i="1">
+                          <a:latin typeface="Cambria Math" panose="02040503050406030204" pitchFamily="18" charset="0"/>
+                        </a:rPr>
+                        <m:t>=</m:t>
+                      </m:r>
+                      <m:f>
+                        <m:fPr>
+                          <m:ctrlPr>
+                            <a:rPr lang="de-DE" i="1">
+                              <a:latin typeface="Cambria Math" panose="02040503050406030204" pitchFamily="18" charset="0"/>
+                            </a:rPr>
+                          </m:ctrlPr>
+                        </m:fPr>
+                        <m:num>
+                          <m:r>
+                            <a:rPr lang="de-DE" i="1">
+                              <a:latin typeface="Cambria Math" panose="02040503050406030204" pitchFamily="18" charset="0"/>
+                            </a:rPr>
+                            <m:t>1</m:t>
+                          </m:r>
+                        </m:num>
+                        <m:den>
+                          <m:r>
+                            <a:rPr lang="de-DE" i="1">
+                              <a:latin typeface="Cambria Math" panose="02040503050406030204" pitchFamily="18" charset="0"/>
+                            </a:rPr>
+                            <m:t>𝑠</m:t>
+                          </m:r>
+                          <m:r>
+                            <a:rPr lang="de-DE" i="1">
+                              <a:latin typeface="Cambria Math" panose="02040503050406030204" pitchFamily="18" charset="0"/>
+                            </a:rPr>
+                            <m:t>+1</m:t>
+                          </m:r>
+                        </m:den>
+                      </m:f>
+                    </m:oMath>
+                  </m:oMathPara>
+                </a14:m>
+                <a:endParaRPr lang="de-DE" dirty="0"/>
+              </a:p>
+              <a:p>
+                <a:pPr marL="0" indent="0">
+                  <a:buNone/>
+                </a:pPr>
+                <a:endParaRPr lang="de-DE" dirty="0"/>
+              </a:p>
+              <a:p>
+                <a:pPr marL="0" indent="0">
+                  <a:buNone/>
+                </a:pPr>
+                <a:r>
+                  <a:rPr lang="de-DE" dirty="0"/>
+                  <a:t>Substitute </a:t>
+                </a:r>
+                <a:r>
+                  <a:rPr lang="de-DE" dirty="0" err="1"/>
+                  <a:t>Tustin</a:t>
+                </a:r>
+                <a:r>
+                  <a:rPr lang="de-DE" dirty="0"/>
+                  <a:t> </a:t>
+                </a:r>
+                <a:r>
+                  <a:rPr lang="de-DE" dirty="0" err="1"/>
+                  <a:t>approximation</a:t>
+                </a:r>
+                <a:endParaRPr lang="de-DE" dirty="0"/>
+              </a:p>
+              <a:p>
+                <a:pPr marL="0" indent="0">
+                  <a:buNone/>
+                </a:pPr>
+                <a:r>
+                  <a:rPr lang="de-DE" dirty="0"/>
+                  <a:t>…</a:t>
+                </a:r>
+              </a:p>
+            </p:txBody>
+          </p:sp>
+        </mc:Choice>
+        <mc:Fallback>
+          <p:sp>
+            <p:nvSpPr>
+              <p:cNvPr id="3" name="Inhaltsplatzhalter 2">
+                <a:extLst>
+                  <a:ext uri="{FF2B5EF4-FFF2-40B4-BE49-F238E27FC236}">
+                    <a16:creationId xmlns:a16="http://schemas.microsoft.com/office/drawing/2014/main" id="{689A3911-D8C7-1DE3-FBD4-A2A8BF7F6F3E}"/>
+                  </a:ext>
+                </a:extLst>
+              </p:cNvPr>
+              <p:cNvSpPr>
+                <a:spLocks noGrp="1" noRot="1" noChangeAspect="1" noMove="1" noResize="1" noEditPoints="1" noAdjustHandles="1" noChangeArrowheads="1" noChangeShapeType="1" noTextEdit="1"/>
+              </p:cNvSpPr>
+              <p:nvPr>
+                <p:ph idx="1"/>
+              </p:nvPr>
+            </p:nvSpPr>
+            <p:spPr>
+              <a:blipFill>
+                <a:blip r:embed="rId2"/>
+                <a:stretch>
+                  <a:fillRect l="-1206" t="-2326"/>
+                </a:stretch>
+              </a:blipFill>
+            </p:spPr>
+            <p:txBody>
+              <a:bodyPr/>
+              <a:lstStyle/>
+              <a:p>
+                <a:r>
+                  <a:rPr lang="de-DE">
+                    <a:noFill/>
+                  </a:rPr>
+                  <a:t> </a:t>
+                </a:r>
+              </a:p>
+            </p:txBody>
+          </p:sp>
+        </mc:Fallback>
+      </mc:AlternateContent>
       <p:sp>
         <p:nvSpPr>
           <p:cNvPr id="4" name="Foliennummernplatzhalter 3">
@@ -16834,7 +19782,7 @@
           <a:p>
             <a:fld id="{08C366F5-AFAD-49CB-854A-9D9E238FCA13}" type="slidenum">
               <a:rPr lang="en-GB" smtClean="0"/>
-              <a:t>34</a:t>
+              <a:t>32</a:t>
             </a:fld>
             <a:endParaRPr lang="en-GB"/>
           </a:p>
@@ -16853,7 +19801,7 @@
 </p:sld>
 </file>
 
-<file path=ppt/slides/slide35.xml><?xml version="1.0" encoding="utf-8"?>
+<file path=ppt/slides/slide33.xml><?xml version="1.0" encoding="utf-8"?>
 <p:sld xmlns:a="http://schemas.openxmlformats.org/drawingml/2006/main" xmlns:r="http://schemas.openxmlformats.org/officeDocument/2006/relationships" xmlns:p="http://schemas.openxmlformats.org/presentationml/2006/main">
   <p:cSld>
     <p:spTree>
@@ -16928,6 +19876,9 @@
           <a:bodyPr/>
           <a:lstStyle/>
           <a:p>
+            <a:pPr marL="0" indent="0">
+              <a:buNone/>
+            </a:pPr>
             <a:r>
               <a:rPr lang="de-DE" dirty="0" err="1"/>
               <a:t>Tustin</a:t>
@@ -16942,13 +19893,11 @@
             </a:r>
             <a:r>
               <a:rPr lang="de-DE" dirty="0"/>
-              <a:t>:</a:t>
-            </a:r>
-          </a:p>
-          <a:p>
+              <a:t> </a:t>
+            </a:r>
             <a:r>
               <a:rPr lang="de-DE" dirty="0" err="1"/>
-              <a:t>Nonlinear</a:t>
+              <a:t>nonlinear</a:t>
             </a:r>
             <a:r>
               <a:rPr lang="de-DE" dirty="0"/>
@@ -16972,21 +19921,37 @@
             <a:endParaRPr lang="de-DE" dirty="0"/>
           </a:p>
           <a:p>
+            <a:pPr marL="0" indent="0">
+              <a:buNone/>
+            </a:pPr>
             <a:r>
               <a:rPr lang="de-DE" dirty="0" err="1"/>
               <a:t>Correction</a:t>
             </a:r>
             <a:r>
               <a:rPr lang="de-DE" dirty="0"/>
-              <a:t>:</a:t>
-            </a:r>
-          </a:p>
-          <a:p>
+              <a:t>: </a:t>
+            </a:r>
             <a:r>
               <a:rPr lang="de-DE" dirty="0" err="1"/>
               <a:t>Prewarping</a:t>
             </a:r>
             <a:endParaRPr lang="de-DE" dirty="0"/>
+          </a:p>
+          <a:p>
+            <a:pPr marL="0" indent="0">
+              <a:buNone/>
+            </a:pPr>
+            <a:endParaRPr lang="de-DE" dirty="0"/>
+          </a:p>
+          <a:p>
+            <a:pPr marL="0" indent="0">
+              <a:buNone/>
+            </a:pPr>
+            <a:r>
+              <a:rPr lang="de-DE" dirty="0"/>
+              <a:t>…</a:t>
+            </a:r>
           </a:p>
           <a:p>
             <a:pPr marL="0" indent="0">
@@ -17019,7 +19984,7 @@
           <a:p>
             <a:fld id="{08C366F5-AFAD-49CB-854A-9D9E238FCA13}" type="slidenum">
               <a:rPr lang="en-GB" smtClean="0"/>
-              <a:t>35</a:t>
+              <a:t>33</a:t>
             </a:fld>
             <a:endParaRPr lang="en-GB"/>
           </a:p>
@@ -17038,547 +20003,7 @@
 </p:sld>
 </file>
 
-<file path=ppt/slides/slide36.xml><?xml version="1.0" encoding="utf-8"?>
-<p:sld xmlns:a="http://schemas.openxmlformats.org/drawingml/2006/main" xmlns:r="http://schemas.openxmlformats.org/officeDocument/2006/relationships" xmlns:p="http://schemas.openxmlformats.org/presentationml/2006/main">
-  <p:cSld>
-    <p:spTree>
-      <p:nvGrpSpPr>
-        <p:cNvPr id="1" name=""/>
-        <p:cNvGrpSpPr/>
-        <p:nvPr/>
-      </p:nvGrpSpPr>
-      <p:grpSpPr>
-        <a:xfrm>
-          <a:off x="0" y="0"/>
-          <a:ext cx="0" cy="0"/>
-          <a:chOff x="0" y="0"/>
-          <a:chExt cx="0" cy="0"/>
-        </a:xfrm>
-      </p:grpSpPr>
-      <p:sp>
-        <p:nvSpPr>
-          <p:cNvPr id="2" name="Titel 1">
-            <a:extLst>
-              <a:ext uri="{FF2B5EF4-FFF2-40B4-BE49-F238E27FC236}">
-                <a16:creationId xmlns:a16="http://schemas.microsoft.com/office/drawing/2014/main" id="{60711423-DF3C-B5DF-7E7E-40C6C2D140DA}"/>
-              </a:ext>
-            </a:extLst>
-          </p:cNvPr>
-          <p:cNvSpPr>
-            <a:spLocks noGrp="1"/>
-          </p:cNvSpPr>
-          <p:nvPr>
-            <p:ph type="title"/>
-          </p:nvPr>
-        </p:nvSpPr>
-        <p:spPr/>
-        <p:txBody>
-          <a:bodyPr/>
-          <a:lstStyle/>
-          <a:p>
-            <a:r>
-              <a:rPr lang="de-DE" dirty="0" err="1"/>
-              <a:t>Comparison</a:t>
-            </a:r>
-            <a:r>
-              <a:rPr lang="de-DE" dirty="0"/>
-              <a:t> </a:t>
-            </a:r>
-            <a:r>
-              <a:rPr lang="de-DE" dirty="0" err="1"/>
-              <a:t>of</a:t>
-            </a:r>
-            <a:r>
-              <a:rPr lang="de-DE" dirty="0"/>
-              <a:t> Methods</a:t>
-            </a:r>
-          </a:p>
-        </p:txBody>
-      </p:sp>
-      <p:sp>
-        <p:nvSpPr>
-          <p:cNvPr id="4" name="Foliennummernplatzhalter 3">
-            <a:extLst>
-              <a:ext uri="{FF2B5EF4-FFF2-40B4-BE49-F238E27FC236}">
-                <a16:creationId xmlns:a16="http://schemas.microsoft.com/office/drawing/2014/main" id="{EF7C8CBB-CFA2-E0E0-F55C-6CE0CE56B6A0}"/>
-              </a:ext>
-            </a:extLst>
-          </p:cNvPr>
-          <p:cNvSpPr>
-            <a:spLocks noGrp="1"/>
-          </p:cNvSpPr>
-          <p:nvPr>
-            <p:ph type="sldNum" sz="quarter" idx="12"/>
-          </p:nvPr>
-        </p:nvSpPr>
-        <p:spPr/>
-        <p:txBody>
-          <a:bodyPr/>
-          <a:lstStyle/>
-          <a:p>
-            <a:fld id="{08C366F5-AFAD-49CB-854A-9D9E238FCA13}" type="slidenum">
-              <a:rPr lang="en-GB" smtClean="0"/>
-              <a:t>36</a:t>
-            </a:fld>
-            <a:endParaRPr lang="en-GB"/>
-          </a:p>
-        </p:txBody>
-      </p:sp>
-      <p:graphicFrame>
-        <p:nvGraphicFramePr>
-          <p:cNvPr id="5" name="Tabelle 4">
-            <a:extLst>
-              <a:ext uri="{FF2B5EF4-FFF2-40B4-BE49-F238E27FC236}">
-                <a16:creationId xmlns:a16="http://schemas.microsoft.com/office/drawing/2014/main" id="{C3912ECF-7994-0EDE-C82B-186024CBFD59}"/>
-              </a:ext>
-            </a:extLst>
-          </p:cNvPr>
-          <p:cNvGraphicFramePr>
-            <a:graphicFrameLocks noGrp="1"/>
-          </p:cNvGraphicFramePr>
-          <p:nvPr/>
-        </p:nvGraphicFramePr>
-        <p:xfrm>
-          <a:off x="838200" y="3269774"/>
-          <a:ext cx="10515600" cy="1463040"/>
-        </p:xfrm>
-        <a:graphic>
-          <a:graphicData uri="http://schemas.openxmlformats.org/drawingml/2006/table">
-            <a:tbl>
-              <a:tblPr/>
-              <a:tblGrid>
-                <a:gridCol w="3505200">
-                  <a:extLst>
-                    <a:ext uri="{9D8B030D-6E8A-4147-A177-3AD203B41FA5}">
-                      <a16:colId xmlns:a16="http://schemas.microsoft.com/office/drawing/2014/main" val="707809539"/>
-                    </a:ext>
-                  </a:extLst>
-                </a:gridCol>
-                <a:gridCol w="3505200">
-                  <a:extLst>
-                    <a:ext uri="{9D8B030D-6E8A-4147-A177-3AD203B41FA5}">
-                      <a16:colId xmlns:a16="http://schemas.microsoft.com/office/drawing/2014/main" val="2314340506"/>
-                    </a:ext>
-                  </a:extLst>
-                </a:gridCol>
-                <a:gridCol w="3505200">
-                  <a:extLst>
-                    <a:ext uri="{9D8B030D-6E8A-4147-A177-3AD203B41FA5}">
-                      <a16:colId xmlns:a16="http://schemas.microsoft.com/office/drawing/2014/main" val="4067597396"/>
-                    </a:ext>
-                  </a:extLst>
-                </a:gridCol>
-              </a:tblGrid>
-              <a:tr h="0">
-                <a:tc>
-                  <a:txBody>
-                    <a:bodyPr/>
-                    <a:lstStyle/>
-                    <a:p>
-                      <a:pPr>
-                        <a:buNone/>
-                      </a:pPr>
-                      <a:r>
-                        <a:rPr lang="de-DE" b="1"/>
-                        <a:t>Method</a:t>
-                      </a:r>
-                      <a:endParaRPr lang="de-DE"/>
-                    </a:p>
-                  </a:txBody>
-                  <a:tcPr anchor="ctr">
-                    <a:lnL>
-                      <a:noFill/>
-                    </a:lnL>
-                    <a:lnR>
-                      <a:noFill/>
-                    </a:lnR>
-                    <a:lnT>
-                      <a:noFill/>
-                    </a:lnT>
-                    <a:lnB>
-                      <a:noFill/>
-                    </a:lnB>
-                    <a:noFill/>
-                  </a:tcPr>
-                </a:tc>
-                <a:tc>
-                  <a:txBody>
-                    <a:bodyPr/>
-                    <a:lstStyle/>
-                    <a:p>
-                      <a:pPr>
-                        <a:buNone/>
-                      </a:pPr>
-                      <a:r>
-                        <a:rPr lang="de-DE" b="1"/>
-                        <a:t>Accuracy</a:t>
-                      </a:r>
-                      <a:endParaRPr lang="de-DE"/>
-                    </a:p>
-                  </a:txBody>
-                  <a:tcPr anchor="ctr">
-                    <a:lnL>
-                      <a:noFill/>
-                    </a:lnL>
-                    <a:lnR>
-                      <a:noFill/>
-                    </a:lnR>
-                    <a:lnT>
-                      <a:noFill/>
-                    </a:lnT>
-                    <a:lnB>
-                      <a:noFill/>
-                    </a:lnB>
-                    <a:noFill/>
-                  </a:tcPr>
-                </a:tc>
-                <a:tc>
-                  <a:txBody>
-                    <a:bodyPr/>
-                    <a:lstStyle/>
-                    <a:p>
-                      <a:pPr>
-                        <a:buNone/>
-                      </a:pPr>
-                      <a:r>
-                        <a:rPr lang="de-DE" b="1"/>
-                        <a:t>Stability</a:t>
-                      </a:r>
-                      <a:endParaRPr lang="de-DE"/>
-                    </a:p>
-                  </a:txBody>
-                  <a:tcPr anchor="ctr">
-                    <a:lnL>
-                      <a:noFill/>
-                    </a:lnL>
-                    <a:lnR>
-                      <a:noFill/>
-                    </a:lnR>
-                    <a:lnT>
-                      <a:noFill/>
-                    </a:lnT>
-                    <a:lnB>
-                      <a:noFill/>
-                    </a:lnB>
-                    <a:noFill/>
-                  </a:tcPr>
-                </a:tc>
-                <a:extLst>
-                  <a:ext uri="{0D108BD9-81ED-4DB2-BD59-A6C34878D82A}">
-                    <a16:rowId xmlns:a16="http://schemas.microsoft.com/office/drawing/2014/main" val="540675038"/>
-                  </a:ext>
-                </a:extLst>
-              </a:tr>
-              <a:tr h="0">
-                <a:tc>
-                  <a:txBody>
-                    <a:bodyPr/>
-                    <a:lstStyle/>
-                    <a:p>
-                      <a:pPr>
-                        <a:buNone/>
-                      </a:pPr>
-                      <a:r>
-                        <a:rPr lang="de-DE"/>
-                        <a:t>Forward Euler</a:t>
-                      </a:r>
-                    </a:p>
-                  </a:txBody>
-                  <a:tcPr anchor="ctr">
-                    <a:lnL>
-                      <a:noFill/>
-                    </a:lnL>
-                    <a:lnR>
-                      <a:noFill/>
-                    </a:lnR>
-                    <a:lnT>
-                      <a:noFill/>
-                    </a:lnT>
-                    <a:lnB>
-                      <a:noFill/>
-                    </a:lnB>
-                    <a:noFill/>
-                  </a:tcPr>
-                </a:tc>
-                <a:tc>
-                  <a:txBody>
-                    <a:bodyPr/>
-                    <a:lstStyle/>
-                    <a:p>
-                      <a:pPr>
-                        <a:buNone/>
-                      </a:pPr>
-                      <a:r>
-                        <a:rPr lang="de-DE"/>
-                        <a:t>Low</a:t>
-                      </a:r>
-                    </a:p>
-                  </a:txBody>
-                  <a:tcPr anchor="ctr">
-                    <a:lnL>
-                      <a:noFill/>
-                    </a:lnL>
-                    <a:lnR>
-                      <a:noFill/>
-                    </a:lnR>
-                    <a:lnT>
-                      <a:noFill/>
-                    </a:lnT>
-                    <a:lnB>
-                      <a:noFill/>
-                    </a:lnB>
-                    <a:noFill/>
-                  </a:tcPr>
-                </a:tc>
-                <a:tc>
-                  <a:txBody>
-                    <a:bodyPr/>
-                    <a:lstStyle/>
-                    <a:p>
-                      <a:pPr>
-                        <a:buNone/>
-                      </a:pPr>
-                      <a:r>
-                        <a:rPr lang="de-DE"/>
-                        <a:t>Poor</a:t>
-                      </a:r>
-                    </a:p>
-                  </a:txBody>
-                  <a:tcPr anchor="ctr">
-                    <a:lnL>
-                      <a:noFill/>
-                    </a:lnL>
-                    <a:lnR>
-                      <a:noFill/>
-                    </a:lnR>
-                    <a:lnT>
-                      <a:noFill/>
-                    </a:lnT>
-                    <a:lnB>
-                      <a:noFill/>
-                    </a:lnB>
-                    <a:noFill/>
-                  </a:tcPr>
-                </a:tc>
-                <a:extLst>
-                  <a:ext uri="{0D108BD9-81ED-4DB2-BD59-A6C34878D82A}">
-                    <a16:rowId xmlns:a16="http://schemas.microsoft.com/office/drawing/2014/main" val="1601581316"/>
-                  </a:ext>
-                </a:extLst>
-              </a:tr>
-              <a:tr h="0">
-                <a:tc>
-                  <a:txBody>
-                    <a:bodyPr/>
-                    <a:lstStyle/>
-                    <a:p>
-                      <a:pPr>
-                        <a:buNone/>
-                      </a:pPr>
-                      <a:r>
-                        <a:rPr lang="de-DE"/>
-                        <a:t>Backward Euler</a:t>
-                      </a:r>
-                    </a:p>
-                  </a:txBody>
-                  <a:tcPr anchor="ctr">
-                    <a:lnL>
-                      <a:noFill/>
-                    </a:lnL>
-                    <a:lnR>
-                      <a:noFill/>
-                    </a:lnR>
-                    <a:lnT>
-                      <a:noFill/>
-                    </a:lnT>
-                    <a:lnB>
-                      <a:noFill/>
-                    </a:lnB>
-                    <a:noFill/>
-                  </a:tcPr>
-                </a:tc>
-                <a:tc>
-                  <a:txBody>
-                    <a:bodyPr/>
-                    <a:lstStyle/>
-                    <a:p>
-                      <a:pPr>
-                        <a:buNone/>
-                      </a:pPr>
-                      <a:r>
-                        <a:rPr lang="de-DE"/>
-                        <a:t>Medium</a:t>
-                      </a:r>
-                    </a:p>
-                  </a:txBody>
-                  <a:tcPr anchor="ctr">
-                    <a:lnL>
-                      <a:noFill/>
-                    </a:lnL>
-                    <a:lnR>
-                      <a:noFill/>
-                    </a:lnR>
-                    <a:lnT>
-                      <a:noFill/>
-                    </a:lnT>
-                    <a:lnB>
-                      <a:noFill/>
-                    </a:lnB>
-                    <a:noFill/>
-                  </a:tcPr>
-                </a:tc>
-                <a:tc>
-                  <a:txBody>
-                    <a:bodyPr/>
-                    <a:lstStyle/>
-                    <a:p>
-                      <a:pPr>
-                        <a:buNone/>
-                      </a:pPr>
-                      <a:r>
-                        <a:rPr lang="de-DE"/>
-                        <a:t>Good</a:t>
-                      </a:r>
-                    </a:p>
-                  </a:txBody>
-                  <a:tcPr anchor="ctr">
-                    <a:lnL>
-                      <a:noFill/>
-                    </a:lnL>
-                    <a:lnR>
-                      <a:noFill/>
-                    </a:lnR>
-                    <a:lnT>
-                      <a:noFill/>
-                    </a:lnT>
-                    <a:lnB>
-                      <a:noFill/>
-                    </a:lnB>
-                    <a:noFill/>
-                  </a:tcPr>
-                </a:tc>
-                <a:extLst>
-                  <a:ext uri="{0D108BD9-81ED-4DB2-BD59-A6C34878D82A}">
-                    <a16:rowId xmlns:a16="http://schemas.microsoft.com/office/drawing/2014/main" val="3798352914"/>
-                  </a:ext>
-                </a:extLst>
-              </a:tr>
-              <a:tr h="0">
-                <a:tc>
-                  <a:txBody>
-                    <a:bodyPr/>
-                    <a:lstStyle/>
-                    <a:p>
-                      <a:pPr>
-                        <a:buNone/>
-                      </a:pPr>
-                      <a:r>
-                        <a:rPr lang="de-DE"/>
-                        <a:t>Tustin</a:t>
-                      </a:r>
-                    </a:p>
-                  </a:txBody>
-                  <a:tcPr anchor="ctr">
-                    <a:lnL>
-                      <a:noFill/>
-                    </a:lnL>
-                    <a:lnR>
-                      <a:noFill/>
-                    </a:lnR>
-                    <a:lnT>
-                      <a:noFill/>
-                    </a:lnT>
-                    <a:lnB>
-                      <a:noFill/>
-                    </a:lnB>
-                    <a:noFill/>
-                  </a:tcPr>
-                </a:tc>
-                <a:tc>
-                  <a:txBody>
-                    <a:bodyPr/>
-                    <a:lstStyle/>
-                    <a:p>
-                      <a:pPr>
-                        <a:buNone/>
-                      </a:pPr>
-                      <a:r>
-                        <a:rPr lang="de-DE"/>
-                        <a:t>High</a:t>
-                      </a:r>
-                    </a:p>
-                  </a:txBody>
-                  <a:tcPr anchor="ctr">
-                    <a:lnL>
-                      <a:noFill/>
-                    </a:lnL>
-                    <a:lnR>
-                      <a:noFill/>
-                    </a:lnR>
-                    <a:lnT>
-                      <a:noFill/>
-                    </a:lnT>
-                    <a:lnB>
-                      <a:noFill/>
-                    </a:lnB>
-                    <a:noFill/>
-                  </a:tcPr>
-                </a:tc>
-                <a:tc>
-                  <a:txBody>
-                    <a:bodyPr/>
-                    <a:lstStyle/>
-                    <a:p>
-                      <a:pPr>
-                        <a:buNone/>
-                      </a:pPr>
-                      <a:r>
-                        <a:rPr lang="de-DE" dirty="0" err="1"/>
-                        <a:t>Good</a:t>
-                      </a:r>
-                      <a:endParaRPr lang="de-DE" dirty="0"/>
-                    </a:p>
-                  </a:txBody>
-                  <a:tcPr anchor="ctr">
-                    <a:lnL>
-                      <a:noFill/>
-                    </a:lnL>
-                    <a:lnR>
-                      <a:noFill/>
-                    </a:lnR>
-                    <a:lnT>
-                      <a:noFill/>
-                    </a:lnT>
-                    <a:lnB>
-                      <a:noFill/>
-                    </a:lnB>
-                    <a:noFill/>
-                  </a:tcPr>
-                </a:tc>
-                <a:extLst>
-                  <a:ext uri="{0D108BD9-81ED-4DB2-BD59-A6C34878D82A}">
-                    <a16:rowId xmlns:a16="http://schemas.microsoft.com/office/drawing/2014/main" val="425994814"/>
-                  </a:ext>
-                </a:extLst>
-              </a:tr>
-            </a:tbl>
-          </a:graphicData>
-        </a:graphic>
-      </p:graphicFrame>
-    </p:spTree>
-    <p:extLst>
-      <p:ext uri="{BB962C8B-B14F-4D97-AF65-F5344CB8AC3E}">
-        <p14:creationId xmlns:p14="http://schemas.microsoft.com/office/powerpoint/2010/main" val="1206638551"/>
-      </p:ext>
-    </p:extLst>
-  </p:cSld>
-  <p:clrMapOvr>
-    <a:masterClrMapping/>
-  </p:clrMapOvr>
-</p:sld>
-</file>
-
-<file path=ppt/slides/slide37.xml><?xml version="1.0" encoding="utf-8"?>
+<file path=ppt/slides/slide34.xml><?xml version="1.0" encoding="utf-8"?>
 <p:sld xmlns:a="http://schemas.openxmlformats.org/drawingml/2006/main" xmlns:r="http://schemas.openxmlformats.org/officeDocument/2006/relationships" xmlns:p="http://schemas.openxmlformats.org/presentationml/2006/main">
   <p:cSld>
     <p:spTree>
@@ -17618,101 +20043,7 @@
           <a:p>
             <a:r>
               <a:rPr lang="de-DE" dirty="0" err="1"/>
-              <a:t>Graphical</a:t>
-            </a:r>
-            <a:r>
-              <a:rPr lang="de-DE" dirty="0"/>
-              <a:t> </a:t>
-            </a:r>
-            <a:r>
-              <a:rPr lang="de-DE" dirty="0" err="1"/>
               <a:t>Comparison</a:t>
-            </a:r>
-            <a:endParaRPr lang="de-DE" dirty="0"/>
-          </a:p>
-        </p:txBody>
-      </p:sp>
-      <p:sp>
-        <p:nvSpPr>
-          <p:cNvPr id="3" name="Inhaltsplatzhalter 2">
-            <a:extLst>
-              <a:ext uri="{FF2B5EF4-FFF2-40B4-BE49-F238E27FC236}">
-                <a16:creationId xmlns:a16="http://schemas.microsoft.com/office/drawing/2014/main" id="{190D9D23-BE92-4ADF-768F-04E580FE9EEA}"/>
-              </a:ext>
-            </a:extLst>
-          </p:cNvPr>
-          <p:cNvSpPr>
-            <a:spLocks noGrp="1"/>
-          </p:cNvSpPr>
-          <p:nvPr>
-            <p:ph idx="1"/>
-          </p:nvPr>
-        </p:nvSpPr>
-        <p:spPr/>
-        <p:txBody>
-          <a:bodyPr/>
-          <a:lstStyle/>
-          <a:p>
-            <a:pPr marL="0" indent="0">
-              <a:buNone/>
-            </a:pPr>
-            <a:r>
-              <a:rPr lang="de-DE" dirty="0"/>
-              <a:t>Plot:</a:t>
-            </a:r>
-          </a:p>
-          <a:p>
-            <a:r>
-              <a:rPr lang="de-DE" dirty="0" err="1"/>
-              <a:t>Frequency</a:t>
-            </a:r>
-            <a:r>
-              <a:rPr lang="de-DE" dirty="0"/>
-              <a:t> </a:t>
-            </a:r>
-            <a:r>
-              <a:rPr lang="de-DE" dirty="0" err="1"/>
-              <a:t>response</a:t>
-            </a:r>
-            <a:r>
-              <a:rPr lang="de-DE" dirty="0"/>
-              <a:t> </a:t>
-            </a:r>
-            <a:r>
-              <a:rPr lang="de-DE" dirty="0" err="1"/>
-              <a:t>of</a:t>
-            </a:r>
-            <a:r>
-              <a:rPr lang="de-DE" dirty="0"/>
-              <a:t> all </a:t>
-            </a:r>
-            <a:r>
-              <a:rPr lang="de-DE" dirty="0" err="1"/>
-              <a:t>methods</a:t>
-            </a:r>
-            <a:r>
-              <a:rPr lang="de-DE" dirty="0"/>
-              <a:t> </a:t>
-            </a:r>
-            <a:r>
-              <a:rPr lang="de-DE" dirty="0" err="1"/>
-              <a:t>vs</a:t>
-            </a:r>
-            <a:r>
-              <a:rPr lang="de-DE" dirty="0"/>
-              <a:t> </a:t>
-            </a:r>
-            <a:r>
-              <a:rPr lang="de-DE" dirty="0" err="1"/>
-              <a:t>continuous</a:t>
-            </a:r>
-            <a:r>
-              <a:rPr lang="de-DE" dirty="0"/>
-              <a:t> </a:t>
-            </a:r>
-            <a:r>
-              <a:rPr lang="de-DE" dirty="0" err="1"/>
-              <a:t>system</a:t>
             </a:r>
             <a:endParaRPr lang="de-DE" dirty="0"/>
           </a:p>
@@ -17741,12 +20072,42 @@
           <a:p>
             <a:fld id="{08C366F5-AFAD-49CB-854A-9D9E238FCA13}" type="slidenum">
               <a:rPr lang="en-GB" smtClean="0"/>
-              <a:t>37</a:t>
+              <a:t>34</a:t>
             </a:fld>
             <a:endParaRPr lang="en-GB"/>
           </a:p>
         </p:txBody>
       </p:sp>
+      <p:pic>
+        <p:nvPicPr>
+          <p:cNvPr id="7" name="Grafik 6">
+            <a:extLst>
+              <a:ext uri="{FF2B5EF4-FFF2-40B4-BE49-F238E27FC236}">
+                <a16:creationId xmlns:a16="http://schemas.microsoft.com/office/drawing/2014/main" id="{D0E612E8-221D-70BC-DF1F-056028EC5036}"/>
+              </a:ext>
+            </a:extLst>
+          </p:cNvPr>
+          <p:cNvPicPr>
+            <a:picLocks noChangeAspect="1"/>
+          </p:cNvPicPr>
+          <p:nvPr/>
+        </p:nvPicPr>
+        <p:blipFill>
+          <a:blip r:embed="rId2"/>
+          <a:stretch>
+            <a:fillRect/>
+          </a:stretch>
+        </p:blipFill>
+        <p:spPr>
+          <a:xfrm>
+            <a:off x="2565400" y="1476375"/>
+            <a:ext cx="7061200" cy="5245100"/>
+          </a:xfrm>
+          <a:prstGeom prst="rect">
+            <a:avLst/>
+          </a:prstGeom>
+        </p:spPr>
+      </p:pic>
     </p:spTree>
     <p:extLst>
       <p:ext uri="{BB962C8B-B14F-4D97-AF65-F5344CB8AC3E}">
@@ -17760,7 +20121,7 @@
 </p:sld>
 </file>
 
-<file path=ppt/slides/slide38.xml><?xml version="1.0" encoding="utf-8"?>
+<file path=ppt/slides/slide35.xml><?xml version="1.0" encoding="utf-8"?>
 <p:sld xmlns:a="http://schemas.openxmlformats.org/drawingml/2006/main" xmlns:r="http://schemas.openxmlformats.org/officeDocument/2006/relationships" xmlns:p="http://schemas.openxmlformats.org/presentationml/2006/main">
   <p:cSld>
     <p:spTree>
@@ -17867,6 +20228,21 @@
             </a:r>
             <a:endParaRPr lang="de-DE" dirty="0"/>
           </a:p>
+          <a:p>
+            <a:pPr marL="0" indent="0">
+              <a:buNone/>
+            </a:pPr>
+            <a:endParaRPr lang="de-DE" dirty="0"/>
+          </a:p>
+          <a:p>
+            <a:pPr marL="0" indent="0">
+              <a:buNone/>
+            </a:pPr>
+            <a:r>
+              <a:rPr lang="de-DE" dirty="0"/>
+              <a:t>…</a:t>
+            </a:r>
+          </a:p>
         </p:txBody>
       </p:sp>
       <p:sp>
@@ -17892,7 +20268,7 @@
           <a:p>
             <a:fld id="{08C366F5-AFAD-49CB-854A-9D9E238FCA13}" type="slidenum">
               <a:rPr lang="en-GB" smtClean="0"/>
-              <a:t>38</a:t>
+              <a:t>35</a:t>
             </a:fld>
             <a:endParaRPr lang="en-GB"/>
           </a:p>
@@ -17902,6 +20278,1208 @@
     <p:extLst>
       <p:ext uri="{BB962C8B-B14F-4D97-AF65-F5344CB8AC3E}">
         <p14:creationId xmlns:p14="http://schemas.microsoft.com/office/powerpoint/2010/main" val="1177416121"/>
+      </p:ext>
+    </p:extLst>
+  </p:cSld>
+  <p:clrMapOvr>
+    <a:masterClrMapping/>
+  </p:clrMapOvr>
+</p:sld>
+</file>
+
+<file path=ppt/slides/slide36.xml><?xml version="1.0" encoding="utf-8"?>
+<p:sld xmlns:a="http://schemas.openxmlformats.org/drawingml/2006/main" xmlns:r="http://schemas.openxmlformats.org/officeDocument/2006/relationships" xmlns:p="http://schemas.openxmlformats.org/presentationml/2006/main">
+  <p:cSld>
+    <p:spTree>
+      <p:nvGrpSpPr>
+        <p:cNvPr id="1" name=""/>
+        <p:cNvGrpSpPr/>
+        <p:nvPr/>
+      </p:nvGrpSpPr>
+      <p:grpSpPr>
+        <a:xfrm>
+          <a:off x="0" y="0"/>
+          <a:ext cx="0" cy="0"/>
+          <a:chOff x="0" y="0"/>
+          <a:chExt cx="0" cy="0"/>
+        </a:xfrm>
+      </p:grpSpPr>
+      <p:sp>
+        <p:nvSpPr>
+          <p:cNvPr id="2" name="Titel 1">
+            <a:extLst>
+              <a:ext uri="{FF2B5EF4-FFF2-40B4-BE49-F238E27FC236}">
+                <a16:creationId xmlns:a16="http://schemas.microsoft.com/office/drawing/2014/main" id="{0928A614-DFBF-9C8B-344A-5180371F0262}"/>
+              </a:ext>
+            </a:extLst>
+          </p:cNvPr>
+          <p:cNvSpPr>
+            <a:spLocks noGrp="1"/>
+          </p:cNvSpPr>
+          <p:nvPr>
+            <p:ph type="title"/>
+          </p:nvPr>
+        </p:nvSpPr>
+        <p:spPr/>
+        <p:txBody>
+          <a:bodyPr/>
+          <a:lstStyle/>
+          <a:p>
+            <a:r>
+              <a:rPr lang="de-DE" dirty="0" err="1"/>
+              <a:t>Discrete</a:t>
+            </a:r>
+            <a:r>
+              <a:rPr lang="de-DE" dirty="0"/>
+              <a:t>-Time PID Tuning</a:t>
+            </a:r>
+          </a:p>
+        </p:txBody>
+      </p:sp>
+      <mc:AlternateContent xmlns:mc="http://schemas.openxmlformats.org/markup-compatibility/2006">
+        <mc:Choice xmlns:a14="http://schemas.microsoft.com/office/drawing/2010/main" Requires="a14">
+          <p:sp>
+            <p:nvSpPr>
+              <p:cNvPr id="3" name="Inhaltsplatzhalter 2">
+                <a:extLst>
+                  <a:ext uri="{FF2B5EF4-FFF2-40B4-BE49-F238E27FC236}">
+                    <a16:creationId xmlns:a16="http://schemas.microsoft.com/office/drawing/2014/main" id="{8F5456DF-6701-1B36-6F40-82DE65498C00}"/>
+                  </a:ext>
+                </a:extLst>
+              </p:cNvPr>
+              <p:cNvSpPr>
+                <a:spLocks noGrp="1"/>
+              </p:cNvSpPr>
+              <p:nvPr>
+                <p:ph idx="1"/>
+              </p:nvPr>
+            </p:nvSpPr>
+            <p:spPr/>
+            <p:txBody>
+              <a:bodyPr/>
+              <a:lstStyle/>
+              <a:p>
+                <a:pPr marL="0" indent="0">
+                  <a:buNone/>
+                </a:pPr>
+                <a:r>
+                  <a:rPr lang="de-DE" dirty="0"/>
+                  <a:t>PID </a:t>
+                </a:r>
+                <a:r>
+                  <a:rPr lang="de-DE" dirty="0" err="1"/>
+                  <a:t>controller</a:t>
+                </a:r>
+                <a:r>
+                  <a:rPr lang="de-DE" dirty="0"/>
+                  <a:t> (</a:t>
+                </a:r>
+                <a:r>
+                  <a:rPr lang="de-DE" dirty="0" err="1"/>
+                  <a:t>continuous</a:t>
+                </a:r>
+                <a:r>
+                  <a:rPr lang="de-DE" dirty="0"/>
+                  <a:t>-time):</a:t>
+                </a:r>
+              </a:p>
+              <a:p>
+                <a:pPr marL="0" indent="0">
+                  <a:buNone/>
+                </a:pPr>
+                <a:r>
+                  <a:rPr lang="de-DE" b="0" dirty="0"/>
+                  <a:t>	</a:t>
+                </a:r>
+                <a14:m>
+                  <m:oMath xmlns:m="http://schemas.openxmlformats.org/officeDocument/2006/math">
+                    <m:r>
+                      <a:rPr lang="de-DE" b="0" i="1" smtClean="0">
+                        <a:latin typeface="Cambria Math" panose="02040503050406030204" pitchFamily="18" charset="0"/>
+                      </a:rPr>
+                      <m:t>𝑢</m:t>
+                    </m:r>
+                    <m:d>
+                      <m:dPr>
+                        <m:ctrlPr>
+                          <a:rPr lang="de-DE" b="0" i="1" smtClean="0">
+                            <a:latin typeface="Cambria Math" panose="02040503050406030204" pitchFamily="18" charset="0"/>
+                          </a:rPr>
+                        </m:ctrlPr>
+                      </m:dPr>
+                      <m:e>
+                        <m:r>
+                          <a:rPr lang="de-DE" b="0" i="1" smtClean="0">
+                            <a:latin typeface="Cambria Math" panose="02040503050406030204" pitchFamily="18" charset="0"/>
+                          </a:rPr>
+                          <m:t>𝑡</m:t>
+                        </m:r>
+                      </m:e>
+                    </m:d>
+                    <m:r>
+                      <a:rPr lang="de-DE" b="0" i="1" smtClean="0">
+                        <a:latin typeface="Cambria Math" panose="02040503050406030204" pitchFamily="18" charset="0"/>
+                      </a:rPr>
+                      <m:t>=</m:t>
+                    </m:r>
+                    <m:sSub>
+                      <m:sSubPr>
+                        <m:ctrlPr>
+                          <a:rPr lang="de-DE" b="0" i="1" smtClean="0">
+                            <a:latin typeface="Cambria Math" panose="02040503050406030204" pitchFamily="18" charset="0"/>
+                          </a:rPr>
+                        </m:ctrlPr>
+                      </m:sSubPr>
+                      <m:e>
+                        <m:r>
+                          <a:rPr lang="de-DE" b="0" i="1" smtClean="0">
+                            <a:latin typeface="Cambria Math" panose="02040503050406030204" pitchFamily="18" charset="0"/>
+                          </a:rPr>
+                          <m:t>𝐾</m:t>
+                        </m:r>
+                      </m:e>
+                      <m:sub>
+                        <m:r>
+                          <a:rPr lang="de-DE" b="0" i="1" smtClean="0">
+                            <a:latin typeface="Cambria Math" panose="02040503050406030204" pitchFamily="18" charset="0"/>
+                          </a:rPr>
+                          <m:t>𝑝</m:t>
+                        </m:r>
+                      </m:sub>
+                    </m:sSub>
+                    <m:r>
+                      <a:rPr lang="de-DE" b="0" i="1" smtClean="0">
+                        <a:latin typeface="Cambria Math" panose="02040503050406030204" pitchFamily="18" charset="0"/>
+                      </a:rPr>
+                      <m:t> </m:t>
+                    </m:r>
+                    <m:r>
+                      <a:rPr lang="de-DE" b="0" i="1" smtClean="0">
+                        <a:latin typeface="Cambria Math" panose="02040503050406030204" pitchFamily="18" charset="0"/>
+                      </a:rPr>
+                      <m:t>𝑒</m:t>
+                    </m:r>
+                    <m:d>
+                      <m:dPr>
+                        <m:ctrlPr>
+                          <a:rPr lang="de-DE" b="0" i="1" smtClean="0">
+                            <a:latin typeface="Cambria Math" panose="02040503050406030204" pitchFamily="18" charset="0"/>
+                          </a:rPr>
+                        </m:ctrlPr>
+                      </m:dPr>
+                      <m:e>
+                        <m:r>
+                          <a:rPr lang="de-DE" b="0" i="1" smtClean="0">
+                            <a:latin typeface="Cambria Math" panose="02040503050406030204" pitchFamily="18" charset="0"/>
+                          </a:rPr>
+                          <m:t>𝑡</m:t>
+                        </m:r>
+                      </m:e>
+                    </m:d>
+                    <m:r>
+                      <a:rPr lang="de-DE" b="0" i="1" smtClean="0">
+                        <a:latin typeface="Cambria Math" panose="02040503050406030204" pitchFamily="18" charset="0"/>
+                      </a:rPr>
+                      <m:t>+</m:t>
+                    </m:r>
+                    <m:sSub>
+                      <m:sSubPr>
+                        <m:ctrlPr>
+                          <a:rPr lang="de-DE" b="0" i="1" smtClean="0">
+                            <a:latin typeface="Cambria Math" panose="02040503050406030204" pitchFamily="18" charset="0"/>
+                          </a:rPr>
+                        </m:ctrlPr>
+                      </m:sSubPr>
+                      <m:e>
+                        <m:r>
+                          <a:rPr lang="de-DE" b="0" i="1" smtClean="0">
+                            <a:latin typeface="Cambria Math" panose="02040503050406030204" pitchFamily="18" charset="0"/>
+                          </a:rPr>
+                          <m:t>𝐾</m:t>
+                        </m:r>
+                      </m:e>
+                      <m:sub>
+                        <m:r>
+                          <a:rPr lang="de-DE" b="0" i="1" smtClean="0">
+                            <a:latin typeface="Cambria Math" panose="02040503050406030204" pitchFamily="18" charset="0"/>
+                          </a:rPr>
+                          <m:t>𝑖</m:t>
+                        </m:r>
+                      </m:sub>
+                    </m:sSub>
+                    <m:r>
+                      <a:rPr lang="de-DE" b="0" i="1" smtClean="0">
+                        <a:latin typeface="Cambria Math" panose="02040503050406030204" pitchFamily="18" charset="0"/>
+                      </a:rPr>
+                      <m:t> </m:t>
+                    </m:r>
+                    <m:nary>
+                      <m:naryPr>
+                        <m:limLoc m:val="undOvr"/>
+                        <m:subHide m:val="on"/>
+                        <m:supHide m:val="on"/>
+                        <m:ctrlPr>
+                          <a:rPr lang="de-DE" b="0" i="1" smtClean="0">
+                            <a:latin typeface="Cambria Math" panose="02040503050406030204" pitchFamily="18" charset="0"/>
+                          </a:rPr>
+                        </m:ctrlPr>
+                      </m:naryPr>
+                      <m:sub/>
+                      <m:sup/>
+                      <m:e>
+                        <m:r>
+                          <a:rPr lang="de-DE" b="0" i="1" smtClean="0">
+                            <a:latin typeface="Cambria Math" panose="02040503050406030204" pitchFamily="18" charset="0"/>
+                          </a:rPr>
+                          <m:t>𝑒</m:t>
+                        </m:r>
+                        <m:d>
+                          <m:dPr>
+                            <m:ctrlPr>
+                              <a:rPr lang="de-DE" b="0" i="1" smtClean="0">
+                                <a:latin typeface="Cambria Math" panose="02040503050406030204" pitchFamily="18" charset="0"/>
+                              </a:rPr>
+                            </m:ctrlPr>
+                          </m:dPr>
+                          <m:e>
+                            <m:r>
+                              <a:rPr lang="de-DE" b="0" i="1" smtClean="0">
+                                <a:latin typeface="Cambria Math" panose="02040503050406030204" pitchFamily="18" charset="0"/>
+                              </a:rPr>
+                              <m:t>𝑡</m:t>
+                            </m:r>
+                          </m:e>
+                        </m:d>
+                        <m:r>
+                          <a:rPr lang="de-DE" b="0" i="1" smtClean="0">
+                            <a:latin typeface="Cambria Math" panose="02040503050406030204" pitchFamily="18" charset="0"/>
+                          </a:rPr>
+                          <m:t>𝑑𝑡</m:t>
+                        </m:r>
+                        <m:r>
+                          <a:rPr lang="de-DE" b="0" i="1" smtClean="0">
+                            <a:latin typeface="Cambria Math" panose="02040503050406030204" pitchFamily="18" charset="0"/>
+                          </a:rPr>
+                          <m:t>+</m:t>
+                        </m:r>
+                        <m:sSub>
+                          <m:sSubPr>
+                            <m:ctrlPr>
+                              <a:rPr lang="de-DE" b="0" i="1" smtClean="0">
+                                <a:latin typeface="Cambria Math" panose="02040503050406030204" pitchFamily="18" charset="0"/>
+                              </a:rPr>
+                            </m:ctrlPr>
+                          </m:sSubPr>
+                          <m:e>
+                            <m:r>
+                              <a:rPr lang="de-DE" b="0" i="1" smtClean="0">
+                                <a:latin typeface="Cambria Math" panose="02040503050406030204" pitchFamily="18" charset="0"/>
+                              </a:rPr>
+                              <m:t>𝐾</m:t>
+                            </m:r>
+                          </m:e>
+                          <m:sub>
+                            <m:r>
+                              <a:rPr lang="de-DE" b="0" i="1" smtClean="0">
+                                <a:latin typeface="Cambria Math" panose="02040503050406030204" pitchFamily="18" charset="0"/>
+                              </a:rPr>
+                              <m:t>𝑑</m:t>
+                            </m:r>
+                          </m:sub>
+                        </m:sSub>
+                        <m:f>
+                          <m:fPr>
+                            <m:ctrlPr>
+                              <a:rPr lang="de-DE" b="0" i="1" smtClean="0">
+                                <a:latin typeface="Cambria Math" panose="02040503050406030204" pitchFamily="18" charset="0"/>
+                              </a:rPr>
+                            </m:ctrlPr>
+                          </m:fPr>
+                          <m:num>
+                            <m:r>
+                              <a:rPr lang="de-DE" b="0" i="1" smtClean="0">
+                                <a:latin typeface="Cambria Math" panose="02040503050406030204" pitchFamily="18" charset="0"/>
+                              </a:rPr>
+                              <m:t>𝑑𝑒</m:t>
+                            </m:r>
+                            <m:d>
+                              <m:dPr>
+                                <m:ctrlPr>
+                                  <a:rPr lang="de-DE" b="0" i="1" smtClean="0">
+                                    <a:latin typeface="Cambria Math" panose="02040503050406030204" pitchFamily="18" charset="0"/>
+                                  </a:rPr>
+                                </m:ctrlPr>
+                              </m:dPr>
+                              <m:e>
+                                <m:r>
+                                  <a:rPr lang="de-DE" b="0" i="1" smtClean="0">
+                                    <a:latin typeface="Cambria Math" panose="02040503050406030204" pitchFamily="18" charset="0"/>
+                                  </a:rPr>
+                                  <m:t>𝑡</m:t>
+                                </m:r>
+                              </m:e>
+                            </m:d>
+                          </m:num>
+                          <m:den>
+                            <m:r>
+                              <a:rPr lang="de-DE" b="0" i="1" smtClean="0">
+                                <a:latin typeface="Cambria Math" panose="02040503050406030204" pitchFamily="18" charset="0"/>
+                              </a:rPr>
+                              <m:t>𝑑𝑡</m:t>
+                            </m:r>
+                          </m:den>
+                        </m:f>
+                      </m:e>
+                    </m:nary>
+                  </m:oMath>
+                </a14:m>
+                <a:endParaRPr lang="de-DE" dirty="0"/>
+              </a:p>
+              <a:p>
+                <a:pPr marL="0" indent="0">
+                  <a:buNone/>
+                </a:pPr>
+                <a:endParaRPr lang="de-DE" dirty="0"/>
+              </a:p>
+              <a:p>
+                <a:pPr marL="0" indent="0">
+                  <a:buNone/>
+                </a:pPr>
+                <a:r>
+                  <a:rPr lang="de-DE" dirty="0"/>
+                  <a:t>Goal: Implement </a:t>
+                </a:r>
+                <a:r>
+                  <a:rPr lang="de-DE" dirty="0" err="1"/>
+                  <a:t>this</a:t>
+                </a:r>
+                <a:r>
+                  <a:rPr lang="de-DE" dirty="0"/>
+                  <a:t> in </a:t>
+                </a:r>
+                <a:r>
+                  <a:rPr lang="de-DE" dirty="0" err="1"/>
+                  <a:t>discrete</a:t>
+                </a:r>
+                <a:r>
+                  <a:rPr lang="de-DE" dirty="0"/>
+                  <a:t>-time</a:t>
+                </a:r>
+              </a:p>
+            </p:txBody>
+          </p:sp>
+        </mc:Choice>
+        <mc:Fallback>
+          <p:sp>
+            <p:nvSpPr>
+              <p:cNvPr id="3" name="Inhaltsplatzhalter 2">
+                <a:extLst>
+                  <a:ext uri="{FF2B5EF4-FFF2-40B4-BE49-F238E27FC236}">
+                    <a16:creationId xmlns:a16="http://schemas.microsoft.com/office/drawing/2014/main" id="{8F5456DF-6701-1B36-6F40-82DE65498C00}"/>
+                  </a:ext>
+                </a:extLst>
+              </p:cNvPr>
+              <p:cNvSpPr>
+                <a:spLocks noGrp="1" noRot="1" noChangeAspect="1" noMove="1" noResize="1" noEditPoints="1" noAdjustHandles="1" noChangeArrowheads="1" noChangeShapeType="1" noTextEdit="1"/>
+              </p:cNvSpPr>
+              <p:nvPr>
+                <p:ph idx="1"/>
+              </p:nvPr>
+            </p:nvSpPr>
+            <p:spPr>
+              <a:blipFill>
+                <a:blip r:embed="rId2"/>
+                <a:stretch>
+                  <a:fillRect l="-1206" t="-6686"/>
+                </a:stretch>
+              </a:blipFill>
+            </p:spPr>
+            <p:txBody>
+              <a:bodyPr/>
+              <a:lstStyle/>
+              <a:p>
+                <a:r>
+                  <a:rPr lang="de-DE">
+                    <a:noFill/>
+                  </a:rPr>
+                  <a:t> </a:t>
+                </a:r>
+              </a:p>
+            </p:txBody>
+          </p:sp>
+        </mc:Fallback>
+      </mc:AlternateContent>
+      <p:sp>
+        <p:nvSpPr>
+          <p:cNvPr id="4" name="Foliennummernplatzhalter 3">
+            <a:extLst>
+              <a:ext uri="{FF2B5EF4-FFF2-40B4-BE49-F238E27FC236}">
+                <a16:creationId xmlns:a16="http://schemas.microsoft.com/office/drawing/2014/main" id="{34A1D167-F509-C713-3874-CD31804652C1}"/>
+              </a:ext>
+            </a:extLst>
+          </p:cNvPr>
+          <p:cNvSpPr>
+            <a:spLocks noGrp="1"/>
+          </p:cNvSpPr>
+          <p:nvPr>
+            <p:ph type="sldNum" sz="quarter" idx="12"/>
+          </p:nvPr>
+        </p:nvSpPr>
+        <p:spPr/>
+        <p:txBody>
+          <a:bodyPr/>
+          <a:lstStyle/>
+          <a:p>
+            <a:fld id="{08C366F5-AFAD-49CB-854A-9D9E238FCA13}" type="slidenum">
+              <a:rPr lang="en-GB" smtClean="0"/>
+              <a:t>36</a:t>
+            </a:fld>
+            <a:endParaRPr lang="en-GB"/>
+          </a:p>
+        </p:txBody>
+      </p:sp>
+    </p:spTree>
+    <p:extLst>
+      <p:ext uri="{BB962C8B-B14F-4D97-AF65-F5344CB8AC3E}">
+        <p14:creationId xmlns:p14="http://schemas.microsoft.com/office/powerpoint/2010/main" val="266018624"/>
+      </p:ext>
+    </p:extLst>
+  </p:cSld>
+  <p:clrMapOvr>
+    <a:masterClrMapping/>
+  </p:clrMapOvr>
+</p:sld>
+</file>
+
+<file path=ppt/slides/slide37.xml><?xml version="1.0" encoding="utf-8"?>
+<p:sld xmlns:a="http://schemas.openxmlformats.org/drawingml/2006/main" xmlns:r="http://schemas.openxmlformats.org/officeDocument/2006/relationships" xmlns:p="http://schemas.openxmlformats.org/presentationml/2006/main">
+  <p:cSld>
+    <p:spTree>
+      <p:nvGrpSpPr>
+        <p:cNvPr id="1" name=""/>
+        <p:cNvGrpSpPr/>
+        <p:nvPr/>
+      </p:nvGrpSpPr>
+      <p:grpSpPr>
+        <a:xfrm>
+          <a:off x="0" y="0"/>
+          <a:ext cx="0" cy="0"/>
+          <a:chOff x="0" y="0"/>
+          <a:chExt cx="0" cy="0"/>
+        </a:xfrm>
+      </p:grpSpPr>
+      <p:sp>
+        <p:nvSpPr>
+          <p:cNvPr id="2" name="Titel 1">
+            <a:extLst>
+              <a:ext uri="{FF2B5EF4-FFF2-40B4-BE49-F238E27FC236}">
+                <a16:creationId xmlns:a16="http://schemas.microsoft.com/office/drawing/2014/main" id="{DC97D1B7-F407-EF19-8DA6-F79E26E07B77}"/>
+              </a:ext>
+            </a:extLst>
+          </p:cNvPr>
+          <p:cNvSpPr>
+            <a:spLocks noGrp="1"/>
+          </p:cNvSpPr>
+          <p:nvPr>
+            <p:ph type="title"/>
+          </p:nvPr>
+        </p:nvSpPr>
+        <p:spPr/>
+        <p:txBody>
+          <a:bodyPr/>
+          <a:lstStyle/>
+          <a:p>
+            <a:r>
+              <a:rPr lang="de-DE" dirty="0" err="1"/>
+              <a:t>Why</a:t>
+            </a:r>
+            <a:r>
+              <a:rPr lang="de-DE" dirty="0"/>
+              <a:t> </a:t>
+            </a:r>
+            <a:r>
+              <a:rPr lang="de-DE" dirty="0" err="1"/>
+              <a:t>Discrete</a:t>
+            </a:r>
+            <a:r>
+              <a:rPr lang="de-DE" dirty="0"/>
+              <a:t> PID </a:t>
+            </a:r>
+            <a:r>
+              <a:rPr lang="de-DE" dirty="0" err="1"/>
+              <a:t>is</a:t>
+            </a:r>
+            <a:r>
+              <a:rPr lang="de-DE" dirty="0"/>
+              <a:t> Different</a:t>
+            </a:r>
+          </a:p>
+        </p:txBody>
+      </p:sp>
+      <mc:AlternateContent xmlns:mc="http://schemas.openxmlformats.org/markup-compatibility/2006">
+        <mc:Choice xmlns:a14="http://schemas.microsoft.com/office/drawing/2010/main" Requires="a14">
+          <p:sp>
+            <p:nvSpPr>
+              <p:cNvPr id="3" name="Inhaltsplatzhalter 2">
+                <a:extLst>
+                  <a:ext uri="{FF2B5EF4-FFF2-40B4-BE49-F238E27FC236}">
+                    <a16:creationId xmlns:a16="http://schemas.microsoft.com/office/drawing/2014/main" id="{752C2A3D-7981-8C67-3B45-297C73508168}"/>
+                  </a:ext>
+                </a:extLst>
+              </p:cNvPr>
+              <p:cNvSpPr>
+                <a:spLocks noGrp="1"/>
+              </p:cNvSpPr>
+              <p:nvPr>
+                <p:ph idx="1"/>
+              </p:nvPr>
+            </p:nvSpPr>
+            <p:spPr/>
+            <p:txBody>
+              <a:bodyPr/>
+              <a:lstStyle/>
+              <a:p>
+                <a:pPr marL="0" indent="0">
+                  <a:buNone/>
+                </a:pPr>
+                <a:r>
+                  <a:rPr lang="de-DE" dirty="0"/>
+                  <a:t>Key </a:t>
+                </a:r>
+                <a:r>
+                  <a:rPr lang="de-DE" dirty="0" err="1"/>
+                  <a:t>differences</a:t>
+                </a:r>
+                <a:r>
+                  <a:rPr lang="de-DE" dirty="0"/>
+                  <a:t> </a:t>
+                </a:r>
+                <a:r>
+                  <a:rPr lang="de-DE" dirty="0" err="1"/>
+                  <a:t>from</a:t>
+                </a:r>
+                <a:r>
+                  <a:rPr lang="de-DE" dirty="0"/>
+                  <a:t> </a:t>
+                </a:r>
+                <a:r>
+                  <a:rPr lang="de-DE" dirty="0" err="1"/>
+                  <a:t>continuous</a:t>
+                </a:r>
+                <a:r>
+                  <a:rPr lang="de-DE" dirty="0"/>
+                  <a:t> PID:</a:t>
+                </a:r>
+              </a:p>
+              <a:p>
+                <a:r>
+                  <a:rPr lang="de-DE" dirty="0"/>
+                  <a:t>Signals </a:t>
+                </a:r>
+                <a:r>
+                  <a:rPr lang="de-DE" dirty="0" err="1"/>
+                  <a:t>are</a:t>
+                </a:r>
+                <a:r>
+                  <a:rPr lang="de-DE" dirty="0"/>
+                  <a:t> </a:t>
+                </a:r>
+                <a:r>
+                  <a:rPr lang="de-DE" dirty="0" err="1"/>
+                  <a:t>sampled</a:t>
+                </a:r>
+                <a:r>
+                  <a:rPr lang="de-DE" dirty="0"/>
+                  <a:t>: </a:t>
+                </a:r>
+                <a14:m>
+                  <m:oMath xmlns:m="http://schemas.openxmlformats.org/officeDocument/2006/math">
+                    <m:r>
+                      <a:rPr lang="de-DE" b="0" i="1" smtClean="0">
+                        <a:latin typeface="Cambria Math" panose="02040503050406030204" pitchFamily="18" charset="0"/>
+                      </a:rPr>
+                      <m:t>𝑒</m:t>
+                    </m:r>
+                    <m:d>
+                      <m:dPr>
+                        <m:begChr m:val="["/>
+                        <m:endChr m:val="]"/>
+                        <m:ctrlPr>
+                          <a:rPr lang="de-DE" b="0" i="1" smtClean="0">
+                            <a:latin typeface="Cambria Math" panose="02040503050406030204" pitchFamily="18" charset="0"/>
+                          </a:rPr>
+                        </m:ctrlPr>
+                      </m:dPr>
+                      <m:e>
+                        <m:r>
+                          <a:rPr lang="de-DE" b="0" i="1" smtClean="0">
+                            <a:latin typeface="Cambria Math" panose="02040503050406030204" pitchFamily="18" charset="0"/>
+                          </a:rPr>
+                          <m:t>𝑘</m:t>
+                        </m:r>
+                      </m:e>
+                    </m:d>
+                    <m:r>
+                      <a:rPr lang="de-DE" b="0" i="1" smtClean="0">
+                        <a:latin typeface="Cambria Math" panose="02040503050406030204" pitchFamily="18" charset="0"/>
+                      </a:rPr>
+                      <m:t>=</m:t>
+                    </m:r>
+                    <m:r>
+                      <a:rPr lang="de-DE" b="0" i="1" smtClean="0">
+                        <a:latin typeface="Cambria Math" panose="02040503050406030204" pitchFamily="18" charset="0"/>
+                      </a:rPr>
+                      <m:t>𝑒</m:t>
+                    </m:r>
+                    <m:r>
+                      <a:rPr lang="de-DE" b="0" i="1" smtClean="0">
+                        <a:latin typeface="Cambria Math" panose="02040503050406030204" pitchFamily="18" charset="0"/>
+                      </a:rPr>
+                      <m:t>(</m:t>
+                    </m:r>
+                    <m:r>
+                      <a:rPr lang="de-DE" b="0" i="1" smtClean="0">
+                        <a:latin typeface="Cambria Math" panose="02040503050406030204" pitchFamily="18" charset="0"/>
+                      </a:rPr>
+                      <m:t>𝑘𝑇</m:t>
+                    </m:r>
+                    <m:r>
+                      <a:rPr lang="de-DE" b="0" i="1" smtClean="0">
+                        <a:latin typeface="Cambria Math" panose="02040503050406030204" pitchFamily="18" charset="0"/>
+                      </a:rPr>
+                      <m:t>)</m:t>
+                    </m:r>
+                  </m:oMath>
+                </a14:m>
+                <a:endParaRPr lang="de-DE" dirty="0"/>
+              </a:p>
+              <a:p>
+                <a:r>
+                  <a:rPr lang="de-DE" dirty="0"/>
+                  <a:t>Integration </a:t>
+                </a:r>
+                <a:r>
+                  <a:rPr lang="de-DE" dirty="0" err="1"/>
+                  <a:t>becomes</a:t>
+                </a:r>
+                <a:r>
+                  <a:rPr lang="de-DE" dirty="0"/>
+                  <a:t> </a:t>
+                </a:r>
+                <a:r>
+                  <a:rPr lang="de-DE" dirty="0" err="1"/>
+                  <a:t>summation</a:t>
+                </a:r>
+                <a:endParaRPr lang="de-DE" dirty="0"/>
+              </a:p>
+              <a:p>
+                <a:r>
+                  <a:rPr lang="de-DE" dirty="0"/>
+                  <a:t>Derivative </a:t>
+                </a:r>
+                <a:r>
+                  <a:rPr lang="de-DE" dirty="0" err="1"/>
+                  <a:t>becomes</a:t>
+                </a:r>
+                <a:r>
+                  <a:rPr lang="de-DE" dirty="0"/>
+                  <a:t> </a:t>
+                </a:r>
+                <a:r>
+                  <a:rPr lang="de-DE" dirty="0" err="1"/>
+                  <a:t>difference</a:t>
+                </a:r>
+                <a:endParaRPr lang="de-DE" dirty="0"/>
+              </a:p>
+              <a:p>
+                <a:r>
+                  <a:rPr lang="de-DE" dirty="0" err="1"/>
+                  <a:t>Numerical</a:t>
+                </a:r>
+                <a:r>
+                  <a:rPr lang="de-DE" dirty="0"/>
+                  <a:t> </a:t>
+                </a:r>
+                <a:r>
+                  <a:rPr lang="de-DE" dirty="0" err="1"/>
+                  <a:t>approximation</a:t>
+                </a:r>
+                <a:r>
+                  <a:rPr lang="de-DE" dirty="0"/>
+                  <a:t> </a:t>
+                </a:r>
+                <a:r>
+                  <a:rPr lang="de-DE" dirty="0" err="1"/>
+                  <a:t>required</a:t>
+                </a:r>
+                <a:endParaRPr lang="de-DE" dirty="0"/>
+              </a:p>
+            </p:txBody>
+          </p:sp>
+        </mc:Choice>
+        <mc:Fallback>
+          <p:sp>
+            <p:nvSpPr>
+              <p:cNvPr id="3" name="Inhaltsplatzhalter 2">
+                <a:extLst>
+                  <a:ext uri="{FF2B5EF4-FFF2-40B4-BE49-F238E27FC236}">
+                    <a16:creationId xmlns:a16="http://schemas.microsoft.com/office/drawing/2014/main" id="{752C2A3D-7981-8C67-3B45-297C73508168}"/>
+                  </a:ext>
+                </a:extLst>
+              </p:cNvPr>
+              <p:cNvSpPr>
+                <a:spLocks noGrp="1" noRot="1" noChangeAspect="1" noMove="1" noResize="1" noEditPoints="1" noAdjustHandles="1" noChangeArrowheads="1" noChangeShapeType="1" noTextEdit="1"/>
+              </p:cNvSpPr>
+              <p:nvPr>
+                <p:ph idx="1"/>
+              </p:nvPr>
+            </p:nvSpPr>
+            <p:spPr>
+              <a:blipFill>
+                <a:blip r:embed="rId2"/>
+                <a:stretch>
+                  <a:fillRect l="-1206" t="-2326"/>
+                </a:stretch>
+              </a:blipFill>
+            </p:spPr>
+            <p:txBody>
+              <a:bodyPr/>
+              <a:lstStyle/>
+              <a:p>
+                <a:r>
+                  <a:rPr lang="de-DE">
+                    <a:noFill/>
+                  </a:rPr>
+                  <a:t> </a:t>
+                </a:r>
+              </a:p>
+            </p:txBody>
+          </p:sp>
+        </mc:Fallback>
+      </mc:AlternateContent>
+      <p:sp>
+        <p:nvSpPr>
+          <p:cNvPr id="4" name="Foliennummernplatzhalter 3">
+            <a:extLst>
+              <a:ext uri="{FF2B5EF4-FFF2-40B4-BE49-F238E27FC236}">
+                <a16:creationId xmlns:a16="http://schemas.microsoft.com/office/drawing/2014/main" id="{A8D74D38-3849-86C7-1380-A543C57ADEC6}"/>
+              </a:ext>
+            </a:extLst>
+          </p:cNvPr>
+          <p:cNvSpPr>
+            <a:spLocks noGrp="1"/>
+          </p:cNvSpPr>
+          <p:nvPr>
+            <p:ph type="sldNum" sz="quarter" idx="12"/>
+          </p:nvPr>
+        </p:nvSpPr>
+        <p:spPr/>
+        <p:txBody>
+          <a:bodyPr/>
+          <a:lstStyle/>
+          <a:p>
+            <a:fld id="{08C366F5-AFAD-49CB-854A-9D9E238FCA13}" type="slidenum">
+              <a:rPr lang="en-GB" smtClean="0"/>
+              <a:t>37</a:t>
+            </a:fld>
+            <a:endParaRPr lang="en-GB"/>
+          </a:p>
+        </p:txBody>
+      </p:sp>
+    </p:spTree>
+    <p:extLst>
+      <p:ext uri="{BB962C8B-B14F-4D97-AF65-F5344CB8AC3E}">
+        <p14:creationId xmlns:p14="http://schemas.microsoft.com/office/powerpoint/2010/main" val="2281482200"/>
+      </p:ext>
+    </p:extLst>
+  </p:cSld>
+  <p:clrMapOvr>
+    <a:masterClrMapping/>
+  </p:clrMapOvr>
+</p:sld>
+</file>
+
+<file path=ppt/slides/slide38.xml><?xml version="1.0" encoding="utf-8"?>
+<p:sld xmlns:a="http://schemas.openxmlformats.org/drawingml/2006/main" xmlns:r="http://schemas.openxmlformats.org/officeDocument/2006/relationships" xmlns:p="http://schemas.openxmlformats.org/presentationml/2006/main">
+  <p:cSld>
+    <p:spTree>
+      <p:nvGrpSpPr>
+        <p:cNvPr id="1" name=""/>
+        <p:cNvGrpSpPr/>
+        <p:nvPr/>
+      </p:nvGrpSpPr>
+      <p:grpSpPr>
+        <a:xfrm>
+          <a:off x="0" y="0"/>
+          <a:ext cx="0" cy="0"/>
+          <a:chOff x="0" y="0"/>
+          <a:chExt cx="0" cy="0"/>
+        </a:xfrm>
+      </p:grpSpPr>
+      <p:sp>
+        <p:nvSpPr>
+          <p:cNvPr id="2" name="Titel 1">
+            <a:extLst>
+              <a:ext uri="{FF2B5EF4-FFF2-40B4-BE49-F238E27FC236}">
+                <a16:creationId xmlns:a16="http://schemas.microsoft.com/office/drawing/2014/main" id="{2D3EA822-1872-313C-1FDE-1AF5CF99851E}"/>
+              </a:ext>
+            </a:extLst>
+          </p:cNvPr>
+          <p:cNvSpPr>
+            <a:spLocks noGrp="1"/>
+          </p:cNvSpPr>
+          <p:nvPr>
+            <p:ph type="title"/>
+          </p:nvPr>
+        </p:nvSpPr>
+        <p:spPr/>
+        <p:txBody>
+          <a:bodyPr/>
+          <a:lstStyle/>
+          <a:p>
+            <a:r>
+              <a:rPr lang="de-DE" dirty="0" err="1"/>
+              <a:t>Discrete</a:t>
+            </a:r>
+            <a:r>
+              <a:rPr lang="de-DE" dirty="0"/>
+              <a:t>-Time PID Goal</a:t>
+            </a:r>
+          </a:p>
+        </p:txBody>
+      </p:sp>
+      <mc:AlternateContent xmlns:mc="http://schemas.openxmlformats.org/markup-compatibility/2006">
+        <mc:Choice xmlns:a14="http://schemas.microsoft.com/office/drawing/2010/main" Requires="a14">
+          <p:sp>
+            <p:nvSpPr>
+              <p:cNvPr id="3" name="Inhaltsplatzhalter 2">
+                <a:extLst>
+                  <a:ext uri="{FF2B5EF4-FFF2-40B4-BE49-F238E27FC236}">
+                    <a16:creationId xmlns:a16="http://schemas.microsoft.com/office/drawing/2014/main" id="{E4EE34C3-6427-614D-303E-E101FEFEAB5B}"/>
+                  </a:ext>
+                </a:extLst>
+              </p:cNvPr>
+              <p:cNvSpPr>
+                <a:spLocks noGrp="1"/>
+              </p:cNvSpPr>
+              <p:nvPr>
+                <p:ph idx="1"/>
+              </p:nvPr>
+            </p:nvSpPr>
+            <p:spPr/>
+            <p:txBody>
+              <a:bodyPr/>
+              <a:lstStyle/>
+              <a:p>
+                <a:pPr marL="0" indent="0">
+                  <a:buNone/>
+                </a:pPr>
+                <a:r>
+                  <a:rPr lang="de-DE" dirty="0"/>
+                  <a:t>Goal:</a:t>
+                </a:r>
+              </a:p>
+              <a:p>
+                <a:pPr marL="0" indent="0">
+                  <a:buNone/>
+                </a:pPr>
+                <a14:m>
+                  <m:oMath xmlns:m="http://schemas.openxmlformats.org/officeDocument/2006/math">
+                    <m:r>
+                      <a:rPr lang="de-DE" b="0" i="1" smtClean="0">
+                        <a:latin typeface="Cambria Math" panose="02040503050406030204" pitchFamily="18" charset="0"/>
+                      </a:rPr>
+                      <m:t>𝑢</m:t>
+                    </m:r>
+                    <m:d>
+                      <m:dPr>
+                        <m:begChr m:val="["/>
+                        <m:endChr m:val="]"/>
+                        <m:ctrlPr>
+                          <a:rPr lang="de-DE" b="0" i="1" smtClean="0">
+                            <a:latin typeface="Cambria Math" panose="02040503050406030204" pitchFamily="18" charset="0"/>
+                          </a:rPr>
+                        </m:ctrlPr>
+                      </m:dPr>
+                      <m:e>
+                        <m:r>
+                          <a:rPr lang="de-DE" b="0" i="1" smtClean="0">
+                            <a:latin typeface="Cambria Math" panose="02040503050406030204" pitchFamily="18" charset="0"/>
+                          </a:rPr>
+                          <m:t>𝑘</m:t>
+                        </m:r>
+                      </m:e>
+                    </m:d>
+                    <m:r>
+                      <a:rPr lang="de-DE" b="0" i="1" smtClean="0">
+                        <a:latin typeface="Cambria Math" panose="02040503050406030204" pitchFamily="18" charset="0"/>
+                      </a:rPr>
+                      <m:t>=</m:t>
+                    </m:r>
+                  </m:oMath>
+                </a14:m>
+                <a:r>
+                  <a:rPr lang="de-DE" dirty="0"/>
+                  <a:t> </a:t>
+                </a:r>
+                <a:r>
+                  <a:rPr lang="de-DE" dirty="0" err="1"/>
+                  <a:t>function</a:t>
+                </a:r>
+                <a:r>
+                  <a:rPr lang="de-DE" dirty="0"/>
+                  <a:t> </a:t>
+                </a:r>
+                <a:r>
+                  <a:rPr lang="de-DE" dirty="0" err="1"/>
+                  <a:t>of</a:t>
+                </a:r>
+                <a:r>
+                  <a:rPr lang="de-DE" dirty="0"/>
+                  <a:t> </a:t>
+                </a:r>
+                <a14:m>
+                  <m:oMath xmlns:m="http://schemas.openxmlformats.org/officeDocument/2006/math">
+                    <m:r>
+                      <a:rPr lang="de-DE" b="0" i="1" smtClean="0">
+                        <a:latin typeface="Cambria Math" panose="02040503050406030204" pitchFamily="18" charset="0"/>
+                      </a:rPr>
+                      <m:t>𝑒</m:t>
+                    </m:r>
+                    <m:d>
+                      <m:dPr>
+                        <m:begChr m:val="["/>
+                        <m:endChr m:val="]"/>
+                        <m:ctrlPr>
+                          <a:rPr lang="de-DE" b="0" i="1" smtClean="0">
+                            <a:latin typeface="Cambria Math" panose="02040503050406030204" pitchFamily="18" charset="0"/>
+                          </a:rPr>
+                        </m:ctrlPr>
+                      </m:dPr>
+                      <m:e>
+                        <m:r>
+                          <a:rPr lang="de-DE" b="0" i="1" smtClean="0">
+                            <a:latin typeface="Cambria Math" panose="02040503050406030204" pitchFamily="18" charset="0"/>
+                          </a:rPr>
+                          <m:t>𝑘</m:t>
+                        </m:r>
+                      </m:e>
+                    </m:d>
+                    <m:r>
+                      <a:rPr lang="de-DE" i="1">
+                        <a:latin typeface="Cambria Math" panose="02040503050406030204" pitchFamily="18" charset="0"/>
+                      </a:rPr>
+                      <m:t>,</m:t>
+                    </m:r>
+                    <m:r>
+                      <a:rPr lang="de-DE" i="1">
+                        <a:latin typeface="Cambria Math" panose="02040503050406030204" pitchFamily="18" charset="0"/>
+                      </a:rPr>
+                      <m:t>𝑒</m:t>
+                    </m:r>
+                    <m:d>
+                      <m:dPr>
+                        <m:begChr m:val="["/>
+                        <m:endChr m:val="]"/>
+                        <m:ctrlPr>
+                          <a:rPr lang="de-DE" i="1">
+                            <a:latin typeface="Cambria Math" panose="02040503050406030204" pitchFamily="18" charset="0"/>
+                          </a:rPr>
+                        </m:ctrlPr>
+                      </m:dPr>
+                      <m:e>
+                        <m:r>
+                          <a:rPr lang="de-DE" i="1">
+                            <a:latin typeface="Cambria Math" panose="02040503050406030204" pitchFamily="18" charset="0"/>
+                          </a:rPr>
+                          <m:t>𝑘</m:t>
+                        </m:r>
+                        <m:r>
+                          <a:rPr lang="de-DE" b="0" i="1" smtClean="0">
+                            <a:latin typeface="Cambria Math" panose="02040503050406030204" pitchFamily="18" charset="0"/>
+                          </a:rPr>
+                          <m:t>−1</m:t>
+                        </m:r>
+                      </m:e>
+                    </m:d>
+                    <m:r>
+                      <a:rPr lang="de-DE" b="0" i="1" smtClean="0">
+                        <a:latin typeface="Cambria Math" panose="02040503050406030204" pitchFamily="18" charset="0"/>
+                      </a:rPr>
+                      <m:t>,</m:t>
+                    </m:r>
+                    <m:r>
+                      <a:rPr lang="de-DE" i="1">
+                        <a:latin typeface="Cambria Math" panose="02040503050406030204" pitchFamily="18" charset="0"/>
+                      </a:rPr>
+                      <m:t>𝑒</m:t>
+                    </m:r>
+                    <m:d>
+                      <m:dPr>
+                        <m:begChr m:val="["/>
+                        <m:endChr m:val="]"/>
+                        <m:ctrlPr>
+                          <a:rPr lang="de-DE" i="1">
+                            <a:latin typeface="Cambria Math" panose="02040503050406030204" pitchFamily="18" charset="0"/>
+                          </a:rPr>
+                        </m:ctrlPr>
+                      </m:dPr>
+                      <m:e>
+                        <m:r>
+                          <a:rPr lang="de-DE" i="1">
+                            <a:latin typeface="Cambria Math" panose="02040503050406030204" pitchFamily="18" charset="0"/>
+                          </a:rPr>
+                          <m:t>𝑘</m:t>
+                        </m:r>
+                        <m:r>
+                          <a:rPr lang="de-DE" b="0" i="1" smtClean="0">
+                            <a:latin typeface="Cambria Math" panose="02040503050406030204" pitchFamily="18" charset="0"/>
+                          </a:rPr>
+                          <m:t>−2</m:t>
+                        </m:r>
+                      </m:e>
+                    </m:d>
+                    <m:r>
+                      <a:rPr lang="de-DE" b="0" i="1" smtClean="0">
+                        <a:latin typeface="Cambria Math" panose="02040503050406030204" pitchFamily="18" charset="0"/>
+                      </a:rPr>
+                      <m:t>, …</m:t>
+                    </m:r>
+                  </m:oMath>
+                </a14:m>
+                <a:endParaRPr lang="de-DE" dirty="0"/>
+              </a:p>
+              <a:p>
+                <a:pPr marL="0" indent="0">
+                  <a:buNone/>
+                </a:pPr>
+                <a:endParaRPr lang="de-DE" dirty="0"/>
+              </a:p>
+              <a:p>
+                <a:pPr marL="0" indent="0">
+                  <a:buNone/>
+                </a:pPr>
+                <a:r>
+                  <a:rPr lang="de-DE" dirty="0" err="1"/>
+                  <a:t>Two</a:t>
+                </a:r>
+                <a:r>
+                  <a:rPr lang="de-DE" dirty="0"/>
+                  <a:t> </a:t>
+                </a:r>
+                <a:r>
+                  <a:rPr lang="de-DE" dirty="0" err="1"/>
+                  <a:t>main</a:t>
+                </a:r>
+                <a:r>
+                  <a:rPr lang="de-DE" dirty="0"/>
+                  <a:t> </a:t>
+                </a:r>
+                <a:r>
+                  <a:rPr lang="de-DE" dirty="0" err="1"/>
+                  <a:t>forms</a:t>
+                </a:r>
+                <a:r>
+                  <a:rPr lang="de-DE" dirty="0"/>
+                  <a:t>:</a:t>
+                </a:r>
+              </a:p>
+              <a:p>
+                <a:r>
+                  <a:rPr lang="de-DE" dirty="0"/>
+                  <a:t>Position form</a:t>
+                </a:r>
+              </a:p>
+              <a:p>
+                <a:r>
+                  <a:rPr lang="de-DE" dirty="0"/>
+                  <a:t>Velocity (</a:t>
+                </a:r>
+                <a:r>
+                  <a:rPr lang="de-DE" dirty="0" err="1"/>
+                  <a:t>incremental</a:t>
+                </a:r>
+                <a:r>
+                  <a:rPr lang="de-DE" dirty="0"/>
+                  <a:t>) form</a:t>
+                </a:r>
+              </a:p>
+            </p:txBody>
+          </p:sp>
+        </mc:Choice>
+        <mc:Fallback>
+          <p:sp>
+            <p:nvSpPr>
+              <p:cNvPr id="3" name="Inhaltsplatzhalter 2">
+                <a:extLst>
+                  <a:ext uri="{FF2B5EF4-FFF2-40B4-BE49-F238E27FC236}">
+                    <a16:creationId xmlns:a16="http://schemas.microsoft.com/office/drawing/2014/main" id="{E4EE34C3-6427-614D-303E-E101FEFEAB5B}"/>
+                  </a:ext>
+                </a:extLst>
+              </p:cNvPr>
+              <p:cNvSpPr>
+                <a:spLocks noGrp="1" noRot="1" noChangeAspect="1" noMove="1" noResize="1" noEditPoints="1" noAdjustHandles="1" noChangeArrowheads="1" noChangeShapeType="1" noTextEdit="1"/>
+              </p:cNvSpPr>
+              <p:nvPr>
+                <p:ph idx="1"/>
+              </p:nvPr>
+            </p:nvSpPr>
+            <p:spPr>
+              <a:blipFill>
+                <a:blip r:embed="rId2"/>
+                <a:stretch>
+                  <a:fillRect l="-1206" t="-2326"/>
+                </a:stretch>
+              </a:blipFill>
+            </p:spPr>
+            <p:txBody>
+              <a:bodyPr/>
+              <a:lstStyle/>
+              <a:p>
+                <a:r>
+                  <a:rPr lang="de-DE">
+                    <a:noFill/>
+                  </a:rPr>
+                  <a:t> </a:t>
+                </a:r>
+              </a:p>
+            </p:txBody>
+          </p:sp>
+        </mc:Fallback>
+      </mc:AlternateContent>
+      <p:sp>
+        <p:nvSpPr>
+          <p:cNvPr id="4" name="Foliennummernplatzhalter 3">
+            <a:extLst>
+              <a:ext uri="{FF2B5EF4-FFF2-40B4-BE49-F238E27FC236}">
+                <a16:creationId xmlns:a16="http://schemas.microsoft.com/office/drawing/2014/main" id="{736231E0-3954-F05D-0A6C-F8F01344E392}"/>
+              </a:ext>
+            </a:extLst>
+          </p:cNvPr>
+          <p:cNvSpPr>
+            <a:spLocks noGrp="1"/>
+          </p:cNvSpPr>
+          <p:nvPr>
+            <p:ph type="sldNum" sz="quarter" idx="12"/>
+          </p:nvPr>
+        </p:nvSpPr>
+        <p:spPr/>
+        <p:txBody>
+          <a:bodyPr/>
+          <a:lstStyle/>
+          <a:p>
+            <a:fld id="{08C366F5-AFAD-49CB-854A-9D9E238FCA13}" type="slidenum">
+              <a:rPr lang="en-GB" smtClean="0"/>
+              <a:t>38</a:t>
+            </a:fld>
+            <a:endParaRPr lang="en-GB"/>
+          </a:p>
+        </p:txBody>
+      </p:sp>
+    </p:spTree>
+    <p:extLst>
+      <p:ext uri="{BB962C8B-B14F-4D97-AF65-F5344CB8AC3E}">
+        <p14:creationId xmlns:p14="http://schemas.microsoft.com/office/powerpoint/2010/main" val="3628429894"/>
       </p:ext>
     </p:extLst>
   </p:cSld>
@@ -17933,7 +21511,7 @@
           <p:cNvPr id="2" name="Titel 1">
             <a:extLst>
               <a:ext uri="{FF2B5EF4-FFF2-40B4-BE49-F238E27FC236}">
-                <a16:creationId xmlns:a16="http://schemas.microsoft.com/office/drawing/2014/main" id="{0FE57CB0-68EE-10C7-5453-73406DEF5701}"/>
+                <a16:creationId xmlns:a16="http://schemas.microsoft.com/office/drawing/2014/main" id="{6C208CCB-605E-513B-1BC3-36C369993B8C}"/>
               </a:ext>
             </a:extLst>
           </p:cNvPr>
@@ -17949,7 +21527,10 @@
           <a:bodyPr/>
           <a:lstStyle/>
           <a:p>
-            <a:endParaRPr lang="de-DE"/>
+            <a:r>
+              <a:rPr lang="de-DE" dirty="0"/>
+              <a:t>Summary</a:t>
+            </a:r>
           </a:p>
         </p:txBody>
       </p:sp>
@@ -17958,7 +21539,7 @@
           <p:cNvPr id="3" name="Inhaltsplatzhalter 2">
             <a:extLst>
               <a:ext uri="{FF2B5EF4-FFF2-40B4-BE49-F238E27FC236}">
-                <a16:creationId xmlns:a16="http://schemas.microsoft.com/office/drawing/2014/main" id="{D2ABE800-372C-8D4C-9A1B-E3DEA80268FF}"/>
+                <a16:creationId xmlns:a16="http://schemas.microsoft.com/office/drawing/2014/main" id="{717F2BDD-E451-7A8E-F095-CE64538B4F58}"/>
               </a:ext>
             </a:extLst>
           </p:cNvPr>
@@ -17974,7 +21555,147 @@
           <a:bodyPr/>
           <a:lstStyle/>
           <a:p>
-            <a:endParaRPr lang="de-DE"/>
+            <a:r>
+              <a:rPr lang="de-DE" dirty="0"/>
+              <a:t>Digital </a:t>
+            </a:r>
+            <a:r>
+              <a:rPr lang="de-DE" dirty="0" err="1"/>
+              <a:t>control</a:t>
+            </a:r>
+            <a:r>
+              <a:rPr lang="de-DE" dirty="0"/>
+              <a:t> </a:t>
+            </a:r>
+            <a:r>
+              <a:rPr lang="de-DE" dirty="0" err="1"/>
+              <a:t>is</a:t>
+            </a:r>
+            <a:r>
+              <a:rPr lang="de-DE" dirty="0"/>
+              <a:t> essential in modern </a:t>
+            </a:r>
+            <a:r>
+              <a:rPr lang="de-DE" dirty="0" err="1"/>
+              <a:t>systems</a:t>
+            </a:r>
+            <a:endParaRPr lang="de-DE" dirty="0"/>
+          </a:p>
+          <a:p>
+            <a:r>
+              <a:rPr lang="de-DE" dirty="0"/>
+              <a:t>Sampling </a:t>
+            </a:r>
+            <a:r>
+              <a:rPr lang="de-DE" dirty="0" err="1"/>
+              <a:t>introduces</a:t>
+            </a:r>
+            <a:r>
+              <a:rPr lang="de-DE" dirty="0"/>
+              <a:t> </a:t>
+            </a:r>
+            <a:r>
+              <a:rPr lang="de-DE" dirty="0" err="1"/>
+              <a:t>constraints</a:t>
+            </a:r>
+            <a:endParaRPr lang="de-DE" dirty="0"/>
+          </a:p>
+          <a:p>
+            <a:r>
+              <a:rPr lang="de-DE" dirty="0"/>
+              <a:t>ZOH </a:t>
+            </a:r>
+            <a:r>
+              <a:rPr lang="de-DE" dirty="0" err="1"/>
+              <a:t>connects</a:t>
+            </a:r>
+            <a:r>
+              <a:rPr lang="de-DE" dirty="0"/>
+              <a:t> </a:t>
+            </a:r>
+            <a:r>
+              <a:rPr lang="de-DE" dirty="0" err="1"/>
+              <a:t>discrete</a:t>
+            </a:r>
+            <a:r>
+              <a:rPr lang="de-DE" dirty="0"/>
+              <a:t> and </a:t>
+            </a:r>
+            <a:r>
+              <a:rPr lang="de-DE" dirty="0" err="1"/>
+              <a:t>continuous</a:t>
+            </a:r>
+            <a:r>
+              <a:rPr lang="de-DE" dirty="0"/>
+              <a:t> </a:t>
+            </a:r>
+            <a:r>
+              <a:rPr lang="de-DE" dirty="0" err="1"/>
+              <a:t>worlds</a:t>
+            </a:r>
+            <a:endParaRPr lang="de-DE" dirty="0"/>
+          </a:p>
+          <a:p>
+            <a:r>
+              <a:rPr lang="de-DE" dirty="0" err="1"/>
+              <a:t>z-transform</a:t>
+            </a:r>
+            <a:r>
+              <a:rPr lang="de-DE" dirty="0"/>
+              <a:t> </a:t>
+            </a:r>
+            <a:r>
+              <a:rPr lang="de-DE" dirty="0" err="1"/>
+              <a:t>is</a:t>
+            </a:r>
+            <a:r>
+              <a:rPr lang="de-DE" dirty="0"/>
+              <a:t> </a:t>
+            </a:r>
+            <a:r>
+              <a:rPr lang="de-DE" dirty="0" err="1"/>
+              <a:t>key</a:t>
+            </a:r>
+            <a:r>
+              <a:rPr lang="de-DE" dirty="0"/>
+              <a:t> </a:t>
+            </a:r>
+            <a:r>
+              <a:rPr lang="de-DE" dirty="0" err="1"/>
+              <a:t>analysis</a:t>
+            </a:r>
+            <a:r>
+              <a:rPr lang="de-DE" dirty="0"/>
+              <a:t> </a:t>
+            </a:r>
+            <a:r>
+              <a:rPr lang="de-DE" dirty="0" err="1"/>
+              <a:t>tool</a:t>
+            </a:r>
+            <a:endParaRPr lang="de-DE" dirty="0"/>
+          </a:p>
+          <a:p>
+            <a:r>
+              <a:rPr lang="de-DE" dirty="0" err="1"/>
+              <a:t>Discretization</a:t>
+            </a:r>
+            <a:r>
+              <a:rPr lang="de-DE" dirty="0"/>
+              <a:t> </a:t>
+            </a:r>
+            <a:r>
+              <a:rPr lang="de-DE" dirty="0" err="1"/>
+              <a:t>method</a:t>
+            </a:r>
+            <a:r>
+              <a:rPr lang="de-DE" dirty="0"/>
+              <a:t> </a:t>
+            </a:r>
+            <a:r>
+              <a:rPr lang="de-DE" dirty="0" err="1"/>
+              <a:t>matters</a:t>
+            </a:r>
+            <a:endParaRPr lang="de-DE" dirty="0"/>
           </a:p>
         </p:txBody>
       </p:sp>
@@ -17983,7 +21704,7 @@
           <p:cNvPr id="4" name="Foliennummernplatzhalter 3">
             <a:extLst>
               <a:ext uri="{FF2B5EF4-FFF2-40B4-BE49-F238E27FC236}">
-                <a16:creationId xmlns:a16="http://schemas.microsoft.com/office/drawing/2014/main" id="{AC57B4AE-55A5-192B-142D-941AA068807B}"/>
+                <a16:creationId xmlns:a16="http://schemas.microsoft.com/office/drawing/2014/main" id="{FA27C285-2CA8-7C1D-7B48-526D96B9D6D1}"/>
               </a:ext>
             </a:extLst>
           </p:cNvPr>
@@ -18010,7 +21731,7 @@
     </p:spTree>
     <p:extLst>
       <p:ext uri="{BB962C8B-B14F-4D97-AF65-F5344CB8AC3E}">
-        <p14:creationId xmlns:p14="http://schemas.microsoft.com/office/powerpoint/2010/main" val="4081185293"/>
+        <p14:creationId xmlns:p14="http://schemas.microsoft.com/office/powerpoint/2010/main" val="4139900114"/>
       </p:ext>
     </p:extLst>
   </p:cSld>
@@ -18307,1156 +22028,6 @@
     <p:extLst>
       <p:ext uri="{BB962C8B-B14F-4D97-AF65-F5344CB8AC3E}">
         <p14:creationId xmlns:p14="http://schemas.microsoft.com/office/powerpoint/2010/main" val="2270854930"/>
-      </p:ext>
-    </p:extLst>
-  </p:cSld>
-  <p:clrMapOvr>
-    <a:masterClrMapping/>
-  </p:clrMapOvr>
-</p:sld>
-</file>
-
-<file path=ppt/slides/slide40.xml><?xml version="1.0" encoding="utf-8"?>
-<p:sld xmlns:a="http://schemas.openxmlformats.org/drawingml/2006/main" xmlns:r="http://schemas.openxmlformats.org/officeDocument/2006/relationships" xmlns:p="http://schemas.openxmlformats.org/presentationml/2006/main">
-  <p:cSld>
-    <p:spTree>
-      <p:nvGrpSpPr>
-        <p:cNvPr id="1" name=""/>
-        <p:cNvGrpSpPr/>
-        <p:nvPr/>
-      </p:nvGrpSpPr>
-      <p:grpSpPr>
-        <a:xfrm>
-          <a:off x="0" y="0"/>
-          <a:ext cx="0" cy="0"/>
-          <a:chOff x="0" y="0"/>
-          <a:chExt cx="0" cy="0"/>
-        </a:xfrm>
-      </p:grpSpPr>
-      <p:sp>
-        <p:nvSpPr>
-          <p:cNvPr id="2" name="Titel 1">
-            <a:extLst>
-              <a:ext uri="{FF2B5EF4-FFF2-40B4-BE49-F238E27FC236}">
-                <a16:creationId xmlns:a16="http://schemas.microsoft.com/office/drawing/2014/main" id="{0928A614-DFBF-9C8B-344A-5180371F0262}"/>
-              </a:ext>
-            </a:extLst>
-          </p:cNvPr>
-          <p:cNvSpPr>
-            <a:spLocks noGrp="1"/>
-          </p:cNvSpPr>
-          <p:nvPr>
-            <p:ph type="title"/>
-          </p:nvPr>
-        </p:nvSpPr>
-        <p:spPr/>
-        <p:txBody>
-          <a:bodyPr/>
-          <a:lstStyle/>
-          <a:p>
-            <a:r>
-              <a:rPr lang="de-DE" dirty="0" err="1"/>
-              <a:t>Discrete</a:t>
-            </a:r>
-            <a:r>
-              <a:rPr lang="de-DE" dirty="0"/>
-              <a:t>-Time PID Tuning</a:t>
-            </a:r>
-          </a:p>
-        </p:txBody>
-      </p:sp>
-      <p:sp>
-        <p:nvSpPr>
-          <p:cNvPr id="3" name="Inhaltsplatzhalter 2">
-            <a:extLst>
-              <a:ext uri="{FF2B5EF4-FFF2-40B4-BE49-F238E27FC236}">
-                <a16:creationId xmlns:a16="http://schemas.microsoft.com/office/drawing/2014/main" id="{8F5456DF-6701-1B36-6F40-82DE65498C00}"/>
-              </a:ext>
-            </a:extLst>
-          </p:cNvPr>
-          <p:cNvSpPr>
-            <a:spLocks noGrp="1"/>
-          </p:cNvSpPr>
-          <p:nvPr>
-            <p:ph idx="1"/>
-          </p:nvPr>
-        </p:nvSpPr>
-        <p:spPr/>
-        <p:txBody>
-          <a:bodyPr/>
-          <a:lstStyle/>
-          <a:p>
-            <a:r>
-              <a:rPr lang="de-DE" dirty="0"/>
-              <a:t>PID </a:t>
-            </a:r>
-            <a:r>
-              <a:rPr lang="de-DE" dirty="0" err="1"/>
-              <a:t>controller</a:t>
-            </a:r>
-            <a:r>
-              <a:rPr lang="de-DE" dirty="0"/>
-              <a:t> (</a:t>
-            </a:r>
-            <a:r>
-              <a:rPr lang="de-DE" dirty="0" err="1"/>
-              <a:t>continuous</a:t>
-            </a:r>
-            <a:r>
-              <a:rPr lang="de-DE" dirty="0"/>
-              <a:t>-time):</a:t>
-            </a:r>
-          </a:p>
-          <a:p>
-            <a:r>
-              <a:rPr lang="de-DE" dirty="0" err="1"/>
-              <a:t>u</a:t>
-            </a:r>
-            <a:r>
-              <a:rPr lang="de-DE" dirty="0"/>
-              <a:t>(t) = </a:t>
-            </a:r>
-            <a:r>
-              <a:rPr lang="de-DE" dirty="0" err="1"/>
-              <a:t>K_p</a:t>
-            </a:r>
-            <a:r>
-              <a:rPr lang="de-DE" dirty="0"/>
-              <a:t> </a:t>
-            </a:r>
-            <a:r>
-              <a:rPr lang="de-DE" dirty="0" err="1"/>
-              <a:t>e</a:t>
-            </a:r>
-            <a:r>
-              <a:rPr lang="de-DE" dirty="0"/>
-              <a:t>(t) + </a:t>
-            </a:r>
-            <a:r>
-              <a:rPr lang="de-DE" dirty="0" err="1"/>
-              <a:t>K_i</a:t>
-            </a:r>
-            <a:r>
-              <a:rPr lang="de-DE" dirty="0"/>
-              <a:t> \</a:t>
-            </a:r>
-            <a:r>
-              <a:rPr lang="de-DE" dirty="0" err="1"/>
-              <a:t>int</a:t>
-            </a:r>
-            <a:r>
-              <a:rPr lang="de-DE" dirty="0"/>
-              <a:t> </a:t>
-            </a:r>
-            <a:r>
-              <a:rPr lang="de-DE" dirty="0" err="1"/>
-              <a:t>e</a:t>
-            </a:r>
-            <a:r>
-              <a:rPr lang="de-DE" dirty="0"/>
-              <a:t>(t)\,</a:t>
-            </a:r>
-            <a:r>
-              <a:rPr lang="de-DE" dirty="0" err="1"/>
-              <a:t>dt</a:t>
-            </a:r>
-            <a:r>
-              <a:rPr lang="de-DE" dirty="0"/>
-              <a:t> + </a:t>
-            </a:r>
-            <a:r>
-              <a:rPr lang="de-DE" dirty="0" err="1"/>
-              <a:t>K_d</a:t>
-            </a:r>
-            <a:r>
-              <a:rPr lang="de-DE" dirty="0"/>
-              <a:t> \</a:t>
-            </a:r>
-            <a:r>
-              <a:rPr lang="de-DE" dirty="0" err="1"/>
-              <a:t>frac</a:t>
-            </a:r>
-            <a:r>
-              <a:rPr lang="de-DE" dirty="0"/>
-              <a:t>{de(t)}{</a:t>
-            </a:r>
-            <a:r>
-              <a:rPr lang="de-DE" dirty="0" err="1"/>
-              <a:t>dt</a:t>
-            </a:r>
-            <a:r>
-              <a:rPr lang="de-DE" dirty="0"/>
-              <a:t>}</a:t>
-            </a:r>
-          </a:p>
-          <a:p>
-            <a:br>
-              <a:rPr lang="de-DE" dirty="0"/>
-            </a:br>
-            <a:endParaRPr lang="de-DE" dirty="0"/>
-          </a:p>
-          <a:p>
-            <a:r>
-              <a:rPr lang="de-DE" dirty="0"/>
-              <a:t>Goal:</a:t>
-            </a:r>
-          </a:p>
-          <a:p>
-            <a:r>
-              <a:rPr lang="de-DE" dirty="0"/>
-              <a:t>→ Implement </a:t>
-            </a:r>
-            <a:r>
-              <a:rPr lang="de-DE" dirty="0" err="1"/>
-              <a:t>this</a:t>
-            </a:r>
-            <a:r>
-              <a:rPr lang="de-DE" dirty="0"/>
-              <a:t> in </a:t>
-            </a:r>
-            <a:r>
-              <a:rPr lang="de-DE" dirty="0" err="1"/>
-              <a:t>discrete</a:t>
-            </a:r>
-            <a:r>
-              <a:rPr lang="de-DE" dirty="0"/>
-              <a:t>-time</a:t>
-            </a:r>
-          </a:p>
-        </p:txBody>
-      </p:sp>
-      <p:sp>
-        <p:nvSpPr>
-          <p:cNvPr id="4" name="Foliennummernplatzhalter 3">
-            <a:extLst>
-              <a:ext uri="{FF2B5EF4-FFF2-40B4-BE49-F238E27FC236}">
-                <a16:creationId xmlns:a16="http://schemas.microsoft.com/office/drawing/2014/main" id="{34A1D167-F509-C713-3874-CD31804652C1}"/>
-              </a:ext>
-            </a:extLst>
-          </p:cNvPr>
-          <p:cNvSpPr>
-            <a:spLocks noGrp="1"/>
-          </p:cNvSpPr>
-          <p:nvPr>
-            <p:ph type="sldNum" sz="quarter" idx="12"/>
-          </p:nvPr>
-        </p:nvSpPr>
-        <p:spPr/>
-        <p:txBody>
-          <a:bodyPr/>
-          <a:lstStyle/>
-          <a:p>
-            <a:fld id="{08C366F5-AFAD-49CB-854A-9D9E238FCA13}" type="slidenum">
-              <a:rPr lang="en-GB" smtClean="0"/>
-              <a:t>40</a:t>
-            </a:fld>
-            <a:endParaRPr lang="en-GB"/>
-          </a:p>
-        </p:txBody>
-      </p:sp>
-    </p:spTree>
-    <p:extLst>
-      <p:ext uri="{BB962C8B-B14F-4D97-AF65-F5344CB8AC3E}">
-        <p14:creationId xmlns:p14="http://schemas.microsoft.com/office/powerpoint/2010/main" val="266018624"/>
-      </p:ext>
-    </p:extLst>
-  </p:cSld>
-  <p:clrMapOvr>
-    <a:masterClrMapping/>
-  </p:clrMapOvr>
-</p:sld>
-</file>
-
-<file path=ppt/slides/slide41.xml><?xml version="1.0" encoding="utf-8"?>
-<p:sld xmlns:a="http://schemas.openxmlformats.org/drawingml/2006/main" xmlns:r="http://schemas.openxmlformats.org/officeDocument/2006/relationships" xmlns:p="http://schemas.openxmlformats.org/presentationml/2006/main">
-  <p:cSld>
-    <p:spTree>
-      <p:nvGrpSpPr>
-        <p:cNvPr id="1" name=""/>
-        <p:cNvGrpSpPr/>
-        <p:nvPr/>
-      </p:nvGrpSpPr>
-      <p:grpSpPr>
-        <a:xfrm>
-          <a:off x="0" y="0"/>
-          <a:ext cx="0" cy="0"/>
-          <a:chOff x="0" y="0"/>
-          <a:chExt cx="0" cy="0"/>
-        </a:xfrm>
-      </p:grpSpPr>
-      <p:sp>
-        <p:nvSpPr>
-          <p:cNvPr id="2" name="Titel 1">
-            <a:extLst>
-              <a:ext uri="{FF2B5EF4-FFF2-40B4-BE49-F238E27FC236}">
-                <a16:creationId xmlns:a16="http://schemas.microsoft.com/office/drawing/2014/main" id="{DC97D1B7-F407-EF19-8DA6-F79E26E07B77}"/>
-              </a:ext>
-            </a:extLst>
-          </p:cNvPr>
-          <p:cNvSpPr>
-            <a:spLocks noGrp="1"/>
-          </p:cNvSpPr>
-          <p:nvPr>
-            <p:ph type="title"/>
-          </p:nvPr>
-        </p:nvSpPr>
-        <p:spPr/>
-        <p:txBody>
-          <a:bodyPr/>
-          <a:lstStyle/>
-          <a:p>
-            <a:r>
-              <a:rPr lang="de-DE" dirty="0" err="1"/>
-              <a:t>Why</a:t>
-            </a:r>
-            <a:r>
-              <a:rPr lang="de-DE" dirty="0"/>
-              <a:t> </a:t>
-            </a:r>
-            <a:r>
-              <a:rPr lang="de-DE" dirty="0" err="1"/>
-              <a:t>Discrete</a:t>
-            </a:r>
-            <a:r>
-              <a:rPr lang="de-DE" dirty="0"/>
-              <a:t> PID </a:t>
-            </a:r>
-            <a:r>
-              <a:rPr lang="de-DE" dirty="0" err="1"/>
-              <a:t>is</a:t>
-            </a:r>
-            <a:r>
-              <a:rPr lang="de-DE" dirty="0"/>
-              <a:t> Different</a:t>
-            </a:r>
-          </a:p>
-        </p:txBody>
-      </p:sp>
-      <p:sp>
-        <p:nvSpPr>
-          <p:cNvPr id="3" name="Inhaltsplatzhalter 2">
-            <a:extLst>
-              <a:ext uri="{FF2B5EF4-FFF2-40B4-BE49-F238E27FC236}">
-                <a16:creationId xmlns:a16="http://schemas.microsoft.com/office/drawing/2014/main" id="{752C2A3D-7981-8C67-3B45-297C73508168}"/>
-              </a:ext>
-            </a:extLst>
-          </p:cNvPr>
-          <p:cNvSpPr>
-            <a:spLocks noGrp="1"/>
-          </p:cNvSpPr>
-          <p:nvPr>
-            <p:ph idx="1"/>
-          </p:nvPr>
-        </p:nvSpPr>
-        <p:spPr/>
-        <p:txBody>
-          <a:bodyPr/>
-          <a:lstStyle/>
-          <a:p>
-            <a:r>
-              <a:rPr lang="de-DE" dirty="0"/>
-              <a:t>Key </a:t>
-            </a:r>
-            <a:r>
-              <a:rPr lang="de-DE" dirty="0" err="1"/>
-              <a:t>differences</a:t>
-            </a:r>
-            <a:r>
-              <a:rPr lang="de-DE" dirty="0"/>
-              <a:t> </a:t>
-            </a:r>
-            <a:r>
-              <a:rPr lang="de-DE" dirty="0" err="1"/>
-              <a:t>from</a:t>
-            </a:r>
-            <a:r>
-              <a:rPr lang="de-DE" dirty="0"/>
-              <a:t> </a:t>
-            </a:r>
-            <a:r>
-              <a:rPr lang="de-DE" dirty="0" err="1"/>
-              <a:t>continuous</a:t>
-            </a:r>
-            <a:r>
-              <a:rPr lang="de-DE" dirty="0"/>
-              <a:t> PID:</a:t>
-            </a:r>
-          </a:p>
-          <a:p>
-            <a:r>
-              <a:rPr lang="de-DE" dirty="0"/>
-              <a:t>Signals </a:t>
-            </a:r>
-            <a:r>
-              <a:rPr lang="de-DE" dirty="0" err="1"/>
-              <a:t>are</a:t>
-            </a:r>
-            <a:r>
-              <a:rPr lang="de-DE" dirty="0"/>
-              <a:t> </a:t>
-            </a:r>
-            <a:r>
-              <a:rPr lang="de-DE" dirty="0" err="1"/>
-              <a:t>sampled</a:t>
-            </a:r>
-            <a:r>
-              <a:rPr lang="de-DE" dirty="0"/>
-              <a:t>:</a:t>
-            </a:r>
-          </a:p>
-          <a:p>
-            <a:r>
-              <a:rPr lang="de-DE" dirty="0" err="1"/>
-              <a:t>e</a:t>
-            </a:r>
-            <a:r>
-              <a:rPr lang="de-DE" dirty="0"/>
-              <a:t>[</a:t>
-            </a:r>
-            <a:r>
-              <a:rPr lang="de-DE" dirty="0" err="1"/>
-              <a:t>k</a:t>
-            </a:r>
-            <a:r>
-              <a:rPr lang="de-DE" dirty="0"/>
-              <a:t>] = </a:t>
-            </a:r>
-            <a:r>
-              <a:rPr lang="de-DE" dirty="0" err="1"/>
-              <a:t>e</a:t>
-            </a:r>
-            <a:r>
-              <a:rPr lang="de-DE" dirty="0"/>
-              <a:t>(</a:t>
-            </a:r>
-            <a:r>
-              <a:rPr lang="de-DE" dirty="0" err="1"/>
-              <a:t>kT</a:t>
-            </a:r>
-            <a:r>
-              <a:rPr lang="de-DE" dirty="0"/>
-              <a:t>)</a:t>
-            </a:r>
-          </a:p>
-          <a:p>
-            <a:r>
-              <a:rPr lang="de-DE" dirty="0"/>
-              <a:t>Integration </a:t>
-            </a:r>
-            <a:r>
-              <a:rPr lang="de-DE" dirty="0" err="1"/>
-              <a:t>becomes</a:t>
-            </a:r>
-            <a:r>
-              <a:rPr lang="de-DE" dirty="0"/>
-              <a:t> </a:t>
-            </a:r>
-            <a:r>
-              <a:rPr lang="de-DE" dirty="0" err="1"/>
-              <a:t>summation</a:t>
-            </a:r>
-            <a:endParaRPr lang="de-DE" dirty="0"/>
-          </a:p>
-          <a:p>
-            <a:r>
-              <a:rPr lang="de-DE" dirty="0"/>
-              <a:t>Derivative </a:t>
-            </a:r>
-            <a:r>
-              <a:rPr lang="de-DE" dirty="0" err="1"/>
-              <a:t>becomes</a:t>
-            </a:r>
-            <a:r>
-              <a:rPr lang="de-DE" dirty="0"/>
-              <a:t> </a:t>
-            </a:r>
-            <a:r>
-              <a:rPr lang="de-DE" dirty="0" err="1"/>
-              <a:t>difference</a:t>
-            </a:r>
-            <a:endParaRPr lang="de-DE" dirty="0"/>
-          </a:p>
-          <a:p>
-            <a:r>
-              <a:rPr lang="de-DE" dirty="0" err="1"/>
-              <a:t>Numerical</a:t>
-            </a:r>
-            <a:r>
-              <a:rPr lang="de-DE" dirty="0"/>
-              <a:t> </a:t>
-            </a:r>
-            <a:r>
-              <a:rPr lang="de-DE" dirty="0" err="1"/>
-              <a:t>approximation</a:t>
-            </a:r>
-            <a:r>
-              <a:rPr lang="de-DE" dirty="0"/>
-              <a:t> </a:t>
-            </a:r>
-            <a:r>
-              <a:rPr lang="de-DE" dirty="0" err="1"/>
-              <a:t>required</a:t>
-            </a:r>
-            <a:endParaRPr lang="de-DE" dirty="0"/>
-          </a:p>
-        </p:txBody>
-      </p:sp>
-      <p:sp>
-        <p:nvSpPr>
-          <p:cNvPr id="4" name="Foliennummernplatzhalter 3">
-            <a:extLst>
-              <a:ext uri="{FF2B5EF4-FFF2-40B4-BE49-F238E27FC236}">
-                <a16:creationId xmlns:a16="http://schemas.microsoft.com/office/drawing/2014/main" id="{A8D74D38-3849-86C7-1380-A543C57ADEC6}"/>
-              </a:ext>
-            </a:extLst>
-          </p:cNvPr>
-          <p:cNvSpPr>
-            <a:spLocks noGrp="1"/>
-          </p:cNvSpPr>
-          <p:nvPr>
-            <p:ph type="sldNum" sz="quarter" idx="12"/>
-          </p:nvPr>
-        </p:nvSpPr>
-        <p:spPr/>
-        <p:txBody>
-          <a:bodyPr/>
-          <a:lstStyle/>
-          <a:p>
-            <a:fld id="{08C366F5-AFAD-49CB-854A-9D9E238FCA13}" type="slidenum">
-              <a:rPr lang="en-GB" smtClean="0"/>
-              <a:t>41</a:t>
-            </a:fld>
-            <a:endParaRPr lang="en-GB"/>
-          </a:p>
-        </p:txBody>
-      </p:sp>
-    </p:spTree>
-    <p:extLst>
-      <p:ext uri="{BB962C8B-B14F-4D97-AF65-F5344CB8AC3E}">
-        <p14:creationId xmlns:p14="http://schemas.microsoft.com/office/powerpoint/2010/main" val="2281482200"/>
-      </p:ext>
-    </p:extLst>
-  </p:cSld>
-  <p:clrMapOvr>
-    <a:masterClrMapping/>
-  </p:clrMapOvr>
-</p:sld>
-</file>
-
-<file path=ppt/slides/slide42.xml><?xml version="1.0" encoding="utf-8"?>
-<p:sld xmlns:a="http://schemas.openxmlformats.org/drawingml/2006/main" xmlns:r="http://schemas.openxmlformats.org/officeDocument/2006/relationships" xmlns:p="http://schemas.openxmlformats.org/presentationml/2006/main">
-  <p:cSld>
-    <p:spTree>
-      <p:nvGrpSpPr>
-        <p:cNvPr id="1" name=""/>
-        <p:cNvGrpSpPr/>
-        <p:nvPr/>
-      </p:nvGrpSpPr>
-      <p:grpSpPr>
-        <a:xfrm>
-          <a:off x="0" y="0"/>
-          <a:ext cx="0" cy="0"/>
-          <a:chOff x="0" y="0"/>
-          <a:chExt cx="0" cy="0"/>
-        </a:xfrm>
-      </p:grpSpPr>
-      <p:sp>
-        <p:nvSpPr>
-          <p:cNvPr id="2" name="Titel 1">
-            <a:extLst>
-              <a:ext uri="{FF2B5EF4-FFF2-40B4-BE49-F238E27FC236}">
-                <a16:creationId xmlns:a16="http://schemas.microsoft.com/office/drawing/2014/main" id="{2D3EA822-1872-313C-1FDE-1AF5CF99851E}"/>
-              </a:ext>
-            </a:extLst>
-          </p:cNvPr>
-          <p:cNvSpPr>
-            <a:spLocks noGrp="1"/>
-          </p:cNvSpPr>
-          <p:nvPr>
-            <p:ph type="title"/>
-          </p:nvPr>
-        </p:nvSpPr>
-        <p:spPr/>
-        <p:txBody>
-          <a:bodyPr/>
-          <a:lstStyle/>
-          <a:p>
-            <a:r>
-              <a:rPr lang="de-DE" dirty="0" err="1"/>
-              <a:t>Discrete</a:t>
-            </a:r>
-            <a:r>
-              <a:rPr lang="de-DE" dirty="0"/>
-              <a:t>-Time PID Goal</a:t>
-            </a:r>
-          </a:p>
-        </p:txBody>
-      </p:sp>
-      <p:sp>
-        <p:nvSpPr>
-          <p:cNvPr id="3" name="Inhaltsplatzhalter 2">
-            <a:extLst>
-              <a:ext uri="{FF2B5EF4-FFF2-40B4-BE49-F238E27FC236}">
-                <a16:creationId xmlns:a16="http://schemas.microsoft.com/office/drawing/2014/main" id="{E4EE34C3-6427-614D-303E-E101FEFEAB5B}"/>
-              </a:ext>
-            </a:extLst>
-          </p:cNvPr>
-          <p:cNvSpPr>
-            <a:spLocks noGrp="1"/>
-          </p:cNvSpPr>
-          <p:nvPr>
-            <p:ph idx="1"/>
-          </p:nvPr>
-        </p:nvSpPr>
-        <p:spPr/>
-        <p:txBody>
-          <a:bodyPr/>
-          <a:lstStyle/>
-          <a:p>
-            <a:r>
-              <a:rPr lang="de-DE" dirty="0" err="1"/>
-              <a:t>We</a:t>
-            </a:r>
-            <a:r>
-              <a:rPr lang="de-DE" dirty="0"/>
-              <a:t> </a:t>
-            </a:r>
-            <a:r>
-              <a:rPr lang="de-DE" dirty="0" err="1"/>
-              <a:t>want</a:t>
-            </a:r>
-            <a:r>
-              <a:rPr lang="de-DE" dirty="0"/>
-              <a:t>:</a:t>
-            </a:r>
-          </a:p>
-          <a:p>
-            <a:r>
-              <a:rPr lang="de-DE" dirty="0" err="1"/>
-              <a:t>u</a:t>
-            </a:r>
-            <a:r>
-              <a:rPr lang="de-DE" dirty="0"/>
-              <a:t>[</a:t>
-            </a:r>
-            <a:r>
-              <a:rPr lang="de-DE" dirty="0" err="1"/>
-              <a:t>k</a:t>
-            </a:r>
-            <a:r>
-              <a:rPr lang="de-DE" dirty="0"/>
-              <a:t>] = \</a:t>
-            </a:r>
-            <a:r>
-              <a:rPr lang="de-DE" dirty="0" err="1"/>
-              <a:t>text</a:t>
-            </a:r>
-            <a:r>
-              <a:rPr lang="de-DE" dirty="0"/>
-              <a:t>{</a:t>
-            </a:r>
-            <a:r>
-              <a:rPr lang="de-DE" dirty="0" err="1"/>
-              <a:t>function</a:t>
-            </a:r>
-            <a:r>
-              <a:rPr lang="de-DE" dirty="0"/>
-              <a:t> </a:t>
-            </a:r>
-            <a:r>
-              <a:rPr lang="de-DE" dirty="0" err="1"/>
-              <a:t>of</a:t>
-            </a:r>
-            <a:r>
-              <a:rPr lang="de-DE" dirty="0"/>
-              <a:t> } </a:t>
-            </a:r>
-            <a:r>
-              <a:rPr lang="de-DE" dirty="0" err="1"/>
-              <a:t>e</a:t>
-            </a:r>
-            <a:r>
-              <a:rPr lang="de-DE" dirty="0"/>
-              <a:t>[</a:t>
-            </a:r>
-            <a:r>
-              <a:rPr lang="de-DE" dirty="0" err="1"/>
-              <a:t>k</a:t>
-            </a:r>
-            <a:r>
-              <a:rPr lang="de-DE" dirty="0"/>
-              <a:t>], </a:t>
-            </a:r>
-            <a:r>
-              <a:rPr lang="de-DE" dirty="0" err="1"/>
-              <a:t>e</a:t>
-            </a:r>
-            <a:r>
-              <a:rPr lang="de-DE" dirty="0"/>
-              <a:t>[k-1], </a:t>
-            </a:r>
-            <a:r>
-              <a:rPr lang="de-DE" dirty="0" err="1"/>
-              <a:t>e</a:t>
-            </a:r>
-            <a:r>
-              <a:rPr lang="de-DE" dirty="0"/>
-              <a:t>[k-2], \</a:t>
-            </a:r>
-            <a:r>
-              <a:rPr lang="de-DE" dirty="0" err="1"/>
-              <a:t>dots</a:t>
-            </a:r>
-            <a:endParaRPr lang="de-DE" dirty="0"/>
-          </a:p>
-          <a:p>
-            <a:br>
-              <a:rPr lang="de-DE" dirty="0"/>
-            </a:br>
-            <a:endParaRPr lang="de-DE" dirty="0"/>
-          </a:p>
-          <a:p>
-            <a:r>
-              <a:rPr lang="de-DE" dirty="0" err="1"/>
-              <a:t>Two</a:t>
-            </a:r>
-            <a:r>
-              <a:rPr lang="de-DE" dirty="0"/>
-              <a:t> </a:t>
-            </a:r>
-            <a:r>
-              <a:rPr lang="de-DE" dirty="0" err="1"/>
-              <a:t>main</a:t>
-            </a:r>
-            <a:r>
-              <a:rPr lang="de-DE" dirty="0"/>
-              <a:t> </a:t>
-            </a:r>
-            <a:r>
-              <a:rPr lang="de-DE" dirty="0" err="1"/>
-              <a:t>forms</a:t>
-            </a:r>
-            <a:r>
-              <a:rPr lang="de-DE" dirty="0"/>
-              <a:t>:</a:t>
-            </a:r>
-          </a:p>
-          <a:p>
-            <a:r>
-              <a:rPr lang="de-DE" dirty="0"/>
-              <a:t>Position form</a:t>
-            </a:r>
-          </a:p>
-          <a:p>
-            <a:r>
-              <a:rPr lang="de-DE" dirty="0"/>
-              <a:t>Velocity (</a:t>
-            </a:r>
-            <a:r>
-              <a:rPr lang="de-DE" dirty="0" err="1"/>
-              <a:t>incremental</a:t>
-            </a:r>
-            <a:r>
-              <a:rPr lang="de-DE" dirty="0"/>
-              <a:t>) form</a:t>
-            </a:r>
-          </a:p>
-        </p:txBody>
-      </p:sp>
-      <p:sp>
-        <p:nvSpPr>
-          <p:cNvPr id="4" name="Foliennummernplatzhalter 3">
-            <a:extLst>
-              <a:ext uri="{FF2B5EF4-FFF2-40B4-BE49-F238E27FC236}">
-                <a16:creationId xmlns:a16="http://schemas.microsoft.com/office/drawing/2014/main" id="{736231E0-3954-F05D-0A6C-F8F01344E392}"/>
-              </a:ext>
-            </a:extLst>
-          </p:cNvPr>
-          <p:cNvSpPr>
-            <a:spLocks noGrp="1"/>
-          </p:cNvSpPr>
-          <p:nvPr>
-            <p:ph type="sldNum" sz="quarter" idx="12"/>
-          </p:nvPr>
-        </p:nvSpPr>
-        <p:spPr/>
-        <p:txBody>
-          <a:bodyPr/>
-          <a:lstStyle/>
-          <a:p>
-            <a:fld id="{08C366F5-AFAD-49CB-854A-9D9E238FCA13}" type="slidenum">
-              <a:rPr lang="en-GB" smtClean="0"/>
-              <a:t>42</a:t>
-            </a:fld>
-            <a:endParaRPr lang="en-GB"/>
-          </a:p>
-        </p:txBody>
-      </p:sp>
-    </p:spTree>
-    <p:extLst>
-      <p:ext uri="{BB962C8B-B14F-4D97-AF65-F5344CB8AC3E}">
-        <p14:creationId xmlns:p14="http://schemas.microsoft.com/office/powerpoint/2010/main" val="3628429894"/>
-      </p:ext>
-    </p:extLst>
-  </p:cSld>
-  <p:clrMapOvr>
-    <a:masterClrMapping/>
-  </p:clrMapOvr>
-</p:sld>
-</file>
-
-<file path=ppt/slides/slide43.xml><?xml version="1.0" encoding="utf-8"?>
-<p:sld xmlns:a="http://schemas.openxmlformats.org/drawingml/2006/main" xmlns:r="http://schemas.openxmlformats.org/officeDocument/2006/relationships" xmlns:p="http://schemas.openxmlformats.org/presentationml/2006/main">
-  <p:cSld>
-    <p:spTree>
-      <p:nvGrpSpPr>
-        <p:cNvPr id="1" name=""/>
-        <p:cNvGrpSpPr/>
-        <p:nvPr/>
-      </p:nvGrpSpPr>
-      <p:grpSpPr>
-        <a:xfrm>
-          <a:off x="0" y="0"/>
-          <a:ext cx="0" cy="0"/>
-          <a:chOff x="0" y="0"/>
-          <a:chExt cx="0" cy="0"/>
-        </a:xfrm>
-      </p:grpSpPr>
-      <p:sp>
-        <p:nvSpPr>
-          <p:cNvPr id="2" name="Titel 1">
-            <a:extLst>
-              <a:ext uri="{FF2B5EF4-FFF2-40B4-BE49-F238E27FC236}">
-                <a16:creationId xmlns:a16="http://schemas.microsoft.com/office/drawing/2014/main" id="{B8D0DE3C-E0D6-53A5-DAF7-4070AE5044D6}"/>
-              </a:ext>
-            </a:extLst>
-          </p:cNvPr>
-          <p:cNvSpPr>
-            <a:spLocks noGrp="1"/>
-          </p:cNvSpPr>
-          <p:nvPr>
-            <p:ph type="title"/>
-          </p:nvPr>
-        </p:nvSpPr>
-        <p:spPr/>
-        <p:txBody>
-          <a:bodyPr/>
-          <a:lstStyle/>
-          <a:p>
-            <a:endParaRPr lang="de-DE"/>
-          </a:p>
-        </p:txBody>
-      </p:sp>
-      <p:sp>
-        <p:nvSpPr>
-          <p:cNvPr id="3" name="Inhaltsplatzhalter 2">
-            <a:extLst>
-              <a:ext uri="{FF2B5EF4-FFF2-40B4-BE49-F238E27FC236}">
-                <a16:creationId xmlns:a16="http://schemas.microsoft.com/office/drawing/2014/main" id="{8B0433CE-B24F-C4B3-567B-85D31A5A76AD}"/>
-              </a:ext>
-            </a:extLst>
-          </p:cNvPr>
-          <p:cNvSpPr>
-            <a:spLocks noGrp="1"/>
-          </p:cNvSpPr>
-          <p:nvPr>
-            <p:ph idx="1"/>
-          </p:nvPr>
-        </p:nvSpPr>
-        <p:spPr/>
-        <p:txBody>
-          <a:bodyPr/>
-          <a:lstStyle/>
-          <a:p>
-            <a:endParaRPr lang="de-DE"/>
-          </a:p>
-        </p:txBody>
-      </p:sp>
-      <p:sp>
-        <p:nvSpPr>
-          <p:cNvPr id="4" name="Foliennummernplatzhalter 3">
-            <a:extLst>
-              <a:ext uri="{FF2B5EF4-FFF2-40B4-BE49-F238E27FC236}">
-                <a16:creationId xmlns:a16="http://schemas.microsoft.com/office/drawing/2014/main" id="{CB85D072-5C98-4066-50D2-642CD5D0BA09}"/>
-              </a:ext>
-            </a:extLst>
-          </p:cNvPr>
-          <p:cNvSpPr>
-            <a:spLocks noGrp="1"/>
-          </p:cNvSpPr>
-          <p:nvPr>
-            <p:ph type="sldNum" sz="quarter" idx="12"/>
-          </p:nvPr>
-        </p:nvSpPr>
-        <p:spPr/>
-        <p:txBody>
-          <a:bodyPr/>
-          <a:lstStyle/>
-          <a:p>
-            <a:fld id="{08C366F5-AFAD-49CB-854A-9D9E238FCA13}" type="slidenum">
-              <a:rPr lang="en-GB" smtClean="0"/>
-              <a:t>43</a:t>
-            </a:fld>
-            <a:endParaRPr lang="en-GB"/>
-          </a:p>
-        </p:txBody>
-      </p:sp>
-    </p:spTree>
-    <p:extLst>
-      <p:ext uri="{BB962C8B-B14F-4D97-AF65-F5344CB8AC3E}">
-        <p14:creationId xmlns:p14="http://schemas.microsoft.com/office/powerpoint/2010/main" val="1090511166"/>
-      </p:ext>
-    </p:extLst>
-  </p:cSld>
-  <p:clrMapOvr>
-    <a:masterClrMapping/>
-  </p:clrMapOvr>
-</p:sld>
-</file>
-
-<file path=ppt/slides/slide44.xml><?xml version="1.0" encoding="utf-8"?>
-<p:sld xmlns:a="http://schemas.openxmlformats.org/drawingml/2006/main" xmlns:r="http://schemas.openxmlformats.org/officeDocument/2006/relationships" xmlns:p="http://schemas.openxmlformats.org/presentationml/2006/main">
-  <p:cSld>
-    <p:spTree>
-      <p:nvGrpSpPr>
-        <p:cNvPr id="1" name=""/>
-        <p:cNvGrpSpPr/>
-        <p:nvPr/>
-      </p:nvGrpSpPr>
-      <p:grpSpPr>
-        <a:xfrm>
-          <a:off x="0" y="0"/>
-          <a:ext cx="0" cy="0"/>
-          <a:chOff x="0" y="0"/>
-          <a:chExt cx="0" cy="0"/>
-        </a:xfrm>
-      </p:grpSpPr>
-      <p:sp>
-        <p:nvSpPr>
-          <p:cNvPr id="2" name="Titel 1">
-            <a:extLst>
-              <a:ext uri="{FF2B5EF4-FFF2-40B4-BE49-F238E27FC236}">
-                <a16:creationId xmlns:a16="http://schemas.microsoft.com/office/drawing/2014/main" id="{6C208CCB-605E-513B-1BC3-36C369993B8C}"/>
-              </a:ext>
-            </a:extLst>
-          </p:cNvPr>
-          <p:cNvSpPr>
-            <a:spLocks noGrp="1"/>
-          </p:cNvSpPr>
-          <p:nvPr>
-            <p:ph type="title"/>
-          </p:nvPr>
-        </p:nvSpPr>
-        <p:spPr/>
-        <p:txBody>
-          <a:bodyPr/>
-          <a:lstStyle/>
-          <a:p>
-            <a:r>
-              <a:rPr lang="de-DE" dirty="0"/>
-              <a:t>Summary</a:t>
-            </a:r>
-          </a:p>
-        </p:txBody>
-      </p:sp>
-      <p:sp>
-        <p:nvSpPr>
-          <p:cNvPr id="3" name="Inhaltsplatzhalter 2">
-            <a:extLst>
-              <a:ext uri="{FF2B5EF4-FFF2-40B4-BE49-F238E27FC236}">
-                <a16:creationId xmlns:a16="http://schemas.microsoft.com/office/drawing/2014/main" id="{717F2BDD-E451-7A8E-F095-CE64538B4F58}"/>
-              </a:ext>
-            </a:extLst>
-          </p:cNvPr>
-          <p:cNvSpPr>
-            <a:spLocks noGrp="1"/>
-          </p:cNvSpPr>
-          <p:nvPr>
-            <p:ph idx="1"/>
-          </p:nvPr>
-        </p:nvSpPr>
-        <p:spPr/>
-        <p:txBody>
-          <a:bodyPr/>
-          <a:lstStyle/>
-          <a:p>
-            <a:r>
-              <a:rPr lang="de-DE" dirty="0"/>
-              <a:t>Digital </a:t>
-            </a:r>
-            <a:r>
-              <a:rPr lang="de-DE" dirty="0" err="1"/>
-              <a:t>control</a:t>
-            </a:r>
-            <a:r>
-              <a:rPr lang="de-DE" dirty="0"/>
-              <a:t> </a:t>
-            </a:r>
-            <a:r>
-              <a:rPr lang="de-DE" dirty="0" err="1"/>
-              <a:t>is</a:t>
-            </a:r>
-            <a:r>
-              <a:rPr lang="de-DE" dirty="0"/>
-              <a:t> essential in modern </a:t>
-            </a:r>
-            <a:r>
-              <a:rPr lang="de-DE" dirty="0" err="1"/>
-              <a:t>systems</a:t>
-            </a:r>
-            <a:endParaRPr lang="de-DE" dirty="0"/>
-          </a:p>
-          <a:p>
-            <a:r>
-              <a:rPr lang="de-DE" dirty="0"/>
-              <a:t>Sampling </a:t>
-            </a:r>
-            <a:r>
-              <a:rPr lang="de-DE" dirty="0" err="1"/>
-              <a:t>introduces</a:t>
-            </a:r>
-            <a:r>
-              <a:rPr lang="de-DE" dirty="0"/>
-              <a:t> </a:t>
-            </a:r>
-            <a:r>
-              <a:rPr lang="de-DE" dirty="0" err="1"/>
-              <a:t>constraints</a:t>
-            </a:r>
-            <a:endParaRPr lang="de-DE" dirty="0"/>
-          </a:p>
-          <a:p>
-            <a:r>
-              <a:rPr lang="de-DE" dirty="0"/>
-              <a:t>ZOH </a:t>
-            </a:r>
-            <a:r>
-              <a:rPr lang="de-DE" dirty="0" err="1"/>
-              <a:t>connects</a:t>
-            </a:r>
-            <a:r>
-              <a:rPr lang="de-DE" dirty="0"/>
-              <a:t> </a:t>
-            </a:r>
-            <a:r>
-              <a:rPr lang="de-DE" dirty="0" err="1"/>
-              <a:t>discrete</a:t>
-            </a:r>
-            <a:r>
-              <a:rPr lang="de-DE" dirty="0"/>
-              <a:t> and </a:t>
-            </a:r>
-            <a:r>
-              <a:rPr lang="de-DE" dirty="0" err="1"/>
-              <a:t>continuous</a:t>
-            </a:r>
-            <a:r>
-              <a:rPr lang="de-DE" dirty="0"/>
-              <a:t> </a:t>
-            </a:r>
-            <a:r>
-              <a:rPr lang="de-DE" dirty="0" err="1"/>
-              <a:t>worlds</a:t>
-            </a:r>
-            <a:endParaRPr lang="de-DE" dirty="0"/>
-          </a:p>
-          <a:p>
-            <a:r>
-              <a:rPr lang="de-DE" dirty="0" err="1"/>
-              <a:t>z-transform</a:t>
-            </a:r>
-            <a:r>
-              <a:rPr lang="de-DE" dirty="0"/>
-              <a:t> </a:t>
-            </a:r>
-            <a:r>
-              <a:rPr lang="de-DE" dirty="0" err="1"/>
-              <a:t>is</a:t>
-            </a:r>
-            <a:r>
-              <a:rPr lang="de-DE" dirty="0"/>
-              <a:t> </a:t>
-            </a:r>
-            <a:r>
-              <a:rPr lang="de-DE" dirty="0" err="1"/>
-              <a:t>key</a:t>
-            </a:r>
-            <a:r>
-              <a:rPr lang="de-DE" dirty="0"/>
-              <a:t> </a:t>
-            </a:r>
-            <a:r>
-              <a:rPr lang="de-DE" dirty="0" err="1"/>
-              <a:t>analysis</a:t>
-            </a:r>
-            <a:r>
-              <a:rPr lang="de-DE" dirty="0"/>
-              <a:t> </a:t>
-            </a:r>
-            <a:r>
-              <a:rPr lang="de-DE" dirty="0" err="1"/>
-              <a:t>tool</a:t>
-            </a:r>
-            <a:endParaRPr lang="de-DE" dirty="0"/>
-          </a:p>
-          <a:p>
-            <a:r>
-              <a:rPr lang="de-DE" dirty="0" err="1"/>
-              <a:t>Discretization</a:t>
-            </a:r>
-            <a:r>
-              <a:rPr lang="de-DE" dirty="0"/>
-              <a:t> </a:t>
-            </a:r>
-            <a:r>
-              <a:rPr lang="de-DE" dirty="0" err="1"/>
-              <a:t>method</a:t>
-            </a:r>
-            <a:r>
-              <a:rPr lang="de-DE" dirty="0"/>
-              <a:t> </a:t>
-            </a:r>
-            <a:r>
-              <a:rPr lang="de-DE" dirty="0" err="1"/>
-              <a:t>matters</a:t>
-            </a:r>
-            <a:endParaRPr lang="de-DE" dirty="0"/>
-          </a:p>
-        </p:txBody>
-      </p:sp>
-      <p:sp>
-        <p:nvSpPr>
-          <p:cNvPr id="4" name="Foliennummernplatzhalter 3">
-            <a:extLst>
-              <a:ext uri="{FF2B5EF4-FFF2-40B4-BE49-F238E27FC236}">
-                <a16:creationId xmlns:a16="http://schemas.microsoft.com/office/drawing/2014/main" id="{FA27C285-2CA8-7C1D-7B48-526D96B9D6D1}"/>
-              </a:ext>
-            </a:extLst>
-          </p:cNvPr>
-          <p:cNvSpPr>
-            <a:spLocks noGrp="1"/>
-          </p:cNvSpPr>
-          <p:nvPr>
-            <p:ph type="sldNum" sz="quarter" idx="12"/>
-          </p:nvPr>
-        </p:nvSpPr>
-        <p:spPr/>
-        <p:txBody>
-          <a:bodyPr/>
-          <a:lstStyle/>
-          <a:p>
-            <a:fld id="{08C366F5-AFAD-49CB-854A-9D9E238FCA13}" type="slidenum">
-              <a:rPr lang="en-GB" smtClean="0"/>
-              <a:t>44</a:t>
-            </a:fld>
-            <a:endParaRPr lang="en-GB"/>
-          </a:p>
-        </p:txBody>
-      </p:sp>
-    </p:spTree>
-    <p:extLst>
-      <p:ext uri="{BB962C8B-B14F-4D97-AF65-F5344CB8AC3E}">
-        <p14:creationId xmlns:p14="http://schemas.microsoft.com/office/powerpoint/2010/main" val="4139900114"/>
       </p:ext>
     </p:extLst>
   </p:cSld>

--- a/slides/6_discrete_controllers.pptx
+++ b/slides/6_discrete_controllers.pptx
@@ -28,8 +28,8 @@
     <p:sldId id="383" r:id="rId19"/>
     <p:sldId id="384" r:id="rId20"/>
     <p:sldId id="271" r:id="rId21"/>
-    <p:sldId id="385" r:id="rId22"/>
-    <p:sldId id="388" r:id="rId23"/>
+    <p:sldId id="388" r:id="rId22"/>
+    <p:sldId id="385" r:id="rId23"/>
     <p:sldId id="405" r:id="rId24"/>
     <p:sldId id="374" r:id="rId25"/>
     <p:sldId id="375" r:id="rId26"/>
@@ -517,7 +517,7 @@
           <a:p>
             <a:fld id="{506E0FD1-891F-4B1E-916D-E9B585160BB8}" type="datetimeFigureOut">
               <a:rPr lang="en-GB" smtClean="0"/>
-              <a:t>30/03/2026</a:t>
+              <a:t>01/04/2026</a:t>
             </a:fld>
             <a:endParaRPr lang="en-GB"/>
           </a:p>
@@ -934,7 +934,7 @@
           <a:p>
             <a:fld id="{D68C3F22-27B2-44E3-9C5F-D08126455F6F}" type="datetime1">
               <a:rPr lang="en-GB" smtClean="0"/>
-              <a:t>30/03/2026</a:t>
+              <a:t>01/04/2026</a:t>
             </a:fld>
             <a:endParaRPr lang="en-GB"/>
           </a:p>
@@ -1134,7 +1134,7 @@
           <a:p>
             <a:fld id="{1CD03846-7BF6-4FB6-A921-FF3379ADBD4C}" type="datetime1">
               <a:rPr lang="en-GB" smtClean="0"/>
-              <a:t>30/03/2026</a:t>
+              <a:t>01/04/2026</a:t>
             </a:fld>
             <a:endParaRPr lang="en-GB"/>
           </a:p>
@@ -1344,7 +1344,7 @@
           <a:p>
             <a:fld id="{99E1B91A-3FD0-4144-9C84-63E9688ED2FE}" type="datetime1">
               <a:rPr lang="en-GB" smtClean="0"/>
-              <a:t>30/03/2026</a:t>
+              <a:t>01/04/2026</a:t>
             </a:fld>
             <a:endParaRPr lang="en-GB"/>
           </a:p>
@@ -1544,7 +1544,7 @@
           <a:p>
             <a:fld id="{5295ED7B-FEAD-4734-819F-93EF4B0EA908}" type="datetime1">
               <a:rPr lang="en-GB" smtClean="0"/>
-              <a:t>30/03/2026</a:t>
+              <a:t>01/04/2026</a:t>
             </a:fld>
             <a:endParaRPr lang="en-GB"/>
           </a:p>
@@ -1820,7 +1820,7 @@
           <a:p>
             <a:fld id="{D2D5D4B4-C926-4B45-8815-1ED8911179A2}" type="datetime1">
               <a:rPr lang="en-GB" smtClean="0"/>
-              <a:t>30/03/2026</a:t>
+              <a:t>01/04/2026</a:t>
             </a:fld>
             <a:endParaRPr lang="en-GB"/>
           </a:p>
@@ -2088,7 +2088,7 @@
           <a:p>
             <a:fld id="{B4C5210A-0E37-4935-93AF-69F21A5F712F}" type="datetime1">
               <a:rPr lang="en-GB" smtClean="0"/>
-              <a:t>30/03/2026</a:t>
+              <a:t>01/04/2026</a:t>
             </a:fld>
             <a:endParaRPr lang="en-GB"/>
           </a:p>
@@ -2503,7 +2503,7 @@
           <a:p>
             <a:fld id="{3D3A6B2F-436C-4691-80E8-9C890E000E9D}" type="datetime1">
               <a:rPr lang="en-GB" smtClean="0"/>
-              <a:t>30/03/2026</a:t>
+              <a:t>01/04/2026</a:t>
             </a:fld>
             <a:endParaRPr lang="en-GB"/>
           </a:p>
@@ -2645,7 +2645,7 @@
           <a:p>
             <a:fld id="{84385F4C-D74B-496F-8D21-97E3549C783B}" type="datetime1">
               <a:rPr lang="en-GB" smtClean="0"/>
-              <a:t>30/03/2026</a:t>
+              <a:t>01/04/2026</a:t>
             </a:fld>
             <a:endParaRPr lang="en-GB"/>
           </a:p>
@@ -2758,7 +2758,7 @@
           <a:p>
             <a:fld id="{0CBDCB32-C241-4703-A832-4EB47BD54E83}" type="datetime1">
               <a:rPr lang="en-GB" smtClean="0"/>
-              <a:t>30/03/2026</a:t>
+              <a:t>01/04/2026</a:t>
             </a:fld>
             <a:endParaRPr lang="en-GB"/>
           </a:p>
@@ -3071,7 +3071,7 @@
           <a:p>
             <a:fld id="{85C150FF-BE95-4D25-A16A-E368A81CBF24}" type="datetime1">
               <a:rPr lang="en-GB" smtClean="0"/>
-              <a:t>30/03/2026</a:t>
+              <a:t>01/04/2026</a:t>
             </a:fld>
             <a:endParaRPr lang="en-GB"/>
           </a:p>
@@ -3360,7 +3360,7 @@
           <a:p>
             <a:fld id="{F3C5DB4B-B349-43C9-A424-BADA723AD9F1}" type="datetime1">
               <a:rPr lang="en-GB" smtClean="0"/>
-              <a:t>30/03/2026</a:t>
+              <a:t>01/04/2026</a:t>
             </a:fld>
             <a:endParaRPr lang="en-GB"/>
           </a:p>
@@ -3603,7 +3603,7 @@
           <a:p>
             <a:fld id="{12632426-0A0C-405F-A3D0-2D11AA44702A}" type="datetime1">
               <a:rPr lang="en-GB" smtClean="0"/>
-              <a:t>30/03/2026</a:t>
+              <a:t>01/04/2026</a:t>
             </a:fld>
             <a:endParaRPr lang="en-GB"/>
           </a:p>
@@ -5850,8 +5850,8 @@
           </a:p>
         </p:txBody>
       </p:sp>
-      <mc:AlternateContent xmlns:mc="http://schemas.openxmlformats.org/markup-compatibility/2006" xmlns:a14="http://schemas.microsoft.com/office/drawing/2010/main">
-        <mc:Choice Requires="a14">
+      <mc:AlternateContent xmlns:mc="http://schemas.openxmlformats.org/markup-compatibility/2006">
+        <mc:Choice xmlns:a14="http://schemas.microsoft.com/office/drawing/2010/main" Requires="a14">
           <p:sp>
             <p:nvSpPr>
               <p:cNvPr id="3" name="Inhaltsplatzhalter 2">
@@ -6111,11 +6111,11 @@
                   <a:rPr lang="de-DE" sz="2400" dirty="0">
                     <a:sym typeface="Wingdings" pitchFamily="2" charset="2"/>
                   </a:rPr>
-                  <a:t> </a:t>
+                  <a:t> d</a:t>
                 </a:r>
                 <a:r>
                   <a:rPr lang="de-DE" sz="2400" dirty="0"/>
-                  <a:t>Digital </a:t>
+                  <a:t>igital </a:t>
                 </a:r>
                 <a:r>
                   <a:rPr lang="de-DE" sz="2400" dirty="0" err="1"/>
@@ -6220,7 +6220,7 @@
             </p:txBody>
           </p:sp>
         </mc:Choice>
-        <mc:Fallback xmlns="">
+        <mc:Fallback>
           <p:sp>
             <p:nvSpPr>
               <p:cNvPr id="3" name="Inhaltsplatzhalter 2">
@@ -6479,8 +6479,8 @@
           </a:p>
         </p:txBody>
       </p:sp>
-      <mc:AlternateContent xmlns:mc="http://schemas.openxmlformats.org/markup-compatibility/2006" xmlns:a14="http://schemas.microsoft.com/office/drawing/2010/main">
-        <mc:Choice Requires="a14">
+      <mc:AlternateContent xmlns:mc="http://schemas.openxmlformats.org/markup-compatibility/2006">
+        <mc:Choice xmlns:a14="http://schemas.microsoft.com/office/drawing/2010/main" Requires="a14">
           <p:sp>
             <p:nvSpPr>
               <p:cNvPr id="3" name="Inhaltsplatzhalter 2">
@@ -6508,12 +6508,8 @@
                   <a:buNone/>
                 </a:pPr>
                 <a:r>
-                  <a:rPr lang="de-DE" dirty="0" err="1"/>
-                  <a:t>Continuous</a:t>
-                </a:r>
-                <a:r>
                   <a:rPr lang="de-DE" dirty="0"/>
-                  <a:t>-time </a:t>
+                  <a:t>Continuous-time </a:t>
                 </a:r>
                 <a:r>
                   <a:rPr lang="de-DE" dirty="0" err="1"/>
@@ -6733,39 +6729,13 @@
                 </a:r>
                 <a:r>
                   <a:rPr lang="de-DE" dirty="0"/>
-                  <a:t> sample (</a:t>
-                </a:r>
-                <a14:m>
-                  <m:oMath xmlns:m="http://schemas.openxmlformats.org/officeDocument/2006/math">
-                    <m:r>
-                      <a:rPr lang="de-DE" b="0" i="1" smtClean="0">
-                        <a:latin typeface="Cambria Math" panose="02040503050406030204" pitchFamily="18" charset="0"/>
-                      </a:rPr>
-                      <m:t>𝑡</m:t>
-                    </m:r>
-                    <m:r>
-                      <a:rPr lang="de-DE" b="0" i="1" smtClean="0">
-                        <a:latin typeface="Cambria Math" panose="02040503050406030204" pitchFamily="18" charset="0"/>
-                      </a:rPr>
-                      <m:t>=</m:t>
-                    </m:r>
-                    <m:r>
-                      <a:rPr lang="de-DE" b="0" i="1" smtClean="0">
-                        <a:latin typeface="Cambria Math" panose="02040503050406030204" pitchFamily="18" charset="0"/>
-                      </a:rPr>
-                      <m:t>𝑇</m:t>
-                    </m:r>
-                  </m:oMath>
-                </a14:m>
-                <a:r>
-                  <a:rPr lang="de-DE" dirty="0"/>
-                  <a:t>)</a:t>
+                  <a:t> sample</a:t>
                 </a:r>
               </a:p>
             </p:txBody>
           </p:sp>
         </mc:Choice>
-        <mc:Fallback xmlns="">
+        <mc:Fallback>
           <p:sp>
             <p:nvSpPr>
               <p:cNvPr id="3" name="Inhaltsplatzhalter 2">
@@ -6896,8 +6866,8 @@
           </a:p>
         </p:txBody>
       </p:sp>
-      <mc:AlternateContent xmlns:mc="http://schemas.openxmlformats.org/markup-compatibility/2006" xmlns:a14="http://schemas.microsoft.com/office/drawing/2010/main">
-        <mc:Choice Requires="a14">
+      <mc:AlternateContent xmlns:mc="http://schemas.openxmlformats.org/markup-compatibility/2006">
+        <mc:Choice xmlns:a14="http://schemas.microsoft.com/office/drawing/2010/main" Requires="a14">
           <p:sp>
             <p:nvSpPr>
               <p:cNvPr id="3" name="Inhaltsplatzhalter 2">
@@ -7474,7 +7444,7 @@
                 </a:r>
                 <a:r>
                   <a:rPr lang="de-DE" dirty="0" err="1"/>
-                  <a:t>constan</a:t>
+                  <a:t>constant</a:t>
                 </a:r>
                 <a:r>
                   <a:rPr lang="de-DE" dirty="0"/>
@@ -7900,7 +7870,7 @@
             </p:txBody>
           </p:sp>
         </mc:Choice>
-        <mc:Fallback xmlns="">
+        <mc:Fallback>
           <p:sp>
             <p:nvSpPr>
               <p:cNvPr id="3" name="Inhaltsplatzhalter 2">
@@ -11238,11 +11208,11 @@
             </a:r>
             <a:r>
               <a:rPr lang="de-DE" dirty="0" err="1"/>
-              <a:t>transfer</a:t>
+              <a:t>z</a:t>
             </a:r>
             <a:r>
               <a:rPr lang="de-DE" dirty="0"/>
-              <a:t> </a:t>
+              <a:t>-transfer </a:t>
             </a:r>
             <a:r>
               <a:rPr lang="de-DE" dirty="0" err="1"/>
@@ -13753,239 +13723,6 @@
           <p:cNvPr id="2" name="Titel 1">
             <a:extLst>
               <a:ext uri="{FF2B5EF4-FFF2-40B4-BE49-F238E27FC236}">
-                <a16:creationId xmlns:a16="http://schemas.microsoft.com/office/drawing/2014/main" id="{5E6D035F-C0FB-44AD-30F4-AFEDE2F71227}"/>
-              </a:ext>
-            </a:extLst>
-          </p:cNvPr>
-          <p:cNvSpPr>
-            <a:spLocks noGrp="1"/>
-          </p:cNvSpPr>
-          <p:nvPr>
-            <p:ph type="title"/>
-          </p:nvPr>
-        </p:nvSpPr>
-        <p:spPr/>
-        <p:txBody>
-          <a:bodyPr/>
-          <a:lstStyle/>
-          <a:p>
-            <a:r>
-              <a:rPr lang="de-DE" dirty="0" err="1"/>
-              <a:t>Stability</a:t>
-            </a:r>
-            <a:r>
-              <a:rPr lang="de-DE" dirty="0"/>
-              <a:t> in </a:t>
-            </a:r>
-            <a:r>
-              <a:rPr lang="de-DE" dirty="0" err="1"/>
-              <a:t>Discrete</a:t>
-            </a:r>
-            <a:r>
-              <a:rPr lang="de-DE" dirty="0"/>
-              <a:t>-Time Systems</a:t>
-            </a:r>
-          </a:p>
-        </p:txBody>
-      </p:sp>
-      <p:sp>
-        <p:nvSpPr>
-          <p:cNvPr id="3" name="Inhaltsplatzhalter 2">
-            <a:extLst>
-              <a:ext uri="{FF2B5EF4-FFF2-40B4-BE49-F238E27FC236}">
-                <a16:creationId xmlns:a16="http://schemas.microsoft.com/office/drawing/2014/main" id="{D59F1111-2F1A-4B89-470B-1C913FCB4666}"/>
-              </a:ext>
-            </a:extLst>
-          </p:cNvPr>
-          <p:cNvSpPr>
-            <a:spLocks noGrp="1"/>
-          </p:cNvSpPr>
-          <p:nvPr>
-            <p:ph idx="1"/>
-          </p:nvPr>
-        </p:nvSpPr>
-        <p:spPr>
-          <a:xfrm>
-            <a:off x="6585526" y="1825625"/>
-            <a:ext cx="4768273" cy="4351338"/>
-          </a:xfrm>
-        </p:spPr>
-        <p:txBody>
-          <a:bodyPr/>
-          <a:lstStyle/>
-          <a:p>
-            <a:pPr marL="0" indent="0">
-              <a:buNone/>
-            </a:pPr>
-            <a:r>
-              <a:rPr lang="de-DE" dirty="0"/>
-              <a:t>System </a:t>
-            </a:r>
-            <a:r>
-              <a:rPr lang="de-DE" dirty="0" err="1"/>
-              <a:t>stable</a:t>
-            </a:r>
-            <a:r>
-              <a:rPr lang="de-DE" dirty="0"/>
-              <a:t> </a:t>
-            </a:r>
-            <a:r>
-              <a:rPr lang="de-DE" dirty="0" err="1"/>
-              <a:t>if</a:t>
-            </a:r>
-            <a:r>
-              <a:rPr lang="de-DE" dirty="0"/>
-              <a:t> </a:t>
-            </a:r>
-            <a:r>
-              <a:rPr lang="de-DE" dirty="0" err="1"/>
-              <a:t>poles</a:t>
-            </a:r>
-            <a:r>
-              <a:rPr lang="de-DE" dirty="0"/>
-              <a:t> </a:t>
-            </a:r>
-            <a:r>
-              <a:rPr lang="de-DE" dirty="0" err="1"/>
-              <a:t>lie</a:t>
-            </a:r>
-            <a:r>
-              <a:rPr lang="de-DE" dirty="0"/>
-              <a:t> </a:t>
-            </a:r>
-            <a:r>
-              <a:rPr lang="de-DE" dirty="0" err="1"/>
-              <a:t>inside</a:t>
-            </a:r>
-            <a:r>
-              <a:rPr lang="de-DE" dirty="0"/>
-              <a:t> </a:t>
-            </a:r>
-            <a:r>
-              <a:rPr lang="de-DE" dirty="0" err="1"/>
-              <a:t>unit</a:t>
-            </a:r>
-            <a:r>
-              <a:rPr lang="de-DE" dirty="0"/>
-              <a:t> </a:t>
-            </a:r>
-            <a:r>
-              <a:rPr lang="de-DE" dirty="0" err="1"/>
-              <a:t>circle</a:t>
-            </a:r>
-            <a:endParaRPr lang="de-DE" dirty="0"/>
-          </a:p>
-          <a:p>
-            <a:pPr marL="0" indent="0">
-              <a:buNone/>
-            </a:pPr>
-            <a:endParaRPr lang="de-DE" dirty="0"/>
-          </a:p>
-          <a:p>
-            <a:pPr marL="0" indent="0">
-              <a:buNone/>
-            </a:pPr>
-            <a:r>
-              <a:rPr lang="de-DE" dirty="0"/>
-              <a:t>…</a:t>
-            </a:r>
-          </a:p>
-        </p:txBody>
-      </p:sp>
-      <p:sp>
-        <p:nvSpPr>
-          <p:cNvPr id="4" name="Foliennummernplatzhalter 3">
-            <a:extLst>
-              <a:ext uri="{FF2B5EF4-FFF2-40B4-BE49-F238E27FC236}">
-                <a16:creationId xmlns:a16="http://schemas.microsoft.com/office/drawing/2014/main" id="{BECC739B-76A7-CF79-0B93-E52879AFFB3D}"/>
-              </a:ext>
-            </a:extLst>
-          </p:cNvPr>
-          <p:cNvSpPr>
-            <a:spLocks noGrp="1"/>
-          </p:cNvSpPr>
-          <p:nvPr>
-            <p:ph type="sldNum" sz="quarter" idx="12"/>
-          </p:nvPr>
-        </p:nvSpPr>
-        <p:spPr/>
-        <p:txBody>
-          <a:bodyPr/>
-          <a:lstStyle/>
-          <a:p>
-            <a:fld id="{08C366F5-AFAD-49CB-854A-9D9E238FCA13}" type="slidenum">
-              <a:rPr lang="en-GB" smtClean="0"/>
-              <a:t>21</a:t>
-            </a:fld>
-            <a:endParaRPr lang="en-GB"/>
-          </a:p>
-        </p:txBody>
-      </p:sp>
-      <p:pic>
-        <p:nvPicPr>
-          <p:cNvPr id="5" name="Grafik 4">
-            <a:extLst>
-              <a:ext uri="{FF2B5EF4-FFF2-40B4-BE49-F238E27FC236}">
-                <a16:creationId xmlns:a16="http://schemas.microsoft.com/office/drawing/2014/main" id="{3ACFABF2-7282-8193-93F4-5770C78395DD}"/>
-              </a:ext>
-            </a:extLst>
-          </p:cNvPr>
-          <p:cNvPicPr>
-            <a:picLocks noChangeAspect="1"/>
-          </p:cNvPicPr>
-          <p:nvPr/>
-        </p:nvPicPr>
-        <p:blipFill>
-          <a:blip r:embed="rId2"/>
-          <a:stretch>
-            <a:fillRect/>
-          </a:stretch>
-        </p:blipFill>
-        <p:spPr>
-          <a:xfrm>
-            <a:off x="838200" y="1539463"/>
-            <a:ext cx="5257800" cy="5182012"/>
-          </a:xfrm>
-          <a:prstGeom prst="rect">
-            <a:avLst/>
-          </a:prstGeom>
-        </p:spPr>
-      </p:pic>
-    </p:spTree>
-    <p:extLst>
-      <p:ext uri="{BB962C8B-B14F-4D97-AF65-F5344CB8AC3E}">
-        <p14:creationId xmlns:p14="http://schemas.microsoft.com/office/powerpoint/2010/main" val="3278865785"/>
-      </p:ext>
-    </p:extLst>
-  </p:cSld>
-  <p:clrMapOvr>
-    <a:masterClrMapping/>
-  </p:clrMapOvr>
-</p:sld>
-</file>
-
-<file path=ppt/slides/slide22.xml><?xml version="1.0" encoding="utf-8"?>
-<p:sld xmlns:a="http://schemas.openxmlformats.org/drawingml/2006/main" xmlns:r="http://schemas.openxmlformats.org/officeDocument/2006/relationships" xmlns:p="http://schemas.openxmlformats.org/presentationml/2006/main">
-  <p:cSld>
-    <p:spTree>
-      <p:nvGrpSpPr>
-        <p:cNvPr id="1" name=""/>
-        <p:cNvGrpSpPr/>
-        <p:nvPr/>
-      </p:nvGrpSpPr>
-      <p:grpSpPr>
-        <a:xfrm>
-          <a:off x="0" y="0"/>
-          <a:ext cx="0" cy="0"/>
-          <a:chOff x="0" y="0"/>
-          <a:chExt cx="0" cy="0"/>
-        </a:xfrm>
-      </p:grpSpPr>
-      <p:sp>
-        <p:nvSpPr>
-          <p:cNvPr id="2" name="Titel 1">
-            <a:extLst>
-              <a:ext uri="{FF2B5EF4-FFF2-40B4-BE49-F238E27FC236}">
                 <a16:creationId xmlns:a16="http://schemas.microsoft.com/office/drawing/2014/main" id="{04A34126-E1FD-D3FD-250E-BE1DBC207194}"/>
               </a:ext>
             </a:extLst>
@@ -14056,9 +13793,15 @@
               <a:bodyPr/>
               <a:lstStyle/>
               <a:p>
-                <a:pPr marL="0" indent="0">
+                <a:pPr marL="0" indent="0" algn="ctr">
                   <a:buNone/>
                 </a:pPr>
+                <a:r>
+                  <a:rPr lang="de-DE" dirty="0">
+                    <a:sym typeface="Wingdings" pitchFamily="2" charset="2"/>
+                  </a:rPr>
+                  <a:t> </a:t>
+                </a:r>
                 <a:r>
                   <a:rPr lang="de-DE" dirty="0"/>
                   <a:t>Relation: </a:t>
@@ -14098,7 +13841,13 @@
                           <a:rPr lang="de-DE" b="0" i="1" smtClean="0">
                             <a:latin typeface="Cambria Math" panose="02040503050406030204" pitchFamily="18" charset="0"/>
                           </a:rPr>
-                          <m:t>𝑠𝑡</m:t>
+                          <m:t>𝑠</m:t>
+                        </m:r>
+                        <m:r>
+                          <a:rPr lang="de-DE" b="0" i="1" smtClean="0">
+                            <a:latin typeface="Cambria Math" panose="02040503050406030204" pitchFamily="18" charset="0"/>
+                          </a:rPr>
+                          <m:t>𝑇</m:t>
                         </m:r>
                       </m:sup>
                     </m:sSup>
@@ -14130,7 +13879,7 @@
               <a:blipFill>
                 <a:blip r:embed="rId2"/>
                 <a:stretch>
-                  <a:fillRect l="-1206" t="-2326"/>
+                  <a:fillRect t="-2616"/>
                 </a:stretch>
               </a:blipFill>
             </p:spPr>
@@ -14172,18 +13921,717 @@
           <a:p>
             <a:fld id="{08C366F5-AFAD-49CB-854A-9D9E238FCA13}" type="slidenum">
               <a:rPr lang="en-GB" smtClean="0"/>
-              <a:t>22</a:t>
+              <a:t>21</a:t>
             </a:fld>
             <a:endParaRPr lang="en-GB"/>
           </a:p>
         </p:txBody>
       </p:sp>
+      <mc:AlternateContent xmlns:mc="http://schemas.openxmlformats.org/markup-compatibility/2006">
+        <mc:Choice xmlns:a14="http://schemas.microsoft.com/office/drawing/2010/main" Requires="a14">
+          <p:sp>
+            <p:nvSpPr>
+              <p:cNvPr id="6" name="Textfeld 5">
+                <a:extLst>
+                  <a:ext uri="{FF2B5EF4-FFF2-40B4-BE49-F238E27FC236}">
+                    <a16:creationId xmlns:a16="http://schemas.microsoft.com/office/drawing/2014/main" id="{09AED19D-7D00-A995-349C-1190786F7CE9}"/>
+                  </a:ext>
+                </a:extLst>
+              </p:cNvPr>
+              <p:cNvSpPr txBox="1"/>
+              <p:nvPr/>
+            </p:nvSpPr>
+            <p:spPr>
+              <a:xfrm>
+                <a:off x="838200" y="1687826"/>
+                <a:ext cx="3467482" cy="1114088"/>
+              </a:xfrm>
+              <a:prstGeom prst="rect">
+                <a:avLst/>
+              </a:prstGeom>
+              <a:noFill/>
+            </p:spPr>
+            <p:txBody>
+              <a:bodyPr wrap="square">
+                <a:spAutoFit/>
+              </a:bodyPr>
+              <a:lstStyle/>
+              <a:p>
+                <a:pPr/>
+                <a:r>
+                  <a:rPr lang="de-DE" sz="2200" dirty="0"/>
+                  <a:t>Sampling </a:t>
+                </a:r>
+                <a:r>
+                  <a:rPr lang="de-DE" sz="2200" dirty="0" err="1"/>
+                  <a:t>exponentials</a:t>
+                </a:r>
+                <a:r>
+                  <a:rPr lang="de-DE" sz="2200" dirty="0"/>
+                  <a:t>:</a:t>
+                </a:r>
+                <a:endParaRPr lang="de-DE" sz="2200" b="0" dirty="0"/>
+              </a:p>
+              <a:p>
+                <a:pPr/>
+                <a14:m>
+                  <m:oMathPara xmlns:m="http://schemas.openxmlformats.org/officeDocument/2006/math">
+                    <m:oMathParaPr>
+                      <m:jc m:val="centerGroup"/>
+                    </m:oMathParaPr>
+                    <m:oMath xmlns:m="http://schemas.openxmlformats.org/officeDocument/2006/math">
+                      <m:r>
+                        <a:rPr lang="de-DE" sz="2200" b="0" i="1" smtClean="0">
+                          <a:latin typeface="Cambria Math" panose="02040503050406030204" pitchFamily="18" charset="0"/>
+                        </a:rPr>
+                        <m:t>𝑥</m:t>
+                      </m:r>
+                      <m:d>
+                        <m:dPr>
+                          <m:ctrlPr>
+                            <a:rPr lang="de-DE" sz="2200" b="0" i="1" smtClean="0">
+                              <a:latin typeface="Cambria Math" panose="02040503050406030204" pitchFamily="18" charset="0"/>
+                            </a:rPr>
+                          </m:ctrlPr>
+                        </m:dPr>
+                        <m:e>
+                          <m:r>
+                            <a:rPr lang="de-DE" sz="2200" b="0" i="1" smtClean="0">
+                              <a:latin typeface="Cambria Math" panose="02040503050406030204" pitchFamily="18" charset="0"/>
+                            </a:rPr>
+                            <m:t>𝑡</m:t>
+                          </m:r>
+                        </m:e>
+                      </m:d>
+                      <m:r>
+                        <a:rPr lang="de-DE" sz="2200" b="0" i="1" smtClean="0">
+                          <a:latin typeface="Cambria Math" panose="02040503050406030204" pitchFamily="18" charset="0"/>
+                        </a:rPr>
+                        <m:t>=</m:t>
+                      </m:r>
+                      <m:sSup>
+                        <m:sSupPr>
+                          <m:ctrlPr>
+                            <a:rPr lang="de-DE" sz="2200" b="0" i="1" smtClean="0">
+                              <a:latin typeface="Cambria Math" panose="02040503050406030204" pitchFamily="18" charset="0"/>
+                            </a:rPr>
+                          </m:ctrlPr>
+                        </m:sSupPr>
+                        <m:e>
+                          <m:r>
+                            <a:rPr lang="de-DE" sz="2200" b="0" i="1" smtClean="0">
+                              <a:latin typeface="Cambria Math" panose="02040503050406030204" pitchFamily="18" charset="0"/>
+                            </a:rPr>
+                            <m:t>𝑒</m:t>
+                          </m:r>
+                        </m:e>
+                        <m:sup>
+                          <m:r>
+                            <a:rPr lang="de-DE" sz="2200" b="0" i="1" smtClean="0">
+                              <a:latin typeface="Cambria Math" panose="02040503050406030204" pitchFamily="18" charset="0"/>
+                            </a:rPr>
+                            <m:t>𝑠𝑡</m:t>
+                          </m:r>
+                        </m:sup>
+                      </m:sSup>
+                    </m:oMath>
+                  </m:oMathPara>
+                </a14:m>
+                <a:endParaRPr lang="de-DE" sz="2200" b="0" dirty="0"/>
+              </a:p>
+              <a:p>
+                <a14:m>
+                  <m:oMathPara xmlns:m="http://schemas.openxmlformats.org/officeDocument/2006/math">
+                    <m:oMathParaPr>
+                      <m:jc m:val="centerGroup"/>
+                    </m:oMathParaPr>
+                    <m:oMath xmlns:m="http://schemas.openxmlformats.org/officeDocument/2006/math">
+                      <m:r>
+                        <a:rPr lang="de-DE" sz="2200" i="1">
+                          <a:latin typeface="Cambria Math" panose="02040503050406030204" pitchFamily="18" charset="0"/>
+                        </a:rPr>
+                        <m:t>𝑥</m:t>
+                      </m:r>
+                      <m:d>
+                        <m:dPr>
+                          <m:begChr m:val="["/>
+                          <m:endChr m:val="]"/>
+                          <m:ctrlPr>
+                            <a:rPr lang="de-DE" sz="2200" i="1" smtClean="0">
+                              <a:latin typeface="Cambria Math" panose="02040503050406030204" pitchFamily="18" charset="0"/>
+                            </a:rPr>
+                          </m:ctrlPr>
+                        </m:dPr>
+                        <m:e>
+                          <m:r>
+                            <a:rPr lang="de-DE" sz="2200" b="0" i="1" smtClean="0">
+                              <a:latin typeface="Cambria Math" panose="02040503050406030204" pitchFamily="18" charset="0"/>
+                            </a:rPr>
+                            <m:t>𝑘</m:t>
+                          </m:r>
+                        </m:e>
+                      </m:d>
+                      <m:r>
+                        <a:rPr lang="de-DE" sz="2200" i="1">
+                          <a:latin typeface="Cambria Math" panose="02040503050406030204" pitchFamily="18" charset="0"/>
+                        </a:rPr>
+                        <m:t>=</m:t>
+                      </m:r>
+                      <m:sSup>
+                        <m:sSupPr>
+                          <m:ctrlPr>
+                            <a:rPr lang="de-DE" sz="2200" i="1">
+                              <a:latin typeface="Cambria Math" panose="02040503050406030204" pitchFamily="18" charset="0"/>
+                            </a:rPr>
+                          </m:ctrlPr>
+                        </m:sSupPr>
+                        <m:e>
+                          <m:r>
+                            <a:rPr lang="de-DE" sz="2200" i="1">
+                              <a:latin typeface="Cambria Math" panose="02040503050406030204" pitchFamily="18" charset="0"/>
+                            </a:rPr>
+                            <m:t>𝑒</m:t>
+                          </m:r>
+                        </m:e>
+                        <m:sup>
+                          <m:r>
+                            <a:rPr lang="de-DE" sz="2200" i="1">
+                              <a:latin typeface="Cambria Math" panose="02040503050406030204" pitchFamily="18" charset="0"/>
+                            </a:rPr>
+                            <m:t>𝑠</m:t>
+                          </m:r>
+                          <m:r>
+                            <a:rPr lang="de-DE" sz="2200" b="0" i="1" smtClean="0">
+                              <a:latin typeface="Cambria Math" panose="02040503050406030204" pitchFamily="18" charset="0"/>
+                            </a:rPr>
+                            <m:t>𝑘𝑇</m:t>
+                          </m:r>
+                        </m:sup>
+                      </m:sSup>
+                      <m:r>
+                        <a:rPr lang="de-DE" sz="2200" b="0" i="1" smtClean="0">
+                          <a:latin typeface="Cambria Math" panose="02040503050406030204" pitchFamily="18" charset="0"/>
+                        </a:rPr>
+                        <m:t>=</m:t>
+                      </m:r>
+                      <m:sSup>
+                        <m:sSupPr>
+                          <m:ctrlPr>
+                            <a:rPr lang="de-DE" sz="2200" b="0" i="1" smtClean="0">
+                              <a:latin typeface="Cambria Math" panose="02040503050406030204" pitchFamily="18" charset="0"/>
+                            </a:rPr>
+                          </m:ctrlPr>
+                        </m:sSupPr>
+                        <m:e>
+                          <m:d>
+                            <m:dPr>
+                              <m:ctrlPr>
+                                <a:rPr lang="de-DE" sz="2200" b="0" i="1" smtClean="0">
+                                  <a:latin typeface="Cambria Math" panose="02040503050406030204" pitchFamily="18" charset="0"/>
+                                </a:rPr>
+                              </m:ctrlPr>
+                            </m:dPr>
+                            <m:e>
+                              <m:sSup>
+                                <m:sSupPr>
+                                  <m:ctrlPr>
+                                    <a:rPr lang="de-DE" sz="2200" i="1">
+                                      <a:latin typeface="Cambria Math" panose="02040503050406030204" pitchFamily="18" charset="0"/>
+                                    </a:rPr>
+                                  </m:ctrlPr>
+                                </m:sSupPr>
+                                <m:e>
+                                  <m:r>
+                                    <a:rPr lang="de-DE" sz="2200" i="1">
+                                      <a:latin typeface="Cambria Math" panose="02040503050406030204" pitchFamily="18" charset="0"/>
+                                    </a:rPr>
+                                    <m:t>𝑒</m:t>
+                                  </m:r>
+                                </m:e>
+                                <m:sup>
+                                  <m:r>
+                                    <a:rPr lang="de-DE" sz="2200" i="1">
+                                      <a:latin typeface="Cambria Math" panose="02040503050406030204" pitchFamily="18" charset="0"/>
+                                    </a:rPr>
+                                    <m:t>𝑠</m:t>
+                                  </m:r>
+                                  <m:r>
+                                    <a:rPr lang="de-DE" sz="2200" i="1">
+                                      <a:latin typeface="Cambria Math" panose="02040503050406030204" pitchFamily="18" charset="0"/>
+                                    </a:rPr>
+                                    <m:t>𝑇</m:t>
+                                  </m:r>
+                                </m:sup>
+                              </m:sSup>
+                            </m:e>
+                          </m:d>
+                        </m:e>
+                        <m:sup>
+                          <m:r>
+                            <a:rPr lang="de-DE" sz="2200" b="0" i="1" smtClean="0">
+                              <a:latin typeface="Cambria Math" panose="02040503050406030204" pitchFamily="18" charset="0"/>
+                            </a:rPr>
+                            <m:t>𝑘</m:t>
+                          </m:r>
+                        </m:sup>
+                      </m:sSup>
+                      <m:r>
+                        <a:rPr lang="de-DE" sz="2200" b="0" i="1" smtClean="0">
+                          <a:latin typeface="Cambria Math" panose="02040503050406030204" pitchFamily="18" charset="0"/>
+                        </a:rPr>
+                        <m:t>=</m:t>
+                      </m:r>
+                      <m:sSup>
+                        <m:sSupPr>
+                          <m:ctrlPr>
+                            <a:rPr lang="de-DE" sz="2200" b="0" i="1" smtClean="0">
+                              <a:latin typeface="Cambria Math" panose="02040503050406030204" pitchFamily="18" charset="0"/>
+                            </a:rPr>
+                          </m:ctrlPr>
+                        </m:sSupPr>
+                        <m:e>
+                          <m:r>
+                            <a:rPr lang="de-DE" sz="2200" b="0" i="1" smtClean="0">
+                              <a:latin typeface="Cambria Math" panose="02040503050406030204" pitchFamily="18" charset="0"/>
+                            </a:rPr>
+                            <m:t>𝑧</m:t>
+                          </m:r>
+                        </m:e>
+                        <m:sup>
+                          <m:r>
+                            <a:rPr lang="de-DE" sz="2200" b="0" i="1" smtClean="0">
+                              <a:latin typeface="Cambria Math" panose="02040503050406030204" pitchFamily="18" charset="0"/>
+                            </a:rPr>
+                            <m:t>𝑘</m:t>
+                          </m:r>
+                        </m:sup>
+                      </m:sSup>
+                    </m:oMath>
+                  </m:oMathPara>
+                </a14:m>
+                <a:endParaRPr lang="de-DE" sz="2200" dirty="0"/>
+              </a:p>
+            </p:txBody>
+          </p:sp>
+        </mc:Choice>
+        <mc:Fallback>
+          <p:sp>
+            <p:nvSpPr>
+              <p:cNvPr id="6" name="Textfeld 5">
+                <a:extLst>
+                  <a:ext uri="{FF2B5EF4-FFF2-40B4-BE49-F238E27FC236}">
+                    <a16:creationId xmlns:a16="http://schemas.microsoft.com/office/drawing/2014/main" id="{09AED19D-7D00-A995-349C-1190786F7CE9}"/>
+                  </a:ext>
+                </a:extLst>
+              </p:cNvPr>
+              <p:cNvSpPr txBox="1">
+                <a:spLocks noRot="1" noChangeAspect="1" noMove="1" noResize="1" noEditPoints="1" noAdjustHandles="1" noChangeArrowheads="1" noChangeShapeType="1" noTextEdit="1"/>
+              </p:cNvSpPr>
+              <p:nvPr/>
+            </p:nvSpPr>
+            <p:spPr>
+              <a:xfrm>
+                <a:off x="838200" y="1687826"/>
+                <a:ext cx="3467482" cy="1114088"/>
+              </a:xfrm>
+              <a:prstGeom prst="rect">
+                <a:avLst/>
+              </a:prstGeom>
+              <a:blipFill>
+                <a:blip r:embed="rId3"/>
+                <a:stretch>
+                  <a:fillRect l="-2198" t="-3371"/>
+                </a:stretch>
+              </a:blipFill>
+            </p:spPr>
+            <p:txBody>
+              <a:bodyPr/>
+              <a:lstStyle/>
+              <a:p>
+                <a:r>
+                  <a:rPr lang="de-DE">
+                    <a:noFill/>
+                  </a:rPr>
+                  <a:t> </a:t>
+                </a:r>
+              </a:p>
+            </p:txBody>
+          </p:sp>
+        </mc:Fallback>
+      </mc:AlternateContent>
+      <mc:AlternateContent xmlns:mc="http://schemas.openxmlformats.org/markup-compatibility/2006">
+        <mc:Choice xmlns:a14="http://schemas.microsoft.com/office/drawing/2010/main" Requires="a14">
+          <p:sp>
+            <p:nvSpPr>
+              <p:cNvPr id="9" name="Textfeld 8">
+                <a:extLst>
+                  <a:ext uri="{FF2B5EF4-FFF2-40B4-BE49-F238E27FC236}">
+                    <a16:creationId xmlns:a16="http://schemas.microsoft.com/office/drawing/2014/main" id="{31EE7CF9-84FB-C61F-FA72-CE026A481771}"/>
+                  </a:ext>
+                </a:extLst>
+              </p:cNvPr>
+              <p:cNvSpPr txBox="1"/>
+              <p:nvPr/>
+            </p:nvSpPr>
+            <p:spPr>
+              <a:xfrm>
+                <a:off x="116864" y="3570407"/>
+                <a:ext cx="1558012" cy="430887"/>
+              </a:xfrm>
+              <a:prstGeom prst="rect">
+                <a:avLst/>
+              </a:prstGeom>
+              <a:noFill/>
+            </p:spPr>
+            <p:txBody>
+              <a:bodyPr wrap="square">
+                <a:spAutoFit/>
+              </a:bodyPr>
+              <a:lstStyle/>
+              <a:p>
+                <a:pPr/>
+                <a14:m>
+                  <m:oMathPara xmlns:m="http://schemas.openxmlformats.org/officeDocument/2006/math">
+                    <m:oMathParaPr>
+                      <m:jc m:val="centerGroup"/>
+                    </m:oMathParaPr>
+                    <m:oMath xmlns:m="http://schemas.openxmlformats.org/officeDocument/2006/math">
+                      <m:r>
+                        <a:rPr lang="de-DE" sz="2200" b="0" i="1" smtClean="0">
+                          <a:latin typeface="Cambria Math" panose="02040503050406030204" pitchFamily="18" charset="0"/>
+                        </a:rPr>
+                        <m:t>𝑠</m:t>
+                      </m:r>
+                      <m:r>
+                        <a:rPr lang="de-DE" sz="2200" i="1">
+                          <a:latin typeface="Cambria Math" panose="02040503050406030204" pitchFamily="18" charset="0"/>
+                        </a:rPr>
+                        <m:t>=</m:t>
+                      </m:r>
+                      <m:r>
+                        <a:rPr lang="de-DE" sz="2200" i="1">
+                          <a:latin typeface="Cambria Math" panose="02040503050406030204" pitchFamily="18" charset="0"/>
+                          <a:ea typeface="Cambria Math" panose="02040503050406030204" pitchFamily="18" charset="0"/>
+                        </a:rPr>
+                        <m:t>𝜎</m:t>
+                      </m:r>
+                      <m:r>
+                        <a:rPr lang="de-DE" sz="2200" i="1">
+                          <a:latin typeface="Cambria Math" panose="02040503050406030204" pitchFamily="18" charset="0"/>
+                          <a:ea typeface="Cambria Math" panose="02040503050406030204" pitchFamily="18" charset="0"/>
+                        </a:rPr>
+                        <m:t>+</m:t>
+                      </m:r>
+                      <m:r>
+                        <a:rPr lang="de-DE" sz="2200" i="1">
+                          <a:latin typeface="Cambria Math" panose="02040503050406030204" pitchFamily="18" charset="0"/>
+                          <a:ea typeface="Cambria Math" panose="02040503050406030204" pitchFamily="18" charset="0"/>
+                        </a:rPr>
+                        <m:t>𝑗</m:t>
+                      </m:r>
+                      <m:r>
+                        <a:rPr lang="de-DE" sz="2200" i="1">
+                          <a:latin typeface="Cambria Math" panose="02040503050406030204" pitchFamily="18" charset="0"/>
+                          <a:ea typeface="Cambria Math" panose="02040503050406030204" pitchFamily="18" charset="0"/>
+                        </a:rPr>
+                        <m:t>𝜔</m:t>
+                      </m:r>
+                    </m:oMath>
+                  </m:oMathPara>
+                </a14:m>
+                <a:endParaRPr lang="de-DE" sz="2200" dirty="0"/>
+              </a:p>
+            </p:txBody>
+          </p:sp>
+        </mc:Choice>
+        <mc:Fallback>
+          <p:sp>
+            <p:nvSpPr>
+              <p:cNvPr id="9" name="Textfeld 8">
+                <a:extLst>
+                  <a:ext uri="{FF2B5EF4-FFF2-40B4-BE49-F238E27FC236}">
+                    <a16:creationId xmlns:a16="http://schemas.microsoft.com/office/drawing/2014/main" id="{31EE7CF9-84FB-C61F-FA72-CE026A481771}"/>
+                  </a:ext>
+                </a:extLst>
+              </p:cNvPr>
+              <p:cNvSpPr txBox="1">
+                <a:spLocks noRot="1" noChangeAspect="1" noMove="1" noResize="1" noEditPoints="1" noAdjustHandles="1" noChangeArrowheads="1" noChangeShapeType="1" noTextEdit="1"/>
+              </p:cNvSpPr>
+              <p:nvPr/>
+            </p:nvSpPr>
+            <p:spPr>
+              <a:xfrm>
+                <a:off x="116864" y="3570407"/>
+                <a:ext cx="1558012" cy="430887"/>
+              </a:xfrm>
+              <a:prstGeom prst="rect">
+                <a:avLst/>
+              </a:prstGeom>
+              <a:blipFill>
+                <a:blip r:embed="rId4"/>
+                <a:stretch>
+                  <a:fillRect b="-14706"/>
+                </a:stretch>
+              </a:blipFill>
+            </p:spPr>
+            <p:txBody>
+              <a:bodyPr/>
+              <a:lstStyle/>
+              <a:p>
+                <a:r>
+                  <a:rPr lang="de-DE">
+                    <a:noFill/>
+                  </a:rPr>
+                  <a:t> </a:t>
+                </a:r>
+              </a:p>
+            </p:txBody>
+          </p:sp>
+        </mc:Fallback>
+      </mc:AlternateContent>
+      <mc:AlternateContent xmlns:mc="http://schemas.openxmlformats.org/markup-compatibility/2006">
+        <mc:Choice xmlns:a14="http://schemas.microsoft.com/office/drawing/2010/main" Requires="a14">
+          <p:sp>
+            <p:nvSpPr>
+              <p:cNvPr id="11" name="Textfeld 10">
+                <a:extLst>
+                  <a:ext uri="{FF2B5EF4-FFF2-40B4-BE49-F238E27FC236}">
+                    <a16:creationId xmlns:a16="http://schemas.microsoft.com/office/drawing/2014/main" id="{7F752E6F-CBE9-9DB7-0269-92231678175E}"/>
+                  </a:ext>
+                </a:extLst>
+              </p:cNvPr>
+              <p:cNvSpPr txBox="1"/>
+              <p:nvPr/>
+            </p:nvSpPr>
+            <p:spPr>
+              <a:xfrm>
+                <a:off x="9447276" y="3570407"/>
+                <a:ext cx="2465832" cy="1457579"/>
+              </a:xfrm>
+              <a:prstGeom prst="rect">
+                <a:avLst/>
+              </a:prstGeom>
+              <a:noFill/>
+            </p:spPr>
+            <p:txBody>
+              <a:bodyPr wrap="square">
+                <a:spAutoFit/>
+              </a:bodyPr>
+              <a:lstStyle/>
+              <a:p>
+                <a:pPr/>
+                <a14:m>
+                  <m:oMathPara xmlns:m="http://schemas.openxmlformats.org/officeDocument/2006/math">
+                    <m:oMathParaPr>
+                      <m:jc m:val="centerGroup"/>
+                    </m:oMathParaPr>
+                    <m:oMath xmlns:m="http://schemas.openxmlformats.org/officeDocument/2006/math">
+                      <m:r>
+                        <a:rPr lang="de-DE" sz="2200" b="0" i="1" smtClean="0">
+                          <a:latin typeface="Cambria Math" panose="02040503050406030204" pitchFamily="18" charset="0"/>
+                        </a:rPr>
+                        <m:t>𝑧</m:t>
+                      </m:r>
+                      <m:r>
+                        <a:rPr lang="de-DE" sz="2200" i="1">
+                          <a:latin typeface="Cambria Math" panose="02040503050406030204" pitchFamily="18" charset="0"/>
+                        </a:rPr>
+                        <m:t>=</m:t>
+                      </m:r>
+                      <m:sSup>
+                        <m:sSupPr>
+                          <m:ctrlPr>
+                            <a:rPr lang="de-DE" sz="2200" i="1">
+                              <a:latin typeface="Cambria Math" panose="02040503050406030204" pitchFamily="18" charset="0"/>
+                            </a:rPr>
+                          </m:ctrlPr>
+                        </m:sSupPr>
+                        <m:e>
+                          <m:r>
+                            <a:rPr lang="de-DE" sz="2200" i="1">
+                              <a:latin typeface="Cambria Math" panose="02040503050406030204" pitchFamily="18" charset="0"/>
+                            </a:rPr>
+                            <m:t>𝑒</m:t>
+                          </m:r>
+                        </m:e>
+                        <m:sup>
+                          <m:r>
+                            <a:rPr lang="de-DE" sz="2200" i="1">
+                              <a:latin typeface="Cambria Math" panose="02040503050406030204" pitchFamily="18" charset="0"/>
+                              <a:ea typeface="Cambria Math" panose="02040503050406030204" pitchFamily="18" charset="0"/>
+                            </a:rPr>
+                            <m:t>𝜎</m:t>
+                          </m:r>
+                          <m:r>
+                            <a:rPr lang="de-DE" sz="2200" i="1">
+                              <a:latin typeface="Cambria Math" panose="02040503050406030204" pitchFamily="18" charset="0"/>
+                            </a:rPr>
+                            <m:t>𝑇</m:t>
+                          </m:r>
+                        </m:sup>
+                      </m:sSup>
+                      <m:r>
+                        <a:rPr lang="de-DE" sz="2200" i="1">
+                          <a:latin typeface="Cambria Math" panose="02040503050406030204" pitchFamily="18" charset="0"/>
+                          <a:ea typeface="Cambria Math" panose="02040503050406030204" pitchFamily="18" charset="0"/>
+                        </a:rPr>
+                        <m:t>+</m:t>
+                      </m:r>
+                      <m:sSup>
+                        <m:sSupPr>
+                          <m:ctrlPr>
+                            <a:rPr lang="de-DE" sz="2200" i="1">
+                              <a:latin typeface="Cambria Math" panose="02040503050406030204" pitchFamily="18" charset="0"/>
+                            </a:rPr>
+                          </m:ctrlPr>
+                        </m:sSupPr>
+                        <m:e>
+                          <m:r>
+                            <a:rPr lang="de-DE" sz="2200" i="1">
+                              <a:latin typeface="Cambria Math" panose="02040503050406030204" pitchFamily="18" charset="0"/>
+                            </a:rPr>
+                            <m:t>𝑒</m:t>
+                          </m:r>
+                        </m:e>
+                        <m:sup>
+                          <m:r>
+                            <a:rPr lang="de-DE" sz="2200" i="1">
+                              <a:latin typeface="Cambria Math" panose="02040503050406030204" pitchFamily="18" charset="0"/>
+                              <a:ea typeface="Cambria Math" panose="02040503050406030204" pitchFamily="18" charset="0"/>
+                            </a:rPr>
+                            <m:t>𝑗</m:t>
+                          </m:r>
+                          <m:r>
+                            <a:rPr lang="de-DE" sz="2200" i="1">
+                              <a:latin typeface="Cambria Math" panose="02040503050406030204" pitchFamily="18" charset="0"/>
+                              <a:ea typeface="Cambria Math" panose="02040503050406030204" pitchFamily="18" charset="0"/>
+                            </a:rPr>
+                            <m:t>𝜔</m:t>
+                          </m:r>
+                          <m:r>
+                            <a:rPr lang="de-DE" sz="2200" i="1">
+                              <a:latin typeface="Cambria Math" panose="02040503050406030204" pitchFamily="18" charset="0"/>
+                            </a:rPr>
+                            <m:t>𝑇</m:t>
+                          </m:r>
+                        </m:sup>
+                      </m:sSup>
+                    </m:oMath>
+                  </m:oMathPara>
+                </a14:m>
+                <a:endParaRPr lang="de-DE" sz="2200" dirty="0"/>
+              </a:p>
+              <a:p>
+                <a:pPr/>
+                <a:endParaRPr lang="de-DE" sz="2200" dirty="0"/>
+              </a:p>
+              <a:p>
+                <a14:m>
+                  <m:oMath xmlns:m="http://schemas.openxmlformats.org/officeDocument/2006/math">
+                    <m:r>
+                      <a:rPr lang="de-DE" sz="2200" i="1">
+                        <a:latin typeface="Cambria Math" panose="02040503050406030204" pitchFamily="18" charset="0"/>
+                        <a:ea typeface="Cambria Math" panose="02040503050406030204" pitchFamily="18" charset="0"/>
+                      </a:rPr>
+                      <m:t>𝜎</m:t>
+                    </m:r>
+                    <m:r>
+                      <a:rPr lang="de-DE" sz="2200" i="1">
+                        <a:latin typeface="Cambria Math" panose="02040503050406030204" pitchFamily="18" charset="0"/>
+                        <a:ea typeface="Cambria Math" panose="02040503050406030204" pitchFamily="18" charset="0"/>
+                      </a:rPr>
+                      <m:t>=0</m:t>
+                    </m:r>
+                  </m:oMath>
+                </a14:m>
+                <a:r>
+                  <a:rPr lang="de-DE" sz="2200" dirty="0"/>
+                  <a:t> </a:t>
+                </a:r>
+                <a:r>
+                  <a:rPr lang="de-DE" sz="2200" dirty="0">
+                    <a:sym typeface="Wingdings" pitchFamily="2" charset="2"/>
+                  </a:rPr>
+                  <a:t> </a:t>
+                </a:r>
+                <a:r>
+                  <a:rPr lang="de-DE" sz="2200" dirty="0" err="1">
+                    <a:sym typeface="Wingdings" pitchFamily="2" charset="2"/>
+                  </a:rPr>
+                  <a:t>unit</a:t>
+                </a:r>
+                <a:r>
+                  <a:rPr lang="de-DE" sz="2200" dirty="0">
+                    <a:sym typeface="Wingdings" pitchFamily="2" charset="2"/>
+                  </a:rPr>
+                  <a:t> </a:t>
+                </a:r>
+                <a:r>
+                  <a:rPr lang="de-DE" sz="2200" dirty="0" err="1">
+                    <a:sym typeface="Wingdings" pitchFamily="2" charset="2"/>
+                  </a:rPr>
+                  <a:t>circle</a:t>
+                </a:r>
+                <a:endParaRPr lang="de-DE" sz="2200" dirty="0"/>
+              </a:p>
+              <a:p>
+                <a:pPr/>
+                <a:endParaRPr lang="de-DE" sz="2200" dirty="0"/>
+              </a:p>
+            </p:txBody>
+          </p:sp>
+        </mc:Choice>
+        <mc:Fallback>
+          <p:sp>
+            <p:nvSpPr>
+              <p:cNvPr id="11" name="Textfeld 10">
+                <a:extLst>
+                  <a:ext uri="{FF2B5EF4-FFF2-40B4-BE49-F238E27FC236}">
+                    <a16:creationId xmlns:a16="http://schemas.microsoft.com/office/drawing/2014/main" id="{7F752E6F-CBE9-9DB7-0269-92231678175E}"/>
+                  </a:ext>
+                </a:extLst>
+              </p:cNvPr>
+              <p:cNvSpPr txBox="1">
+                <a:spLocks noRot="1" noChangeAspect="1" noMove="1" noResize="1" noEditPoints="1" noAdjustHandles="1" noChangeArrowheads="1" noChangeShapeType="1" noTextEdit="1"/>
+              </p:cNvSpPr>
+              <p:nvPr/>
+            </p:nvSpPr>
+            <p:spPr>
+              <a:xfrm>
+                <a:off x="9447276" y="3570407"/>
+                <a:ext cx="2465832" cy="1457579"/>
+              </a:xfrm>
+              <a:prstGeom prst="rect">
+                <a:avLst/>
+              </a:prstGeom>
+              <a:blipFill>
+                <a:blip r:embed="rId5"/>
+                <a:stretch>
+                  <a:fillRect r="-2577"/>
+                </a:stretch>
+              </a:blipFill>
+            </p:spPr>
+            <p:txBody>
+              <a:bodyPr/>
+              <a:lstStyle/>
+              <a:p>
+                <a:r>
+                  <a:rPr lang="de-DE">
+                    <a:noFill/>
+                  </a:rPr>
+                  <a:t> </a:t>
+                </a:r>
+              </a:p>
+            </p:txBody>
+          </p:sp>
+        </mc:Fallback>
+      </mc:AlternateContent>
       <p:pic>
         <p:nvPicPr>
-          <p:cNvPr id="7" name="Grafik 6">
+          <p:cNvPr id="12" name="Grafik 11">
             <a:extLst>
               <a:ext uri="{FF2B5EF4-FFF2-40B4-BE49-F238E27FC236}">
-                <a16:creationId xmlns:a16="http://schemas.microsoft.com/office/drawing/2014/main" id="{54A30DB2-44CF-6D11-AD01-903F3A9DDB6C}"/>
+                <a16:creationId xmlns:a16="http://schemas.microsoft.com/office/drawing/2014/main" id="{42CB669C-D189-4B3C-F152-5BD40E97B752}"/>
               </a:ext>
             </a:extLst>
           </p:cNvPr>
@@ -14193,15 +14641,15 @@
           <p:nvPr/>
         </p:nvPicPr>
         <p:blipFill>
-          <a:blip r:embed="rId3"/>
+          <a:blip r:embed="rId6"/>
           <a:stretch>
             <a:fillRect/>
           </a:stretch>
         </p:blipFill>
         <p:spPr>
           <a:xfrm>
-            <a:off x="1329206" y="2413000"/>
-            <a:ext cx="9533588" cy="4079875"/>
+            <a:off x="1674876" y="3252910"/>
+            <a:ext cx="7772400" cy="3286002"/>
           </a:xfrm>
           <a:prstGeom prst="rect">
             <a:avLst/>
@@ -14212,6 +14660,556 @@
     <p:extLst>
       <p:ext uri="{BB962C8B-B14F-4D97-AF65-F5344CB8AC3E}">
         <p14:creationId xmlns:p14="http://schemas.microsoft.com/office/powerpoint/2010/main" val="4063553706"/>
+      </p:ext>
+    </p:extLst>
+  </p:cSld>
+  <p:clrMapOvr>
+    <a:masterClrMapping/>
+  </p:clrMapOvr>
+</p:sld>
+</file>
+
+<file path=ppt/slides/slide22.xml><?xml version="1.0" encoding="utf-8"?>
+<p:sld xmlns:a="http://schemas.openxmlformats.org/drawingml/2006/main" xmlns:r="http://schemas.openxmlformats.org/officeDocument/2006/relationships" xmlns:p="http://schemas.openxmlformats.org/presentationml/2006/main">
+  <p:cSld>
+    <p:spTree>
+      <p:nvGrpSpPr>
+        <p:cNvPr id="1" name=""/>
+        <p:cNvGrpSpPr/>
+        <p:nvPr/>
+      </p:nvGrpSpPr>
+      <p:grpSpPr>
+        <a:xfrm>
+          <a:off x="0" y="0"/>
+          <a:ext cx="0" cy="0"/>
+          <a:chOff x="0" y="0"/>
+          <a:chExt cx="0" cy="0"/>
+        </a:xfrm>
+      </p:grpSpPr>
+      <p:pic>
+        <p:nvPicPr>
+          <p:cNvPr id="6" name="Grafik 5">
+            <a:extLst>
+              <a:ext uri="{FF2B5EF4-FFF2-40B4-BE49-F238E27FC236}">
+                <a16:creationId xmlns:a16="http://schemas.microsoft.com/office/drawing/2014/main" id="{6B36AE83-611D-B02A-12BE-0EC671187279}"/>
+              </a:ext>
+            </a:extLst>
+          </p:cNvPr>
+          <p:cNvPicPr>
+            <a:picLocks noChangeAspect="1"/>
+          </p:cNvPicPr>
+          <p:nvPr/>
+        </p:nvPicPr>
+        <p:blipFill>
+          <a:blip r:embed="rId2"/>
+          <a:stretch>
+            <a:fillRect/>
+          </a:stretch>
+        </p:blipFill>
+        <p:spPr>
+          <a:xfrm>
+            <a:off x="838200" y="1539462"/>
+            <a:ext cx="5257800" cy="5182011"/>
+          </a:xfrm>
+          <a:prstGeom prst="rect">
+            <a:avLst/>
+          </a:prstGeom>
+        </p:spPr>
+      </p:pic>
+      <p:sp>
+        <p:nvSpPr>
+          <p:cNvPr id="2" name="Titel 1">
+            <a:extLst>
+              <a:ext uri="{FF2B5EF4-FFF2-40B4-BE49-F238E27FC236}">
+                <a16:creationId xmlns:a16="http://schemas.microsoft.com/office/drawing/2014/main" id="{5E6D035F-C0FB-44AD-30F4-AFEDE2F71227}"/>
+              </a:ext>
+            </a:extLst>
+          </p:cNvPr>
+          <p:cNvSpPr>
+            <a:spLocks noGrp="1"/>
+          </p:cNvSpPr>
+          <p:nvPr>
+            <p:ph type="title"/>
+          </p:nvPr>
+        </p:nvSpPr>
+        <p:spPr/>
+        <p:txBody>
+          <a:bodyPr/>
+          <a:lstStyle/>
+          <a:p>
+            <a:r>
+              <a:rPr lang="de-DE" dirty="0" err="1"/>
+              <a:t>Stability</a:t>
+            </a:r>
+            <a:r>
+              <a:rPr lang="de-DE" dirty="0"/>
+              <a:t> in </a:t>
+            </a:r>
+            <a:r>
+              <a:rPr lang="de-DE" dirty="0" err="1"/>
+              <a:t>Discrete</a:t>
+            </a:r>
+            <a:r>
+              <a:rPr lang="de-DE" dirty="0"/>
+              <a:t>-Time Systems</a:t>
+            </a:r>
+          </a:p>
+        </p:txBody>
+      </p:sp>
+      <mc:AlternateContent xmlns:mc="http://schemas.openxmlformats.org/markup-compatibility/2006">
+        <mc:Choice xmlns:a14="http://schemas.microsoft.com/office/drawing/2010/main" Requires="a14">
+          <p:sp>
+            <p:nvSpPr>
+              <p:cNvPr id="3" name="Inhaltsplatzhalter 2">
+                <a:extLst>
+                  <a:ext uri="{FF2B5EF4-FFF2-40B4-BE49-F238E27FC236}">
+                    <a16:creationId xmlns:a16="http://schemas.microsoft.com/office/drawing/2014/main" id="{D59F1111-2F1A-4B89-470B-1C913FCB4666}"/>
+                  </a:ext>
+                </a:extLst>
+              </p:cNvPr>
+              <p:cNvSpPr>
+                <a:spLocks noGrp="1"/>
+              </p:cNvSpPr>
+              <p:nvPr>
+                <p:ph idx="1"/>
+              </p:nvPr>
+            </p:nvSpPr>
+            <p:spPr>
+              <a:xfrm>
+                <a:off x="6585526" y="1825625"/>
+                <a:ext cx="4768273" cy="4351338"/>
+              </a:xfrm>
+            </p:spPr>
+            <p:txBody>
+              <a:bodyPr>
+                <a:normAutofit/>
+              </a:bodyPr>
+              <a:lstStyle/>
+              <a:p>
+                <a:pPr marL="0" indent="0">
+                  <a:buNone/>
+                </a:pPr>
+                <a:r>
+                  <a:rPr lang="de-DE" sz="2600" dirty="0"/>
+                  <a:t>Remember:</a:t>
+                </a:r>
+              </a:p>
+              <a:p>
+                <a14:m>
+                  <m:oMath xmlns:m="http://schemas.openxmlformats.org/officeDocument/2006/math">
+                    <m:sSub>
+                      <m:sSubPr>
+                        <m:ctrlPr>
+                          <a:rPr lang="de-DE" sz="2600" i="1" smtClean="0">
+                            <a:latin typeface="Cambria Math" panose="02040503050406030204" pitchFamily="18" charset="0"/>
+                          </a:rPr>
+                        </m:ctrlPr>
+                      </m:sSubPr>
+                      <m:e>
+                        <m:r>
+                          <m:rPr>
+                            <m:sty m:val="p"/>
+                          </m:rPr>
+                          <a:rPr lang="de-DE" sz="2600">
+                            <a:latin typeface="Cambria Math" panose="02040503050406030204" pitchFamily="18" charset="0"/>
+                          </a:rPr>
+                          <m:t>Re</m:t>
+                        </m:r>
+                        <m:r>
+                          <a:rPr lang="de-DE" sz="2600" i="1">
+                            <a:latin typeface="Cambria Math" panose="02040503050406030204" pitchFamily="18" charset="0"/>
+                          </a:rPr>
+                          <m:t>(</m:t>
+                        </m:r>
+                        <m:r>
+                          <a:rPr lang="de-DE" sz="2600" i="1">
+                            <a:latin typeface="Cambria Math" panose="02040503050406030204" pitchFamily="18" charset="0"/>
+                          </a:rPr>
+                          <m:t>𝑠</m:t>
+                        </m:r>
+                      </m:e>
+                      <m:sub>
+                        <m:r>
+                          <a:rPr lang="de-DE" sz="2600" i="1">
+                            <a:latin typeface="Cambria Math" panose="02040503050406030204" pitchFamily="18" charset="0"/>
+                          </a:rPr>
+                          <m:t>𝑝</m:t>
+                        </m:r>
+                      </m:sub>
+                    </m:sSub>
+                    <m:r>
+                      <a:rPr lang="de-DE" sz="2600" i="1">
+                        <a:latin typeface="Cambria Math" panose="02040503050406030204" pitchFamily="18" charset="0"/>
+                      </a:rPr>
+                      <m:t>)&lt;0</m:t>
+                    </m:r>
+                  </m:oMath>
+                </a14:m>
+                <a:r>
+                  <a:rPr lang="de-DE" sz="2600" dirty="0"/>
+                  <a:t>: </a:t>
+                </a:r>
+                <a:r>
+                  <a:rPr lang="de-DE" sz="2600" dirty="0" err="1">
+                    <a:sym typeface="Wingdings" pitchFamily="2" charset="2"/>
+                  </a:rPr>
+                  <a:t>stable</a:t>
+                </a:r>
+                <a:endParaRPr lang="de-DE" sz="2600" dirty="0">
+                  <a:sym typeface="Wingdings" pitchFamily="2" charset="2"/>
+                </a:endParaRPr>
+              </a:p>
+              <a:p>
+                <a14:m>
+                  <m:oMath xmlns:m="http://schemas.openxmlformats.org/officeDocument/2006/math">
+                    <m:sSub>
+                      <m:sSubPr>
+                        <m:ctrlPr>
+                          <a:rPr lang="de-DE" sz="2600" i="1">
+                            <a:latin typeface="Cambria Math" panose="02040503050406030204" pitchFamily="18" charset="0"/>
+                          </a:rPr>
+                        </m:ctrlPr>
+                      </m:sSubPr>
+                      <m:e>
+                        <m:r>
+                          <m:rPr>
+                            <m:sty m:val="p"/>
+                          </m:rPr>
+                          <a:rPr lang="de-DE" sz="2600">
+                            <a:latin typeface="Cambria Math" panose="02040503050406030204" pitchFamily="18" charset="0"/>
+                          </a:rPr>
+                          <m:t>Re</m:t>
+                        </m:r>
+                        <m:r>
+                          <a:rPr lang="de-DE" sz="2600" i="1">
+                            <a:latin typeface="Cambria Math" panose="02040503050406030204" pitchFamily="18" charset="0"/>
+                          </a:rPr>
+                          <m:t>(</m:t>
+                        </m:r>
+                        <m:r>
+                          <a:rPr lang="de-DE" sz="2600" i="1">
+                            <a:latin typeface="Cambria Math" panose="02040503050406030204" pitchFamily="18" charset="0"/>
+                          </a:rPr>
+                          <m:t>𝑠</m:t>
+                        </m:r>
+                      </m:e>
+                      <m:sub>
+                        <m:r>
+                          <a:rPr lang="de-DE" sz="2600" i="1">
+                            <a:latin typeface="Cambria Math" panose="02040503050406030204" pitchFamily="18" charset="0"/>
+                          </a:rPr>
+                          <m:t>𝑝</m:t>
+                        </m:r>
+                      </m:sub>
+                    </m:sSub>
+                    <m:r>
+                      <a:rPr lang="de-DE" sz="2600" i="1">
+                        <a:latin typeface="Cambria Math" panose="02040503050406030204" pitchFamily="18" charset="0"/>
+                      </a:rPr>
+                      <m:t>)</m:t>
+                    </m:r>
+                    <m:r>
+                      <a:rPr lang="de-DE" sz="2600" i="1">
+                        <a:latin typeface="Cambria Math" panose="02040503050406030204" pitchFamily="18" charset="0"/>
+                      </a:rPr>
+                      <m:t>=</m:t>
+                    </m:r>
+                    <m:r>
+                      <a:rPr lang="de-DE" sz="2600" i="1">
+                        <a:latin typeface="Cambria Math" panose="02040503050406030204" pitchFamily="18" charset="0"/>
+                      </a:rPr>
+                      <m:t>0</m:t>
+                    </m:r>
+                  </m:oMath>
+                </a14:m>
+                <a:r>
+                  <a:rPr lang="de-DE" sz="2600" dirty="0">
+                    <a:sym typeface="Wingdings" pitchFamily="2" charset="2"/>
+                  </a:rPr>
+                  <a:t>: marginally </a:t>
+                </a:r>
+                <a:r>
+                  <a:rPr lang="de-DE" sz="2600" dirty="0" err="1">
+                    <a:sym typeface="Wingdings" pitchFamily="2" charset="2"/>
+                  </a:rPr>
+                  <a:t>stable</a:t>
+                </a:r>
+                <a:endParaRPr lang="de-DE" sz="2600" i="1" dirty="0">
+                  <a:latin typeface="Cambria Math" panose="02040503050406030204" pitchFamily="18" charset="0"/>
+                </a:endParaRPr>
+              </a:p>
+              <a:p>
+                <a14:m>
+                  <m:oMath xmlns:m="http://schemas.openxmlformats.org/officeDocument/2006/math">
+                    <m:sSub>
+                      <m:sSubPr>
+                        <m:ctrlPr>
+                          <a:rPr lang="de-DE" sz="2600" i="1">
+                            <a:latin typeface="Cambria Math" panose="02040503050406030204" pitchFamily="18" charset="0"/>
+                          </a:rPr>
+                        </m:ctrlPr>
+                      </m:sSubPr>
+                      <m:e>
+                        <m:r>
+                          <m:rPr>
+                            <m:sty m:val="p"/>
+                          </m:rPr>
+                          <a:rPr lang="de-DE" sz="2600">
+                            <a:latin typeface="Cambria Math" panose="02040503050406030204" pitchFamily="18" charset="0"/>
+                          </a:rPr>
+                          <m:t>Re</m:t>
+                        </m:r>
+                        <m:r>
+                          <a:rPr lang="de-DE" sz="2600" i="1">
+                            <a:latin typeface="Cambria Math" panose="02040503050406030204" pitchFamily="18" charset="0"/>
+                          </a:rPr>
+                          <m:t>(</m:t>
+                        </m:r>
+                        <m:r>
+                          <a:rPr lang="de-DE" sz="2600" i="1">
+                            <a:latin typeface="Cambria Math" panose="02040503050406030204" pitchFamily="18" charset="0"/>
+                          </a:rPr>
+                          <m:t>𝑠</m:t>
+                        </m:r>
+                      </m:e>
+                      <m:sub>
+                        <m:r>
+                          <a:rPr lang="de-DE" sz="2600" i="1">
+                            <a:latin typeface="Cambria Math" panose="02040503050406030204" pitchFamily="18" charset="0"/>
+                          </a:rPr>
+                          <m:t>𝑝</m:t>
+                        </m:r>
+                      </m:sub>
+                    </m:sSub>
+                    <m:r>
+                      <a:rPr lang="de-DE" sz="2600" i="1">
+                        <a:latin typeface="Cambria Math" panose="02040503050406030204" pitchFamily="18" charset="0"/>
+                      </a:rPr>
+                      <m:t>)&gt;0</m:t>
+                    </m:r>
+                  </m:oMath>
+                </a14:m>
+                <a:r>
+                  <a:rPr lang="de-DE" sz="2600" dirty="0"/>
+                  <a:t>: </a:t>
+                </a:r>
+                <a:r>
+                  <a:rPr lang="de-DE" sz="2600" dirty="0" err="1">
+                    <a:sym typeface="Wingdings" pitchFamily="2" charset="2"/>
+                  </a:rPr>
+                  <a:t>unstable</a:t>
+                </a:r>
+                <a:endParaRPr lang="de-DE" sz="2600" dirty="0"/>
+              </a:p>
+              <a:p>
+                <a:pPr marL="0" indent="0">
+                  <a:buNone/>
+                </a:pPr>
+                <a:endParaRPr lang="de-DE" sz="2600" dirty="0"/>
+              </a:p>
+              <a:p>
+                <a:pPr marL="0" indent="0">
+                  <a:buNone/>
+                </a:pPr>
+                <a:r>
+                  <a:rPr lang="de-DE" sz="2600" dirty="0">
+                    <a:sym typeface="Wingdings" pitchFamily="2" charset="2"/>
+                  </a:rPr>
+                  <a:t> </a:t>
+                </a:r>
+                <a:r>
+                  <a:rPr lang="de-DE" sz="2600" dirty="0" err="1">
+                    <a:sym typeface="Wingdings" pitchFamily="2" charset="2"/>
+                  </a:rPr>
+                  <a:t>Discrete</a:t>
+                </a:r>
+                <a:r>
+                  <a:rPr lang="de-DE" sz="2600" dirty="0">
+                    <a:sym typeface="Wingdings" pitchFamily="2" charset="2"/>
+                  </a:rPr>
+                  <a:t>-time </a:t>
+                </a:r>
+                <a:r>
+                  <a:rPr lang="de-DE" sz="2600" dirty="0" err="1">
+                    <a:sym typeface="Wingdings" pitchFamily="2" charset="2"/>
+                  </a:rPr>
+                  <a:t>s</a:t>
+                </a:r>
+                <a:r>
+                  <a:rPr lang="de-DE" sz="2600" dirty="0" err="1"/>
+                  <a:t>ystem</a:t>
+                </a:r>
+                <a:r>
+                  <a:rPr lang="de-DE" sz="2600" dirty="0"/>
+                  <a:t> </a:t>
+                </a:r>
+                <a:r>
+                  <a:rPr lang="de-DE" sz="2600" dirty="0" err="1"/>
+                  <a:t>stable</a:t>
+                </a:r>
+                <a:r>
+                  <a:rPr lang="de-DE" sz="2600" dirty="0"/>
+                  <a:t> </a:t>
+                </a:r>
+                <a:r>
+                  <a:rPr lang="de-DE" sz="2600" dirty="0" err="1"/>
+                  <a:t>if</a:t>
+                </a:r>
+                <a:r>
+                  <a:rPr lang="de-DE" sz="2600" dirty="0"/>
+                  <a:t> </a:t>
+                </a:r>
+                <a:r>
+                  <a:rPr lang="de-DE" sz="2600" dirty="0" err="1"/>
+                  <a:t>poles</a:t>
+                </a:r>
+                <a:r>
+                  <a:rPr lang="de-DE" sz="2600" dirty="0"/>
+                  <a:t> </a:t>
+                </a:r>
+                <a14:m>
+                  <m:oMath xmlns:m="http://schemas.openxmlformats.org/officeDocument/2006/math">
+                    <m:sSub>
+                      <m:sSubPr>
+                        <m:ctrlPr>
+                          <a:rPr lang="de-DE" sz="2600" i="1" smtClean="0">
+                            <a:latin typeface="Cambria Math" panose="02040503050406030204" pitchFamily="18" charset="0"/>
+                          </a:rPr>
+                        </m:ctrlPr>
+                      </m:sSubPr>
+                      <m:e>
+                        <m:r>
+                          <a:rPr lang="de-DE" sz="2600" b="0" i="1" smtClean="0">
+                            <a:latin typeface="Cambria Math" panose="02040503050406030204" pitchFamily="18" charset="0"/>
+                          </a:rPr>
+                          <m:t>𝑧</m:t>
+                        </m:r>
+                      </m:e>
+                      <m:sub>
+                        <m:r>
+                          <a:rPr lang="de-DE" sz="2600" b="0" i="1" smtClean="0">
+                            <a:latin typeface="Cambria Math" panose="02040503050406030204" pitchFamily="18" charset="0"/>
+                          </a:rPr>
+                          <m:t>𝑝</m:t>
+                        </m:r>
+                      </m:sub>
+                    </m:sSub>
+                  </m:oMath>
+                </a14:m>
+                <a:r>
+                  <a:rPr lang="de-DE" sz="2600" dirty="0"/>
+                  <a:t> </a:t>
+                </a:r>
+                <a:r>
+                  <a:rPr lang="de-DE" sz="2600" dirty="0" err="1"/>
+                  <a:t>lie</a:t>
+                </a:r>
+                <a:r>
+                  <a:rPr lang="de-DE" sz="2600" dirty="0"/>
+                  <a:t> </a:t>
+                </a:r>
+                <a:r>
+                  <a:rPr lang="de-DE" sz="2600" dirty="0" err="1"/>
+                  <a:t>inside</a:t>
+                </a:r>
+                <a:r>
+                  <a:rPr lang="de-DE" sz="2600" dirty="0"/>
+                  <a:t> </a:t>
+                </a:r>
+                <a:r>
+                  <a:rPr lang="de-DE" sz="2600" dirty="0" err="1"/>
+                  <a:t>unit</a:t>
+                </a:r>
+                <a:r>
+                  <a:rPr lang="de-DE" sz="2600" dirty="0"/>
+                  <a:t> </a:t>
+                </a:r>
+                <a:r>
+                  <a:rPr lang="de-DE" sz="2600" dirty="0" err="1"/>
+                  <a:t>circle</a:t>
+                </a:r>
+                <a:endParaRPr lang="de-DE" sz="2600" dirty="0"/>
+              </a:p>
+            </p:txBody>
+          </p:sp>
+        </mc:Choice>
+        <mc:Fallback>
+          <p:sp>
+            <p:nvSpPr>
+              <p:cNvPr id="3" name="Inhaltsplatzhalter 2">
+                <a:extLst>
+                  <a:ext uri="{FF2B5EF4-FFF2-40B4-BE49-F238E27FC236}">
+                    <a16:creationId xmlns:a16="http://schemas.microsoft.com/office/drawing/2014/main" id="{D59F1111-2F1A-4B89-470B-1C913FCB4666}"/>
+                  </a:ext>
+                </a:extLst>
+              </p:cNvPr>
+              <p:cNvSpPr>
+                <a:spLocks noGrp="1" noRot="1" noChangeAspect="1" noMove="1" noResize="1" noEditPoints="1" noAdjustHandles="1" noChangeArrowheads="1" noChangeShapeType="1" noTextEdit="1"/>
+              </p:cNvSpPr>
+              <p:nvPr>
+                <p:ph idx="1"/>
+              </p:nvPr>
+            </p:nvSpPr>
+            <p:spPr>
+              <a:xfrm>
+                <a:off x="6585526" y="1825625"/>
+                <a:ext cx="4768273" cy="4351338"/>
+              </a:xfrm>
+              <a:blipFill>
+                <a:blip r:embed="rId3"/>
+                <a:stretch>
+                  <a:fillRect l="-2128" t="-2035"/>
+                </a:stretch>
+              </a:blipFill>
+            </p:spPr>
+            <p:txBody>
+              <a:bodyPr/>
+              <a:lstStyle/>
+              <a:p>
+                <a:r>
+                  <a:rPr lang="de-DE">
+                    <a:noFill/>
+                  </a:rPr>
+                  <a:t> </a:t>
+                </a:r>
+              </a:p>
+            </p:txBody>
+          </p:sp>
+        </mc:Fallback>
+      </mc:AlternateContent>
+      <p:sp>
+        <p:nvSpPr>
+          <p:cNvPr id="4" name="Foliennummernplatzhalter 3">
+            <a:extLst>
+              <a:ext uri="{FF2B5EF4-FFF2-40B4-BE49-F238E27FC236}">
+                <a16:creationId xmlns:a16="http://schemas.microsoft.com/office/drawing/2014/main" id="{BECC739B-76A7-CF79-0B93-E52879AFFB3D}"/>
+              </a:ext>
+            </a:extLst>
+          </p:cNvPr>
+          <p:cNvSpPr>
+            <a:spLocks noGrp="1"/>
+          </p:cNvSpPr>
+          <p:nvPr>
+            <p:ph type="sldNum" sz="quarter" idx="12"/>
+          </p:nvPr>
+        </p:nvSpPr>
+        <p:spPr/>
+        <p:txBody>
+          <a:bodyPr/>
+          <a:lstStyle/>
+          <a:p>
+            <a:fld id="{08C366F5-AFAD-49CB-854A-9D9E238FCA13}" type="slidenum">
+              <a:rPr lang="en-GB" smtClean="0"/>
+              <a:t>22</a:t>
+            </a:fld>
+            <a:endParaRPr lang="en-GB"/>
+          </a:p>
+        </p:txBody>
+      </p:sp>
+    </p:spTree>
+    <p:extLst>
+      <p:ext uri="{BB962C8B-B14F-4D97-AF65-F5344CB8AC3E}">
+        <p14:creationId xmlns:p14="http://schemas.microsoft.com/office/powerpoint/2010/main" val="3278865785"/>
       </p:ext>
     </p:extLst>
   </p:cSld>
@@ -14279,8 +15277,8 @@
           </a:p>
         </p:txBody>
       </p:sp>
-      <mc:AlternateContent xmlns:mc="http://schemas.openxmlformats.org/markup-compatibility/2006">
-        <mc:Choice xmlns:a14="http://schemas.microsoft.com/office/drawing/2010/main" Requires="a14">
+      <mc:AlternateContent xmlns:mc="http://schemas.openxmlformats.org/markup-compatibility/2006" xmlns:a14="http://schemas.microsoft.com/office/drawing/2010/main">
+        <mc:Choice Requires="a14">
           <p:sp>
             <p:nvSpPr>
               <p:cNvPr id="3" name="Inhaltsplatzhalter 2">
@@ -14454,7 +15452,16 @@
                           <a:rPr lang="de-DE" b="0" i="0" smtClean="0">
                             <a:latin typeface="Cambria Math" panose="02040503050406030204" pitchFamily="18" charset="0"/>
                           </a:rPr>
-                          <m:t>ZOH</m:t>
+                          <m:t>Z</m:t>
+                        </m:r>
+                        <m:r>
+                          <m:rPr>
+                            <m:sty m:val="p"/>
+                          </m:rPr>
+                          <a:rPr lang="de-DE" b="0" i="0" smtClean="0">
+                            <a:latin typeface="Cambria Math" panose="02040503050406030204" pitchFamily="18" charset="0"/>
+                          </a:rPr>
+                          <m:t>OH</m:t>
                         </m:r>
                       </m:e>
                     </m:groupChr>
@@ -14565,7 +15572,16 @@
                           <a:rPr lang="de-DE" b="0" i="0" smtClean="0">
                             <a:latin typeface="Cambria Math" panose="02040503050406030204" pitchFamily="18" charset="0"/>
                           </a:rPr>
-                          <m:t>sampling</m:t>
+                          <m:t>s</m:t>
+                        </m:r>
+                        <m:r>
+                          <m:rPr>
+                            <m:sty m:val="p"/>
+                          </m:rPr>
+                          <a:rPr lang="de-DE" b="0" i="0" smtClean="0">
+                            <a:latin typeface="Cambria Math" panose="02040503050406030204" pitchFamily="18" charset="0"/>
+                          </a:rPr>
+                          <m:t>ampling</m:t>
                         </m:r>
                       </m:e>
                     </m:groupChr>
@@ -14801,7 +15817,7 @@
             </p:txBody>
           </p:sp>
         </mc:Choice>
-        <mc:Fallback>
+        <mc:Fallback xmlns="">
           <p:sp>
             <p:nvSpPr>
               <p:cNvPr id="3" name="Inhaltsplatzhalter 2">
@@ -14941,8 +15957,8 @@
           </a:p>
         </p:txBody>
       </p:sp>
-      <mc:AlternateContent xmlns:mc="http://schemas.openxmlformats.org/markup-compatibility/2006">
-        <mc:Choice xmlns:a14="http://schemas.microsoft.com/office/drawing/2010/main" Requires="a14">
+      <mc:AlternateContent xmlns:mc="http://schemas.openxmlformats.org/markup-compatibility/2006" xmlns:a14="http://schemas.microsoft.com/office/drawing/2010/main">
+        <mc:Choice Requires="a14">
           <p:sp>
             <p:nvSpPr>
               <p:cNvPr id="3" name="Inhaltsplatzhalter 2">
@@ -15632,7 +16648,7 @@
             </p:txBody>
           </p:sp>
         </mc:Choice>
-        <mc:Fallback>
+        <mc:Fallback xmlns="">
           <p:sp>
             <p:nvSpPr>
               <p:cNvPr id="3" name="Inhaltsplatzhalter 2">
@@ -15705,8 +16721,8 @@
           </a:p>
         </p:txBody>
       </p:sp>
-      <mc:AlternateContent xmlns:mc="http://schemas.openxmlformats.org/markup-compatibility/2006">
-        <mc:Choice xmlns:a14="http://schemas.microsoft.com/office/drawing/2010/main" Requires="a14">
+      <mc:AlternateContent xmlns:mc="http://schemas.openxmlformats.org/markup-compatibility/2006" xmlns:a14="http://schemas.microsoft.com/office/drawing/2010/main">
+        <mc:Choice Requires="a14">
           <p:sp>
             <p:nvSpPr>
               <p:cNvPr id="7" name="Textfeld 6">
@@ -15735,6 +16751,7 @@
               </a:bodyPr>
               <a:lstStyle/>
               <a:p>
+                <a:pPr/>
                 <a14:m>
                   <m:oMathPara xmlns:m="http://schemas.openxmlformats.org/officeDocument/2006/math">
                     <m:oMathParaPr>
@@ -15795,7 +16812,7 @@
             </p:txBody>
           </p:sp>
         </mc:Choice>
-        <mc:Fallback>
+        <mc:Fallback xmlns="">
           <p:sp>
             <p:nvSpPr>
               <p:cNvPr id="7" name="Textfeld 6">
@@ -15972,8 +16989,8 @@
           </a:fontRef>
         </p:style>
       </p:cxnSp>
-      <mc:AlternateContent xmlns:mc="http://schemas.openxmlformats.org/markup-compatibility/2006">
-        <mc:Choice xmlns:a14="http://schemas.microsoft.com/office/drawing/2010/main" Requires="a14">
+      <mc:AlternateContent xmlns:mc="http://schemas.openxmlformats.org/markup-compatibility/2006" xmlns:a14="http://schemas.microsoft.com/office/drawing/2010/main">
+        <mc:Choice Requires="a14">
           <p:sp>
             <p:nvSpPr>
               <p:cNvPr id="17" name="Textfeld 16">
@@ -16007,6 +17024,7 @@
               </a:bodyPr>
               <a:lstStyle/>
               <a:p>
+                <a:pPr/>
                 <a14:m>
                   <m:oMathPara xmlns:m="http://schemas.openxmlformats.org/officeDocument/2006/math">
                     <m:oMathParaPr>
@@ -16084,13 +17102,7 @@
                                 <a:rPr lang="de-DE" b="0" i="1" smtClean="0">
                                   <a:latin typeface="Cambria Math" panose="02040503050406030204" pitchFamily="18" charset="0"/>
                                 </a:rPr>
-                                <m:t>1</m:t>
-                              </m:r>
-                              <m:r>
-                                <a:rPr lang="de-DE" b="0" i="1" smtClean="0">
-                                  <a:latin typeface="Cambria Math" panose="02040503050406030204" pitchFamily="18" charset="0"/>
-                                </a:rPr>
-                                <m:t>,  0&lt;</m:t>
+                                <m:t>1,  0&lt;</m:t>
                               </m:r>
                               <m:r>
                                 <a:rPr lang="de-DE" b="0" i="1" smtClean="0">
@@ -16148,7 +17160,7 @@
             </p:txBody>
           </p:sp>
         </mc:Choice>
-        <mc:Fallback>
+        <mc:Fallback xmlns="">
           <p:sp>
             <p:nvSpPr>
               <p:cNvPr id="17" name="Textfeld 16">
@@ -16269,8 +17281,8 @@
           </a:p>
         </p:txBody>
       </p:sp>
-      <mc:AlternateContent xmlns:mc="http://schemas.openxmlformats.org/markup-compatibility/2006">
-        <mc:Choice xmlns:a14="http://schemas.microsoft.com/office/drawing/2010/main" Requires="a14">
+      <mc:AlternateContent xmlns:mc="http://schemas.openxmlformats.org/markup-compatibility/2006" xmlns:a14="http://schemas.microsoft.com/office/drawing/2010/main">
+        <mc:Choice Requires="a14">
           <p:sp>
             <p:nvSpPr>
               <p:cNvPr id="3" name="Inhaltsplatzhalter 2">
@@ -17509,7 +18521,7 @@
             </p:txBody>
           </p:sp>
         </mc:Choice>
-        <mc:Fallback>
+        <mc:Fallback xmlns="">
           <p:sp>
             <p:nvSpPr>
               <p:cNvPr id="3" name="Inhaltsplatzhalter 2">
@@ -17800,8 +18812,8 @@
           </a:p>
         </p:txBody>
       </p:sp>
-      <mc:AlternateContent xmlns:mc="http://schemas.openxmlformats.org/markup-compatibility/2006">
-        <mc:Choice xmlns:a14="http://schemas.microsoft.com/office/drawing/2010/main" Requires="a14">
+      <mc:AlternateContent xmlns:mc="http://schemas.openxmlformats.org/markup-compatibility/2006" xmlns:a14="http://schemas.microsoft.com/office/drawing/2010/main">
+        <mc:Choice Requires="a14">
           <p:sp>
             <p:nvSpPr>
               <p:cNvPr id="3" name="Inhaltsplatzhalter 2">
@@ -18029,7 +19041,7 @@
             </p:txBody>
           </p:sp>
         </mc:Choice>
-        <mc:Fallback>
+        <mc:Fallback xmlns="">
           <p:sp>
             <p:nvSpPr>
               <p:cNvPr id="3" name="Inhaltsplatzhalter 2">
@@ -18156,8 +19168,8 @@
           </a:p>
         </p:txBody>
       </p:sp>
-      <mc:AlternateContent xmlns:mc="http://schemas.openxmlformats.org/markup-compatibility/2006">
-        <mc:Choice xmlns:a14="http://schemas.microsoft.com/office/drawing/2010/main" Requires="a14">
+      <mc:AlternateContent xmlns:mc="http://schemas.openxmlformats.org/markup-compatibility/2006" xmlns:a14="http://schemas.microsoft.com/office/drawing/2010/main">
+        <mc:Choice Requires="a14">
           <p:sp>
             <p:nvSpPr>
               <p:cNvPr id="3" name="Inhaltsplatzhalter 2">
@@ -18297,7 +19309,7 @@
             </p:txBody>
           </p:sp>
         </mc:Choice>
-        <mc:Fallback>
+        <mc:Fallback xmlns="">
           <p:sp>
             <p:nvSpPr>
               <p:cNvPr id="3" name="Inhaltsplatzhalter 2">
@@ -18428,8 +19440,8 @@
           </a:p>
         </p:txBody>
       </p:sp>
-      <mc:AlternateContent xmlns:mc="http://schemas.openxmlformats.org/markup-compatibility/2006">
-        <mc:Choice xmlns:a14="http://schemas.microsoft.com/office/drawing/2010/main" Requires="a14">
+      <mc:AlternateContent xmlns:mc="http://schemas.openxmlformats.org/markup-compatibility/2006" xmlns:a14="http://schemas.microsoft.com/office/drawing/2010/main">
+        <mc:Choice Requires="a14">
           <p:sp>
             <p:nvSpPr>
               <p:cNvPr id="3" name="Inhaltsplatzhalter 2">
@@ -18662,7 +19674,7 @@
             </p:txBody>
           </p:sp>
         </mc:Choice>
-        <mc:Fallback>
+        <mc:Fallback xmlns="">
           <p:sp>
             <p:nvSpPr>
               <p:cNvPr id="3" name="Inhaltsplatzhalter 2">
@@ -18968,8 +19980,8 @@
           </a:p>
         </p:txBody>
       </p:sp>
-      <mc:AlternateContent xmlns:mc="http://schemas.openxmlformats.org/markup-compatibility/2006">
-        <mc:Choice xmlns:a14="http://schemas.microsoft.com/office/drawing/2010/main" Requires="a14">
+      <mc:AlternateContent xmlns:mc="http://schemas.openxmlformats.org/markup-compatibility/2006" xmlns:a14="http://schemas.microsoft.com/office/drawing/2010/main">
+        <mc:Choice Requires="a14">
           <p:sp>
             <p:nvSpPr>
               <p:cNvPr id="3" name="Inhaltsplatzhalter 2">
@@ -19123,7 +20135,7 @@
             </p:txBody>
           </p:sp>
         </mc:Choice>
-        <mc:Fallback>
+        <mc:Fallback xmlns="">
           <p:sp>
             <p:nvSpPr>
               <p:cNvPr id="3" name="Inhaltsplatzhalter 2">
@@ -19254,8 +20266,8 @@
           </a:p>
         </p:txBody>
       </p:sp>
-      <mc:AlternateContent xmlns:mc="http://schemas.openxmlformats.org/markup-compatibility/2006">
-        <mc:Choice xmlns:a14="http://schemas.microsoft.com/office/drawing/2010/main" Requires="a14">
+      <mc:AlternateContent xmlns:mc="http://schemas.openxmlformats.org/markup-compatibility/2006" xmlns:a14="http://schemas.microsoft.com/office/drawing/2010/main">
+        <mc:Choice Requires="a14">
           <p:sp>
             <p:nvSpPr>
               <p:cNvPr id="3" name="Inhaltsplatzhalter 2">
@@ -19434,7 +20446,7 @@
             </p:txBody>
           </p:sp>
         </mc:Choice>
-        <mc:Fallback>
+        <mc:Fallback xmlns="">
           <p:sp>
             <p:nvSpPr>
               <p:cNvPr id="3" name="Inhaltsplatzhalter 2">
@@ -19573,8 +20585,8 @@
           </a:p>
         </p:txBody>
       </p:sp>
-      <mc:AlternateContent xmlns:mc="http://schemas.openxmlformats.org/markup-compatibility/2006">
-        <mc:Choice xmlns:a14="http://schemas.microsoft.com/office/drawing/2010/main" Requires="a14">
+      <mc:AlternateContent xmlns:mc="http://schemas.openxmlformats.org/markup-compatibility/2006" xmlns:a14="http://schemas.microsoft.com/office/drawing/2010/main">
+        <mc:Choice Requires="a14">
           <p:sp>
             <p:nvSpPr>
               <p:cNvPr id="3" name="Inhaltsplatzhalter 2">
@@ -19719,7 +20731,7 @@
             </p:txBody>
           </p:sp>
         </mc:Choice>
-        <mc:Fallback>
+        <mc:Fallback xmlns="">
           <p:sp>
             <p:nvSpPr>
               <p:cNvPr id="3" name="Inhaltsplatzhalter 2">
@@ -20336,8 +21348,8 @@
           </a:p>
         </p:txBody>
       </p:sp>
-      <mc:AlternateContent xmlns:mc="http://schemas.openxmlformats.org/markup-compatibility/2006">
-        <mc:Choice xmlns:a14="http://schemas.microsoft.com/office/drawing/2010/main" Requires="a14">
+      <mc:AlternateContent xmlns:mc="http://schemas.openxmlformats.org/markup-compatibility/2006" xmlns:a14="http://schemas.microsoft.com/office/drawing/2010/main">
+        <mc:Choice Requires="a14">
           <p:sp>
             <p:nvSpPr>
               <p:cNvPr id="3" name="Inhaltsplatzhalter 2">
@@ -20669,7 +21681,7 @@
             </p:txBody>
           </p:sp>
         </mc:Choice>
-        <mc:Fallback>
+        <mc:Fallback xmlns="">
           <p:sp>
             <p:nvSpPr>
               <p:cNvPr id="3" name="Inhaltsplatzhalter 2">
@@ -20816,8 +21828,8 @@
           </a:p>
         </p:txBody>
       </p:sp>
-      <mc:AlternateContent xmlns:mc="http://schemas.openxmlformats.org/markup-compatibility/2006">
-        <mc:Choice xmlns:a14="http://schemas.microsoft.com/office/drawing/2010/main" Requires="a14">
+      <mc:AlternateContent xmlns:mc="http://schemas.openxmlformats.org/markup-compatibility/2006" xmlns:a14="http://schemas.microsoft.com/office/drawing/2010/main">
+        <mc:Choice Requires="a14">
           <p:sp>
             <p:nvSpPr>
               <p:cNvPr id="3" name="Inhaltsplatzhalter 2">
@@ -21017,7 +22029,7 @@
             </p:txBody>
           </p:sp>
         </mc:Choice>
-        <mc:Fallback>
+        <mc:Fallback xmlns="">
           <p:sp>
             <p:nvSpPr>
               <p:cNvPr id="3" name="Inhaltsplatzhalter 2">
@@ -21148,8 +22160,8 @@
           </a:p>
         </p:txBody>
       </p:sp>
-      <mc:AlternateContent xmlns:mc="http://schemas.openxmlformats.org/markup-compatibility/2006">
-        <mc:Choice xmlns:a14="http://schemas.microsoft.com/office/drawing/2010/main" Requires="a14">
+      <mc:AlternateContent xmlns:mc="http://schemas.openxmlformats.org/markup-compatibility/2006" xmlns:a14="http://schemas.microsoft.com/office/drawing/2010/main">
+        <mc:Choice Requires="a14">
           <p:sp>
             <p:nvSpPr>
               <p:cNvPr id="3" name="Inhaltsplatzhalter 2">
@@ -21407,7 +22419,7 @@
             </p:txBody>
           </p:sp>
         </mc:Choice>
-        <mc:Fallback>
+        <mc:Fallback xmlns="">
           <p:sp>
             <p:nvSpPr>
               <p:cNvPr id="3" name="Inhaltsplatzhalter 2">
@@ -22460,7 +23472,7 @@
         </p:blipFill>
         <p:spPr>
           <a:xfrm rot="5400000">
-            <a:off x="2857696" y="-1423468"/>
+            <a:off x="2667000" y="-1423468"/>
             <a:ext cx="6858000" cy="9704936"/>
           </a:xfrm>
           <a:prstGeom prst="rect">
@@ -22511,7 +23523,7 @@
         </p:nvSpPr>
         <p:spPr>
           <a:xfrm>
-            <a:off x="1544031" y="5176739"/>
+            <a:off x="1463137" y="5327273"/>
             <a:ext cx="9485331" cy="892552"/>
           </a:xfrm>
           <a:prstGeom prst="rect">
